--- a/documentation/V6a_8_6_20_slides.pptx
+++ b/documentation/V6a_8_6_20_slides.pptx
@@ -33,6 +33,13 @@
     <p:sldId id="281" r:id="rId32"/>
     <p:sldId id="282" r:id="rId33"/>
     <p:sldId id="283" r:id="rId34"/>
+    <p:sldId id="284" r:id="rId35"/>
+    <p:sldId id="285" r:id="rId36"/>
+    <p:sldId id="286" r:id="rId37"/>
+    <p:sldId id="287" r:id="rId38"/>
+    <p:sldId id="288" r:id="rId39"/>
+    <p:sldId id="289" r:id="rId40"/>
+    <p:sldId id="290" r:id="rId41"/>
   </p:sldIdLst>
   <p:sldSz cx="12191695" cy="6858000" type="screen4x3"/>
   <p:notesSz cx="6858000" cy="9144000"/>
@@ -20434,6 +20441,734 @@
 </p:sld>
 </file>
 
+<file path=ppt/slides/slide29.xml><?xml version="1.0" encoding="utf-8"?>
+<p:sld xmlns:a="http://schemas.openxmlformats.org/drawingml/2006/main" xmlns:p="http://schemas.openxmlformats.org/presentationml/2006/main" xmlns:r="http://schemas.openxmlformats.org/officeDocument/2006/relationships">
+  <p:cSld>
+    <p:spTree>
+      <p:nvGrpSpPr>
+        <p:cNvPr id="1" name=""/>
+        <p:cNvGrpSpPr/>
+        <p:nvPr/>
+      </p:nvGrpSpPr>
+      <p:grpSpPr/>
+      <p:sp>
+        <p:nvSpPr>
+          <p:cNvPr id="2" name="TextBox 1"/>
+          <p:cNvSpPr txBox="1"/>
+          <p:nvPr/>
+        </p:nvSpPr>
+        <p:spPr>
+          <a:xfrm>
+            <a:off x="11155680" y="274320"/>
+            <a:ext cx="914400" cy="274320"/>
+          </a:xfrm>
+          <a:prstGeom prst="rect">
+            <a:avLst/>
+          </a:prstGeom>
+          <a:noFill/>
+        </p:spPr>
+        <p:txBody>
+          <a:bodyPr wrap="square" lIns="45720" rIns="45720" tIns="18288" bIns="18288" anchor="t">
+            <a:spAutoFit/>
+          </a:bodyPr>
+          <a:lstStyle/>
+          <a:p>
+            <a:pPr algn="r"/>
+            <a:r>
+              <a:rPr sz="800" b="1" i="0">
+                <a:solidFill>
+                  <a:srgbClr val="707070"/>
+                </a:solidFill>
+                <a:latin typeface="Calibri"/>
+              </a:rPr>
+              <a:t>JÖNKÖPING UNIVERSITY</a:t>
+            </a:r>
+          </a:p>
+        </p:txBody>
+      </p:sp>
+      <p:sp>
+        <p:nvSpPr>
+          <p:cNvPr id="3" name="Rectangle 2"/>
+          <p:cNvSpPr/>
+          <p:nvPr/>
+        </p:nvSpPr>
+        <p:spPr>
+          <a:xfrm>
+            <a:off x="457200" y="411480"/>
+            <a:ext cx="457200" cy="73152"/>
+          </a:xfrm>
+          <a:prstGeom prst="rect">
+            <a:avLst/>
+          </a:prstGeom>
+          <a:solidFill>
+            <a:srgbClr val="A9D6EF"/>
+          </a:solidFill>
+          <a:ln>
+            <a:noFill/>
+          </a:ln>
+        </p:spPr>
+        <p:style>
+          <a:lnRef idx="1">
+            <a:schemeClr val="accent1"/>
+          </a:lnRef>
+          <a:fillRef idx="3">
+            <a:schemeClr val="accent1"/>
+          </a:fillRef>
+          <a:effectRef idx="2">
+            <a:schemeClr val="accent1"/>
+          </a:effectRef>
+          <a:fontRef idx="minor">
+            <a:schemeClr val="lt1"/>
+          </a:fontRef>
+        </p:style>
+        <p:txBody>
+          <a:bodyPr rtlCol="0" anchor="ctr"/>
+          <a:lstStyle/>
+          <a:p>
+            <a:pPr algn="ctr"/>
+          </a:p>
+        </p:txBody>
+      </p:sp>
+      <p:sp>
+        <p:nvSpPr>
+          <p:cNvPr id="4" name="TextBox 3"/>
+          <p:cNvSpPr txBox="1"/>
+          <p:nvPr/>
+        </p:nvSpPr>
+        <p:spPr>
+          <a:xfrm>
+            <a:off x="457200" y="502920"/>
+            <a:ext cx="11430000" cy="822960"/>
+          </a:xfrm>
+          <a:prstGeom prst="rect">
+            <a:avLst/>
+          </a:prstGeom>
+          <a:noFill/>
+        </p:spPr>
+        <p:txBody>
+          <a:bodyPr wrap="square" lIns="45720" rIns="45720" tIns="18288" bIns="18288" anchor="t">
+            <a:spAutoFit/>
+          </a:bodyPr>
+          <a:lstStyle/>
+          <a:p>
+            <a:pPr algn="l"/>
+            <a:r>
+              <a:rPr sz="3000" b="0" i="0">
+                <a:solidFill>
+                  <a:srgbClr val="000000"/>
+                </a:solidFill>
+                <a:latin typeface="Calibri Light"/>
+              </a:rPr>
+              <a:t>NEW — SMART-UTM FEATURE SET (2026-07)</a:t>
+            </a:r>
+          </a:p>
+        </p:txBody>
+      </p:sp>
+      <p:sp>
+        <p:nvSpPr>
+          <p:cNvPr id="5" name="TextBox 4"/>
+          <p:cNvSpPr txBox="1"/>
+          <p:nvPr/>
+        </p:nvSpPr>
+        <p:spPr>
+          <a:xfrm>
+            <a:off x="365760" y="1133856"/>
+            <a:ext cx="11475720" cy="457200"/>
+          </a:xfrm>
+          <a:prstGeom prst="rect">
+            <a:avLst/>
+          </a:prstGeom>
+          <a:noFill/>
+        </p:spPr>
+        <p:txBody>
+          <a:bodyPr wrap="square" lIns="45720" rIns="45720" tIns="18288" bIns="18288" anchor="t">
+            <a:spAutoFit/>
+          </a:bodyPr>
+          <a:lstStyle/>
+          <a:p>
+            <a:pPr algn="l"/>
+            <a:r>
+              <a:rPr sz="1200" b="0" i="1">
+                <a:solidFill>
+                  <a:srgbClr val="707070"/>
+                </a:solidFill>
+                <a:latin typeface="Calibri"/>
+              </a:rPr>
+              <a:t>Every card below is built AND rig-validated (green).</a:t>
+            </a:r>
+          </a:p>
+        </p:txBody>
+      </p:sp>
+      <p:sp>
+        <p:nvSpPr>
+          <p:cNvPr id="6" name="Rounded Rectangle 5"/>
+          <p:cNvSpPr/>
+          <p:nvPr/>
+        </p:nvSpPr>
+        <p:spPr>
+          <a:xfrm>
+            <a:off x="365760" y="1691640"/>
+            <a:ext cx="2743200" cy="1371600"/>
+          </a:xfrm>
+          <a:prstGeom prst="roundRect">
+            <a:avLst/>
+          </a:prstGeom>
+          <a:solidFill>
+            <a:srgbClr val="C8E6C9"/>
+          </a:solidFill>
+          <a:ln w="15240">
+            <a:solidFill>
+              <a:srgbClr val="1F3F2F"/>
+            </a:solidFill>
+          </a:ln>
+        </p:spPr>
+        <p:style>
+          <a:lnRef idx="1">
+            <a:schemeClr val="accent1"/>
+          </a:lnRef>
+          <a:fillRef idx="3">
+            <a:schemeClr val="accent1"/>
+          </a:fillRef>
+          <a:effectRef idx="2">
+            <a:schemeClr val="accent1"/>
+          </a:effectRef>
+          <a:fontRef idx="minor">
+            <a:schemeClr val="lt1"/>
+          </a:fontRef>
+        </p:style>
+        <p:txBody>
+          <a:bodyPr rtlCol="0" anchor="ctr" lIns="54864" rIns="54864" tIns="27432" bIns="27432" wrap="square"/>
+          <a:lstStyle/>
+          <a:p>
+            <a:pPr algn="ctr"/>
+            <a:r>
+              <a:rPr sz="1200" b="1">
+                <a:solidFill>
+                  <a:srgbClr val="1F3F2F"/>
+                </a:solidFill>
+                <a:latin typeface="Calibri"/>
+              </a:rPr>
+              <a:t>DIC health HUD
+live 2/2 · jitter</a:t>
+            </a:r>
+          </a:p>
+        </p:txBody>
+      </p:sp>
+      <p:sp>
+        <p:nvSpPr>
+          <p:cNvPr id="7" name="Rounded Rectangle 6"/>
+          <p:cNvSpPr/>
+          <p:nvPr/>
+        </p:nvSpPr>
+        <p:spPr>
+          <a:xfrm>
+            <a:off x="3310128" y="1691640"/>
+            <a:ext cx="2743200" cy="1371600"/>
+          </a:xfrm>
+          <a:prstGeom prst="roundRect">
+            <a:avLst/>
+          </a:prstGeom>
+          <a:solidFill>
+            <a:srgbClr val="C8E6C9"/>
+          </a:solidFill>
+          <a:ln w="15240">
+            <a:solidFill>
+              <a:srgbClr val="1F3F2F"/>
+            </a:solidFill>
+          </a:ln>
+        </p:spPr>
+        <p:style>
+          <a:lnRef idx="1">
+            <a:schemeClr val="accent1"/>
+          </a:lnRef>
+          <a:fillRef idx="3">
+            <a:schemeClr val="accent1"/>
+          </a:fillRef>
+          <a:effectRef idx="2">
+            <a:schemeClr val="accent1"/>
+          </a:effectRef>
+          <a:fontRef idx="minor">
+            <a:schemeClr val="lt1"/>
+          </a:fontRef>
+        </p:style>
+        <p:txBody>
+          <a:bodyPr rtlCol="0" anchor="ctr" lIns="54864" rIns="54864" tIns="27432" bIns="27432" wrap="square"/>
+          <a:lstStyle/>
+          <a:p>
+            <a:pPr algn="ctr"/>
+            <a:r>
+              <a:rPr sz="1200" b="1">
+                <a:solidFill>
+                  <a:srgbClr val="1F3F2F"/>
+                </a:solidFill>
+                <a:latin typeface="Calibri"/>
+              </a:rPr>
+              <a:t>Prepare specimen
+1-click tare all</a:t>
+            </a:r>
+          </a:p>
+        </p:txBody>
+      </p:sp>
+      <p:sp>
+        <p:nvSpPr>
+          <p:cNvPr id="8" name="Rounded Rectangle 7"/>
+          <p:cNvSpPr/>
+          <p:nvPr/>
+        </p:nvSpPr>
+        <p:spPr>
+          <a:xfrm>
+            <a:off x="6254496" y="1691640"/>
+            <a:ext cx="2743200" cy="1371600"/>
+          </a:xfrm>
+          <a:prstGeom prst="roundRect">
+            <a:avLst/>
+          </a:prstGeom>
+          <a:solidFill>
+            <a:srgbClr val="C8E6C9"/>
+          </a:solidFill>
+          <a:ln w="15240">
+            <a:solidFill>
+              <a:srgbClr val="1F3F2F"/>
+            </a:solidFill>
+          </a:ln>
+        </p:spPr>
+        <p:style>
+          <a:lnRef idx="1">
+            <a:schemeClr val="accent1"/>
+          </a:lnRef>
+          <a:fillRef idx="3">
+            <a:schemeClr val="accent1"/>
+          </a:fillRef>
+          <a:effectRef idx="2">
+            <a:schemeClr val="accent1"/>
+          </a:effectRef>
+          <a:fontRef idx="minor">
+            <a:schemeClr val="lt1"/>
+          </a:fontRef>
+        </p:style>
+        <p:txBody>
+          <a:bodyPr rtlCol="0" anchor="ctr" lIns="54864" rIns="54864" tIns="27432" bIns="27432" wrap="square"/>
+          <a:lstStyle/>
+          <a:p>
+            <a:pPr algn="ctr"/>
+            <a:r>
+              <a:rPr sz="1200" b="1">
+                <a:solidFill>
+                  <a:srgbClr val="1F3F2F"/>
+                </a:solidFill>
+                <a:latin typeface="Calibri"/>
+              </a:rPr>
+              <a:t>Settings save / load
+reuse a setup</a:t>
+            </a:r>
+          </a:p>
+        </p:txBody>
+      </p:sp>
+      <p:sp>
+        <p:nvSpPr>
+          <p:cNvPr id="9" name="Rounded Rectangle 8"/>
+          <p:cNvSpPr/>
+          <p:nvPr/>
+        </p:nvSpPr>
+        <p:spPr>
+          <a:xfrm>
+            <a:off x="9198864" y="1691640"/>
+            <a:ext cx="2743200" cy="1371600"/>
+          </a:xfrm>
+          <a:prstGeom prst="roundRect">
+            <a:avLst/>
+          </a:prstGeom>
+          <a:solidFill>
+            <a:srgbClr val="C8E6C9"/>
+          </a:solidFill>
+          <a:ln w="15240">
+            <a:solidFill>
+              <a:srgbClr val="1F3F2F"/>
+            </a:solidFill>
+          </a:ln>
+        </p:spPr>
+        <p:style>
+          <a:lnRef idx="1">
+            <a:schemeClr val="accent1"/>
+          </a:lnRef>
+          <a:fillRef idx="3">
+            <a:schemeClr val="accent1"/>
+          </a:fillRef>
+          <a:effectRef idx="2">
+            <a:schemeClr val="accent1"/>
+          </a:effectRef>
+          <a:fontRef idx="minor">
+            <a:schemeClr val="lt1"/>
+          </a:fontRef>
+        </p:style>
+        <p:txBody>
+          <a:bodyPr rtlCol="0" anchor="ctr" lIns="54864" rIns="54864" tIns="27432" bIns="27432" wrap="square"/>
+          <a:lstStyle/>
+          <a:p>
+            <a:pPr algn="ctr"/>
+            <a:r>
+              <a:rPr sz="1200" b="1">
+                <a:solidFill>
+                  <a:srgbClr val="1F3F2F"/>
+                </a:solidFill>
+                <a:latin typeface="Calibri"/>
+              </a:rPr>
+              <a:t>Generate report
+1-click PDF + PNG</a:t>
+            </a:r>
+          </a:p>
+        </p:txBody>
+      </p:sp>
+      <p:sp>
+        <p:nvSpPr>
+          <p:cNvPr id="10" name="Rounded Rectangle 9"/>
+          <p:cNvSpPr/>
+          <p:nvPr/>
+        </p:nvSpPr>
+        <p:spPr>
+          <a:xfrm>
+            <a:off x="365760" y="3429000"/>
+            <a:ext cx="2743200" cy="1371600"/>
+          </a:xfrm>
+          <a:prstGeom prst="roundRect">
+            <a:avLst/>
+          </a:prstGeom>
+          <a:solidFill>
+            <a:srgbClr val="C8E6C9"/>
+          </a:solidFill>
+          <a:ln w="15240">
+            <a:solidFill>
+              <a:srgbClr val="1F3F2F"/>
+            </a:solidFill>
+          </a:ln>
+        </p:spPr>
+        <p:style>
+          <a:lnRef idx="1">
+            <a:schemeClr val="accent1"/>
+          </a:lnRef>
+          <a:fillRef idx="3">
+            <a:schemeClr val="accent1"/>
+          </a:fillRef>
+          <a:effectRef idx="2">
+            <a:schemeClr val="accent1"/>
+          </a:effectRef>
+          <a:fontRef idx="minor">
+            <a:schemeClr val="lt1"/>
+          </a:fontRef>
+        </p:style>
+        <p:txBody>
+          <a:bodyPr rtlCol="0" anchor="ctr" lIns="54864" rIns="54864" tIns="27432" bIns="27432" wrap="square"/>
+          <a:lstStyle/>
+          <a:p>
+            <a:pPr algn="ctr"/>
+            <a:r>
+              <a:rPr sz="1200" b="1">
+                <a:solidFill>
+                  <a:srgbClr val="1F3F2F"/>
+                </a:solidFill>
+                <a:latin typeface="Calibri"/>
+              </a:rPr>
+              <a:t>Auto-stop at fracture
+halts on collapse</a:t>
+            </a:r>
+          </a:p>
+        </p:txBody>
+      </p:sp>
+      <p:sp>
+        <p:nvSpPr>
+          <p:cNvPr id="11" name="Rounded Rectangle 10"/>
+          <p:cNvSpPr/>
+          <p:nvPr/>
+        </p:nvSpPr>
+        <p:spPr>
+          <a:xfrm>
+            <a:off x="3310128" y="3429000"/>
+            <a:ext cx="2743200" cy="1371600"/>
+          </a:xfrm>
+          <a:prstGeom prst="roundRect">
+            <a:avLst/>
+          </a:prstGeom>
+          <a:solidFill>
+            <a:srgbClr val="C8E6C9"/>
+          </a:solidFill>
+          <a:ln w="15240">
+            <a:solidFill>
+              <a:srgbClr val="1F3F2F"/>
+            </a:solidFill>
+          </a:ln>
+        </p:spPr>
+        <p:style>
+          <a:lnRef idx="1">
+            <a:schemeClr val="accent1"/>
+          </a:lnRef>
+          <a:fillRef idx="3">
+            <a:schemeClr val="accent1"/>
+          </a:fillRef>
+          <a:effectRef idx="2">
+            <a:schemeClr val="accent1"/>
+          </a:effectRef>
+          <a:fontRef idx="minor">
+            <a:schemeClr val="lt1"/>
+          </a:fontRef>
+        </p:style>
+        <p:txBody>
+          <a:bodyPr rtlCol="0" anchor="ctr" lIns="54864" rIns="54864" tIns="27432" bIns="27432" wrap="square"/>
+          <a:lstStyle/>
+          <a:p>
+            <a:pPr algn="ctr"/>
+            <a:r>
+              <a:rPr sz="1200" b="1">
+                <a:solidFill>
+                  <a:srgbClr val="1F3F2F"/>
+                </a:solidFill>
+                <a:latin typeface="Calibri"/>
+              </a:rPr>
+              <a:t>Strain-rate fracture
+constant dε/dt</a:t>
+            </a:r>
+          </a:p>
+        </p:txBody>
+      </p:sp>
+      <p:sp>
+        <p:nvSpPr>
+          <p:cNvPr id="12" name="Rounded Rectangle 11"/>
+          <p:cNvSpPr/>
+          <p:nvPr/>
+        </p:nvSpPr>
+        <p:spPr>
+          <a:xfrm>
+            <a:off x="6254496" y="3429000"/>
+            <a:ext cx="2743200" cy="1371600"/>
+          </a:xfrm>
+          <a:prstGeom prst="roundRect">
+            <a:avLst/>
+          </a:prstGeom>
+          <a:solidFill>
+            <a:srgbClr val="C8E6C9"/>
+          </a:solidFill>
+          <a:ln w="15240">
+            <a:solidFill>
+              <a:srgbClr val="1F3F2F"/>
+            </a:solidFill>
+          </a:ln>
+        </p:spPr>
+        <p:style>
+          <a:lnRef idx="1">
+            <a:schemeClr val="accent1"/>
+          </a:lnRef>
+          <a:fillRef idx="3">
+            <a:schemeClr val="accent1"/>
+          </a:fillRef>
+          <a:effectRef idx="2">
+            <a:schemeClr val="accent1"/>
+          </a:effectRef>
+          <a:fontRef idx="minor">
+            <a:schemeClr val="lt1"/>
+          </a:fontRef>
+        </p:style>
+        <p:txBody>
+          <a:bodyPr rtlCol="0" anchor="ctr" lIns="54864" rIns="54864" tIns="27432" bIns="27432" wrap="square"/>
+          <a:lstStyle/>
+          <a:p>
+            <a:pPr algn="ctr"/>
+            <a:r>
+              <a:rPr sz="1200" b="1">
+                <a:solidFill>
+                  <a:srgbClr val="1F3F2F"/>
+                </a:solidFill>
+                <a:latin typeface="Calibri"/>
+              </a:rPr>
+              <a:t>Stall guard
+halts frozen motor</a:t>
+            </a:r>
+          </a:p>
+        </p:txBody>
+      </p:sp>
+      <p:sp>
+        <p:nvSpPr>
+          <p:cNvPr id="13" name="Rounded Rectangle 12"/>
+          <p:cNvSpPr/>
+          <p:nvPr/>
+        </p:nvSpPr>
+        <p:spPr>
+          <a:xfrm>
+            <a:off x="9198864" y="3429000"/>
+            <a:ext cx="2743200" cy="1371600"/>
+          </a:xfrm>
+          <a:prstGeom prst="roundRect">
+            <a:avLst/>
+          </a:prstGeom>
+          <a:solidFill>
+            <a:srgbClr val="C8E6C9"/>
+          </a:solidFill>
+          <a:ln w="15240">
+            <a:solidFill>
+              <a:srgbClr val="1F3F2F"/>
+            </a:solidFill>
+          </a:ln>
+        </p:spPr>
+        <p:style>
+          <a:lnRef idx="1">
+            <a:schemeClr val="accent1"/>
+          </a:lnRef>
+          <a:fillRef idx="3">
+            <a:schemeClr val="accent1"/>
+          </a:fillRef>
+          <a:effectRef idx="2">
+            <a:schemeClr val="accent1"/>
+          </a:effectRef>
+          <a:fontRef idx="minor">
+            <a:schemeClr val="lt1"/>
+          </a:fontRef>
+        </p:style>
+        <p:txBody>
+          <a:bodyPr rtlCol="0" anchor="ctr" lIns="54864" rIns="54864" tIns="27432" bIns="27432" wrap="square"/>
+          <a:lstStyle/>
+          <a:p>
+            <a:pPr algn="ctr"/>
+            <a:r>
+              <a:rPr sz="1200" b="1">
+                <a:solidFill>
+                  <a:srgbClr val="1F3F2F"/>
+                </a:solidFill>
+                <a:latin typeface="Calibri"/>
+              </a:rPr>
+              <a:t>Release preload
+safe return to 0</a:t>
+            </a:r>
+          </a:p>
+        </p:txBody>
+      </p:sp>
+      <p:sp>
+        <p:nvSpPr>
+          <p:cNvPr id="14" name="Rectangle 13"/>
+          <p:cNvSpPr/>
+          <p:nvPr/>
+        </p:nvSpPr>
+        <p:spPr>
+          <a:xfrm>
+            <a:off x="365760" y="5120640"/>
+            <a:ext cx="11475720" cy="868680"/>
+          </a:xfrm>
+          <a:prstGeom prst="rect">
+            <a:avLst/>
+          </a:prstGeom>
+          <a:solidFill>
+            <a:srgbClr val="E7F1F8"/>
+          </a:solidFill>
+          <a:ln>
+            <a:noFill/>
+          </a:ln>
+        </p:spPr>
+        <p:style>
+          <a:lnRef idx="1">
+            <a:schemeClr val="accent1"/>
+          </a:lnRef>
+          <a:fillRef idx="3">
+            <a:schemeClr val="accent1"/>
+          </a:fillRef>
+          <a:effectRef idx="2">
+            <a:schemeClr val="accent1"/>
+          </a:effectRef>
+          <a:fontRef idx="minor">
+            <a:schemeClr val="lt1"/>
+          </a:fontRef>
+        </p:style>
+        <p:txBody>
+          <a:bodyPr rtlCol="0" anchor="ctr" wrap="square" lIns="109728" rIns="109728"/>
+          <a:lstStyle/>
+          <a:p>
+            <a:pPr algn="ctr"/>
+            <a:r>
+              <a:rPr sz="1150" b="1">
+                <a:solidFill>
+                  <a:srgbClr val="000000"/>
+                </a:solidFill>
+                <a:latin typeface="Calibri"/>
+              </a:rPr>
+              <a:t>3-layer safety on every driven test — load-collapse detector · stall guard · 10 kN / 30 mm backstop + dead-DIC freeze.  Engine ready to add 4 more modes: cyclic · staircase · relaxation · creep.</a:t>
+            </a:r>
+          </a:p>
+        </p:txBody>
+      </p:sp>
+      <p:sp>
+        <p:nvSpPr>
+          <p:cNvPr id="15" name="TextBox 14"/>
+          <p:cNvSpPr txBox="1"/>
+          <p:nvPr/>
+        </p:nvSpPr>
+        <p:spPr>
+          <a:xfrm>
+            <a:off x="548640" y="6400800"/>
+            <a:ext cx="11064240" cy="365760"/>
+          </a:xfrm>
+          <a:prstGeom prst="rect">
+            <a:avLst/>
+          </a:prstGeom>
+          <a:noFill/>
+        </p:spPr>
+        <p:txBody>
+          <a:bodyPr wrap="square" lIns="45720" rIns="45720" tIns="18288" bIns="18288" anchor="t">
+            <a:spAutoFit/>
+          </a:bodyPr>
+          <a:lstStyle/>
+          <a:p>
+            <a:pPr algn="l"/>
+            <a:r>
+              <a:rPr sz="1200" b="0" i="1">
+                <a:solidFill>
+                  <a:srgbClr val="707070"/>
+                </a:solidFill>
+                <a:latin typeface="Calibri"/>
+              </a:rPr>
+              <a:t>Details: Software/UTM_PyQt6/ROADMAP.md · TESTING_TODO.md. App wiring snapshot-committed (main.py a3b187f).</a:t>
+            </a:r>
+          </a:p>
+        </p:txBody>
+      </p:sp>
+      <p:sp>
+        <p:nvSpPr>
+          <p:cNvPr id="16" name="TextBox 15"/>
+          <p:cNvSpPr txBox="1"/>
+          <p:nvPr/>
+        </p:nvSpPr>
+        <p:spPr>
+          <a:xfrm>
+            <a:off x="457200" y="6446520"/>
+            <a:ext cx="640080" cy="274320"/>
+          </a:xfrm>
+          <a:prstGeom prst="rect">
+            <a:avLst/>
+          </a:prstGeom>
+          <a:noFill/>
+        </p:spPr>
+        <p:txBody>
+          <a:bodyPr wrap="square" lIns="45720" rIns="45720" tIns="18288" bIns="18288" anchor="t">
+            <a:spAutoFit/>
+          </a:bodyPr>
+          <a:lstStyle/>
+          <a:p>
+            <a:pPr algn="l"/>
+            <a:r>
+              <a:rPr sz="1000" b="0" i="0">
+                <a:solidFill>
+                  <a:srgbClr val="707070"/>
+                </a:solidFill>
+                <a:latin typeface="Calibri"/>
+              </a:rPr>
+              <a:t>169</a:t>
+            </a:r>
+          </a:p>
+        </p:txBody>
+      </p:sp>
+    </p:spTree>
+  </p:cSld>
+  <p:clrMapOvr>
+    <a:masterClrMapping/>
+  </p:clrMapOvr>
+</p:sld>
+</file>
+
 <file path=ppt/slides/slide3.xml><?xml version="1.0" encoding="utf-8"?>
 <p:sld xmlns:a="http://schemas.openxmlformats.org/drawingml/2006/main" xmlns:p="http://schemas.openxmlformats.org/presentationml/2006/main" xmlns:r="http://schemas.openxmlformats.org/officeDocument/2006/relationships">
   <p:cSld>
@@ -20647,6 +21382,5556 @@
                 <a:latin typeface="Calibri"/>
               </a:rPr>
               <a:t>143</a:t>
+            </a:r>
+          </a:p>
+        </p:txBody>
+      </p:sp>
+    </p:spTree>
+  </p:cSld>
+  <p:clrMapOvr>
+    <a:masterClrMapping/>
+  </p:clrMapOvr>
+</p:sld>
+</file>
+
+<file path=ppt/slides/slide30.xml><?xml version="1.0" encoding="utf-8"?>
+<p:sld xmlns:a="http://schemas.openxmlformats.org/drawingml/2006/main" xmlns:p="http://schemas.openxmlformats.org/presentationml/2006/main" xmlns:r="http://schemas.openxmlformats.org/officeDocument/2006/relationships">
+  <p:cSld>
+    <p:spTree>
+      <p:nvGrpSpPr>
+        <p:cNvPr id="1" name=""/>
+        <p:cNvGrpSpPr/>
+        <p:nvPr/>
+      </p:nvGrpSpPr>
+      <p:grpSpPr/>
+      <p:sp>
+        <p:nvSpPr>
+          <p:cNvPr id="2" name="TextBox 1"/>
+          <p:cNvSpPr txBox="1"/>
+          <p:nvPr/>
+        </p:nvSpPr>
+        <p:spPr>
+          <a:xfrm>
+            <a:off x="11155680" y="274320"/>
+            <a:ext cx="914400" cy="274320"/>
+          </a:xfrm>
+          <a:prstGeom prst="rect">
+            <a:avLst/>
+          </a:prstGeom>
+          <a:noFill/>
+        </p:spPr>
+        <p:txBody>
+          <a:bodyPr wrap="square" lIns="45720" rIns="45720" tIns="18288" bIns="18288" anchor="t">
+            <a:spAutoFit/>
+          </a:bodyPr>
+          <a:lstStyle/>
+          <a:p>
+            <a:pPr algn="r"/>
+            <a:r>
+              <a:rPr sz="800" b="1" i="0">
+                <a:solidFill>
+                  <a:srgbClr val="707070"/>
+                </a:solidFill>
+                <a:latin typeface="Calibri"/>
+              </a:rPr>
+              <a:t>JÖNKÖPING UNIVERSITY</a:t>
+            </a:r>
+          </a:p>
+        </p:txBody>
+      </p:sp>
+      <p:sp>
+        <p:nvSpPr>
+          <p:cNvPr id="3" name="Rectangle 2"/>
+          <p:cNvSpPr/>
+          <p:nvPr/>
+        </p:nvSpPr>
+        <p:spPr>
+          <a:xfrm>
+            <a:off x="457200" y="411480"/>
+            <a:ext cx="457200" cy="73152"/>
+          </a:xfrm>
+          <a:prstGeom prst="rect">
+            <a:avLst/>
+          </a:prstGeom>
+          <a:solidFill>
+            <a:srgbClr val="A9D6EF"/>
+          </a:solidFill>
+          <a:ln>
+            <a:noFill/>
+          </a:ln>
+        </p:spPr>
+        <p:style>
+          <a:lnRef idx="1">
+            <a:schemeClr val="accent1"/>
+          </a:lnRef>
+          <a:fillRef idx="3">
+            <a:schemeClr val="accent1"/>
+          </a:fillRef>
+          <a:effectRef idx="2">
+            <a:schemeClr val="accent1"/>
+          </a:effectRef>
+          <a:fontRef idx="minor">
+            <a:schemeClr val="lt1"/>
+          </a:fontRef>
+        </p:style>
+        <p:txBody>
+          <a:bodyPr rtlCol="0" anchor="ctr"/>
+          <a:lstStyle/>
+          <a:p>
+            <a:pPr algn="ctr"/>
+          </a:p>
+        </p:txBody>
+      </p:sp>
+      <p:sp>
+        <p:nvSpPr>
+          <p:cNvPr id="4" name="TextBox 3"/>
+          <p:cNvSpPr txBox="1"/>
+          <p:nvPr/>
+        </p:nvSpPr>
+        <p:spPr>
+          <a:xfrm>
+            <a:off x="457200" y="502920"/>
+            <a:ext cx="11430000" cy="822960"/>
+          </a:xfrm>
+          <a:prstGeom prst="rect">
+            <a:avLst/>
+          </a:prstGeom>
+          <a:noFill/>
+        </p:spPr>
+        <p:txBody>
+          <a:bodyPr wrap="square" lIns="45720" rIns="45720" tIns="18288" bIns="18288" anchor="t">
+            <a:spAutoFit/>
+          </a:bodyPr>
+          <a:lstStyle/>
+          <a:p>
+            <a:pPr algn="l"/>
+            <a:r>
+              <a:rPr sz="3000" b="0" i="0">
+                <a:solidFill>
+                  <a:srgbClr val="000000"/>
+                </a:solidFill>
+                <a:latin typeface="Calibri Light"/>
+              </a:rPr>
+              <a:t>PROOF — AUTO-STOP AT FRACTURE  (S16, 100% infill)</a:t>
+            </a:r>
+          </a:p>
+        </p:txBody>
+      </p:sp>
+      <p:pic>
+        <p:nvPicPr>
+          <p:cNvPr id="5" name="Picture 4" descr="feat_autostop_proof.png"/>
+          <p:cNvPicPr>
+            <a:picLocks noChangeAspect="1"/>
+          </p:cNvPicPr>
+          <p:nvPr/>
+        </p:nvPicPr>
+        <p:blipFill>
+          <a:blip r:embed="rId2"/>
+          <a:stretch>
+            <a:fillRect/>
+          </a:stretch>
+        </p:blipFill>
+        <p:spPr>
+          <a:xfrm>
+            <a:off x="320040" y="1417320"/>
+            <a:ext cx="6766560" cy="3759200"/>
+          </a:xfrm>
+          <a:prstGeom prst="rect">
+            <a:avLst/>
+          </a:prstGeom>
+        </p:spPr>
+      </p:pic>
+      <p:sp>
+        <p:nvSpPr>
+          <p:cNvPr id="6" name="TextBox 5"/>
+          <p:cNvSpPr txBox="1"/>
+          <p:nvPr/>
+        </p:nvSpPr>
+        <p:spPr>
+          <a:xfrm>
+            <a:off x="7315200" y="1170432"/>
+            <a:ext cx="4526280" cy="365760"/>
+          </a:xfrm>
+          <a:prstGeom prst="rect">
+            <a:avLst/>
+          </a:prstGeom>
+          <a:noFill/>
+        </p:spPr>
+        <p:txBody>
+          <a:bodyPr wrap="square" lIns="45720" rIns="45720" tIns="18288" bIns="18288" anchor="t">
+            <a:spAutoFit/>
+          </a:bodyPr>
+          <a:lstStyle/>
+          <a:p>
+            <a:pPr algn="l"/>
+            <a:r>
+              <a:rPr sz="1600" b="0" i="0">
+                <a:solidFill>
+                  <a:srgbClr val="707070"/>
+                </a:solidFill>
+                <a:latin typeface="Calibri"/>
+              </a:rPr>
+              <a:t>How it works</a:t>
+            </a:r>
+          </a:p>
+        </p:txBody>
+      </p:sp>
+      <p:sp>
+        <p:nvSpPr>
+          <p:cNvPr id="7" name="Rounded Rectangle 6"/>
+          <p:cNvSpPr/>
+          <p:nvPr/>
+        </p:nvSpPr>
+        <p:spPr>
+          <a:xfrm>
+            <a:off x="7315200" y="1600200"/>
+            <a:ext cx="4526280" cy="548640"/>
+          </a:xfrm>
+          <a:prstGeom prst="roundRect">
+            <a:avLst/>
+          </a:prstGeom>
+          <a:solidFill>
+            <a:srgbClr val="FFFFFF"/>
+          </a:solidFill>
+          <a:ln w="15240">
+            <a:solidFill>
+              <a:srgbClr val="1F77B4"/>
+            </a:solidFill>
+          </a:ln>
+        </p:spPr>
+        <p:style>
+          <a:lnRef idx="1">
+            <a:schemeClr val="accent1"/>
+          </a:lnRef>
+          <a:fillRef idx="3">
+            <a:schemeClr val="accent1"/>
+          </a:fillRef>
+          <a:effectRef idx="2">
+            <a:schemeClr val="accent1"/>
+          </a:effectRef>
+          <a:fontRef idx="minor">
+            <a:schemeClr val="lt1"/>
+          </a:fontRef>
+        </p:style>
+        <p:txBody>
+          <a:bodyPr rtlCol="0" anchor="ctr" lIns="54864" rIns="54864" tIns="27432" bIns="27432" wrap="square"/>
+          <a:lstStyle/>
+          <a:p>
+            <a:pPr algn="ctr"/>
+            <a:r>
+              <a:rPr sz="1100" b="0">
+                <a:solidFill>
+                  <a:srgbClr val="000000"/>
+                </a:solidFill>
+                <a:latin typeface="Calibri"/>
+              </a:rPr>
+              <a:t>Track the peak load</a:t>
+            </a:r>
+          </a:p>
+        </p:txBody>
+      </p:sp>
+      <p:cxnSp>
+        <p:nvCxnSpPr>
+          <p:cNvPr id="8" name="Connector 7"/>
+          <p:cNvCxnSpPr/>
+          <p:nvPr/>
+        </p:nvCxnSpPr>
+        <p:spPr>
+          <a:xfrm>
+            <a:off x="9573768" y="2148840"/>
+            <a:ext cx="0" cy="164592"/>
+          </a:xfrm>
+          <a:prstGeom prst="line">
+            <a:avLst/>
+          </a:prstGeom>
+          <a:ln w="25400">
+            <a:solidFill>
+              <a:srgbClr val="555555"/>
+            </a:solidFill>
+            <a:tailEnd type="triangle" w="med" len="med"/>
+          </a:ln>
+        </p:spPr>
+        <p:style>
+          <a:lnRef idx="2">
+            <a:schemeClr val="accent1"/>
+          </a:lnRef>
+          <a:fillRef idx="0">
+            <a:schemeClr val="accent1"/>
+          </a:fillRef>
+          <a:effectRef idx="1">
+            <a:schemeClr val="accent1"/>
+          </a:effectRef>
+          <a:fontRef idx="minor">
+            <a:schemeClr val="tx1"/>
+          </a:fontRef>
+        </p:style>
+      </p:cxnSp>
+      <p:sp>
+        <p:nvSpPr>
+          <p:cNvPr id="9" name="Rounded Rectangle 8"/>
+          <p:cNvSpPr/>
+          <p:nvPr/>
+        </p:nvSpPr>
+        <p:spPr>
+          <a:xfrm>
+            <a:off x="7315200" y="2313432"/>
+            <a:ext cx="4526280" cy="548640"/>
+          </a:xfrm>
+          <a:prstGeom prst="roundRect">
+            <a:avLst/>
+          </a:prstGeom>
+          <a:solidFill>
+            <a:srgbClr val="FFFFFF"/>
+          </a:solidFill>
+          <a:ln w="15240">
+            <a:solidFill>
+              <a:srgbClr val="1F77B4"/>
+            </a:solidFill>
+          </a:ln>
+        </p:spPr>
+        <p:style>
+          <a:lnRef idx="1">
+            <a:schemeClr val="accent1"/>
+          </a:lnRef>
+          <a:fillRef idx="3">
+            <a:schemeClr val="accent1"/>
+          </a:fillRef>
+          <a:effectRef idx="2">
+            <a:schemeClr val="accent1"/>
+          </a:effectRef>
+          <a:fontRef idx="minor">
+            <a:schemeClr val="lt1"/>
+          </a:fontRef>
+        </p:style>
+        <p:txBody>
+          <a:bodyPr rtlCol="0" anchor="ctr" lIns="54864" rIns="54864" tIns="27432" bIns="27432" wrap="square"/>
+          <a:lstStyle/>
+          <a:p>
+            <a:pPr algn="ctr"/>
+            <a:r>
+              <a:rPr sz="1100" b="0">
+                <a:solidFill>
+                  <a:srgbClr val="000000"/>
+                </a:solidFill>
+                <a:latin typeface="Calibri"/>
+              </a:rPr>
+              <a:t>Arm at 30% of peak</a:t>
+            </a:r>
+          </a:p>
+        </p:txBody>
+      </p:sp>
+      <p:cxnSp>
+        <p:nvCxnSpPr>
+          <p:cNvPr id="10" name="Connector 9"/>
+          <p:cNvCxnSpPr/>
+          <p:nvPr/>
+        </p:nvCxnSpPr>
+        <p:spPr>
+          <a:xfrm>
+            <a:off x="9573768" y="2862072"/>
+            <a:ext cx="0" cy="164592"/>
+          </a:xfrm>
+          <a:prstGeom prst="line">
+            <a:avLst/>
+          </a:prstGeom>
+          <a:ln w="25400">
+            <a:solidFill>
+              <a:srgbClr val="555555"/>
+            </a:solidFill>
+            <a:tailEnd type="triangle" w="med" len="med"/>
+          </a:ln>
+        </p:spPr>
+        <p:style>
+          <a:lnRef idx="2">
+            <a:schemeClr val="accent1"/>
+          </a:lnRef>
+          <a:fillRef idx="0">
+            <a:schemeClr val="accent1"/>
+          </a:fillRef>
+          <a:effectRef idx="1">
+            <a:schemeClr val="accent1"/>
+          </a:effectRef>
+          <a:fontRef idx="minor">
+            <a:schemeClr val="tx1"/>
+          </a:fontRef>
+        </p:style>
+      </p:cxnSp>
+      <p:sp>
+        <p:nvSpPr>
+          <p:cNvPr id="11" name="Rounded Rectangle 10"/>
+          <p:cNvSpPr/>
+          <p:nvPr/>
+        </p:nvSpPr>
+        <p:spPr>
+          <a:xfrm>
+            <a:off x="7315200" y="3026664"/>
+            <a:ext cx="4526280" cy="548640"/>
+          </a:xfrm>
+          <a:prstGeom prst="roundRect">
+            <a:avLst/>
+          </a:prstGeom>
+          <a:solidFill>
+            <a:srgbClr val="FFF3CD"/>
+          </a:solidFill>
+          <a:ln w="15240">
+            <a:solidFill>
+              <a:srgbClr val="555555"/>
+            </a:solidFill>
+          </a:ln>
+        </p:spPr>
+        <p:style>
+          <a:lnRef idx="1">
+            <a:schemeClr val="accent1"/>
+          </a:lnRef>
+          <a:fillRef idx="3">
+            <a:schemeClr val="accent1"/>
+          </a:fillRef>
+          <a:effectRef idx="2">
+            <a:schemeClr val="accent1"/>
+          </a:effectRef>
+          <a:fontRef idx="minor">
+            <a:schemeClr val="lt1"/>
+          </a:fontRef>
+        </p:style>
+        <p:txBody>
+          <a:bodyPr rtlCol="0" anchor="ctr" lIns="54864" rIns="54864" tIns="27432" bIns="27432" wrap="square"/>
+          <a:lstStyle/>
+          <a:p>
+            <a:pPr algn="ctr"/>
+            <a:r>
+              <a:rPr sz="1100" b="0">
+                <a:solidFill>
+                  <a:srgbClr val="000000"/>
+                </a:solidFill>
+                <a:latin typeface="Calibri"/>
+              </a:rPr>
+              <a:t>Fire when load &lt; 50% (collapse)</a:t>
+            </a:r>
+          </a:p>
+        </p:txBody>
+      </p:sp>
+      <p:cxnSp>
+        <p:nvCxnSpPr>
+          <p:cNvPr id="12" name="Connector 11"/>
+          <p:cNvCxnSpPr/>
+          <p:nvPr/>
+        </p:nvCxnSpPr>
+        <p:spPr>
+          <a:xfrm>
+            <a:off x="9573768" y="3575304"/>
+            <a:ext cx="0" cy="164592"/>
+          </a:xfrm>
+          <a:prstGeom prst="line">
+            <a:avLst/>
+          </a:prstGeom>
+          <a:ln w="25400">
+            <a:solidFill>
+              <a:srgbClr val="555555"/>
+            </a:solidFill>
+            <a:tailEnd type="triangle" w="med" len="med"/>
+          </a:ln>
+        </p:spPr>
+        <p:style>
+          <a:lnRef idx="2">
+            <a:schemeClr val="accent1"/>
+          </a:lnRef>
+          <a:fillRef idx="0">
+            <a:schemeClr val="accent1"/>
+          </a:fillRef>
+          <a:effectRef idx="1">
+            <a:schemeClr val="accent1"/>
+          </a:effectRef>
+          <a:fontRef idx="minor">
+            <a:schemeClr val="tx1"/>
+          </a:fontRef>
+        </p:style>
+      </p:cxnSp>
+      <p:sp>
+        <p:nvSpPr>
+          <p:cNvPr id="13" name="Rounded Rectangle 12"/>
+          <p:cNvSpPr/>
+          <p:nvPr/>
+        </p:nvSpPr>
+        <p:spPr>
+          <a:xfrm>
+            <a:off x="7315200" y="3739896"/>
+            <a:ext cx="4526280" cy="548640"/>
+          </a:xfrm>
+          <a:prstGeom prst="roundRect">
+            <a:avLst/>
+          </a:prstGeom>
+          <a:solidFill>
+            <a:srgbClr val="C8E6C9"/>
+          </a:solidFill>
+          <a:ln w="15240">
+            <a:solidFill>
+              <a:srgbClr val="1F3F2F"/>
+            </a:solidFill>
+          </a:ln>
+        </p:spPr>
+        <p:style>
+          <a:lnRef idx="1">
+            <a:schemeClr val="accent1"/>
+          </a:lnRef>
+          <a:fillRef idx="3">
+            <a:schemeClr val="accent1"/>
+          </a:fillRef>
+          <a:effectRef idx="2">
+            <a:schemeClr val="accent1"/>
+          </a:effectRef>
+          <a:fontRef idx="minor">
+            <a:schemeClr val="lt1"/>
+          </a:fontRef>
+        </p:style>
+        <p:txBody>
+          <a:bodyPr rtlCol="0" anchor="ctr" lIns="54864" rIns="54864" tIns="27432" bIns="27432" wrap="square"/>
+          <a:lstStyle/>
+          <a:p>
+            <a:pPr algn="ctr"/>
+            <a:r>
+              <a:rPr sz="1150" b="1">
+                <a:solidFill>
+                  <a:srgbClr val="1F3F2F"/>
+                </a:solidFill>
+                <a:latin typeface="Calibri"/>
+              </a:rPr>
+              <a:t>Stop + E-Stop</a:t>
+            </a:r>
+          </a:p>
+        </p:txBody>
+      </p:sp>
+      <p:sp>
+        <p:nvSpPr>
+          <p:cNvPr id="14" name="Rounded Rectangle 13"/>
+          <p:cNvSpPr/>
+          <p:nvPr/>
+        </p:nvSpPr>
+        <p:spPr>
+          <a:xfrm>
+            <a:off x="7315200" y="4572000"/>
+            <a:ext cx="2194560" cy="868680"/>
+          </a:xfrm>
+          <a:prstGeom prst="roundRect">
+            <a:avLst/>
+          </a:prstGeom>
+          <a:solidFill>
+            <a:srgbClr val="E7F1F8"/>
+          </a:solidFill>
+          <a:ln>
+            <a:noFill/>
+          </a:ln>
+        </p:spPr>
+        <p:style>
+          <a:lnRef idx="1">
+            <a:schemeClr val="accent1"/>
+          </a:lnRef>
+          <a:fillRef idx="3">
+            <a:schemeClr val="accent1"/>
+          </a:fillRef>
+          <a:effectRef idx="2">
+            <a:schemeClr val="accent1"/>
+          </a:effectRef>
+          <a:fontRef idx="minor">
+            <a:schemeClr val="lt1"/>
+          </a:fontRef>
+        </p:style>
+        <p:txBody>
+          <a:bodyPr rtlCol="0" anchor="ctr" lIns="54864" rIns="54864" bIns="27432" wrap="square"/>
+          <a:lstStyle/>
+          <a:p>
+            <a:pPr algn="ctr"/>
+            <a:r>
+              <a:rPr sz="1800" b="1">
+                <a:solidFill>
+                  <a:srgbClr val="1F3F2F"/>
+                </a:solidFill>
+                <a:latin typeface="Calibri"/>
+              </a:rPr>
+              <a:t>2992 N</a:t>
+            </a:r>
+          </a:p>
+          <a:p>
+            <a:pPr algn="ctr"/>
+            <a:r>
+              <a:rPr sz="950">
+                <a:solidFill>
+                  <a:srgbClr val="000000"/>
+                </a:solidFill>
+                <a:latin typeface="Calibri"/>
+              </a:rPr>
+              <a:t>PEAK</a:t>
+            </a:r>
+          </a:p>
+        </p:txBody>
+      </p:sp>
+      <p:sp>
+        <p:nvSpPr>
+          <p:cNvPr id="15" name="Rounded Rectangle 14"/>
+          <p:cNvSpPr/>
+          <p:nvPr/>
+        </p:nvSpPr>
+        <p:spPr>
+          <a:xfrm>
+            <a:off x="9646920" y="4572000"/>
+            <a:ext cx="2194560" cy="868680"/>
+          </a:xfrm>
+          <a:prstGeom prst="roundRect">
+            <a:avLst/>
+          </a:prstGeom>
+          <a:solidFill>
+            <a:srgbClr val="E7F1F8"/>
+          </a:solidFill>
+          <a:ln>
+            <a:noFill/>
+          </a:ln>
+        </p:spPr>
+        <p:style>
+          <a:lnRef idx="1">
+            <a:schemeClr val="accent1"/>
+          </a:lnRef>
+          <a:fillRef idx="3">
+            <a:schemeClr val="accent1"/>
+          </a:fillRef>
+          <a:effectRef idx="2">
+            <a:schemeClr val="accent1"/>
+          </a:effectRef>
+          <a:fontRef idx="minor">
+            <a:schemeClr val="lt1"/>
+          </a:fontRef>
+        </p:style>
+        <p:txBody>
+          <a:bodyPr rtlCol="0" anchor="ctr" lIns="54864" rIns="54864" bIns="27432" wrap="square"/>
+          <a:lstStyle/>
+          <a:p>
+            <a:pPr algn="ctr"/>
+            <a:r>
+              <a:rPr sz="1800" b="1">
+                <a:solidFill>
+                  <a:srgbClr val="1F3F2F"/>
+                </a:solidFill>
+                <a:latin typeface="Calibri"/>
+              </a:rPr>
+              <a:t>47.4 MPa</a:t>
+            </a:r>
+          </a:p>
+          <a:p>
+            <a:pPr algn="ctr"/>
+            <a:r>
+              <a:rPr sz="950">
+                <a:solidFill>
+                  <a:srgbClr val="000000"/>
+                </a:solidFill>
+                <a:latin typeface="Calibri"/>
+              </a:rPr>
+              <a:t>UTS (true)</a:t>
+            </a:r>
+          </a:p>
+        </p:txBody>
+      </p:sp>
+      <p:sp>
+        <p:nvSpPr>
+          <p:cNvPr id="16" name="Rectangle 15"/>
+          <p:cNvSpPr/>
+          <p:nvPr/>
+        </p:nvSpPr>
+        <p:spPr>
+          <a:xfrm>
+            <a:off x="365760" y="5806440"/>
+            <a:ext cx="11475720" cy="658368"/>
+          </a:xfrm>
+          <a:prstGeom prst="rect">
+            <a:avLst/>
+          </a:prstGeom>
+          <a:solidFill>
+            <a:srgbClr val="C8E6C9"/>
+          </a:solidFill>
+          <a:ln>
+            <a:noFill/>
+          </a:ln>
+        </p:spPr>
+        <p:style>
+          <a:lnRef idx="1">
+            <a:schemeClr val="accent1"/>
+          </a:lnRef>
+          <a:fillRef idx="3">
+            <a:schemeClr val="accent1"/>
+          </a:fillRef>
+          <a:effectRef idx="2">
+            <a:schemeClr val="accent1"/>
+          </a:effectRef>
+          <a:fontRef idx="minor">
+            <a:schemeClr val="lt1"/>
+          </a:fontRef>
+        </p:style>
+        <p:txBody>
+          <a:bodyPr rtlCol="0" anchor="ctr" wrap="square" lIns="109728" rIns="109728"/>
+          <a:lstStyle/>
+          <a:p>
+            <a:pPr algn="ctr"/>
+            <a:r>
+              <a:rPr sz="1200" b="1">
+                <a:solidFill>
+                  <a:srgbClr val="1F3F2F"/>
+                </a:solidFill>
+                <a:latin typeface="Calibri"/>
+              </a:rPr>
+              <a:t>No hand on the button — the rig detects its own fracture and halts in one sample.</a:t>
+            </a:r>
+          </a:p>
+        </p:txBody>
+      </p:sp>
+      <p:sp>
+        <p:nvSpPr>
+          <p:cNvPr id="17" name="TextBox 16"/>
+          <p:cNvSpPr txBox="1"/>
+          <p:nvPr/>
+        </p:nvSpPr>
+        <p:spPr>
+          <a:xfrm>
+            <a:off x="457200" y="6446520"/>
+            <a:ext cx="640080" cy="274320"/>
+          </a:xfrm>
+          <a:prstGeom prst="rect">
+            <a:avLst/>
+          </a:prstGeom>
+          <a:noFill/>
+        </p:spPr>
+        <p:txBody>
+          <a:bodyPr wrap="square" lIns="45720" rIns="45720" tIns="18288" bIns="18288" anchor="t">
+            <a:spAutoFit/>
+          </a:bodyPr>
+          <a:lstStyle/>
+          <a:p>
+            <a:pPr algn="l"/>
+            <a:r>
+              <a:rPr sz="1000" b="0" i="0">
+                <a:solidFill>
+                  <a:srgbClr val="707070"/>
+                </a:solidFill>
+                <a:latin typeface="Calibri"/>
+              </a:rPr>
+              <a:t>170</a:t>
+            </a:r>
+          </a:p>
+        </p:txBody>
+      </p:sp>
+    </p:spTree>
+  </p:cSld>
+  <p:clrMapOvr>
+    <a:masterClrMapping/>
+  </p:clrMapOvr>
+</p:sld>
+</file>
+
+<file path=ppt/slides/slide31.xml><?xml version="1.0" encoding="utf-8"?>
+<p:sld xmlns:a="http://schemas.openxmlformats.org/drawingml/2006/main" xmlns:p="http://schemas.openxmlformats.org/presentationml/2006/main" xmlns:r="http://schemas.openxmlformats.org/officeDocument/2006/relationships">
+  <p:cSld>
+    <p:spTree>
+      <p:nvGrpSpPr>
+        <p:cNvPr id="1" name=""/>
+        <p:cNvGrpSpPr/>
+        <p:nvPr/>
+      </p:nvGrpSpPr>
+      <p:grpSpPr/>
+      <p:sp>
+        <p:nvSpPr>
+          <p:cNvPr id="2" name="TextBox 1"/>
+          <p:cNvSpPr txBox="1"/>
+          <p:nvPr/>
+        </p:nvSpPr>
+        <p:spPr>
+          <a:xfrm>
+            <a:off x="11155680" y="274320"/>
+            <a:ext cx="914400" cy="274320"/>
+          </a:xfrm>
+          <a:prstGeom prst="rect">
+            <a:avLst/>
+          </a:prstGeom>
+          <a:noFill/>
+        </p:spPr>
+        <p:txBody>
+          <a:bodyPr wrap="square" lIns="45720" rIns="45720" tIns="18288" bIns="18288" anchor="t">
+            <a:spAutoFit/>
+          </a:bodyPr>
+          <a:lstStyle/>
+          <a:p>
+            <a:pPr algn="r"/>
+            <a:r>
+              <a:rPr sz="800" b="1" i="0">
+                <a:solidFill>
+                  <a:srgbClr val="707070"/>
+                </a:solidFill>
+                <a:latin typeface="Calibri"/>
+              </a:rPr>
+              <a:t>JÖNKÖPING UNIVERSITY</a:t>
+            </a:r>
+          </a:p>
+        </p:txBody>
+      </p:sp>
+      <p:sp>
+        <p:nvSpPr>
+          <p:cNvPr id="3" name="Rectangle 2"/>
+          <p:cNvSpPr/>
+          <p:nvPr/>
+        </p:nvSpPr>
+        <p:spPr>
+          <a:xfrm>
+            <a:off x="457200" y="411480"/>
+            <a:ext cx="457200" cy="73152"/>
+          </a:xfrm>
+          <a:prstGeom prst="rect">
+            <a:avLst/>
+          </a:prstGeom>
+          <a:solidFill>
+            <a:srgbClr val="A9D6EF"/>
+          </a:solidFill>
+          <a:ln>
+            <a:noFill/>
+          </a:ln>
+        </p:spPr>
+        <p:style>
+          <a:lnRef idx="1">
+            <a:schemeClr val="accent1"/>
+          </a:lnRef>
+          <a:fillRef idx="3">
+            <a:schemeClr val="accent1"/>
+          </a:fillRef>
+          <a:effectRef idx="2">
+            <a:schemeClr val="accent1"/>
+          </a:effectRef>
+          <a:fontRef idx="minor">
+            <a:schemeClr val="lt1"/>
+          </a:fontRef>
+        </p:style>
+        <p:txBody>
+          <a:bodyPr rtlCol="0" anchor="ctr"/>
+          <a:lstStyle/>
+          <a:p>
+            <a:pPr algn="ctr"/>
+          </a:p>
+        </p:txBody>
+      </p:sp>
+      <p:sp>
+        <p:nvSpPr>
+          <p:cNvPr id="4" name="TextBox 3"/>
+          <p:cNvSpPr txBox="1"/>
+          <p:nvPr/>
+        </p:nvSpPr>
+        <p:spPr>
+          <a:xfrm>
+            <a:off x="457200" y="502920"/>
+            <a:ext cx="11430000" cy="822960"/>
+          </a:xfrm>
+          <a:prstGeom prst="rect">
+            <a:avLst/>
+          </a:prstGeom>
+          <a:noFill/>
+        </p:spPr>
+        <p:txBody>
+          <a:bodyPr wrap="square" lIns="45720" rIns="45720" tIns="18288" bIns="18288" anchor="t">
+            <a:spAutoFit/>
+          </a:bodyPr>
+          <a:lstStyle/>
+          <a:p>
+            <a:pPr algn="l"/>
+            <a:r>
+              <a:rPr sz="3000" b="0" i="0">
+                <a:solidFill>
+                  <a:srgbClr val="000000"/>
+                </a:solidFill>
+                <a:latin typeface="Calibri Light"/>
+              </a:rPr>
+              <a:t>STRAIN-RATE FRACTURE TEST — RESULTS &amp; WHY IT WORKS</a:t>
+            </a:r>
+          </a:p>
+        </p:txBody>
+      </p:sp>
+      <p:pic>
+        <p:nvPicPr>
+          <p:cNvPr id="5" name="Picture 4" descr="feat_strainrate_proof.png"/>
+          <p:cNvPicPr>
+            <a:picLocks noChangeAspect="1"/>
+          </p:cNvPicPr>
+          <p:nvPr/>
+        </p:nvPicPr>
+        <p:blipFill>
+          <a:blip r:embed="rId2"/>
+          <a:stretch>
+            <a:fillRect/>
+          </a:stretch>
+        </p:blipFill>
+        <p:spPr>
+          <a:xfrm>
+            <a:off x="320040" y="1417320"/>
+            <a:ext cx="6766560" cy="3759200"/>
+          </a:xfrm>
+          <a:prstGeom prst="rect">
+            <a:avLst/>
+          </a:prstGeom>
+        </p:spPr>
+      </p:pic>
+      <p:sp>
+        <p:nvSpPr>
+          <p:cNvPr id="6" name="TextBox 5"/>
+          <p:cNvSpPr txBox="1"/>
+          <p:nvPr/>
+        </p:nvSpPr>
+        <p:spPr>
+          <a:xfrm>
+            <a:off x="7315200" y="1170432"/>
+            <a:ext cx="4526280" cy="365760"/>
+          </a:xfrm>
+          <a:prstGeom prst="rect">
+            <a:avLst/>
+          </a:prstGeom>
+          <a:noFill/>
+        </p:spPr>
+        <p:txBody>
+          <a:bodyPr wrap="square" lIns="45720" rIns="45720" tIns="18288" bIns="18288" anchor="t">
+            <a:spAutoFit/>
+          </a:bodyPr>
+          <a:lstStyle/>
+          <a:p>
+            <a:pPr algn="l"/>
+            <a:r>
+              <a:rPr sz="1600" b="0" i="0">
+                <a:solidFill>
+                  <a:srgbClr val="707070"/>
+                </a:solidFill>
+                <a:latin typeface="Calibri"/>
+              </a:rPr>
+              <a:t>Rate held BY adapting speed</a:t>
+            </a:r>
+          </a:p>
+        </p:txBody>
+      </p:sp>
+      <p:graphicFrame>
+        <p:nvGraphicFramePr>
+          <p:cNvPr id="7" name="Table 6"/>
+          <p:cNvGraphicFramePr>
+            <a:graphicFrameLocks noGrp="1"/>
+          </p:cNvGraphicFramePr>
+          <p:nvPr/>
+        </p:nvGraphicFramePr>
+        <p:xfrm>
+          <a:off x="7315200" y="1600200"/>
+          <a:ext cx="4526280" cy="1783080"/>
+        </p:xfrm>
+        <a:graphic>
+          <a:graphicData uri="http://schemas.openxmlformats.org/drawingml/2006/table">
+            <a:tbl>
+              <a:tblPr firstRow="1" bandRow="1">
+                <a:tableStyleId>{5C22544A-7EE6-4342-B048-85BDC9FD1C3A}</a:tableStyleId>
+              </a:tblPr>
+              <a:tblGrid>
+                <a:gridCol w="1737360"/>
+                <a:gridCol w="1371600"/>
+                <a:gridCol w="1417320"/>
+              </a:tblGrid>
+              <a:tr h="356616">
+                <a:tc>
+                  <a:txBody>
+                    <a:bodyPr lIns="54864" rIns="54864" tIns="18288" bIns="18288" wrap="square" anchor="ctr"/>
+                    <a:lstStyle/>
+                    <a:p>
+                      <a:pPr algn="l"/>
+                      <a:r>
+                        <a:rPr sz="1000" b="1">
+                          <a:solidFill>
+                            <a:srgbClr val="FFFFFF"/>
+                          </a:solidFill>
+                          <a:latin typeface="Calibri"/>
+                        </a:rPr>
+                        <a:t>Regime</a:t>
+                      </a:r>
+                    </a:p>
+                  </a:txBody>
+                  <a:tcPr>
+                    <a:solidFill>
+                      <a:srgbClr val="143D2F"/>
+                    </a:solidFill>
+                  </a:tcPr>
+                </a:tc>
+                <a:tc>
+                  <a:txBody>
+                    <a:bodyPr lIns="54864" rIns="54864" tIns="18288" bIns="18288" wrap="square" anchor="ctr"/>
+                    <a:lstStyle/>
+                    <a:p>
+                      <a:pPr algn="l"/>
+                      <a:r>
+                        <a:rPr sz="1000" b="1">
+                          <a:solidFill>
+                            <a:srgbClr val="FFFFFF"/>
+                          </a:solidFill>
+                          <a:latin typeface="Calibri"/>
+                        </a:rPr>
+                        <a:t>speed</a:t>
+                      </a:r>
+                    </a:p>
+                  </a:txBody>
+                  <a:tcPr>
+                    <a:solidFill>
+                      <a:srgbClr val="143D2F"/>
+                    </a:solidFill>
+                  </a:tcPr>
+                </a:tc>
+                <a:tc>
+                  <a:txBody>
+                    <a:bodyPr lIns="54864" rIns="54864" tIns="18288" bIns="18288" wrap="square" anchor="ctr"/>
+                    <a:lstStyle/>
+                    <a:p>
+                      <a:pPr algn="l"/>
+                      <a:r>
+                        <a:rPr sz="1000" b="1">
+                          <a:solidFill>
+                            <a:srgbClr val="FFFFFF"/>
+                          </a:solidFill>
+                          <a:latin typeface="Calibri"/>
+                        </a:rPr>
+                        <a:t>dε/dt</a:t>
+                      </a:r>
+                    </a:p>
+                  </a:txBody>
+                  <a:tcPr>
+                    <a:solidFill>
+                      <a:srgbClr val="143D2F"/>
+                    </a:solidFill>
+                  </a:tcPr>
+                </a:tc>
+              </a:tr>
+              <a:tr h="356616">
+                <a:tc>
+                  <a:txBody>
+                    <a:bodyPr lIns="54864" rIns="54864" tIns="18288" bIns="18288" wrap="square" anchor="ctr"/>
+                    <a:lstStyle/>
+                    <a:p>
+                      <a:pPr algn="l"/>
+                      <a:r>
+                        <a:rPr sz="950" b="0">
+                          <a:solidFill>
+                            <a:srgbClr val="000000"/>
+                          </a:solidFill>
+                          <a:latin typeface="Calibri"/>
+                        </a:rPr>
+                        <a:t>elastic</a:t>
+                      </a:r>
+                    </a:p>
+                  </a:txBody>
+                  <a:tcPr/>
+                </a:tc>
+                <a:tc>
+                  <a:txBody>
+                    <a:bodyPr lIns="54864" rIns="54864" tIns="18288" bIns="18288" wrap="square" anchor="ctr"/>
+                    <a:lstStyle/>
+                    <a:p>
+                      <a:pPr algn="l"/>
+                      <a:r>
+                        <a:rPr sz="950" b="0">
+                          <a:solidFill>
+                            <a:srgbClr val="000000"/>
+                          </a:solidFill>
+                          <a:latin typeface="Calibri"/>
+                        </a:rPr>
+                        <a:t>0.10</a:t>
+                      </a:r>
+                    </a:p>
+                  </a:txBody>
+                  <a:tcPr/>
+                </a:tc>
+                <a:tc>
+                  <a:txBody>
+                    <a:bodyPr lIns="54864" rIns="54864" tIns="18288" bIns="18288" wrap="square" anchor="ctr"/>
+                    <a:lstStyle/>
+                    <a:p>
+                      <a:pPr algn="l"/>
+                      <a:r>
+                        <a:rPr sz="950" b="0">
+                          <a:solidFill>
+                            <a:srgbClr val="000000"/>
+                          </a:solidFill>
+                          <a:latin typeface="Calibri"/>
+                        </a:rPr>
+                        <a:t>0.00049</a:t>
+                      </a:r>
+                    </a:p>
+                  </a:txBody>
+                  <a:tcPr/>
+                </a:tc>
+              </a:tr>
+              <a:tr h="356616">
+                <a:tc>
+                  <a:txBody>
+                    <a:bodyPr lIns="54864" rIns="54864" tIns="18288" bIns="18288" wrap="square" anchor="ctr"/>
+                    <a:lstStyle/>
+                    <a:p>
+                      <a:pPr algn="l"/>
+                      <a:r>
+                        <a:rPr sz="950" b="0">
+                          <a:solidFill>
+                            <a:srgbClr val="000000"/>
+                          </a:solidFill>
+                          <a:latin typeface="Calibri"/>
+                        </a:rPr>
+                        <a:t>yield</a:t>
+                      </a:r>
+                    </a:p>
+                  </a:txBody>
+                  <a:tcPr/>
+                </a:tc>
+                <a:tc>
+                  <a:txBody>
+                    <a:bodyPr lIns="54864" rIns="54864" tIns="18288" bIns="18288" wrap="square" anchor="ctr"/>
+                    <a:lstStyle/>
+                    <a:p>
+                      <a:pPr algn="l"/>
+                      <a:r>
+                        <a:rPr sz="950" b="0">
+                          <a:solidFill>
+                            <a:srgbClr val="000000"/>
+                          </a:solidFill>
+                          <a:latin typeface="Calibri"/>
+                        </a:rPr>
+                        <a:t>0.09</a:t>
+                      </a:r>
+                    </a:p>
+                  </a:txBody>
+                  <a:tcPr/>
+                </a:tc>
+                <a:tc>
+                  <a:txBody>
+                    <a:bodyPr lIns="54864" rIns="54864" tIns="18288" bIns="18288" wrap="square" anchor="ctr"/>
+                    <a:lstStyle/>
+                    <a:p>
+                      <a:pPr algn="l"/>
+                      <a:r>
+                        <a:rPr sz="950" b="0">
+                          <a:solidFill>
+                            <a:srgbClr val="000000"/>
+                          </a:solidFill>
+                          <a:latin typeface="Calibri"/>
+                        </a:rPr>
+                        <a:t>0.00050</a:t>
+                      </a:r>
+                    </a:p>
+                  </a:txBody>
+                  <a:tcPr/>
+                </a:tc>
+              </a:tr>
+              <a:tr h="356616">
+                <a:tc>
+                  <a:txBody>
+                    <a:bodyPr lIns="54864" rIns="54864" tIns="18288" bIns="18288" wrap="square" anchor="ctr"/>
+                    <a:lstStyle/>
+                    <a:p>
+                      <a:pPr algn="l"/>
+                      <a:r>
+                        <a:rPr sz="950" b="0">
+                          <a:solidFill>
+                            <a:srgbClr val="000000"/>
+                          </a:solidFill>
+                          <a:latin typeface="Calibri"/>
+                        </a:rPr>
+                        <a:t>necking</a:t>
+                      </a:r>
+                    </a:p>
+                  </a:txBody>
+                  <a:tcPr/>
+                </a:tc>
+                <a:tc>
+                  <a:txBody>
+                    <a:bodyPr lIns="54864" rIns="54864" tIns="18288" bIns="18288" wrap="square" anchor="ctr"/>
+                    <a:lstStyle/>
+                    <a:p>
+                      <a:pPr algn="l"/>
+                      <a:r>
+                        <a:rPr sz="950" b="0">
+                          <a:solidFill>
+                            <a:srgbClr val="000000"/>
+                          </a:solidFill>
+                          <a:latin typeface="Calibri"/>
+                        </a:rPr>
+                        <a:t>0.06</a:t>
+                      </a:r>
+                    </a:p>
+                  </a:txBody>
+                  <a:tcPr/>
+                </a:tc>
+                <a:tc>
+                  <a:txBody>
+                    <a:bodyPr lIns="54864" rIns="54864" tIns="18288" bIns="18288" wrap="square" anchor="ctr"/>
+                    <a:lstStyle/>
+                    <a:p>
+                      <a:pPr algn="l"/>
+                      <a:r>
+                        <a:rPr sz="950" b="0">
+                          <a:solidFill>
+                            <a:srgbClr val="000000"/>
+                          </a:solidFill>
+                          <a:latin typeface="Calibri"/>
+                        </a:rPr>
+                        <a:t>0.00048</a:t>
+                      </a:r>
+                    </a:p>
+                  </a:txBody>
+                  <a:tcPr/>
+                </a:tc>
+              </a:tr>
+              <a:tr h="356616">
+                <a:tc>
+                  <a:txBody>
+                    <a:bodyPr lIns="54864" rIns="54864" tIns="18288" bIns="18288" wrap="square" anchor="ctr"/>
+                    <a:lstStyle/>
+                    <a:p>
+                      <a:pPr algn="l"/>
+                      <a:r>
+                        <a:rPr sz="950" b="0">
+                          <a:solidFill>
+                            <a:srgbClr val="000000"/>
+                          </a:solidFill>
+                          <a:latin typeface="Calibri"/>
+                        </a:rPr>
+                        <a:t>draw</a:t>
+                      </a:r>
+                    </a:p>
+                  </a:txBody>
+                  <a:tcPr/>
+                </a:tc>
+                <a:tc>
+                  <a:txBody>
+                    <a:bodyPr lIns="54864" rIns="54864" tIns="18288" bIns="18288" wrap="square" anchor="ctr"/>
+                    <a:lstStyle/>
+                    <a:p>
+                      <a:pPr algn="l"/>
+                      <a:r>
+                        <a:rPr sz="950" b="0">
+                          <a:solidFill>
+                            <a:srgbClr val="000000"/>
+                          </a:solidFill>
+                          <a:latin typeface="Calibri"/>
+                        </a:rPr>
+                        <a:t>0.05</a:t>
+                      </a:r>
+                    </a:p>
+                  </a:txBody>
+                  <a:tcPr/>
+                </a:tc>
+                <a:tc>
+                  <a:txBody>
+                    <a:bodyPr lIns="54864" rIns="54864" tIns="18288" bIns="18288" wrap="square" anchor="ctr"/>
+                    <a:lstStyle/>
+                    <a:p>
+                      <a:pPr algn="l"/>
+                      <a:r>
+                        <a:rPr sz="950" b="0">
+                          <a:solidFill>
+                            <a:srgbClr val="000000"/>
+                          </a:solidFill>
+                          <a:latin typeface="Calibri"/>
+                        </a:rPr>
+                        <a:t>0.00054</a:t>
+                      </a:r>
+                    </a:p>
+                  </a:txBody>
+                  <a:tcPr/>
+                </a:tc>
+              </a:tr>
+            </a:tbl>
+          </a:graphicData>
+        </a:graphic>
+      </p:graphicFrame>
+      <p:sp>
+        <p:nvSpPr>
+          <p:cNvPr id="8" name="TextBox 7"/>
+          <p:cNvSpPr txBox="1"/>
+          <p:nvPr/>
+        </p:nvSpPr>
+        <p:spPr>
+          <a:xfrm>
+            <a:off x="7315200" y="3611880"/>
+            <a:ext cx="4526280" cy="365760"/>
+          </a:xfrm>
+          <a:prstGeom prst="rect">
+            <a:avLst/>
+          </a:prstGeom>
+          <a:noFill/>
+        </p:spPr>
+        <p:txBody>
+          <a:bodyPr wrap="square" lIns="45720" rIns="45720" tIns="18288" bIns="18288" anchor="t">
+            <a:spAutoFit/>
+          </a:bodyPr>
+          <a:lstStyle/>
+          <a:p>
+            <a:pPr algn="l"/>
+            <a:r>
+              <a:rPr sz="1600" b="0" i="0">
+                <a:solidFill>
+                  <a:srgbClr val="707070"/>
+                </a:solidFill>
+                <a:latin typeface="Calibri"/>
+              </a:rPr>
+              <a:t>Why it matters</a:t>
+            </a:r>
+          </a:p>
+        </p:txBody>
+      </p:sp>
+      <p:sp>
+        <p:nvSpPr>
+          <p:cNvPr id="9" name="TextBox 8"/>
+          <p:cNvSpPr txBox="1"/>
+          <p:nvPr/>
+        </p:nvSpPr>
+        <p:spPr>
+          <a:xfrm>
+            <a:off x="7315200" y="4005072"/>
+            <a:ext cx="4526280" cy="1737360"/>
+          </a:xfrm>
+          <a:prstGeom prst="rect">
+            <a:avLst/>
+          </a:prstGeom>
+          <a:noFill/>
+        </p:spPr>
+        <p:txBody>
+          <a:bodyPr wrap="square" lIns="45720" rIns="45720" tIns="18288" bIns="18288" anchor="t">
+            <a:spAutoFit/>
+          </a:bodyPr>
+          <a:lstStyle/>
+          <a:p>
+            <a:pPr algn="l"/>
+            <a:r>
+              <a:rPr sz="1100" b="0" i="0">
+                <a:solidFill>
+                  <a:srgbClr val="000000"/>
+                </a:solidFill>
+                <a:latin typeface="Calibri"/>
+              </a:rPr>
+              <a:t>•  Constant MATERIAL strain rate (test standards)
+•  Compliance-free — measures the gauge, not the machine
+•  Comparable E / σy across specimens &amp; rigs</a:t>
+            </a:r>
+          </a:p>
+        </p:txBody>
+      </p:sp>
+      <p:sp>
+        <p:nvSpPr>
+          <p:cNvPr id="10" name="Rectangle 9"/>
+          <p:cNvSpPr/>
+          <p:nvPr/>
+        </p:nvSpPr>
+        <p:spPr>
+          <a:xfrm>
+            <a:off x="365760" y="5806440"/>
+            <a:ext cx="11475720" cy="658368"/>
+          </a:xfrm>
+          <a:prstGeom prst="rect">
+            <a:avLst/>
+          </a:prstGeom>
+          <a:solidFill>
+            <a:srgbClr val="C8E6C9"/>
+          </a:solidFill>
+          <a:ln>
+            <a:noFill/>
+          </a:ln>
+        </p:spPr>
+        <p:style>
+          <a:lnRef idx="1">
+            <a:schemeClr val="accent1"/>
+          </a:lnRef>
+          <a:fillRef idx="3">
+            <a:schemeClr val="accent1"/>
+          </a:fillRef>
+          <a:effectRef idx="2">
+            <a:schemeClr val="accent1"/>
+          </a:effectRef>
+          <a:fontRef idx="minor">
+            <a:schemeClr val="lt1"/>
+          </a:fontRef>
+        </p:style>
+        <p:txBody>
+          <a:bodyPr rtlCol="0" anchor="ctr" wrap="square" lIns="109728" rIns="109728"/>
+          <a:lstStyle/>
+          <a:p>
+            <a:pPr algn="ctr"/>
+            <a:r>
+              <a:rPr sz="1200" b="1">
+                <a:solidFill>
+                  <a:srgbClr val="1F3F2F"/>
+                </a:solidFill>
+                <a:latin typeface="Calibri"/>
+              </a:rPr>
+              <a:t>Held 0.00051 /s (target 0.0005) while HALVING crosshead speed 0.10 → 0.05 mm/s — a fixed-speed pull cannot.</a:t>
+            </a:r>
+          </a:p>
+        </p:txBody>
+      </p:sp>
+      <p:sp>
+        <p:nvSpPr>
+          <p:cNvPr id="11" name="TextBox 10"/>
+          <p:cNvSpPr txBox="1"/>
+          <p:nvPr/>
+        </p:nvSpPr>
+        <p:spPr>
+          <a:xfrm>
+            <a:off x="457200" y="6446520"/>
+            <a:ext cx="640080" cy="274320"/>
+          </a:xfrm>
+          <a:prstGeom prst="rect">
+            <a:avLst/>
+          </a:prstGeom>
+          <a:noFill/>
+        </p:spPr>
+        <p:txBody>
+          <a:bodyPr wrap="square" lIns="45720" rIns="45720" tIns="18288" bIns="18288" anchor="t">
+            <a:spAutoFit/>
+          </a:bodyPr>
+          <a:lstStyle/>
+          <a:p>
+            <a:pPr algn="l"/>
+            <a:r>
+              <a:rPr sz="1000" b="0" i="0">
+                <a:solidFill>
+                  <a:srgbClr val="707070"/>
+                </a:solidFill>
+                <a:latin typeface="Calibri"/>
+              </a:rPr>
+              <a:t>171</a:t>
+            </a:r>
+          </a:p>
+        </p:txBody>
+      </p:sp>
+    </p:spTree>
+  </p:cSld>
+  <p:clrMapOvr>
+    <a:masterClrMapping/>
+  </p:clrMapOvr>
+</p:sld>
+</file>
+
+<file path=ppt/slides/slide32.xml><?xml version="1.0" encoding="utf-8"?>
+<p:sld xmlns:a="http://schemas.openxmlformats.org/drawingml/2006/main" xmlns:p="http://schemas.openxmlformats.org/presentationml/2006/main" xmlns:r="http://schemas.openxmlformats.org/officeDocument/2006/relationships">
+  <p:cSld>
+    <p:spTree>
+      <p:nvGrpSpPr>
+        <p:cNvPr id="1" name=""/>
+        <p:cNvGrpSpPr/>
+        <p:nvPr/>
+      </p:nvGrpSpPr>
+      <p:grpSpPr/>
+      <p:sp>
+        <p:nvSpPr>
+          <p:cNvPr id="2" name="TextBox 1"/>
+          <p:cNvSpPr txBox="1"/>
+          <p:nvPr/>
+        </p:nvSpPr>
+        <p:spPr>
+          <a:xfrm>
+            <a:off x="11155680" y="274320"/>
+            <a:ext cx="914400" cy="274320"/>
+          </a:xfrm>
+          <a:prstGeom prst="rect">
+            <a:avLst/>
+          </a:prstGeom>
+          <a:noFill/>
+        </p:spPr>
+        <p:txBody>
+          <a:bodyPr wrap="square" lIns="45720" rIns="45720" tIns="18288" bIns="18288" anchor="t">
+            <a:spAutoFit/>
+          </a:bodyPr>
+          <a:lstStyle/>
+          <a:p>
+            <a:pPr algn="r"/>
+            <a:r>
+              <a:rPr sz="800" b="1" i="0">
+                <a:solidFill>
+                  <a:srgbClr val="707070"/>
+                </a:solidFill>
+                <a:latin typeface="Calibri"/>
+              </a:rPr>
+              <a:t>JÖNKÖPING UNIVERSITY</a:t>
+            </a:r>
+          </a:p>
+        </p:txBody>
+      </p:sp>
+      <p:sp>
+        <p:nvSpPr>
+          <p:cNvPr id="3" name="Rectangle 2"/>
+          <p:cNvSpPr/>
+          <p:nvPr/>
+        </p:nvSpPr>
+        <p:spPr>
+          <a:xfrm>
+            <a:off x="457200" y="411480"/>
+            <a:ext cx="457200" cy="73152"/>
+          </a:xfrm>
+          <a:prstGeom prst="rect">
+            <a:avLst/>
+          </a:prstGeom>
+          <a:solidFill>
+            <a:srgbClr val="A9D6EF"/>
+          </a:solidFill>
+          <a:ln>
+            <a:noFill/>
+          </a:ln>
+        </p:spPr>
+        <p:style>
+          <a:lnRef idx="1">
+            <a:schemeClr val="accent1"/>
+          </a:lnRef>
+          <a:fillRef idx="3">
+            <a:schemeClr val="accent1"/>
+          </a:fillRef>
+          <a:effectRef idx="2">
+            <a:schemeClr val="accent1"/>
+          </a:effectRef>
+          <a:fontRef idx="minor">
+            <a:schemeClr val="lt1"/>
+          </a:fontRef>
+        </p:style>
+        <p:txBody>
+          <a:bodyPr rtlCol="0" anchor="ctr"/>
+          <a:lstStyle/>
+          <a:p>
+            <a:pPr algn="ctr"/>
+          </a:p>
+        </p:txBody>
+      </p:sp>
+      <p:sp>
+        <p:nvSpPr>
+          <p:cNvPr id="4" name="TextBox 3"/>
+          <p:cNvSpPr txBox="1"/>
+          <p:nvPr/>
+        </p:nvSpPr>
+        <p:spPr>
+          <a:xfrm>
+            <a:off x="457200" y="502920"/>
+            <a:ext cx="11430000" cy="822960"/>
+          </a:xfrm>
+          <a:prstGeom prst="rect">
+            <a:avLst/>
+          </a:prstGeom>
+          <a:noFill/>
+        </p:spPr>
+        <p:txBody>
+          <a:bodyPr wrap="square" lIns="45720" rIns="45720" tIns="18288" bIns="18288" anchor="t">
+            <a:spAutoFit/>
+          </a:bodyPr>
+          <a:lstStyle/>
+          <a:p>
+            <a:pPr algn="l"/>
+            <a:r>
+              <a:rPr sz="3000" b="0" i="0">
+                <a:solidFill>
+                  <a:srgbClr val="000000"/>
+                </a:solidFill>
+                <a:latin typeface="Calibri Light"/>
+              </a:rPr>
+              <a:t>TWO WAYS TO FRACTURE — WHEN TO USE WHICH</a:t>
+            </a:r>
+          </a:p>
+        </p:txBody>
+      </p:sp>
+      <p:graphicFrame>
+        <p:nvGraphicFramePr>
+          <p:cNvPr id="5" name="Table 4"/>
+          <p:cNvGraphicFramePr>
+            <a:graphicFrameLocks noGrp="1"/>
+          </p:cNvGraphicFramePr>
+          <p:nvPr/>
+        </p:nvGraphicFramePr>
+        <p:xfrm>
+          <a:off x="365760" y="1280160"/>
+          <a:ext cx="11475720" cy="2971800"/>
+        </p:xfrm>
+        <a:graphic>
+          <a:graphicData uri="http://schemas.openxmlformats.org/drawingml/2006/table">
+            <a:tbl>
+              <a:tblPr firstRow="1" bandRow="1">
+                <a:tableStyleId>{5C22544A-7EE6-4342-B048-85BDC9FD1C3A}</a:tableStyleId>
+              </a:tblPr>
+              <a:tblGrid>
+                <a:gridCol w="1920240"/>
+                <a:gridCol w="4754880"/>
+                <a:gridCol w="4800600"/>
+              </a:tblGrid>
+              <a:tr h="495300">
+                <a:tc>
+                  <a:txBody>
+                    <a:bodyPr lIns="54864" rIns="54864" tIns="18288" bIns="18288" wrap="square" anchor="ctr"/>
+                    <a:lstStyle/>
+                    <a:p>
+                      <a:pPr algn="l"/>
+                      <a:r>
+                        <a:rPr sz="1100" b="1">
+                          <a:solidFill>
+                            <a:srgbClr val="FFFFFF"/>
+                          </a:solidFill>
+                          <a:latin typeface="Calibri"/>
+                        </a:rPr>
+                        <a:t/>
+                      </a:r>
+                    </a:p>
+                  </a:txBody>
+                  <a:tcPr>
+                    <a:solidFill>
+                      <a:srgbClr val="143D2F"/>
+                    </a:solidFill>
+                  </a:tcPr>
+                </a:tc>
+                <a:tc>
+                  <a:txBody>
+                    <a:bodyPr lIns="54864" rIns="54864" tIns="18288" bIns="18288" wrap="square" anchor="ctr"/>
+                    <a:lstStyle/>
+                    <a:p>
+                      <a:pPr algn="l"/>
+                      <a:r>
+                        <a:rPr sz="1100" b="1">
+                          <a:solidFill>
+                            <a:srgbClr val="FFFFFF"/>
+                          </a:solidFill>
+                          <a:latin typeface="Calibri"/>
+                        </a:rPr>
+                        <a:t>Direct motor speed</a:t>
+                      </a:r>
+                    </a:p>
+                  </a:txBody>
+                  <a:tcPr>
+                    <a:solidFill>
+                      <a:srgbClr val="143D2F"/>
+                    </a:solidFill>
+                  </a:tcPr>
+                </a:tc>
+                <a:tc>
+                  <a:txBody>
+                    <a:bodyPr lIns="54864" rIns="54864" tIns="18288" bIns="18288" wrap="square" anchor="ctr"/>
+                    <a:lstStyle/>
+                    <a:p>
+                      <a:pPr algn="l"/>
+                      <a:r>
+                        <a:rPr sz="1100" b="1">
+                          <a:solidFill>
+                            <a:srgbClr val="FFFFFF"/>
+                          </a:solidFill>
+                          <a:latin typeface="Calibri"/>
+                        </a:rPr>
+                        <a:t>Strain-rate fracture</a:t>
+                      </a:r>
+                    </a:p>
+                  </a:txBody>
+                  <a:tcPr>
+                    <a:solidFill>
+                      <a:srgbClr val="143D2F"/>
+                    </a:solidFill>
+                  </a:tcPr>
+                </a:tc>
+              </a:tr>
+              <a:tr h="495300">
+                <a:tc>
+                  <a:txBody>
+                    <a:bodyPr lIns="54864" rIns="54864" tIns="18288" bIns="18288" wrap="square" anchor="ctr"/>
+                    <a:lstStyle/>
+                    <a:p>
+                      <a:pPr algn="l"/>
+                      <a:r>
+                        <a:rPr sz="1050" b="0">
+                          <a:solidFill>
+                            <a:srgbClr val="000000"/>
+                          </a:solidFill>
+                          <a:latin typeface="Calibri"/>
+                        </a:rPr>
+                        <a:t>How</a:t>
+                      </a:r>
+                    </a:p>
+                  </a:txBody>
+                  <a:tcPr/>
+                </a:tc>
+                <a:tc>
+                  <a:txBody>
+                    <a:bodyPr lIns="54864" rIns="54864" tIns="18288" bIns="18288" wrap="square" anchor="ctr"/>
+                    <a:lstStyle/>
+                    <a:p>
+                      <a:pPr algn="l"/>
+                      <a:r>
+                        <a:rPr sz="1050" b="0">
+                          <a:solidFill>
+                            <a:srgbClr val="000000"/>
+                          </a:solidFill>
+                          <a:latin typeface="Calibri"/>
+                        </a:rPr>
+                        <a:t>constant crosshead mm/s</a:t>
+                      </a:r>
+                    </a:p>
+                  </a:txBody>
+                  <a:tcPr/>
+                </a:tc>
+                <a:tc>
+                  <a:txBody>
+                    <a:bodyPr lIns="54864" rIns="54864" tIns="18288" bIns="18288" wrap="square" anchor="ctr"/>
+                    <a:lstStyle/>
+                    <a:p>
+                      <a:pPr algn="l"/>
+                      <a:r>
+                        <a:rPr sz="1050" b="0">
+                          <a:solidFill>
+                            <a:srgbClr val="000000"/>
+                          </a:solidFill>
+                          <a:latin typeface="Calibri"/>
+                        </a:rPr>
+                        <a:t>closed-loop on DIC dε/dt</a:t>
+                      </a:r>
+                    </a:p>
+                  </a:txBody>
+                  <a:tcPr/>
+                </a:tc>
+              </a:tr>
+              <a:tr h="495300">
+                <a:tc>
+                  <a:txBody>
+                    <a:bodyPr lIns="54864" rIns="54864" tIns="18288" bIns="18288" wrap="square" anchor="ctr"/>
+                    <a:lstStyle/>
+                    <a:p>
+                      <a:pPr algn="l"/>
+                      <a:r>
+                        <a:rPr sz="1050" b="0">
+                          <a:solidFill>
+                            <a:srgbClr val="000000"/>
+                          </a:solidFill>
+                          <a:latin typeface="Calibri"/>
+                        </a:rPr>
+                        <a:t>Rate</a:t>
+                      </a:r>
+                    </a:p>
+                  </a:txBody>
+                  <a:tcPr/>
+                </a:tc>
+                <a:tc>
+                  <a:txBody>
+                    <a:bodyPr lIns="54864" rIns="54864" tIns="18288" bIns="18288" wrap="square" anchor="ctr"/>
+                    <a:lstStyle/>
+                    <a:p>
+                      <a:pPr algn="l"/>
+                      <a:r>
+                        <a:rPr sz="1050" b="0">
+                          <a:solidFill>
+                            <a:srgbClr val="000000"/>
+                          </a:solidFill>
+                          <a:latin typeface="Calibri"/>
+                        </a:rPr>
+                        <a:t>varies (fast neck, slow elastic)</a:t>
+                      </a:r>
+                    </a:p>
+                  </a:txBody>
+                  <a:tcPr/>
+                </a:tc>
+                <a:tc>
+                  <a:txBody>
+                    <a:bodyPr lIns="54864" rIns="54864" tIns="18288" bIns="18288" wrap="square" anchor="ctr"/>
+                    <a:lstStyle/>
+                    <a:p>
+                      <a:pPr algn="l"/>
+                      <a:r>
+                        <a:rPr sz="1050" b="0">
+                          <a:solidFill>
+                            <a:srgbClr val="000000"/>
+                          </a:solidFill>
+                          <a:latin typeface="Calibri"/>
+                        </a:rPr>
+                        <a:t>CONSTANT gauge rate</a:t>
+                      </a:r>
+                    </a:p>
+                  </a:txBody>
+                  <a:tcPr/>
+                </a:tc>
+              </a:tr>
+              <a:tr h="495300">
+                <a:tc>
+                  <a:txBody>
+                    <a:bodyPr lIns="54864" rIns="54864" tIns="18288" bIns="18288" wrap="square" anchor="ctr"/>
+                    <a:lstStyle/>
+                    <a:p>
+                      <a:pPr algn="l"/>
+                      <a:r>
+                        <a:rPr sz="1050" b="0">
+                          <a:solidFill>
+                            <a:srgbClr val="000000"/>
+                          </a:solidFill>
+                          <a:latin typeface="Calibri"/>
+                        </a:rPr>
+                        <a:t>Needs DIC?</a:t>
+                      </a:r>
+                    </a:p>
+                  </a:txBody>
+                  <a:tcPr/>
+                </a:tc>
+                <a:tc>
+                  <a:txBody>
+                    <a:bodyPr lIns="54864" rIns="54864" tIns="18288" bIns="18288" wrap="square" anchor="ctr"/>
+                    <a:lstStyle/>
+                    <a:p>
+                      <a:pPr algn="l"/>
+                      <a:r>
+                        <a:rPr sz="1050" b="0">
+                          <a:solidFill>
+                            <a:srgbClr val="000000"/>
+                          </a:solidFill>
+                          <a:latin typeface="Calibri"/>
+                        </a:rPr>
+                        <a:t>no</a:t>
+                      </a:r>
+                    </a:p>
+                  </a:txBody>
+                  <a:tcPr/>
+                </a:tc>
+                <a:tc>
+                  <a:txBody>
+                    <a:bodyPr lIns="54864" rIns="54864" tIns="18288" bIns="18288" wrap="square" anchor="ctr"/>
+                    <a:lstStyle/>
+                    <a:p>
+                      <a:pPr algn="l"/>
+                      <a:r>
+                        <a:rPr sz="1050" b="0">
+                          <a:solidFill>
+                            <a:srgbClr val="000000"/>
+                          </a:solidFill>
+                          <a:latin typeface="Calibri"/>
+                        </a:rPr>
+                        <a:t>YES (green 2/2)</a:t>
+                      </a:r>
+                    </a:p>
+                  </a:txBody>
+                  <a:tcPr/>
+                </a:tc>
+              </a:tr>
+              <a:tr h="495300">
+                <a:tc>
+                  <a:txBody>
+                    <a:bodyPr lIns="54864" rIns="54864" tIns="18288" bIns="18288" wrap="square" anchor="ctr"/>
+                    <a:lstStyle/>
+                    <a:p>
+                      <a:pPr algn="l"/>
+                      <a:r>
+                        <a:rPr sz="1050" b="0">
+                          <a:solidFill>
+                            <a:srgbClr val="000000"/>
+                          </a:solidFill>
+                          <a:latin typeface="Calibri"/>
+                        </a:rPr>
+                        <a:t>Motor force</a:t>
+                      </a:r>
+                    </a:p>
+                  </a:txBody>
+                  <a:tcPr/>
+                </a:tc>
+                <a:tc>
+                  <a:txBody>
+                    <a:bodyPr lIns="54864" rIns="54864" tIns="18288" bIns="18288" wrap="square" anchor="ctr"/>
+                    <a:lstStyle/>
+                    <a:p>
+                      <a:pPr algn="l"/>
+                      <a:r>
+                        <a:rPr sz="1050" b="0">
+                          <a:solidFill>
+                            <a:srgbClr val="000000"/>
+                          </a:solidFill>
+                          <a:latin typeface="Calibri"/>
+                        </a:rPr>
+                        <a:t>full — higher speed OK</a:t>
+                      </a:r>
+                    </a:p>
+                  </a:txBody>
+                  <a:tcPr/>
+                </a:tc>
+                <a:tc>
+                  <a:txBody>
+                    <a:bodyPr lIns="54864" rIns="54864" tIns="18288" bIns="18288" wrap="square" anchor="ctr"/>
+                    <a:lstStyle/>
+                    <a:p>
+                      <a:pPr algn="l"/>
+                      <a:r>
+                        <a:rPr sz="1050" b="0">
+                          <a:solidFill>
+                            <a:srgbClr val="000000"/>
+                          </a:solidFill>
+                          <a:latin typeface="Calibri"/>
+                        </a:rPr>
+                        <a:t>capped speed → less force</a:t>
+                      </a:r>
+                    </a:p>
+                  </a:txBody>
+                  <a:tcPr/>
+                </a:tc>
+              </a:tr>
+              <a:tr h="495300">
+                <a:tc>
+                  <a:txBody>
+                    <a:bodyPr lIns="54864" rIns="54864" tIns="18288" bIns="18288" wrap="square" anchor="ctr"/>
+                    <a:lstStyle/>
+                    <a:p>
+                      <a:pPr algn="l"/>
+                      <a:r>
+                        <a:rPr sz="1050" b="0">
+                          <a:solidFill>
+                            <a:srgbClr val="000000"/>
+                          </a:solidFill>
+                          <a:latin typeface="Calibri"/>
+                        </a:rPr>
+                        <a:t>Best for</a:t>
+                      </a:r>
+                    </a:p>
+                  </a:txBody>
+                  <a:tcPr/>
+                </a:tc>
+                <a:tc>
+                  <a:txBody>
+                    <a:bodyPr lIns="54864" rIns="54864" tIns="18288" bIns="18288" wrap="square" anchor="ctr"/>
+                    <a:lstStyle/>
+                    <a:p>
+                      <a:pPr algn="l"/>
+                      <a:r>
+                        <a:rPr sz="1050" b="0">
+                          <a:solidFill>
+                            <a:srgbClr val="000000"/>
+                          </a:solidFill>
+                          <a:latin typeface="Calibri"/>
+                        </a:rPr>
+                        <a:t>quick UTS · strong specimens</a:t>
+                      </a:r>
+                    </a:p>
+                  </a:txBody>
+                  <a:tcPr/>
+                </a:tc>
+                <a:tc>
+                  <a:txBody>
+                    <a:bodyPr lIns="54864" rIns="54864" tIns="18288" bIns="18288" wrap="square" anchor="ctr"/>
+                    <a:lstStyle/>
+                    <a:p>
+                      <a:pPr algn="l"/>
+                      <a:r>
+                        <a:rPr sz="1050" b="0">
+                          <a:solidFill>
+                            <a:srgbClr val="000000"/>
+                          </a:solidFill>
+                          <a:latin typeface="Calibri"/>
+                        </a:rPr>
+                        <a:t>standards-grade · rate-sensitive</a:t>
+                      </a:r>
+                    </a:p>
+                  </a:txBody>
+                  <a:tcPr/>
+                </a:tc>
+              </a:tr>
+            </a:tbl>
+          </a:graphicData>
+        </a:graphic>
+      </p:graphicFrame>
+      <p:sp>
+        <p:nvSpPr>
+          <p:cNvPr id="6" name="TextBox 5"/>
+          <p:cNvSpPr txBox="1"/>
+          <p:nvPr/>
+        </p:nvSpPr>
+        <p:spPr>
+          <a:xfrm>
+            <a:off x="365760" y="4480560"/>
+            <a:ext cx="11475720" cy="365760"/>
+          </a:xfrm>
+          <a:prstGeom prst="rect">
+            <a:avLst/>
+          </a:prstGeom>
+          <a:noFill/>
+        </p:spPr>
+        <p:txBody>
+          <a:bodyPr wrap="square" lIns="45720" rIns="45720" tIns="18288" bIns="18288" anchor="t">
+            <a:spAutoFit/>
+          </a:bodyPr>
+          <a:lstStyle/>
+          <a:p>
+            <a:pPr algn="l"/>
+            <a:r>
+              <a:rPr sz="1600" b="0" i="0">
+                <a:solidFill>
+                  <a:srgbClr val="707070"/>
+                </a:solidFill>
+                <a:latin typeface="Calibri"/>
+              </a:rPr>
+              <a:t>Suggestion</a:t>
+            </a:r>
+          </a:p>
+        </p:txBody>
+      </p:sp>
+      <p:sp>
+        <p:nvSpPr>
+          <p:cNvPr id="7" name="Rounded Rectangle 6"/>
+          <p:cNvSpPr/>
+          <p:nvPr/>
+        </p:nvSpPr>
+        <p:spPr>
+          <a:xfrm>
+            <a:off x="365760" y="4910328"/>
+            <a:ext cx="5669280" cy="914400"/>
+          </a:xfrm>
+          <a:prstGeom prst="roundRect">
+            <a:avLst/>
+          </a:prstGeom>
+          <a:solidFill>
+            <a:srgbClr val="E7F1F8"/>
+          </a:solidFill>
+          <a:ln w="15240">
+            <a:solidFill>
+              <a:srgbClr val="1F77B4"/>
+            </a:solidFill>
+          </a:ln>
+        </p:spPr>
+        <p:style>
+          <a:lnRef idx="1">
+            <a:schemeClr val="accent1"/>
+          </a:lnRef>
+          <a:fillRef idx="3">
+            <a:schemeClr val="accent1"/>
+          </a:fillRef>
+          <a:effectRef idx="2">
+            <a:schemeClr val="accent1"/>
+          </a:effectRef>
+          <a:fontRef idx="minor">
+            <a:schemeClr val="lt1"/>
+          </a:fontRef>
+        </p:style>
+        <p:txBody>
+          <a:bodyPr rtlCol="0" anchor="ctr" lIns="54864" rIns="54864" tIns="27432" bIns="27432" wrap="square"/>
+          <a:lstStyle/>
+          <a:p>
+            <a:pPr algn="ctr"/>
+            <a:r>
+              <a:rPr sz="1250" b="1">
+                <a:solidFill>
+                  <a:srgbClr val="000000"/>
+                </a:solidFill>
+                <a:latin typeface="Calibri"/>
+              </a:rPr>
+              <a:t>MAX pulling force or a quick UTS?
+→  DIRECT motor speed</a:t>
+            </a:r>
+          </a:p>
+        </p:txBody>
+      </p:sp>
+      <p:sp>
+        <p:nvSpPr>
+          <p:cNvPr id="8" name="Rounded Rectangle 7"/>
+          <p:cNvSpPr/>
+          <p:nvPr/>
+        </p:nvSpPr>
+        <p:spPr>
+          <a:xfrm>
+            <a:off x="6172200" y="4910328"/>
+            <a:ext cx="5669280" cy="914400"/>
+          </a:xfrm>
+          <a:prstGeom prst="roundRect">
+            <a:avLst/>
+          </a:prstGeom>
+          <a:solidFill>
+            <a:srgbClr val="C8E6C9"/>
+          </a:solidFill>
+          <a:ln w="15240">
+            <a:solidFill>
+              <a:srgbClr val="1F3F2F"/>
+            </a:solidFill>
+          </a:ln>
+        </p:spPr>
+        <p:style>
+          <a:lnRef idx="1">
+            <a:schemeClr val="accent1"/>
+          </a:lnRef>
+          <a:fillRef idx="3">
+            <a:schemeClr val="accent1"/>
+          </a:fillRef>
+          <a:effectRef idx="2">
+            <a:schemeClr val="accent1"/>
+          </a:effectRef>
+          <a:fontRef idx="minor">
+            <a:schemeClr val="lt1"/>
+          </a:fontRef>
+        </p:style>
+        <p:txBody>
+          <a:bodyPr rtlCol="0" anchor="ctr" lIns="54864" rIns="54864" tIns="27432" bIns="27432" wrap="square"/>
+          <a:lstStyle/>
+          <a:p>
+            <a:pPr algn="ctr"/>
+            <a:r>
+              <a:rPr sz="1250" b="1">
+                <a:solidFill>
+                  <a:srgbClr val="1F3F2F"/>
+                </a:solidFill>
+                <a:latin typeface="Calibri"/>
+              </a:rPr>
+              <a:t>Controlled material strain rate (comparable)?
+→  STRAIN-RATE fracture</a:t>
+            </a:r>
+          </a:p>
+        </p:txBody>
+      </p:sp>
+      <p:sp>
+        <p:nvSpPr>
+          <p:cNvPr id="9" name="TextBox 8"/>
+          <p:cNvSpPr txBox="1"/>
+          <p:nvPr/>
+        </p:nvSpPr>
+        <p:spPr>
+          <a:xfrm>
+            <a:off x="548640" y="6400800"/>
+            <a:ext cx="11064240" cy="365760"/>
+          </a:xfrm>
+          <a:prstGeom prst="rect">
+            <a:avLst/>
+          </a:prstGeom>
+          <a:noFill/>
+        </p:spPr>
+        <p:txBody>
+          <a:bodyPr wrap="square" lIns="45720" rIns="45720" tIns="18288" bIns="18288" anchor="t">
+            <a:spAutoFit/>
+          </a:bodyPr>
+          <a:lstStyle/>
+          <a:p>
+            <a:pPr algn="l"/>
+            <a:r>
+              <a:rPr sz="1200" b="0" i="1">
+                <a:solidFill>
+                  <a:srgbClr val="707070"/>
+                </a:solidFill>
+                <a:latin typeface="Calibri"/>
+              </a:rPr>
+              <a:t>Both auto-stop on fracture (same detector) + stall guard. On THIS rig (torque ~2.6 kN today) use 50% / smaller specimens for strain-rate to reach break.</a:t>
+            </a:r>
+          </a:p>
+        </p:txBody>
+      </p:sp>
+      <p:sp>
+        <p:nvSpPr>
+          <p:cNvPr id="10" name="TextBox 9"/>
+          <p:cNvSpPr txBox="1"/>
+          <p:nvPr/>
+        </p:nvSpPr>
+        <p:spPr>
+          <a:xfrm>
+            <a:off x="457200" y="6446520"/>
+            <a:ext cx="640080" cy="274320"/>
+          </a:xfrm>
+          <a:prstGeom prst="rect">
+            <a:avLst/>
+          </a:prstGeom>
+          <a:noFill/>
+        </p:spPr>
+        <p:txBody>
+          <a:bodyPr wrap="square" lIns="45720" rIns="45720" tIns="18288" bIns="18288" anchor="t">
+            <a:spAutoFit/>
+          </a:bodyPr>
+          <a:lstStyle/>
+          <a:p>
+            <a:pPr algn="l"/>
+            <a:r>
+              <a:rPr sz="1000" b="0" i="0">
+                <a:solidFill>
+                  <a:srgbClr val="707070"/>
+                </a:solidFill>
+                <a:latin typeface="Calibri"/>
+              </a:rPr>
+              <a:t>172</a:t>
+            </a:r>
+          </a:p>
+        </p:txBody>
+      </p:sp>
+    </p:spTree>
+  </p:cSld>
+  <p:clrMapOvr>
+    <a:masterClrMapping/>
+  </p:clrMapOvr>
+</p:sld>
+</file>
+
+<file path=ppt/slides/slide33.xml><?xml version="1.0" encoding="utf-8"?>
+<p:sld xmlns:a="http://schemas.openxmlformats.org/drawingml/2006/main" xmlns:p="http://schemas.openxmlformats.org/presentationml/2006/main" xmlns:r="http://schemas.openxmlformats.org/officeDocument/2006/relationships">
+  <p:cSld>
+    <p:spTree>
+      <p:nvGrpSpPr>
+        <p:cNvPr id="1" name=""/>
+        <p:cNvGrpSpPr/>
+        <p:nvPr/>
+      </p:nvGrpSpPr>
+      <p:grpSpPr/>
+      <p:sp>
+        <p:nvSpPr>
+          <p:cNvPr id="2" name="TextBox 1"/>
+          <p:cNvSpPr txBox="1"/>
+          <p:nvPr/>
+        </p:nvSpPr>
+        <p:spPr>
+          <a:xfrm>
+            <a:off x="11155680" y="274320"/>
+            <a:ext cx="914400" cy="274320"/>
+          </a:xfrm>
+          <a:prstGeom prst="rect">
+            <a:avLst/>
+          </a:prstGeom>
+          <a:noFill/>
+        </p:spPr>
+        <p:txBody>
+          <a:bodyPr wrap="square" lIns="45720" rIns="45720" tIns="18288" bIns="18288" anchor="t">
+            <a:spAutoFit/>
+          </a:bodyPr>
+          <a:lstStyle/>
+          <a:p>
+            <a:pPr algn="r"/>
+            <a:r>
+              <a:rPr sz="800" b="1" i="0">
+                <a:solidFill>
+                  <a:srgbClr val="707070"/>
+                </a:solidFill>
+                <a:latin typeface="Calibri"/>
+              </a:rPr>
+              <a:t>JÖNKÖPING UNIVERSITY</a:t>
+            </a:r>
+          </a:p>
+        </p:txBody>
+      </p:sp>
+      <p:sp>
+        <p:nvSpPr>
+          <p:cNvPr id="3" name="Rectangle 2"/>
+          <p:cNvSpPr/>
+          <p:nvPr/>
+        </p:nvSpPr>
+        <p:spPr>
+          <a:xfrm>
+            <a:off x="457200" y="411480"/>
+            <a:ext cx="457200" cy="73152"/>
+          </a:xfrm>
+          <a:prstGeom prst="rect">
+            <a:avLst/>
+          </a:prstGeom>
+          <a:solidFill>
+            <a:srgbClr val="A9D6EF"/>
+          </a:solidFill>
+          <a:ln>
+            <a:noFill/>
+          </a:ln>
+        </p:spPr>
+        <p:style>
+          <a:lnRef idx="1">
+            <a:schemeClr val="accent1"/>
+          </a:lnRef>
+          <a:fillRef idx="3">
+            <a:schemeClr val="accent1"/>
+          </a:fillRef>
+          <a:effectRef idx="2">
+            <a:schemeClr val="accent1"/>
+          </a:effectRef>
+          <a:fontRef idx="minor">
+            <a:schemeClr val="lt1"/>
+          </a:fontRef>
+        </p:style>
+        <p:txBody>
+          <a:bodyPr rtlCol="0" anchor="ctr"/>
+          <a:lstStyle/>
+          <a:p>
+            <a:pPr algn="ctr"/>
+          </a:p>
+        </p:txBody>
+      </p:sp>
+      <p:sp>
+        <p:nvSpPr>
+          <p:cNvPr id="4" name="TextBox 3"/>
+          <p:cNvSpPr txBox="1"/>
+          <p:nvPr/>
+        </p:nvSpPr>
+        <p:spPr>
+          <a:xfrm>
+            <a:off x="457200" y="502920"/>
+            <a:ext cx="11430000" cy="822960"/>
+          </a:xfrm>
+          <a:prstGeom prst="rect">
+            <a:avLst/>
+          </a:prstGeom>
+          <a:noFill/>
+        </p:spPr>
+        <p:txBody>
+          <a:bodyPr wrap="square" lIns="45720" rIns="45720" tIns="18288" bIns="18288" anchor="t">
+            <a:spAutoFit/>
+          </a:bodyPr>
+          <a:lstStyle/>
+          <a:p>
+            <a:pPr algn="l"/>
+            <a:r>
+              <a:rPr sz="3000" b="0" i="0">
+                <a:solidFill>
+                  <a:srgbClr val="000000"/>
+                </a:solidFill>
+                <a:latin typeface="Calibri Light"/>
+              </a:rPr>
+              <a:t>INNOVATION ROADMAP — AT A GLANCE</a:t>
+            </a:r>
+          </a:p>
+        </p:txBody>
+      </p:sp>
+      <p:sp>
+        <p:nvSpPr>
+          <p:cNvPr id="5" name="Rounded Rectangle 4"/>
+          <p:cNvSpPr/>
+          <p:nvPr/>
+        </p:nvSpPr>
+        <p:spPr>
+          <a:xfrm>
+            <a:off x="365760" y="1920240"/>
+            <a:ext cx="2148840" cy="1371600"/>
+          </a:xfrm>
+          <a:prstGeom prst="roundRect">
+            <a:avLst/>
+          </a:prstGeom>
+          <a:solidFill>
+            <a:srgbClr val="C8E6C9"/>
+          </a:solidFill>
+          <a:ln w="15240">
+            <a:solidFill>
+              <a:srgbClr val="1F3F2F"/>
+            </a:solidFill>
+          </a:ln>
+        </p:spPr>
+        <p:style>
+          <a:lnRef idx="1">
+            <a:schemeClr val="accent1"/>
+          </a:lnRef>
+          <a:fillRef idx="3">
+            <a:schemeClr val="accent1"/>
+          </a:fillRef>
+          <a:effectRef idx="2">
+            <a:schemeClr val="accent1"/>
+          </a:effectRef>
+          <a:fontRef idx="minor">
+            <a:schemeClr val="lt1"/>
+          </a:fontRef>
+        </p:style>
+        <p:txBody>
+          <a:bodyPr rtlCol="0" anchor="ctr" lIns="54864" rIns="54864" tIns="27432" bIns="27432" wrap="square"/>
+          <a:lstStyle/>
+          <a:p>
+            <a:pPr algn="ctr"/>
+            <a:r>
+              <a:rPr sz="1050" b="1">
+                <a:solidFill>
+                  <a:srgbClr val="1F3F2F"/>
+                </a:solidFill>
+                <a:latin typeface="Calibri"/>
+              </a:rPr>
+              <a:t>0 · Foundations
+analysis · engine · recipes</a:t>
+            </a:r>
+          </a:p>
+        </p:txBody>
+      </p:sp>
+      <p:sp>
+        <p:nvSpPr>
+          <p:cNvPr id="6" name="TextBox 5"/>
+          <p:cNvSpPr txBox="1"/>
+          <p:nvPr/>
+        </p:nvSpPr>
+        <p:spPr>
+          <a:xfrm>
+            <a:off x="365760" y="3346704"/>
+            <a:ext cx="2148840" cy="365760"/>
+          </a:xfrm>
+          <a:prstGeom prst="rect">
+            <a:avLst/>
+          </a:prstGeom>
+          <a:noFill/>
+        </p:spPr>
+        <p:txBody>
+          <a:bodyPr wrap="square" lIns="45720" rIns="45720" tIns="18288" bIns="18288" anchor="t">
+            <a:spAutoFit/>
+          </a:bodyPr>
+          <a:lstStyle/>
+          <a:p>
+            <a:pPr algn="l"/>
+            <a:r>
+              <a:rPr sz="1100" b="1" i="0">
+                <a:solidFill>
+                  <a:srgbClr val="1F3F2F"/>
+                </a:solidFill>
+                <a:latin typeface="Calibri"/>
+              </a:rPr>
+              <a:t>DONE</a:t>
+            </a:r>
+          </a:p>
+        </p:txBody>
+      </p:sp>
+      <p:cxnSp>
+        <p:nvCxnSpPr>
+          <p:cNvPr id="7" name="Connector 6"/>
+          <p:cNvCxnSpPr/>
+          <p:nvPr/>
+        </p:nvCxnSpPr>
+        <p:spPr>
+          <a:xfrm>
+            <a:off x="2514600" y="2606040"/>
+            <a:ext cx="210312" cy="0"/>
+          </a:xfrm>
+          <a:prstGeom prst="line">
+            <a:avLst/>
+          </a:prstGeom>
+          <a:ln w="25400">
+            <a:solidFill>
+              <a:srgbClr val="555555"/>
+            </a:solidFill>
+            <a:tailEnd type="triangle" w="med" len="med"/>
+          </a:ln>
+        </p:spPr>
+        <p:style>
+          <a:lnRef idx="2">
+            <a:schemeClr val="accent1"/>
+          </a:lnRef>
+          <a:fillRef idx="0">
+            <a:schemeClr val="accent1"/>
+          </a:fillRef>
+          <a:effectRef idx="1">
+            <a:schemeClr val="accent1"/>
+          </a:effectRef>
+          <a:fontRef idx="minor">
+            <a:schemeClr val="tx1"/>
+          </a:fontRef>
+        </p:style>
+      </p:cxnSp>
+      <p:sp>
+        <p:nvSpPr>
+          <p:cNvPr id="8" name="Rounded Rectangle 7"/>
+          <p:cNvSpPr/>
+          <p:nvPr/>
+        </p:nvSpPr>
+        <p:spPr>
+          <a:xfrm>
+            <a:off x="2724912" y="1920240"/>
+            <a:ext cx="2148840" cy="1371600"/>
+          </a:xfrm>
+          <a:prstGeom prst="roundRect">
+            <a:avLst/>
+          </a:prstGeom>
+          <a:solidFill>
+            <a:srgbClr val="C8E6C9"/>
+          </a:solidFill>
+          <a:ln w="15240">
+            <a:solidFill>
+              <a:srgbClr val="1F3F2F"/>
+            </a:solidFill>
+          </a:ln>
+        </p:spPr>
+        <p:style>
+          <a:lnRef idx="1">
+            <a:schemeClr val="accent1"/>
+          </a:lnRef>
+          <a:fillRef idx="3">
+            <a:schemeClr val="accent1"/>
+          </a:fillRef>
+          <a:effectRef idx="2">
+            <a:schemeClr val="accent1"/>
+          </a:effectRef>
+          <a:fontRef idx="minor">
+            <a:schemeClr val="lt1"/>
+          </a:fontRef>
+        </p:style>
+        <p:txBody>
+          <a:bodyPr rtlCol="0" anchor="ctr" lIns="54864" rIns="54864" tIns="27432" bIns="27432" wrap="square"/>
+          <a:lstStyle/>
+          <a:p>
+            <a:pPr algn="ctr"/>
+            <a:r>
+              <a:rPr sz="1050" b="1">
+                <a:solidFill>
+                  <a:srgbClr val="1F3F2F"/>
+                </a:solidFill>
+                <a:latin typeface="Calibri"/>
+              </a:rPr>
+              <a:t>A · One-click
+report · prepare · auto-stop</a:t>
+            </a:r>
+          </a:p>
+        </p:txBody>
+      </p:sp>
+      <p:sp>
+        <p:nvSpPr>
+          <p:cNvPr id="9" name="TextBox 8"/>
+          <p:cNvSpPr txBox="1"/>
+          <p:nvPr/>
+        </p:nvSpPr>
+        <p:spPr>
+          <a:xfrm>
+            <a:off x="2724912" y="3346704"/>
+            <a:ext cx="2148840" cy="365760"/>
+          </a:xfrm>
+          <a:prstGeom prst="rect">
+            <a:avLst/>
+          </a:prstGeom>
+          <a:noFill/>
+        </p:spPr>
+        <p:txBody>
+          <a:bodyPr wrap="square" lIns="45720" rIns="45720" tIns="18288" bIns="18288" anchor="t">
+            <a:spAutoFit/>
+          </a:bodyPr>
+          <a:lstStyle/>
+          <a:p>
+            <a:pPr algn="l"/>
+            <a:r>
+              <a:rPr sz="1100" b="1" i="0">
+                <a:solidFill>
+                  <a:srgbClr val="1F3F2F"/>
+                </a:solidFill>
+                <a:latin typeface="Calibri"/>
+              </a:rPr>
+              <a:t>DONE</a:t>
+            </a:r>
+          </a:p>
+        </p:txBody>
+      </p:sp>
+      <p:cxnSp>
+        <p:nvCxnSpPr>
+          <p:cNvPr id="10" name="Connector 9"/>
+          <p:cNvCxnSpPr/>
+          <p:nvPr/>
+        </p:nvCxnSpPr>
+        <p:spPr>
+          <a:xfrm>
+            <a:off x="4873752" y="2606040"/>
+            <a:ext cx="210312" cy="0"/>
+          </a:xfrm>
+          <a:prstGeom prst="line">
+            <a:avLst/>
+          </a:prstGeom>
+          <a:ln w="25400">
+            <a:solidFill>
+              <a:srgbClr val="555555"/>
+            </a:solidFill>
+            <a:tailEnd type="triangle" w="med" len="med"/>
+          </a:ln>
+        </p:spPr>
+        <p:style>
+          <a:lnRef idx="2">
+            <a:schemeClr val="accent1"/>
+          </a:lnRef>
+          <a:fillRef idx="0">
+            <a:schemeClr val="accent1"/>
+          </a:fillRef>
+          <a:effectRef idx="1">
+            <a:schemeClr val="accent1"/>
+          </a:effectRef>
+          <a:fontRef idx="minor">
+            <a:schemeClr val="tx1"/>
+          </a:fontRef>
+        </p:style>
+      </p:cxnSp>
+      <p:sp>
+        <p:nvSpPr>
+          <p:cNvPr id="11" name="Rounded Rectangle 10"/>
+          <p:cNvSpPr/>
+          <p:nvPr/>
+        </p:nvSpPr>
+        <p:spPr>
+          <a:xfrm>
+            <a:off x="5084064" y="1920240"/>
+            <a:ext cx="2148840" cy="1371600"/>
+          </a:xfrm>
+          <a:prstGeom prst="roundRect">
+            <a:avLst/>
+          </a:prstGeom>
+          <a:solidFill>
+            <a:srgbClr val="FFF3CD"/>
+          </a:solidFill>
+          <a:ln w="15240">
+            <a:solidFill>
+              <a:srgbClr val="555555"/>
+            </a:solidFill>
+          </a:ln>
+        </p:spPr>
+        <p:style>
+          <a:lnRef idx="1">
+            <a:schemeClr val="accent1"/>
+          </a:lnRef>
+          <a:fillRef idx="3">
+            <a:schemeClr val="accent1"/>
+          </a:fillRef>
+          <a:effectRef idx="2">
+            <a:schemeClr val="accent1"/>
+          </a:effectRef>
+          <a:fontRef idx="minor">
+            <a:schemeClr val="lt1"/>
+          </a:fontRef>
+        </p:style>
+        <p:txBody>
+          <a:bodyPr rtlCol="0" anchor="ctr" lIns="54864" rIns="54864" tIns="27432" bIns="27432" wrap="square"/>
+          <a:lstStyle/>
+          <a:p>
+            <a:pPr algn="ctr"/>
+            <a:r>
+              <a:rPr sz="1050" b="1">
+                <a:solidFill>
+                  <a:srgbClr val="555555"/>
+                </a:solidFill>
+                <a:latin typeface="Calibri"/>
+              </a:rPr>
+              <a:t>B · Test modes
+strain-rate ✓ · 4 more</a:t>
+            </a:r>
+          </a:p>
+        </p:txBody>
+      </p:sp>
+      <p:sp>
+        <p:nvSpPr>
+          <p:cNvPr id="12" name="TextBox 11"/>
+          <p:cNvSpPr txBox="1"/>
+          <p:nvPr/>
+        </p:nvSpPr>
+        <p:spPr>
+          <a:xfrm>
+            <a:off x="5084064" y="3346704"/>
+            <a:ext cx="2148840" cy="365760"/>
+          </a:xfrm>
+          <a:prstGeom prst="rect">
+            <a:avLst/>
+          </a:prstGeom>
+          <a:noFill/>
+        </p:spPr>
+        <p:txBody>
+          <a:bodyPr wrap="square" lIns="45720" rIns="45720" tIns="18288" bIns="18288" anchor="t">
+            <a:spAutoFit/>
+          </a:bodyPr>
+          <a:lstStyle/>
+          <a:p>
+            <a:pPr algn="l"/>
+            <a:r>
+              <a:rPr sz="1100" b="1" i="0">
+                <a:solidFill>
+                  <a:srgbClr val="555555"/>
+                </a:solidFill>
+                <a:latin typeface="Calibri"/>
+              </a:rPr>
+              <a:t>1 / 5</a:t>
+            </a:r>
+          </a:p>
+        </p:txBody>
+      </p:sp>
+      <p:cxnSp>
+        <p:nvCxnSpPr>
+          <p:cNvPr id="13" name="Connector 12"/>
+          <p:cNvCxnSpPr/>
+          <p:nvPr/>
+        </p:nvCxnSpPr>
+        <p:spPr>
+          <a:xfrm>
+            <a:off x="7232904" y="2606040"/>
+            <a:ext cx="210312" cy="0"/>
+          </a:xfrm>
+          <a:prstGeom prst="line">
+            <a:avLst/>
+          </a:prstGeom>
+          <a:ln w="25400">
+            <a:solidFill>
+              <a:srgbClr val="555555"/>
+            </a:solidFill>
+            <a:tailEnd type="triangle" w="med" len="med"/>
+          </a:ln>
+        </p:spPr>
+        <p:style>
+          <a:lnRef idx="2">
+            <a:schemeClr val="accent1"/>
+          </a:lnRef>
+          <a:fillRef idx="0">
+            <a:schemeClr val="accent1"/>
+          </a:fillRef>
+          <a:effectRef idx="1">
+            <a:schemeClr val="accent1"/>
+          </a:effectRef>
+          <a:fontRef idx="minor">
+            <a:schemeClr val="tx1"/>
+          </a:fontRef>
+        </p:style>
+      </p:cxnSp>
+      <p:sp>
+        <p:nvSpPr>
+          <p:cNvPr id="14" name="Rounded Rectangle 13"/>
+          <p:cNvSpPr/>
+          <p:nvPr/>
+        </p:nvSpPr>
+        <p:spPr>
+          <a:xfrm>
+            <a:off x="7443216" y="1920240"/>
+            <a:ext cx="2148840" cy="1371600"/>
+          </a:xfrm>
+          <a:prstGeom prst="roundRect">
+            <a:avLst/>
+          </a:prstGeom>
+          <a:solidFill>
+            <a:srgbClr val="FFF3CD"/>
+          </a:solidFill>
+          <a:ln w="15240">
+            <a:solidFill>
+              <a:srgbClr val="555555"/>
+            </a:solidFill>
+          </a:ln>
+        </p:spPr>
+        <p:style>
+          <a:lnRef idx="1">
+            <a:schemeClr val="accent1"/>
+          </a:lnRef>
+          <a:fillRef idx="3">
+            <a:schemeClr val="accent1"/>
+          </a:fillRef>
+          <a:effectRef idx="2">
+            <a:schemeClr val="accent1"/>
+          </a:effectRef>
+          <a:fontRef idx="minor">
+            <a:schemeClr val="lt1"/>
+          </a:fontRef>
+        </p:style>
+        <p:txBody>
+          <a:bodyPr rtlCol="0" anchor="ctr" lIns="54864" rIns="54864" tIns="27432" bIns="27432" wrap="square"/>
+          <a:lstStyle/>
+          <a:p>
+            <a:pPr algn="ctr"/>
+            <a:r>
+              <a:rPr sz="1050" b="1">
+                <a:solidFill>
+                  <a:srgbClr val="555555"/>
+                </a:solidFill>
+                <a:latin typeface="Calibri"/>
+              </a:rPr>
+              <a:t>C · Smart DIC
+health HUD ✓ · Poisson</a:t>
+            </a:r>
+          </a:p>
+        </p:txBody>
+      </p:sp>
+      <p:sp>
+        <p:nvSpPr>
+          <p:cNvPr id="15" name="TextBox 14"/>
+          <p:cNvSpPr txBox="1"/>
+          <p:nvPr/>
+        </p:nvSpPr>
+        <p:spPr>
+          <a:xfrm>
+            <a:off x="7443216" y="3346704"/>
+            <a:ext cx="2148840" cy="365760"/>
+          </a:xfrm>
+          <a:prstGeom prst="rect">
+            <a:avLst/>
+          </a:prstGeom>
+          <a:noFill/>
+        </p:spPr>
+        <p:txBody>
+          <a:bodyPr wrap="square" lIns="45720" rIns="45720" tIns="18288" bIns="18288" anchor="t">
+            <a:spAutoFit/>
+          </a:bodyPr>
+          <a:lstStyle/>
+          <a:p>
+            <a:pPr algn="l"/>
+            <a:r>
+              <a:rPr sz="1100" b="1" i="0">
+                <a:solidFill>
+                  <a:srgbClr val="555555"/>
+                </a:solidFill>
+                <a:latin typeface="Calibri"/>
+              </a:rPr>
+              <a:t>partial</a:t>
+            </a:r>
+          </a:p>
+        </p:txBody>
+      </p:sp>
+      <p:cxnSp>
+        <p:nvCxnSpPr>
+          <p:cNvPr id="16" name="Connector 15"/>
+          <p:cNvCxnSpPr/>
+          <p:nvPr/>
+        </p:nvCxnSpPr>
+        <p:spPr>
+          <a:xfrm>
+            <a:off x="9592056" y="2606040"/>
+            <a:ext cx="210312" cy="0"/>
+          </a:xfrm>
+          <a:prstGeom prst="line">
+            <a:avLst/>
+          </a:prstGeom>
+          <a:ln w="25400">
+            <a:solidFill>
+              <a:srgbClr val="555555"/>
+            </a:solidFill>
+            <a:tailEnd type="triangle" w="med" len="med"/>
+          </a:ln>
+        </p:spPr>
+        <p:style>
+          <a:lnRef idx="2">
+            <a:schemeClr val="accent1"/>
+          </a:lnRef>
+          <a:fillRef idx="0">
+            <a:schemeClr val="accent1"/>
+          </a:fillRef>
+          <a:effectRef idx="1">
+            <a:schemeClr val="accent1"/>
+          </a:effectRef>
+          <a:fontRef idx="minor">
+            <a:schemeClr val="tx1"/>
+          </a:fontRef>
+        </p:style>
+      </p:cxnSp>
+      <p:sp>
+        <p:nvSpPr>
+          <p:cNvPr id="17" name="Rounded Rectangle 16"/>
+          <p:cNvSpPr/>
+          <p:nvPr/>
+        </p:nvSpPr>
+        <p:spPr>
+          <a:xfrm>
+            <a:off x="9802368" y="1920240"/>
+            <a:ext cx="2148840" cy="1371600"/>
+          </a:xfrm>
+          <a:prstGeom prst="roundRect">
+            <a:avLst/>
+          </a:prstGeom>
+          <a:solidFill>
+            <a:srgbClr val="E8E8E8"/>
+          </a:solidFill>
+          <a:ln w="15240">
+            <a:solidFill>
+              <a:srgbClr val="555555"/>
+            </a:solidFill>
+          </a:ln>
+        </p:spPr>
+        <p:style>
+          <a:lnRef idx="1">
+            <a:schemeClr val="accent1"/>
+          </a:lnRef>
+          <a:fillRef idx="3">
+            <a:schemeClr val="accent1"/>
+          </a:fillRef>
+          <a:effectRef idx="2">
+            <a:schemeClr val="accent1"/>
+          </a:effectRef>
+          <a:fontRef idx="minor">
+            <a:schemeClr val="lt1"/>
+          </a:fontRef>
+        </p:style>
+        <p:txBody>
+          <a:bodyPr rtlCol="0" anchor="ctr" lIns="54864" rIns="54864" tIns="27432" bIns="27432" wrap="square"/>
+          <a:lstStyle/>
+          <a:p>
+            <a:pPr algn="ctr"/>
+            <a:r>
+              <a:rPr sz="1050" b="1">
+                <a:solidFill>
+                  <a:srgbClr val="555555"/>
+                </a:solidFill>
+                <a:latin typeface="Calibri"/>
+              </a:rPr>
+              <a:t>D · UX layer
+wizard · overlay · dash</a:t>
+            </a:r>
+          </a:p>
+        </p:txBody>
+      </p:sp>
+      <p:sp>
+        <p:nvSpPr>
+          <p:cNvPr id="18" name="TextBox 17"/>
+          <p:cNvSpPr txBox="1"/>
+          <p:nvPr/>
+        </p:nvSpPr>
+        <p:spPr>
+          <a:xfrm>
+            <a:off x="9802368" y="3346704"/>
+            <a:ext cx="2148840" cy="365760"/>
+          </a:xfrm>
+          <a:prstGeom prst="rect">
+            <a:avLst/>
+          </a:prstGeom>
+          <a:noFill/>
+        </p:spPr>
+        <p:txBody>
+          <a:bodyPr wrap="square" lIns="45720" rIns="45720" tIns="18288" bIns="18288" anchor="t">
+            <a:spAutoFit/>
+          </a:bodyPr>
+          <a:lstStyle/>
+          <a:p>
+            <a:pPr algn="l"/>
+            <a:r>
+              <a:rPr sz="1100" b="1" i="0">
+                <a:solidFill>
+                  <a:srgbClr val="555555"/>
+                </a:solidFill>
+                <a:latin typeface="Calibri"/>
+              </a:rPr>
+              <a:t>next</a:t>
+            </a:r>
+          </a:p>
+        </p:txBody>
+      </p:sp>
+      <p:sp>
+        <p:nvSpPr>
+          <p:cNvPr id="19" name="TextBox 18"/>
+          <p:cNvSpPr txBox="1"/>
+          <p:nvPr/>
+        </p:nvSpPr>
+        <p:spPr>
+          <a:xfrm>
+            <a:off x="365760" y="4114800"/>
+            <a:ext cx="11475720" cy="365760"/>
+          </a:xfrm>
+          <a:prstGeom prst="rect">
+            <a:avLst/>
+          </a:prstGeom>
+          <a:noFill/>
+        </p:spPr>
+        <p:txBody>
+          <a:bodyPr wrap="square" lIns="45720" rIns="45720" tIns="18288" bIns="18288" anchor="t">
+            <a:spAutoFit/>
+          </a:bodyPr>
+          <a:lstStyle/>
+          <a:p>
+            <a:pPr algn="l"/>
+            <a:r>
+              <a:rPr sz="1600" b="0" i="0">
+                <a:solidFill>
+                  <a:srgbClr val="707070"/>
+                </a:solidFill>
+                <a:latin typeface="Calibri"/>
+              </a:rPr>
+              <a:t>Next up (in order)</a:t>
+            </a:r>
+          </a:p>
+        </p:txBody>
+      </p:sp>
+      <p:sp>
+        <p:nvSpPr>
+          <p:cNvPr id="20" name="Rounded Rectangle 19"/>
+          <p:cNvSpPr/>
+          <p:nvPr/>
+        </p:nvSpPr>
+        <p:spPr>
+          <a:xfrm>
+            <a:off x="365760" y="4553712"/>
+            <a:ext cx="3703320" cy="868680"/>
+          </a:xfrm>
+          <a:prstGeom prst="roundRect">
+            <a:avLst/>
+          </a:prstGeom>
+          <a:solidFill>
+            <a:srgbClr val="FFFFFF"/>
+          </a:solidFill>
+          <a:ln w="15240">
+            <a:solidFill>
+              <a:srgbClr val="1F77B4"/>
+            </a:solidFill>
+          </a:ln>
+        </p:spPr>
+        <p:style>
+          <a:lnRef idx="1">
+            <a:schemeClr val="accent1"/>
+          </a:lnRef>
+          <a:fillRef idx="3">
+            <a:schemeClr val="accent1"/>
+          </a:fillRef>
+          <a:effectRef idx="2">
+            <a:schemeClr val="accent1"/>
+          </a:effectRef>
+          <a:fontRef idx="minor">
+            <a:schemeClr val="lt1"/>
+          </a:fontRef>
+        </p:style>
+        <p:txBody>
+          <a:bodyPr rtlCol="0" anchor="ctr" lIns="54864" rIns="54864" tIns="27432" bIns="27432" wrap="square"/>
+          <a:lstStyle/>
+          <a:p>
+            <a:pPr algn="ctr"/>
+            <a:r>
+              <a:rPr sz="1150" b="1">
+                <a:solidFill>
+                  <a:srgbClr val="000000"/>
+                </a:solidFill>
+                <a:latin typeface="Calibri"/>
+              </a:rPr>
+              <a:t>1 · Wire the 4 remaining
+modes (engine ready)</a:t>
+            </a:r>
+          </a:p>
+        </p:txBody>
+      </p:sp>
+      <p:cxnSp>
+        <p:nvCxnSpPr>
+          <p:cNvPr id="21" name="Connector 20"/>
+          <p:cNvCxnSpPr/>
+          <p:nvPr/>
+        </p:nvCxnSpPr>
+        <p:spPr>
+          <a:xfrm>
+            <a:off x="4087368" y="4983480"/>
+            <a:ext cx="192024" cy="0"/>
+          </a:xfrm>
+          <a:prstGeom prst="line">
+            <a:avLst/>
+          </a:prstGeom>
+          <a:ln w="25400">
+            <a:solidFill>
+              <a:srgbClr val="555555"/>
+            </a:solidFill>
+            <a:tailEnd type="triangle" w="med" len="med"/>
+          </a:ln>
+        </p:spPr>
+        <p:style>
+          <a:lnRef idx="2">
+            <a:schemeClr val="accent1"/>
+          </a:lnRef>
+          <a:fillRef idx="0">
+            <a:schemeClr val="accent1"/>
+          </a:fillRef>
+          <a:effectRef idx="1">
+            <a:schemeClr val="accent1"/>
+          </a:effectRef>
+          <a:fontRef idx="minor">
+            <a:schemeClr val="tx1"/>
+          </a:fontRef>
+        </p:style>
+      </p:cxnSp>
+      <p:sp>
+        <p:nvSpPr>
+          <p:cNvPr id="22" name="Rounded Rectangle 21"/>
+          <p:cNvSpPr/>
+          <p:nvPr/>
+        </p:nvSpPr>
+        <p:spPr>
+          <a:xfrm>
+            <a:off x="4297680" y="4553712"/>
+            <a:ext cx="3703320" cy="868680"/>
+          </a:xfrm>
+          <a:prstGeom prst="roundRect">
+            <a:avLst/>
+          </a:prstGeom>
+          <a:solidFill>
+            <a:srgbClr val="FFFFFF"/>
+          </a:solidFill>
+          <a:ln w="15240">
+            <a:solidFill>
+              <a:srgbClr val="1F77B4"/>
+            </a:solidFill>
+          </a:ln>
+        </p:spPr>
+        <p:style>
+          <a:lnRef idx="1">
+            <a:schemeClr val="accent1"/>
+          </a:lnRef>
+          <a:fillRef idx="3">
+            <a:schemeClr val="accent1"/>
+          </a:fillRef>
+          <a:effectRef idx="2">
+            <a:schemeClr val="accent1"/>
+          </a:effectRef>
+          <a:fontRef idx="minor">
+            <a:schemeClr val="lt1"/>
+          </a:fontRef>
+        </p:style>
+        <p:txBody>
+          <a:bodyPr rtlCol="0" anchor="ctr" lIns="54864" rIns="54864" tIns="27432" bIns="27432" wrap="square"/>
+          <a:lstStyle/>
+          <a:p>
+            <a:pPr algn="ctr"/>
+            <a:r>
+              <a:rPr sz="1150" b="1">
+                <a:solidFill>
+                  <a:srgbClr val="000000"/>
+                </a:solidFill>
+                <a:latin typeface="Calibri"/>
+              </a:rPr>
+              <a:t>2 · Measured Poisson
+(4-marker + backdrop)</a:t>
+            </a:r>
+          </a:p>
+        </p:txBody>
+      </p:sp>
+      <p:cxnSp>
+        <p:nvCxnSpPr>
+          <p:cNvPr id="23" name="Connector 22"/>
+          <p:cNvCxnSpPr/>
+          <p:nvPr/>
+        </p:nvCxnSpPr>
+        <p:spPr>
+          <a:xfrm>
+            <a:off x="8019288" y="4983480"/>
+            <a:ext cx="192024" cy="0"/>
+          </a:xfrm>
+          <a:prstGeom prst="line">
+            <a:avLst/>
+          </a:prstGeom>
+          <a:ln w="25400">
+            <a:solidFill>
+              <a:srgbClr val="555555"/>
+            </a:solidFill>
+            <a:tailEnd type="triangle" w="med" len="med"/>
+          </a:ln>
+        </p:spPr>
+        <p:style>
+          <a:lnRef idx="2">
+            <a:schemeClr val="accent1"/>
+          </a:lnRef>
+          <a:fillRef idx="0">
+            <a:schemeClr val="accent1"/>
+          </a:fillRef>
+          <a:effectRef idx="1">
+            <a:schemeClr val="accent1"/>
+          </a:effectRef>
+          <a:fontRef idx="minor">
+            <a:schemeClr val="tx1"/>
+          </a:fontRef>
+        </p:style>
+      </p:cxnSp>
+      <p:sp>
+        <p:nvSpPr>
+          <p:cNvPr id="24" name="Rounded Rectangle 23"/>
+          <p:cNvSpPr/>
+          <p:nvPr/>
+        </p:nvSpPr>
+        <p:spPr>
+          <a:xfrm>
+            <a:off x="8229600" y="4553712"/>
+            <a:ext cx="3611880" cy="868680"/>
+          </a:xfrm>
+          <a:prstGeom prst="roundRect">
+            <a:avLst/>
+          </a:prstGeom>
+          <a:solidFill>
+            <a:srgbClr val="FFFFFF"/>
+          </a:solidFill>
+          <a:ln w="15240">
+            <a:solidFill>
+              <a:srgbClr val="1F77B4"/>
+            </a:solidFill>
+          </a:ln>
+        </p:spPr>
+        <p:style>
+          <a:lnRef idx="1">
+            <a:schemeClr val="accent1"/>
+          </a:lnRef>
+          <a:fillRef idx="3">
+            <a:schemeClr val="accent1"/>
+          </a:fillRef>
+          <a:effectRef idx="2">
+            <a:schemeClr val="accent1"/>
+          </a:effectRef>
+          <a:fontRef idx="minor">
+            <a:schemeClr val="lt1"/>
+          </a:fontRef>
+        </p:style>
+        <p:txBody>
+          <a:bodyPr rtlCol="0" anchor="ctr" lIns="54864" rIns="54864" tIns="27432" bIns="27432" wrap="square"/>
+          <a:lstStyle/>
+          <a:p>
+            <a:pPr algn="ctr"/>
+            <a:r>
+              <a:rPr sz="1150" b="1">
+                <a:solidFill>
+                  <a:srgbClr val="000000"/>
+                </a:solidFill>
+                <a:latin typeface="Calibri"/>
+              </a:rPr>
+              <a:t>3 · UX wizard +
+live overlay</a:t>
+            </a:r>
+          </a:p>
+        </p:txBody>
+      </p:sp>
+      <p:sp>
+        <p:nvSpPr>
+          <p:cNvPr id="25" name="Rectangle 24"/>
+          <p:cNvSpPr/>
+          <p:nvPr/>
+        </p:nvSpPr>
+        <p:spPr>
+          <a:xfrm>
+            <a:off x="365760" y="5669280"/>
+            <a:ext cx="11475720" cy="658368"/>
+          </a:xfrm>
+          <a:prstGeom prst="rect">
+            <a:avLst/>
+          </a:prstGeom>
+          <a:solidFill>
+            <a:srgbClr val="FFF3CD"/>
+          </a:solidFill>
+          <a:ln>
+            <a:noFill/>
+          </a:ln>
+        </p:spPr>
+        <p:style>
+          <a:lnRef idx="1">
+            <a:schemeClr val="accent1"/>
+          </a:lnRef>
+          <a:fillRef idx="3">
+            <a:schemeClr val="accent1"/>
+          </a:fillRef>
+          <a:effectRef idx="2">
+            <a:schemeClr val="accent1"/>
+          </a:effectRef>
+          <a:fontRef idx="minor">
+            <a:schemeClr val="lt1"/>
+          </a:fontRef>
+        </p:style>
+        <p:txBody>
+          <a:bodyPr rtlCol="0" anchor="ctr" wrap="square" lIns="109728" rIns="109728"/>
+          <a:lstStyle/>
+          <a:p>
+            <a:pPr algn="ctr"/>
+            <a:r>
+              <a:rPr sz="1100" b="1">
+                <a:solidFill>
+                  <a:srgbClr val="000000"/>
+                </a:solidFill>
+                <a:latin typeface="Calibri"/>
+              </a:rPr>
+              <a:t>Hardware gate — motor torque ~2.6 kN today; fix driver Vref / cooling to fracture 100% infill.</a:t>
+            </a:r>
+          </a:p>
+        </p:txBody>
+      </p:sp>
+      <p:sp>
+        <p:nvSpPr>
+          <p:cNvPr id="26" name="TextBox 25"/>
+          <p:cNvSpPr txBox="1"/>
+          <p:nvPr/>
+        </p:nvSpPr>
+        <p:spPr>
+          <a:xfrm>
+            <a:off x="457200" y="6446520"/>
+            <a:ext cx="640080" cy="274320"/>
+          </a:xfrm>
+          <a:prstGeom prst="rect">
+            <a:avLst/>
+          </a:prstGeom>
+          <a:noFill/>
+        </p:spPr>
+        <p:txBody>
+          <a:bodyPr wrap="square" lIns="45720" rIns="45720" tIns="18288" bIns="18288" anchor="t">
+            <a:spAutoFit/>
+          </a:bodyPr>
+          <a:lstStyle/>
+          <a:p>
+            <a:pPr algn="l"/>
+            <a:r>
+              <a:rPr sz="1000" b="0" i="0">
+                <a:solidFill>
+                  <a:srgbClr val="707070"/>
+                </a:solidFill>
+                <a:latin typeface="Calibri"/>
+              </a:rPr>
+              <a:t>173</a:t>
+            </a:r>
+          </a:p>
+        </p:txBody>
+      </p:sp>
+    </p:spTree>
+  </p:cSld>
+  <p:clrMapOvr>
+    <a:masterClrMapping/>
+  </p:clrMapOvr>
+</p:sld>
+</file>
+
+<file path=ppt/slides/slide34.xml><?xml version="1.0" encoding="utf-8"?>
+<p:sld xmlns:a="http://schemas.openxmlformats.org/drawingml/2006/main" xmlns:p="http://schemas.openxmlformats.org/presentationml/2006/main" xmlns:r="http://schemas.openxmlformats.org/officeDocument/2006/relationships">
+  <p:cSld>
+    <p:spTree>
+      <p:nvGrpSpPr>
+        <p:cNvPr id="1" name=""/>
+        <p:cNvGrpSpPr/>
+        <p:nvPr/>
+      </p:nvGrpSpPr>
+      <p:grpSpPr/>
+      <p:sp>
+        <p:nvSpPr>
+          <p:cNvPr id="2" name="TextBox 1"/>
+          <p:cNvSpPr txBox="1"/>
+          <p:nvPr/>
+        </p:nvSpPr>
+        <p:spPr>
+          <a:xfrm>
+            <a:off x="11155680" y="274320"/>
+            <a:ext cx="914400" cy="274320"/>
+          </a:xfrm>
+          <a:prstGeom prst="rect">
+            <a:avLst/>
+          </a:prstGeom>
+          <a:noFill/>
+        </p:spPr>
+        <p:txBody>
+          <a:bodyPr wrap="square" lIns="45720" rIns="45720" tIns="18288" bIns="18288" anchor="t">
+            <a:spAutoFit/>
+          </a:bodyPr>
+          <a:lstStyle/>
+          <a:p>
+            <a:pPr algn="r"/>
+            <a:r>
+              <a:rPr sz="800" b="1" i="0">
+                <a:solidFill>
+                  <a:srgbClr val="707070"/>
+                </a:solidFill>
+                <a:latin typeface="Calibri"/>
+              </a:rPr>
+              <a:t>JÖNKÖPING UNIVERSITY</a:t>
+            </a:r>
+          </a:p>
+        </p:txBody>
+      </p:sp>
+      <p:sp>
+        <p:nvSpPr>
+          <p:cNvPr id="3" name="Rectangle 2"/>
+          <p:cNvSpPr/>
+          <p:nvPr/>
+        </p:nvSpPr>
+        <p:spPr>
+          <a:xfrm>
+            <a:off x="457200" y="411480"/>
+            <a:ext cx="457200" cy="73152"/>
+          </a:xfrm>
+          <a:prstGeom prst="rect">
+            <a:avLst/>
+          </a:prstGeom>
+          <a:solidFill>
+            <a:srgbClr val="A9D6EF"/>
+          </a:solidFill>
+          <a:ln>
+            <a:noFill/>
+          </a:ln>
+        </p:spPr>
+        <p:style>
+          <a:lnRef idx="1">
+            <a:schemeClr val="accent1"/>
+          </a:lnRef>
+          <a:fillRef idx="3">
+            <a:schemeClr val="accent1"/>
+          </a:fillRef>
+          <a:effectRef idx="2">
+            <a:schemeClr val="accent1"/>
+          </a:effectRef>
+          <a:fontRef idx="minor">
+            <a:schemeClr val="lt1"/>
+          </a:fontRef>
+        </p:style>
+        <p:txBody>
+          <a:bodyPr rtlCol="0" anchor="ctr"/>
+          <a:lstStyle/>
+          <a:p>
+            <a:pPr algn="ctr"/>
+          </a:p>
+        </p:txBody>
+      </p:sp>
+      <p:sp>
+        <p:nvSpPr>
+          <p:cNvPr id="4" name="TextBox 3"/>
+          <p:cNvSpPr txBox="1"/>
+          <p:nvPr/>
+        </p:nvSpPr>
+        <p:spPr>
+          <a:xfrm>
+            <a:off x="457200" y="502920"/>
+            <a:ext cx="11430000" cy="822960"/>
+          </a:xfrm>
+          <a:prstGeom prst="rect">
+            <a:avLst/>
+          </a:prstGeom>
+          <a:noFill/>
+        </p:spPr>
+        <p:txBody>
+          <a:bodyPr wrap="square" lIns="45720" rIns="45720" tIns="18288" bIns="18288" anchor="t">
+            <a:spAutoFit/>
+          </a:bodyPr>
+          <a:lstStyle/>
+          <a:p>
+            <a:pPr algn="l"/>
+            <a:r>
+              <a:rPr sz="3000" b="0" i="0">
+                <a:solidFill>
+                  <a:srgbClr val="000000"/>
+                </a:solidFill>
+                <a:latin typeface="Calibri Light"/>
+              </a:rPr>
+              <a:t>IN THE APP — ONE-CLICK REPORT &amp; SAVED SETTINGS</a:t>
+            </a:r>
+          </a:p>
+        </p:txBody>
+      </p:sp>
+      <p:sp>
+        <p:nvSpPr>
+          <p:cNvPr id="5" name="TextBox 4"/>
+          <p:cNvSpPr txBox="1"/>
+          <p:nvPr/>
+        </p:nvSpPr>
+        <p:spPr>
+          <a:xfrm>
+            <a:off x="365760" y="1170432"/>
+            <a:ext cx="5669280" cy="365760"/>
+          </a:xfrm>
+          <a:prstGeom prst="rect">
+            <a:avLst/>
+          </a:prstGeom>
+          <a:noFill/>
+        </p:spPr>
+        <p:txBody>
+          <a:bodyPr wrap="square" lIns="45720" rIns="45720" tIns="18288" bIns="18288" anchor="t">
+            <a:spAutoFit/>
+          </a:bodyPr>
+          <a:lstStyle/>
+          <a:p>
+            <a:pPr algn="l"/>
+            <a:r>
+              <a:rPr sz="1600" b="0" i="0">
+                <a:solidFill>
+                  <a:srgbClr val="707070"/>
+                </a:solidFill>
+                <a:latin typeface="Calibri"/>
+              </a:rPr>
+              <a:t>Generate report  →  one-page PDF + PNGs</a:t>
+            </a:r>
+          </a:p>
+        </p:txBody>
+      </p:sp>
+      <p:pic>
+        <p:nvPicPr>
+          <p:cNvPr id="6" name="Picture 5" descr="feat_report_s16.png"/>
+          <p:cNvPicPr>
+            <a:picLocks noChangeAspect="1"/>
+          </p:cNvPicPr>
+          <p:nvPr/>
+        </p:nvPicPr>
+        <p:blipFill>
+          <a:blip r:embed="rId2"/>
+          <a:stretch>
+            <a:fillRect/>
+          </a:stretch>
+        </p:blipFill>
+        <p:spPr>
+          <a:xfrm>
+            <a:off x="365760" y="1627632"/>
+            <a:ext cx="5623560" cy="3163252"/>
+          </a:xfrm>
+          <a:prstGeom prst="rect">
+            <a:avLst/>
+          </a:prstGeom>
+        </p:spPr>
+      </p:pic>
+      <p:sp>
+        <p:nvSpPr>
+          <p:cNvPr id="7" name="TextBox 6"/>
+          <p:cNvSpPr txBox="1"/>
+          <p:nvPr/>
+        </p:nvSpPr>
+        <p:spPr>
+          <a:xfrm>
+            <a:off x="6355080" y="1170432"/>
+            <a:ext cx="5486400" cy="365760"/>
+          </a:xfrm>
+          <a:prstGeom prst="rect">
+            <a:avLst/>
+          </a:prstGeom>
+          <a:noFill/>
+        </p:spPr>
+        <p:txBody>
+          <a:bodyPr wrap="square" lIns="45720" rIns="45720" tIns="18288" bIns="18288" anchor="t">
+            <a:spAutoFit/>
+          </a:bodyPr>
+          <a:lstStyle/>
+          <a:p>
+            <a:pPr algn="l"/>
+            <a:r>
+              <a:rPr sz="1600" b="0" i="0">
+                <a:solidFill>
+                  <a:srgbClr val="707070"/>
+                </a:solidFill>
+                <a:latin typeface="Calibri"/>
+              </a:rPr>
+              <a:t>Settings  —  save a setup, reload in 1 click</a:t>
+            </a:r>
+          </a:p>
+        </p:txBody>
+      </p:sp>
+      <p:sp>
+        <p:nvSpPr>
+          <p:cNvPr id="8" name="Rounded Rectangle 7"/>
+          <p:cNvSpPr/>
+          <p:nvPr/>
+        </p:nvSpPr>
+        <p:spPr>
+          <a:xfrm>
+            <a:off x="6355080" y="1627632"/>
+            <a:ext cx="5486400" cy="502920"/>
+          </a:xfrm>
+          <a:prstGeom prst="roundRect">
+            <a:avLst/>
+          </a:prstGeom>
+          <a:solidFill>
+            <a:srgbClr val="F2F2F2"/>
+          </a:solidFill>
+          <a:ln w="15240">
+            <a:solidFill>
+              <a:srgbClr val="555555"/>
+            </a:solidFill>
+          </a:ln>
+        </p:spPr>
+        <p:style>
+          <a:lnRef idx="1">
+            <a:schemeClr val="accent1"/>
+          </a:lnRef>
+          <a:fillRef idx="3">
+            <a:schemeClr val="accent1"/>
+          </a:fillRef>
+          <a:effectRef idx="2">
+            <a:schemeClr val="accent1"/>
+          </a:effectRef>
+          <a:fontRef idx="minor">
+            <a:schemeClr val="lt1"/>
+          </a:fontRef>
+        </p:style>
+        <p:txBody>
+          <a:bodyPr rtlCol="0" anchor="ctr" lIns="54864" rIns="54864" tIns="27432" bIns="27432" wrap="square"/>
+          <a:lstStyle/>
+          <a:p>
+            <a:pPr algn="ctr"/>
+            <a:r>
+              <a:rPr sz="1100" b="1">
+                <a:solidFill>
+                  <a:srgbClr val="000000"/>
+                </a:solidFill>
+                <a:latin typeface="Calibri"/>
+              </a:rPr>
+              <a:t>Settings:  [ Default v ]   [ Load ]   [ Save... ]   Infill %: [ 100 ]</a:t>
+            </a:r>
+          </a:p>
+        </p:txBody>
+      </p:sp>
+      <p:sp>
+        <p:nvSpPr>
+          <p:cNvPr id="9" name="TextBox 8"/>
+          <p:cNvSpPr txBox="1"/>
+          <p:nvPr/>
+        </p:nvSpPr>
+        <p:spPr>
+          <a:xfrm>
+            <a:off x="6355080" y="2331720"/>
+            <a:ext cx="5486400" cy="2926080"/>
+          </a:xfrm>
+          <a:prstGeom prst="rect">
+            <a:avLst/>
+          </a:prstGeom>
+          <a:noFill/>
+        </p:spPr>
+        <p:txBody>
+          <a:bodyPr wrap="square" lIns="45720" rIns="45720" tIns="18288" bIns="18288" anchor="t">
+            <a:spAutoFit/>
+          </a:bodyPr>
+          <a:lstStyle/>
+          <a:p>
+            <a:pPr algn="l"/>
+            <a:r>
+              <a:rPr sz="1150" b="0" i="0">
+                <a:solidFill>
+                  <a:srgbClr val="000000"/>
+                </a:solidFill>
+                <a:latin typeface="Calibri"/>
+              </a:rPr>
+              <a:t>•  Saves area · gauge · preload · speed · mode + params
+•  'Default' always present (auto-stop ON)
+•  Reload a full test setup with ONE click
+•  Infill % = recorded label only (does NOT change data)
+•  Report reads the CSV header → KPIs + 4 plots + validation</a:t>
+            </a:r>
+          </a:p>
+        </p:txBody>
+      </p:sp>
+      <p:sp>
+        <p:nvSpPr>
+          <p:cNvPr id="10" name="TextBox 9"/>
+          <p:cNvSpPr txBox="1"/>
+          <p:nvPr/>
+        </p:nvSpPr>
+        <p:spPr>
+          <a:xfrm>
+            <a:off x="548640" y="6400800"/>
+            <a:ext cx="11064240" cy="365760"/>
+          </a:xfrm>
+          <a:prstGeom prst="rect">
+            <a:avLst/>
+          </a:prstGeom>
+          <a:noFill/>
+        </p:spPr>
+        <p:txBody>
+          <a:bodyPr wrap="square" lIns="45720" rIns="45720" tIns="18288" bIns="18288" anchor="t">
+            <a:spAutoFit/>
+          </a:bodyPr>
+          <a:lstStyle/>
+          <a:p>
+            <a:pPr algn="l"/>
+            <a:r>
+              <a:rPr sz="1200" b="0" i="1">
+                <a:solidFill>
+                  <a:srgbClr val="707070"/>
+                </a:solidFill>
+                <a:latin typeface="Calibri"/>
+              </a:rPr>
+              <a:t>Report shown is the REAL S16 one-pager (auto-generated: reports/…200615_report.png). Settings row is a schematic of the Motor-Control controls.</a:t>
+            </a:r>
+          </a:p>
+        </p:txBody>
+      </p:sp>
+      <p:sp>
+        <p:nvSpPr>
+          <p:cNvPr id="11" name="TextBox 10"/>
+          <p:cNvSpPr txBox="1"/>
+          <p:nvPr/>
+        </p:nvSpPr>
+        <p:spPr>
+          <a:xfrm>
+            <a:off x="457200" y="6446520"/>
+            <a:ext cx="640080" cy="274320"/>
+          </a:xfrm>
+          <a:prstGeom prst="rect">
+            <a:avLst/>
+          </a:prstGeom>
+          <a:noFill/>
+        </p:spPr>
+        <p:txBody>
+          <a:bodyPr wrap="square" lIns="45720" rIns="45720" tIns="18288" bIns="18288" anchor="t">
+            <a:spAutoFit/>
+          </a:bodyPr>
+          <a:lstStyle/>
+          <a:p>
+            <a:pPr algn="l"/>
+            <a:r>
+              <a:rPr sz="1000" b="0" i="0">
+                <a:solidFill>
+                  <a:srgbClr val="707070"/>
+                </a:solidFill>
+                <a:latin typeface="Calibri"/>
+              </a:rPr>
+              <a:t>174</a:t>
+            </a:r>
+          </a:p>
+        </p:txBody>
+      </p:sp>
+    </p:spTree>
+  </p:cSld>
+  <p:clrMapOvr>
+    <a:masterClrMapping/>
+  </p:clrMapOvr>
+</p:sld>
+</file>
+
+<file path=ppt/slides/slide35.xml><?xml version="1.0" encoding="utf-8"?>
+<p:sld xmlns:a="http://schemas.openxmlformats.org/drawingml/2006/main" xmlns:p="http://schemas.openxmlformats.org/presentationml/2006/main" xmlns:r="http://schemas.openxmlformats.org/officeDocument/2006/relationships">
+  <p:cSld>
+    <p:spTree>
+      <p:nvGrpSpPr>
+        <p:cNvPr id="1" name=""/>
+        <p:cNvGrpSpPr/>
+        <p:nvPr/>
+      </p:nvGrpSpPr>
+      <p:grpSpPr/>
+      <p:sp>
+        <p:nvSpPr>
+          <p:cNvPr id="2" name="TextBox 1"/>
+          <p:cNvSpPr txBox="1"/>
+          <p:nvPr/>
+        </p:nvSpPr>
+        <p:spPr>
+          <a:xfrm>
+            <a:off x="11155680" y="274320"/>
+            <a:ext cx="914400" cy="274320"/>
+          </a:xfrm>
+          <a:prstGeom prst="rect">
+            <a:avLst/>
+          </a:prstGeom>
+          <a:noFill/>
+        </p:spPr>
+        <p:txBody>
+          <a:bodyPr wrap="square" lIns="45720" rIns="45720" tIns="18288" bIns="18288" anchor="t">
+            <a:spAutoFit/>
+          </a:bodyPr>
+          <a:lstStyle/>
+          <a:p>
+            <a:pPr algn="r"/>
+            <a:r>
+              <a:rPr sz="800" b="1" i="0">
+                <a:solidFill>
+                  <a:srgbClr val="707070"/>
+                </a:solidFill>
+                <a:latin typeface="Calibri"/>
+              </a:rPr>
+              <a:t>JÖNKÖPING UNIVERSITY</a:t>
+            </a:r>
+          </a:p>
+        </p:txBody>
+      </p:sp>
+      <p:sp>
+        <p:nvSpPr>
+          <p:cNvPr id="3" name="Rectangle 2"/>
+          <p:cNvSpPr/>
+          <p:nvPr/>
+        </p:nvSpPr>
+        <p:spPr>
+          <a:xfrm>
+            <a:off x="457200" y="411480"/>
+            <a:ext cx="457200" cy="73152"/>
+          </a:xfrm>
+          <a:prstGeom prst="rect">
+            <a:avLst/>
+          </a:prstGeom>
+          <a:solidFill>
+            <a:srgbClr val="A9D6EF"/>
+          </a:solidFill>
+          <a:ln>
+            <a:noFill/>
+          </a:ln>
+        </p:spPr>
+        <p:style>
+          <a:lnRef idx="1">
+            <a:schemeClr val="accent1"/>
+          </a:lnRef>
+          <a:fillRef idx="3">
+            <a:schemeClr val="accent1"/>
+          </a:fillRef>
+          <a:effectRef idx="2">
+            <a:schemeClr val="accent1"/>
+          </a:effectRef>
+          <a:fontRef idx="minor">
+            <a:schemeClr val="lt1"/>
+          </a:fontRef>
+        </p:style>
+        <p:txBody>
+          <a:bodyPr rtlCol="0" anchor="ctr"/>
+          <a:lstStyle/>
+          <a:p>
+            <a:pPr algn="ctr"/>
+          </a:p>
+        </p:txBody>
+      </p:sp>
+      <p:sp>
+        <p:nvSpPr>
+          <p:cNvPr id="4" name="TextBox 3"/>
+          <p:cNvSpPr txBox="1"/>
+          <p:nvPr/>
+        </p:nvSpPr>
+        <p:spPr>
+          <a:xfrm>
+            <a:off x="457200" y="502920"/>
+            <a:ext cx="11430000" cy="822960"/>
+          </a:xfrm>
+          <a:prstGeom prst="rect">
+            <a:avLst/>
+          </a:prstGeom>
+          <a:noFill/>
+        </p:spPr>
+        <p:txBody>
+          <a:bodyPr wrap="square" lIns="45720" rIns="45720" tIns="18288" bIns="18288" anchor="t">
+            <a:spAutoFit/>
+          </a:bodyPr>
+          <a:lstStyle/>
+          <a:p>
+            <a:pPr algn="l"/>
+            <a:r>
+              <a:rPr sz="3000" b="0" i="0">
+                <a:solidFill>
+                  <a:srgbClr val="000000"/>
+                </a:solidFill>
+                <a:latin typeface="Calibri Light"/>
+              </a:rPr>
+              <a:t>SPECIMEN REGISTER  (S1 – S19)</a:t>
+            </a:r>
+          </a:p>
+        </p:txBody>
+      </p:sp>
+      <p:graphicFrame>
+        <p:nvGraphicFramePr>
+          <p:cNvPr id="5" name="Table 4"/>
+          <p:cNvGraphicFramePr>
+            <a:graphicFrameLocks noGrp="1"/>
+          </p:cNvGraphicFramePr>
+          <p:nvPr/>
+        </p:nvGraphicFramePr>
+        <p:xfrm>
+          <a:off x="365760" y="1280160"/>
+          <a:ext cx="5669280" cy="4526280"/>
+        </p:xfrm>
+        <a:graphic>
+          <a:graphicData uri="http://schemas.openxmlformats.org/drawingml/2006/table">
+            <a:tbl>
+              <a:tblPr firstRow="1" bandRow="1">
+                <a:tableStyleId>{5C22544A-7EE6-4342-B048-85BDC9FD1C3A}</a:tableStyleId>
+              </a:tblPr>
+              <a:tblGrid>
+                <a:gridCol w="914400"/>
+                <a:gridCol w="1005840"/>
+                <a:gridCol w="1005840"/>
+                <a:gridCol w="2743200"/>
+              </a:tblGrid>
+              <a:tr h="452628">
+                <a:tc>
+                  <a:txBody>
+                    <a:bodyPr lIns="54864" rIns="54864" tIns="18288" bIns="18288" wrap="square" anchor="ctr"/>
+                    <a:lstStyle/>
+                    <a:p>
+                      <a:pPr algn="l"/>
+                      <a:r>
+                        <a:rPr sz="1000" b="1">
+                          <a:solidFill>
+                            <a:srgbClr val="FFFFFF"/>
+                          </a:solidFill>
+                          <a:latin typeface="Calibri"/>
+                        </a:rPr>
+                        <a:t>Spec</a:t>
+                      </a:r>
+                    </a:p>
+                  </a:txBody>
+                  <a:tcPr>
+                    <a:solidFill>
+                      <a:srgbClr val="143D2F"/>
+                    </a:solidFill>
+                  </a:tcPr>
+                </a:tc>
+                <a:tc>
+                  <a:txBody>
+                    <a:bodyPr lIns="54864" rIns="54864" tIns="18288" bIns="18288" wrap="square" anchor="ctr"/>
+                    <a:lstStyle/>
+                    <a:p>
+                      <a:pPr algn="l"/>
+                      <a:r>
+                        <a:rPr sz="1000" b="1">
+                          <a:solidFill>
+                            <a:srgbClr val="FFFFFF"/>
+                          </a:solidFill>
+                          <a:latin typeface="Calibri"/>
+                        </a:rPr>
+                        <a:t>Infill</a:t>
+                      </a:r>
+                    </a:p>
+                  </a:txBody>
+                  <a:tcPr>
+                    <a:solidFill>
+                      <a:srgbClr val="143D2F"/>
+                    </a:solidFill>
+                  </a:tcPr>
+                </a:tc>
+                <a:tc>
+                  <a:txBody>
+                    <a:bodyPr lIns="54864" rIns="54864" tIns="18288" bIns="18288" wrap="square" anchor="ctr"/>
+                    <a:lstStyle/>
+                    <a:p>
+                      <a:pPr algn="l"/>
+                      <a:r>
+                        <a:rPr sz="1000" b="1">
+                          <a:solidFill>
+                            <a:srgbClr val="FFFFFF"/>
+                          </a:solidFill>
+                          <a:latin typeface="Calibri"/>
+                        </a:rPr>
+                        <a:t>Colour</a:t>
+                      </a:r>
+                    </a:p>
+                  </a:txBody>
+                  <a:tcPr>
+                    <a:solidFill>
+                      <a:srgbClr val="143D2F"/>
+                    </a:solidFill>
+                  </a:tcPr>
+                </a:tc>
+                <a:tc>
+                  <a:txBody>
+                    <a:bodyPr lIns="54864" rIns="54864" tIns="18288" bIns="18288" wrap="square" anchor="ctr"/>
+                    <a:lstStyle/>
+                    <a:p>
+                      <a:pPr algn="l"/>
+                      <a:r>
+                        <a:rPr sz="1000" b="1">
+                          <a:solidFill>
+                            <a:srgbClr val="FFFFFF"/>
+                          </a:solidFill>
+                          <a:latin typeface="Calibri"/>
+                        </a:rPr>
+                        <a:t>Test / result</a:t>
+                      </a:r>
+                    </a:p>
+                  </a:txBody>
+                  <a:tcPr>
+                    <a:solidFill>
+                      <a:srgbClr val="143D2F"/>
+                    </a:solidFill>
+                  </a:tcPr>
+                </a:tc>
+              </a:tr>
+              <a:tr h="452628">
+                <a:tc>
+                  <a:txBody>
+                    <a:bodyPr lIns="54864" rIns="54864" tIns="18288" bIns="18288" wrap="square" anchor="ctr"/>
+                    <a:lstStyle/>
+                    <a:p>
+                      <a:pPr algn="l"/>
+                      <a:r>
+                        <a:rPr sz="900" b="0">
+                          <a:solidFill>
+                            <a:srgbClr val="000000"/>
+                          </a:solidFill>
+                          <a:latin typeface="Calibri"/>
+                        </a:rPr>
+                        <a:t>S1</a:t>
+                      </a:r>
+                    </a:p>
+                  </a:txBody>
+                  <a:tcPr/>
+                </a:tc>
+                <a:tc>
+                  <a:txBody>
+                    <a:bodyPr lIns="54864" rIns="54864" tIns="18288" bIns="18288" wrap="square" anchor="ctr"/>
+                    <a:lstStyle/>
+                    <a:p>
+                      <a:pPr algn="l"/>
+                      <a:r>
+                        <a:rPr sz="900" b="0">
+                          <a:solidFill>
+                            <a:srgbClr val="000000"/>
+                          </a:solidFill>
+                          <a:latin typeface="Calibri"/>
+                        </a:rPr>
+                        <a:t/>
+                      </a:r>
+                    </a:p>
+                  </a:txBody>
+                  <a:tcPr/>
+                </a:tc>
+                <a:tc>
+                  <a:txBody>
+                    <a:bodyPr lIns="54864" rIns="54864" tIns="18288" bIns="18288" wrap="square" anchor="ctr"/>
+                    <a:lstStyle/>
+                    <a:p>
+                      <a:pPr algn="l"/>
+                      <a:r>
+                        <a:rPr sz="900" b="0">
+                          <a:solidFill>
+                            <a:srgbClr val="000000"/>
+                          </a:solidFill>
+                          <a:latin typeface="Calibri"/>
+                        </a:rPr>
+                        <a:t/>
+                      </a:r>
+                    </a:p>
+                  </a:txBody>
+                  <a:tcPr/>
+                </a:tc>
+                <a:tc>
+                  <a:txBody>
+                    <a:bodyPr lIns="54864" rIns="54864" tIns="18288" bIns="18288" wrap="square" anchor="ctr"/>
+                    <a:lstStyle/>
+                    <a:p>
+                      <a:pPr algn="l"/>
+                      <a:r>
+                        <a:rPr sz="900" b="0">
+                          <a:solidFill>
+                            <a:srgbClr val="000000"/>
+                          </a:solidFill>
+                          <a:latin typeface="Calibri"/>
+                        </a:rPr>
+                        <a:t/>
+                      </a:r>
+                    </a:p>
+                  </a:txBody>
+                  <a:tcPr/>
+                </a:tc>
+              </a:tr>
+              <a:tr h="452628">
+                <a:tc>
+                  <a:txBody>
+                    <a:bodyPr lIns="54864" rIns="54864" tIns="18288" bIns="18288" wrap="square" anchor="ctr"/>
+                    <a:lstStyle/>
+                    <a:p>
+                      <a:pPr algn="l"/>
+                      <a:r>
+                        <a:rPr sz="900" b="0">
+                          <a:solidFill>
+                            <a:srgbClr val="000000"/>
+                          </a:solidFill>
+                          <a:latin typeface="Calibri"/>
+                        </a:rPr>
+                        <a:t>S2</a:t>
+                      </a:r>
+                    </a:p>
+                  </a:txBody>
+                  <a:tcPr/>
+                </a:tc>
+                <a:tc>
+                  <a:txBody>
+                    <a:bodyPr lIns="54864" rIns="54864" tIns="18288" bIns="18288" wrap="square" anchor="ctr"/>
+                    <a:lstStyle/>
+                    <a:p>
+                      <a:pPr algn="l"/>
+                      <a:r>
+                        <a:rPr sz="900" b="0">
+                          <a:solidFill>
+                            <a:srgbClr val="000000"/>
+                          </a:solidFill>
+                          <a:latin typeface="Calibri"/>
+                        </a:rPr>
+                        <a:t>50%</a:t>
+                      </a:r>
+                    </a:p>
+                  </a:txBody>
+                  <a:tcPr/>
+                </a:tc>
+                <a:tc>
+                  <a:txBody>
+                    <a:bodyPr lIns="54864" rIns="54864" tIns="18288" bIns="18288" wrap="square" anchor="ctr"/>
+                    <a:lstStyle/>
+                    <a:p>
+                      <a:pPr algn="l"/>
+                      <a:r>
+                        <a:rPr sz="900" b="0">
+                          <a:solidFill>
+                            <a:srgbClr val="000000"/>
+                          </a:solidFill>
+                          <a:latin typeface="Calibri"/>
+                        </a:rPr>
+                        <a:t/>
+                      </a:r>
+                    </a:p>
+                  </a:txBody>
+                  <a:tcPr/>
+                </a:tc>
+                <a:tc>
+                  <a:txBody>
+                    <a:bodyPr lIns="54864" rIns="54864" tIns="18288" bIns="18288" wrap="square" anchor="ctr"/>
+                    <a:lstStyle/>
+                    <a:p>
+                      <a:pPr algn="l"/>
+                      <a:r>
+                        <a:rPr sz="900" b="0">
+                          <a:solidFill>
+                            <a:srgbClr val="000000"/>
+                          </a:solidFill>
+                          <a:latin typeface="Calibri"/>
+                        </a:rPr>
+                        <a:t>V5c · 22.0 MPa</a:t>
+                      </a:r>
+                    </a:p>
+                  </a:txBody>
+                  <a:tcPr/>
+                </a:tc>
+              </a:tr>
+              <a:tr h="452628">
+                <a:tc>
+                  <a:txBody>
+                    <a:bodyPr lIns="54864" rIns="54864" tIns="18288" bIns="18288" wrap="square" anchor="ctr"/>
+                    <a:lstStyle/>
+                    <a:p>
+                      <a:pPr algn="l"/>
+                      <a:r>
+                        <a:rPr sz="900" b="0">
+                          <a:solidFill>
+                            <a:srgbClr val="000000"/>
+                          </a:solidFill>
+                          <a:latin typeface="Calibri"/>
+                        </a:rPr>
+                        <a:t>S3</a:t>
+                      </a:r>
+                    </a:p>
+                  </a:txBody>
+                  <a:tcPr/>
+                </a:tc>
+                <a:tc>
+                  <a:txBody>
+                    <a:bodyPr lIns="54864" rIns="54864" tIns="18288" bIns="18288" wrap="square" anchor="ctr"/>
+                    <a:lstStyle/>
+                    <a:p>
+                      <a:pPr algn="l"/>
+                      <a:r>
+                        <a:rPr sz="900" b="0">
+                          <a:solidFill>
+                            <a:srgbClr val="000000"/>
+                          </a:solidFill>
+                          <a:latin typeface="Calibri"/>
+                        </a:rPr>
+                        <a:t>50%</a:t>
+                      </a:r>
+                    </a:p>
+                  </a:txBody>
+                  <a:tcPr/>
+                </a:tc>
+                <a:tc>
+                  <a:txBody>
+                    <a:bodyPr lIns="54864" rIns="54864" tIns="18288" bIns="18288" wrap="square" anchor="ctr"/>
+                    <a:lstStyle/>
+                    <a:p>
+                      <a:pPr algn="l"/>
+                      <a:r>
+                        <a:rPr sz="900" b="0">
+                          <a:solidFill>
+                            <a:srgbClr val="000000"/>
+                          </a:solidFill>
+                          <a:latin typeface="Calibri"/>
+                        </a:rPr>
+                        <a:t/>
+                      </a:r>
+                    </a:p>
+                  </a:txBody>
+                  <a:tcPr/>
+                </a:tc>
+                <a:tc>
+                  <a:txBody>
+                    <a:bodyPr lIns="54864" rIns="54864" tIns="18288" bIns="18288" wrap="square" anchor="ctr"/>
+                    <a:lstStyle/>
+                    <a:p>
+                      <a:pPr algn="l"/>
+                      <a:r>
+                        <a:rPr sz="900" b="0">
+                          <a:solidFill>
+                            <a:srgbClr val="000000"/>
+                          </a:solidFill>
+                          <a:latin typeface="Calibri"/>
+                        </a:rPr>
+                        <a:t>V5b · 22.0 MPa</a:t>
+                      </a:r>
+                    </a:p>
+                  </a:txBody>
+                  <a:tcPr/>
+                </a:tc>
+              </a:tr>
+              <a:tr h="452628">
+                <a:tc>
+                  <a:txBody>
+                    <a:bodyPr lIns="54864" rIns="54864" tIns="18288" bIns="18288" wrap="square" anchor="ctr"/>
+                    <a:lstStyle/>
+                    <a:p>
+                      <a:pPr algn="l"/>
+                      <a:r>
+                        <a:rPr sz="900" b="0">
+                          <a:solidFill>
+                            <a:srgbClr val="000000"/>
+                          </a:solidFill>
+                          <a:latin typeface="Calibri"/>
+                        </a:rPr>
+                        <a:t>S4</a:t>
+                      </a:r>
+                    </a:p>
+                  </a:txBody>
+                  <a:tcPr/>
+                </a:tc>
+                <a:tc>
+                  <a:txBody>
+                    <a:bodyPr lIns="54864" rIns="54864" tIns="18288" bIns="18288" wrap="square" anchor="ctr"/>
+                    <a:lstStyle/>
+                    <a:p>
+                      <a:pPr algn="l"/>
+                      <a:r>
+                        <a:rPr sz="900" b="0">
+                          <a:solidFill>
+                            <a:srgbClr val="000000"/>
+                          </a:solidFill>
+                          <a:latin typeface="Calibri"/>
+                        </a:rPr>
+                        <a:t>50%</a:t>
+                      </a:r>
+                    </a:p>
+                  </a:txBody>
+                  <a:tcPr/>
+                </a:tc>
+                <a:tc>
+                  <a:txBody>
+                    <a:bodyPr lIns="54864" rIns="54864" tIns="18288" bIns="18288" wrap="square" anchor="ctr"/>
+                    <a:lstStyle/>
+                    <a:p>
+                      <a:pPr algn="l"/>
+                      <a:r>
+                        <a:rPr sz="900" b="0">
+                          <a:solidFill>
+                            <a:srgbClr val="000000"/>
+                          </a:solidFill>
+                          <a:latin typeface="Calibri"/>
+                        </a:rPr>
+                        <a:t/>
+                      </a:r>
+                    </a:p>
+                  </a:txBody>
+                  <a:tcPr/>
+                </a:tc>
+                <a:tc>
+                  <a:txBody>
+                    <a:bodyPr lIns="54864" rIns="54864" tIns="18288" bIns="18288" wrap="square" anchor="ctr"/>
+                    <a:lstStyle/>
+                    <a:p>
+                      <a:pPr algn="l"/>
+                      <a:r>
+                        <a:rPr sz="900" b="0">
+                          <a:solidFill>
+                            <a:srgbClr val="000000"/>
+                          </a:solidFill>
+                          <a:latin typeface="Calibri"/>
+                        </a:rPr>
+                        <a:t>V5 · 22.1 MPa</a:t>
+                      </a:r>
+                    </a:p>
+                  </a:txBody>
+                  <a:tcPr/>
+                </a:tc>
+              </a:tr>
+              <a:tr h="452628">
+                <a:tc>
+                  <a:txBody>
+                    <a:bodyPr lIns="54864" rIns="54864" tIns="18288" bIns="18288" wrap="square" anchor="ctr"/>
+                    <a:lstStyle/>
+                    <a:p>
+                      <a:pPr algn="l"/>
+                      <a:r>
+                        <a:rPr sz="900" b="0">
+                          <a:solidFill>
+                            <a:srgbClr val="000000"/>
+                          </a:solidFill>
+                          <a:latin typeface="Calibri"/>
+                        </a:rPr>
+                        <a:t>S5</a:t>
+                      </a:r>
+                    </a:p>
+                  </a:txBody>
+                  <a:tcPr/>
+                </a:tc>
+                <a:tc>
+                  <a:txBody>
+                    <a:bodyPr lIns="54864" rIns="54864" tIns="18288" bIns="18288" wrap="square" anchor="ctr"/>
+                    <a:lstStyle/>
+                    <a:p>
+                      <a:pPr algn="l"/>
+                      <a:r>
+                        <a:rPr sz="900" b="0">
+                          <a:solidFill>
+                            <a:srgbClr val="000000"/>
+                          </a:solidFill>
+                          <a:latin typeface="Calibri"/>
+                        </a:rPr>
+                        <a:t/>
+                      </a:r>
+                    </a:p>
+                  </a:txBody>
+                  <a:tcPr/>
+                </a:tc>
+                <a:tc>
+                  <a:txBody>
+                    <a:bodyPr lIns="54864" rIns="54864" tIns="18288" bIns="18288" wrap="square" anchor="ctr"/>
+                    <a:lstStyle/>
+                    <a:p>
+                      <a:pPr algn="l"/>
+                      <a:r>
+                        <a:rPr sz="900" b="0">
+                          <a:solidFill>
+                            <a:srgbClr val="000000"/>
+                          </a:solidFill>
+                          <a:latin typeface="Calibri"/>
+                        </a:rPr>
+                        <a:t/>
+                      </a:r>
+                    </a:p>
+                  </a:txBody>
+                  <a:tcPr/>
+                </a:tc>
+                <a:tc>
+                  <a:txBody>
+                    <a:bodyPr lIns="54864" rIns="54864" tIns="18288" bIns="18288" wrap="square" anchor="ctr"/>
+                    <a:lstStyle/>
+                    <a:p>
+                      <a:pPr algn="l"/>
+                      <a:r>
+                        <a:rPr sz="900" b="0">
+                          <a:solidFill>
+                            <a:srgbClr val="000000"/>
+                          </a:solidFill>
+                          <a:latin typeface="Calibri"/>
+                        </a:rPr>
+                        <a:t/>
+                      </a:r>
+                    </a:p>
+                  </a:txBody>
+                  <a:tcPr/>
+                </a:tc>
+              </a:tr>
+              <a:tr h="452628">
+                <a:tc>
+                  <a:txBody>
+                    <a:bodyPr lIns="54864" rIns="54864" tIns="18288" bIns="18288" wrap="square" anchor="ctr"/>
+                    <a:lstStyle/>
+                    <a:p>
+                      <a:pPr algn="l"/>
+                      <a:r>
+                        <a:rPr sz="900" b="0">
+                          <a:solidFill>
+                            <a:srgbClr val="000000"/>
+                          </a:solidFill>
+                          <a:latin typeface="Calibri"/>
+                        </a:rPr>
+                        <a:t>S6</a:t>
+                      </a:r>
+                    </a:p>
+                  </a:txBody>
+                  <a:tcPr/>
+                </a:tc>
+                <a:tc>
+                  <a:txBody>
+                    <a:bodyPr lIns="54864" rIns="54864" tIns="18288" bIns="18288" wrap="square" anchor="ctr"/>
+                    <a:lstStyle/>
+                    <a:p>
+                      <a:pPr algn="l"/>
+                      <a:r>
+                        <a:rPr sz="900" b="0">
+                          <a:solidFill>
+                            <a:srgbClr val="000000"/>
+                          </a:solidFill>
+                          <a:latin typeface="Calibri"/>
+                        </a:rPr>
+                        <a:t/>
+                      </a:r>
+                    </a:p>
+                  </a:txBody>
+                  <a:tcPr/>
+                </a:tc>
+                <a:tc>
+                  <a:txBody>
+                    <a:bodyPr lIns="54864" rIns="54864" tIns="18288" bIns="18288" wrap="square" anchor="ctr"/>
+                    <a:lstStyle/>
+                    <a:p>
+                      <a:pPr algn="l"/>
+                      <a:r>
+                        <a:rPr sz="900" b="0">
+                          <a:solidFill>
+                            <a:srgbClr val="000000"/>
+                          </a:solidFill>
+                          <a:latin typeface="Calibri"/>
+                        </a:rPr>
+                        <a:t/>
+                      </a:r>
+                    </a:p>
+                  </a:txBody>
+                  <a:tcPr/>
+                </a:tc>
+                <a:tc>
+                  <a:txBody>
+                    <a:bodyPr lIns="54864" rIns="54864" tIns="18288" bIns="18288" wrap="square" anchor="ctr"/>
+                    <a:lstStyle/>
+                    <a:p>
+                      <a:pPr algn="l"/>
+                      <a:r>
+                        <a:rPr sz="900" b="0">
+                          <a:solidFill>
+                            <a:srgbClr val="000000"/>
+                          </a:solidFill>
+                          <a:latin typeface="Calibri"/>
+                        </a:rPr>
+                        <a:t/>
+                      </a:r>
+                    </a:p>
+                  </a:txBody>
+                  <a:tcPr/>
+                </a:tc>
+              </a:tr>
+              <a:tr h="452628">
+                <a:tc>
+                  <a:txBody>
+                    <a:bodyPr lIns="54864" rIns="54864" tIns="18288" bIns="18288" wrap="square" anchor="ctr"/>
+                    <a:lstStyle/>
+                    <a:p>
+                      <a:pPr algn="l"/>
+                      <a:r>
+                        <a:rPr sz="900" b="0">
+                          <a:solidFill>
+                            <a:srgbClr val="000000"/>
+                          </a:solidFill>
+                          <a:latin typeface="Calibri"/>
+                        </a:rPr>
+                        <a:t>S7</a:t>
+                      </a:r>
+                    </a:p>
+                  </a:txBody>
+                  <a:tcPr/>
+                </a:tc>
+                <a:tc>
+                  <a:txBody>
+                    <a:bodyPr lIns="54864" rIns="54864" tIns="18288" bIns="18288" wrap="square" anchor="ctr"/>
+                    <a:lstStyle/>
+                    <a:p>
+                      <a:pPr algn="l"/>
+                      <a:r>
+                        <a:rPr sz="900" b="0">
+                          <a:solidFill>
+                            <a:srgbClr val="000000"/>
+                          </a:solidFill>
+                          <a:latin typeface="Calibri"/>
+                        </a:rPr>
+                        <a:t>100%</a:t>
+                      </a:r>
+                    </a:p>
+                  </a:txBody>
+                  <a:tcPr/>
+                </a:tc>
+                <a:tc>
+                  <a:txBody>
+                    <a:bodyPr lIns="54864" rIns="54864" tIns="18288" bIns="18288" wrap="square" anchor="ctr"/>
+                    <a:lstStyle/>
+                    <a:p>
+                      <a:pPr algn="l"/>
+                      <a:r>
+                        <a:rPr sz="900" b="0">
+                          <a:solidFill>
+                            <a:srgbClr val="000000"/>
+                          </a:solidFill>
+                          <a:latin typeface="Calibri"/>
+                        </a:rPr>
+                        <a:t/>
+                      </a:r>
+                    </a:p>
+                  </a:txBody>
+                  <a:tcPr/>
+                </a:tc>
+                <a:tc>
+                  <a:txBody>
+                    <a:bodyPr lIns="54864" rIns="54864" tIns="18288" bIns="18288" wrap="square" anchor="ctr"/>
+                    <a:lstStyle/>
+                    <a:p>
+                      <a:pPr algn="l"/>
+                      <a:r>
+                        <a:rPr sz="900" b="0">
+                          <a:solidFill>
+                            <a:srgbClr val="000000"/>
+                          </a:solidFill>
+                          <a:latin typeface="Calibri"/>
+                        </a:rPr>
+                        <a:t>V6a · 47.8 MPa</a:t>
+                      </a:r>
+                    </a:p>
+                  </a:txBody>
+                  <a:tcPr/>
+                </a:tc>
+              </a:tr>
+              <a:tr h="452628">
+                <a:tc>
+                  <a:txBody>
+                    <a:bodyPr lIns="54864" rIns="54864" tIns="18288" bIns="18288" wrap="square" anchor="ctr"/>
+                    <a:lstStyle/>
+                    <a:p>
+                      <a:pPr algn="l"/>
+                      <a:r>
+                        <a:rPr sz="900" b="0">
+                          <a:solidFill>
+                            <a:srgbClr val="000000"/>
+                          </a:solidFill>
+                          <a:latin typeface="Calibri"/>
+                        </a:rPr>
+                        <a:t>S8</a:t>
+                      </a:r>
+                    </a:p>
+                  </a:txBody>
+                  <a:tcPr/>
+                </a:tc>
+                <a:tc>
+                  <a:txBody>
+                    <a:bodyPr lIns="54864" rIns="54864" tIns="18288" bIns="18288" wrap="square" anchor="ctr"/>
+                    <a:lstStyle/>
+                    <a:p>
+                      <a:pPr algn="l"/>
+                      <a:r>
+                        <a:rPr sz="900" b="0">
+                          <a:solidFill>
+                            <a:srgbClr val="000000"/>
+                          </a:solidFill>
+                          <a:latin typeface="Calibri"/>
+                        </a:rPr>
+                        <a:t>100%</a:t>
+                      </a:r>
+                    </a:p>
+                  </a:txBody>
+                  <a:tcPr/>
+                </a:tc>
+                <a:tc>
+                  <a:txBody>
+                    <a:bodyPr lIns="54864" rIns="54864" tIns="18288" bIns="18288" wrap="square" anchor="ctr"/>
+                    <a:lstStyle/>
+                    <a:p>
+                      <a:pPr algn="l"/>
+                      <a:r>
+                        <a:rPr sz="900" b="0">
+                          <a:solidFill>
+                            <a:srgbClr val="000000"/>
+                          </a:solidFill>
+                          <a:latin typeface="Calibri"/>
+                        </a:rPr>
+                        <a:t/>
+                      </a:r>
+                    </a:p>
+                  </a:txBody>
+                  <a:tcPr/>
+                </a:tc>
+                <a:tc>
+                  <a:txBody>
+                    <a:bodyPr lIns="54864" rIns="54864" tIns="18288" bIns="18288" wrap="square" anchor="ctr"/>
+                    <a:lstStyle/>
+                    <a:p>
+                      <a:pPr algn="l"/>
+                      <a:r>
+                        <a:rPr sz="900" b="0">
+                          <a:solidFill>
+                            <a:srgbClr val="000000"/>
+                          </a:solidFill>
+                          <a:latin typeface="Calibri"/>
+                        </a:rPr>
+                        <a:t>V6b · 44.8 MPa</a:t>
+                      </a:r>
+                    </a:p>
+                  </a:txBody>
+                  <a:tcPr/>
+                </a:tc>
+              </a:tr>
+              <a:tr h="452628">
+                <a:tc>
+                  <a:txBody>
+                    <a:bodyPr lIns="54864" rIns="54864" tIns="18288" bIns="18288" wrap="square" anchor="ctr"/>
+                    <a:lstStyle/>
+                    <a:p>
+                      <a:pPr algn="l"/>
+                      <a:r>
+                        <a:rPr sz="900" b="0">
+                          <a:solidFill>
+                            <a:srgbClr val="000000"/>
+                          </a:solidFill>
+                          <a:latin typeface="Calibri"/>
+                        </a:rPr>
+                        <a:t>S9</a:t>
+                      </a:r>
+                    </a:p>
+                  </a:txBody>
+                  <a:tcPr/>
+                </a:tc>
+                <a:tc>
+                  <a:txBody>
+                    <a:bodyPr lIns="54864" rIns="54864" tIns="18288" bIns="18288" wrap="square" anchor="ctr"/>
+                    <a:lstStyle/>
+                    <a:p>
+                      <a:pPr algn="l"/>
+                      <a:r>
+                        <a:rPr sz="900" b="0">
+                          <a:solidFill>
+                            <a:srgbClr val="000000"/>
+                          </a:solidFill>
+                          <a:latin typeface="Calibri"/>
+                        </a:rPr>
+                        <a:t>100%</a:t>
+                      </a:r>
+                    </a:p>
+                  </a:txBody>
+                  <a:tcPr/>
+                </a:tc>
+                <a:tc>
+                  <a:txBody>
+                    <a:bodyPr lIns="54864" rIns="54864" tIns="18288" bIns="18288" wrap="square" anchor="ctr"/>
+                    <a:lstStyle/>
+                    <a:p>
+                      <a:pPr algn="l"/>
+                      <a:r>
+                        <a:rPr sz="900" b="0">
+                          <a:solidFill>
+                            <a:srgbClr val="000000"/>
+                          </a:solidFill>
+                          <a:latin typeface="Calibri"/>
+                        </a:rPr>
+                        <a:t/>
+                      </a:r>
+                    </a:p>
+                  </a:txBody>
+                  <a:tcPr/>
+                </a:tc>
+                <a:tc>
+                  <a:txBody>
+                    <a:bodyPr lIns="54864" rIns="54864" tIns="18288" bIns="18288" wrap="square" anchor="ctr"/>
+                    <a:lstStyle/>
+                    <a:p>
+                      <a:pPr algn="l"/>
+                      <a:r>
+                        <a:rPr sz="900" b="0">
+                          <a:solidFill>
+                            <a:srgbClr val="000000"/>
+                          </a:solidFill>
+                          <a:latin typeface="Calibri"/>
+                        </a:rPr>
+                        <a:t>V6e · 45.5 MPa</a:t>
+                      </a:r>
+                    </a:p>
+                  </a:txBody>
+                  <a:tcPr/>
+                </a:tc>
+              </a:tr>
+            </a:tbl>
+          </a:graphicData>
+        </a:graphic>
+      </p:graphicFrame>
+      <p:graphicFrame>
+        <p:nvGraphicFramePr>
+          <p:cNvPr id="6" name="Table 5"/>
+          <p:cNvGraphicFramePr>
+            <a:graphicFrameLocks noGrp="1"/>
+          </p:cNvGraphicFramePr>
+          <p:nvPr/>
+        </p:nvGraphicFramePr>
+        <p:xfrm>
+          <a:off x="6172200" y="1280160"/>
+          <a:ext cx="5669280" cy="4526280"/>
+        </p:xfrm>
+        <a:graphic>
+          <a:graphicData uri="http://schemas.openxmlformats.org/drawingml/2006/table">
+            <a:tbl>
+              <a:tblPr firstRow="1" bandRow="1">
+                <a:tableStyleId>{5C22544A-7EE6-4342-B048-85BDC9FD1C3A}</a:tableStyleId>
+              </a:tblPr>
+              <a:tblGrid>
+                <a:gridCol w="914400"/>
+                <a:gridCol w="1005840"/>
+                <a:gridCol w="1005840"/>
+                <a:gridCol w="2743200"/>
+              </a:tblGrid>
+              <a:tr h="411480">
+                <a:tc>
+                  <a:txBody>
+                    <a:bodyPr lIns="54864" rIns="54864" tIns="18288" bIns="18288" wrap="square" anchor="ctr"/>
+                    <a:lstStyle/>
+                    <a:p>
+                      <a:pPr algn="l"/>
+                      <a:r>
+                        <a:rPr sz="1000" b="1">
+                          <a:solidFill>
+                            <a:srgbClr val="FFFFFF"/>
+                          </a:solidFill>
+                          <a:latin typeface="Calibri"/>
+                        </a:rPr>
+                        <a:t>Spec</a:t>
+                      </a:r>
+                    </a:p>
+                  </a:txBody>
+                  <a:tcPr>
+                    <a:solidFill>
+                      <a:srgbClr val="143D2F"/>
+                    </a:solidFill>
+                  </a:tcPr>
+                </a:tc>
+                <a:tc>
+                  <a:txBody>
+                    <a:bodyPr lIns="54864" rIns="54864" tIns="18288" bIns="18288" wrap="square" anchor="ctr"/>
+                    <a:lstStyle/>
+                    <a:p>
+                      <a:pPr algn="l"/>
+                      <a:r>
+                        <a:rPr sz="1000" b="1">
+                          <a:solidFill>
+                            <a:srgbClr val="FFFFFF"/>
+                          </a:solidFill>
+                          <a:latin typeface="Calibri"/>
+                        </a:rPr>
+                        <a:t>Infill</a:t>
+                      </a:r>
+                    </a:p>
+                  </a:txBody>
+                  <a:tcPr>
+                    <a:solidFill>
+                      <a:srgbClr val="143D2F"/>
+                    </a:solidFill>
+                  </a:tcPr>
+                </a:tc>
+                <a:tc>
+                  <a:txBody>
+                    <a:bodyPr lIns="54864" rIns="54864" tIns="18288" bIns="18288" wrap="square" anchor="ctr"/>
+                    <a:lstStyle/>
+                    <a:p>
+                      <a:pPr algn="l"/>
+                      <a:r>
+                        <a:rPr sz="1000" b="1">
+                          <a:solidFill>
+                            <a:srgbClr val="FFFFFF"/>
+                          </a:solidFill>
+                          <a:latin typeface="Calibri"/>
+                        </a:rPr>
+                        <a:t>Colour</a:t>
+                      </a:r>
+                    </a:p>
+                  </a:txBody>
+                  <a:tcPr>
+                    <a:solidFill>
+                      <a:srgbClr val="143D2F"/>
+                    </a:solidFill>
+                  </a:tcPr>
+                </a:tc>
+                <a:tc>
+                  <a:txBody>
+                    <a:bodyPr lIns="54864" rIns="54864" tIns="18288" bIns="18288" wrap="square" anchor="ctr"/>
+                    <a:lstStyle/>
+                    <a:p>
+                      <a:pPr algn="l"/>
+                      <a:r>
+                        <a:rPr sz="1000" b="1">
+                          <a:solidFill>
+                            <a:srgbClr val="FFFFFF"/>
+                          </a:solidFill>
+                          <a:latin typeface="Calibri"/>
+                        </a:rPr>
+                        <a:t>Test / result</a:t>
+                      </a:r>
+                    </a:p>
+                  </a:txBody>
+                  <a:tcPr>
+                    <a:solidFill>
+                      <a:srgbClr val="143D2F"/>
+                    </a:solidFill>
+                  </a:tcPr>
+                </a:tc>
+              </a:tr>
+              <a:tr h="411480">
+                <a:tc>
+                  <a:txBody>
+                    <a:bodyPr lIns="54864" rIns="54864" tIns="18288" bIns="18288" wrap="square" anchor="ctr"/>
+                    <a:lstStyle/>
+                    <a:p>
+                      <a:pPr algn="l"/>
+                      <a:r>
+                        <a:rPr sz="900" b="0">
+                          <a:solidFill>
+                            <a:srgbClr val="000000"/>
+                          </a:solidFill>
+                          <a:latin typeface="Calibri"/>
+                        </a:rPr>
+                        <a:t>S10</a:t>
+                      </a:r>
+                    </a:p>
+                  </a:txBody>
+                  <a:tcPr/>
+                </a:tc>
+                <a:tc>
+                  <a:txBody>
+                    <a:bodyPr lIns="54864" rIns="54864" tIns="18288" bIns="18288" wrap="square" anchor="ctr"/>
+                    <a:lstStyle/>
+                    <a:p>
+                      <a:pPr algn="l"/>
+                      <a:r>
+                        <a:rPr sz="900" b="0">
+                          <a:solidFill>
+                            <a:srgbClr val="000000"/>
+                          </a:solidFill>
+                          <a:latin typeface="Calibri"/>
+                        </a:rPr>
+                        <a:t>100%</a:t>
+                      </a:r>
+                    </a:p>
+                  </a:txBody>
+                  <a:tcPr/>
+                </a:tc>
+                <a:tc>
+                  <a:txBody>
+                    <a:bodyPr lIns="54864" rIns="54864" tIns="18288" bIns="18288" wrap="square" anchor="ctr"/>
+                    <a:lstStyle/>
+                    <a:p>
+                      <a:pPr algn="l"/>
+                      <a:r>
+                        <a:rPr sz="900" b="0">
+                          <a:solidFill>
+                            <a:srgbClr val="000000"/>
+                          </a:solidFill>
+                          <a:latin typeface="Calibri"/>
+                        </a:rPr>
+                        <a:t/>
+                      </a:r>
+                    </a:p>
+                  </a:txBody>
+                  <a:tcPr/>
+                </a:tc>
+                <a:tc>
+                  <a:txBody>
+                    <a:bodyPr lIns="54864" rIns="54864" tIns="18288" bIns="18288" wrap="square" anchor="ctr"/>
+                    <a:lstStyle/>
+                    <a:p>
+                      <a:pPr algn="l"/>
+                      <a:r>
+                        <a:rPr sz="900" b="0">
+                          <a:solidFill>
+                            <a:srgbClr val="000000"/>
+                          </a:solidFill>
+                          <a:latin typeface="Calibri"/>
+                        </a:rPr>
+                        <a:t>V6c · 46.8 MPa</a:t>
+                      </a:r>
+                    </a:p>
+                  </a:txBody>
+                  <a:tcPr/>
+                </a:tc>
+              </a:tr>
+              <a:tr h="411480">
+                <a:tc>
+                  <a:txBody>
+                    <a:bodyPr lIns="54864" rIns="54864" tIns="18288" bIns="18288" wrap="square" anchor="ctr"/>
+                    <a:lstStyle/>
+                    <a:p>
+                      <a:pPr algn="l"/>
+                      <a:r>
+                        <a:rPr sz="900" b="0">
+                          <a:solidFill>
+                            <a:srgbClr val="000000"/>
+                          </a:solidFill>
+                          <a:latin typeface="Calibri"/>
+                        </a:rPr>
+                        <a:t>S11</a:t>
+                      </a:r>
+                    </a:p>
+                  </a:txBody>
+                  <a:tcPr/>
+                </a:tc>
+                <a:tc>
+                  <a:txBody>
+                    <a:bodyPr lIns="54864" rIns="54864" tIns="18288" bIns="18288" wrap="square" anchor="ctr"/>
+                    <a:lstStyle/>
+                    <a:p>
+                      <a:pPr algn="l"/>
+                      <a:r>
+                        <a:rPr sz="900" b="0">
+                          <a:solidFill>
+                            <a:srgbClr val="000000"/>
+                          </a:solidFill>
+                          <a:latin typeface="Calibri"/>
+                        </a:rPr>
+                        <a:t>100%</a:t>
+                      </a:r>
+                    </a:p>
+                  </a:txBody>
+                  <a:tcPr/>
+                </a:tc>
+                <a:tc>
+                  <a:txBody>
+                    <a:bodyPr lIns="54864" rIns="54864" tIns="18288" bIns="18288" wrap="square" anchor="ctr"/>
+                    <a:lstStyle/>
+                    <a:p>
+                      <a:pPr algn="l"/>
+                      <a:r>
+                        <a:rPr sz="900" b="0">
+                          <a:solidFill>
+                            <a:srgbClr val="000000"/>
+                          </a:solidFill>
+                          <a:latin typeface="Calibri"/>
+                        </a:rPr>
+                        <a:t/>
+                      </a:r>
+                    </a:p>
+                  </a:txBody>
+                  <a:tcPr/>
+                </a:tc>
+                <a:tc>
+                  <a:txBody>
+                    <a:bodyPr lIns="54864" rIns="54864" tIns="18288" bIns="18288" wrap="square" anchor="ctr"/>
+                    <a:lstStyle/>
+                    <a:p>
+                      <a:pPr algn="l"/>
+                      <a:r>
+                        <a:rPr sz="900" b="0">
+                          <a:solidFill>
+                            <a:srgbClr val="000000"/>
+                          </a:solidFill>
+                          <a:latin typeface="Calibri"/>
+                        </a:rPr>
+                        <a:t>V6d · 46.1 MPa</a:t>
+                      </a:r>
+                    </a:p>
+                  </a:txBody>
+                  <a:tcPr/>
+                </a:tc>
+              </a:tr>
+              <a:tr h="411480">
+                <a:tc>
+                  <a:txBody>
+                    <a:bodyPr lIns="54864" rIns="54864" tIns="18288" bIns="18288" wrap="square" anchor="ctr"/>
+                    <a:lstStyle/>
+                    <a:p>
+                      <a:pPr algn="l"/>
+                      <a:r>
+                        <a:rPr sz="900" b="0">
+                          <a:solidFill>
+                            <a:srgbClr val="000000"/>
+                          </a:solidFill>
+                          <a:latin typeface="Calibri"/>
+                        </a:rPr>
+                        <a:t>S12</a:t>
+                      </a:r>
+                    </a:p>
+                  </a:txBody>
+                  <a:tcPr/>
+                </a:tc>
+                <a:tc>
+                  <a:txBody>
+                    <a:bodyPr lIns="54864" rIns="54864" tIns="18288" bIns="18288" wrap="square" anchor="ctr"/>
+                    <a:lstStyle/>
+                    <a:p>
+                      <a:pPr algn="l"/>
+                      <a:r>
+                        <a:rPr sz="900" b="0">
+                          <a:solidFill>
+                            <a:srgbClr val="000000"/>
+                          </a:solidFill>
+                          <a:latin typeface="Calibri"/>
+                        </a:rPr>
+                        <a:t/>
+                      </a:r>
+                    </a:p>
+                  </a:txBody>
+                  <a:tcPr/>
+                </a:tc>
+                <a:tc>
+                  <a:txBody>
+                    <a:bodyPr lIns="54864" rIns="54864" tIns="18288" bIns="18288" wrap="square" anchor="ctr"/>
+                    <a:lstStyle/>
+                    <a:p>
+                      <a:pPr algn="l"/>
+                      <a:r>
+                        <a:rPr sz="900" b="0">
+                          <a:solidFill>
+                            <a:srgbClr val="000000"/>
+                          </a:solidFill>
+                          <a:latin typeface="Calibri"/>
+                        </a:rPr>
+                        <a:t/>
+                      </a:r>
+                    </a:p>
+                  </a:txBody>
+                  <a:tcPr/>
+                </a:tc>
+                <a:tc>
+                  <a:txBody>
+                    <a:bodyPr lIns="54864" rIns="54864" tIns="18288" bIns="18288" wrap="square" anchor="ctr"/>
+                    <a:lstStyle/>
+                    <a:p>
+                      <a:pPr algn="l"/>
+                      <a:r>
+                        <a:rPr sz="900" b="0">
+                          <a:solidFill>
+                            <a:srgbClr val="000000"/>
+                          </a:solidFill>
+                          <a:latin typeface="Calibri"/>
+                        </a:rPr>
+                        <a:t/>
+                      </a:r>
+                    </a:p>
+                  </a:txBody>
+                  <a:tcPr/>
+                </a:tc>
+              </a:tr>
+              <a:tr h="411480">
+                <a:tc>
+                  <a:txBody>
+                    <a:bodyPr lIns="54864" rIns="54864" tIns="18288" bIns="18288" wrap="square" anchor="ctr"/>
+                    <a:lstStyle/>
+                    <a:p>
+                      <a:pPr algn="l"/>
+                      <a:r>
+                        <a:rPr sz="900" b="0">
+                          <a:solidFill>
+                            <a:srgbClr val="000000"/>
+                          </a:solidFill>
+                          <a:latin typeface="Calibri"/>
+                        </a:rPr>
+                        <a:t>S13</a:t>
+                      </a:r>
+                    </a:p>
+                  </a:txBody>
+                  <a:tcPr/>
+                </a:tc>
+                <a:tc>
+                  <a:txBody>
+                    <a:bodyPr lIns="54864" rIns="54864" tIns="18288" bIns="18288" wrap="square" anchor="ctr"/>
+                    <a:lstStyle/>
+                    <a:p>
+                      <a:pPr algn="l"/>
+                      <a:r>
+                        <a:rPr sz="900" b="0">
+                          <a:solidFill>
+                            <a:srgbClr val="000000"/>
+                          </a:solidFill>
+                          <a:latin typeface="Calibri"/>
+                        </a:rPr>
+                        <a:t/>
+                      </a:r>
+                    </a:p>
+                  </a:txBody>
+                  <a:tcPr/>
+                </a:tc>
+                <a:tc>
+                  <a:txBody>
+                    <a:bodyPr lIns="54864" rIns="54864" tIns="18288" bIns="18288" wrap="square" anchor="ctr"/>
+                    <a:lstStyle/>
+                    <a:p>
+                      <a:pPr algn="l"/>
+                      <a:r>
+                        <a:rPr sz="900" b="0">
+                          <a:solidFill>
+                            <a:srgbClr val="000000"/>
+                          </a:solidFill>
+                          <a:latin typeface="Calibri"/>
+                        </a:rPr>
+                        <a:t/>
+                      </a:r>
+                    </a:p>
+                  </a:txBody>
+                  <a:tcPr/>
+                </a:tc>
+                <a:tc>
+                  <a:txBody>
+                    <a:bodyPr lIns="54864" rIns="54864" tIns="18288" bIns="18288" wrap="square" anchor="ctr"/>
+                    <a:lstStyle/>
+                    <a:p>
+                      <a:pPr algn="l"/>
+                      <a:r>
+                        <a:rPr sz="900" b="0">
+                          <a:solidFill>
+                            <a:srgbClr val="000000"/>
+                          </a:solidFill>
+                          <a:latin typeface="Calibri"/>
+                        </a:rPr>
+                        <a:t/>
+                      </a:r>
+                    </a:p>
+                  </a:txBody>
+                  <a:tcPr/>
+                </a:tc>
+              </a:tr>
+              <a:tr h="411480">
+                <a:tc>
+                  <a:txBody>
+                    <a:bodyPr lIns="54864" rIns="54864" tIns="18288" bIns="18288" wrap="square" anchor="ctr"/>
+                    <a:lstStyle/>
+                    <a:p>
+                      <a:pPr algn="l"/>
+                      <a:r>
+                        <a:rPr sz="900" b="0">
+                          <a:solidFill>
+                            <a:srgbClr val="000000"/>
+                          </a:solidFill>
+                          <a:latin typeface="Calibri"/>
+                        </a:rPr>
+                        <a:t>S14</a:t>
+                      </a:r>
+                    </a:p>
+                  </a:txBody>
+                  <a:tcPr/>
+                </a:tc>
+                <a:tc>
+                  <a:txBody>
+                    <a:bodyPr lIns="54864" rIns="54864" tIns="18288" bIns="18288" wrap="square" anchor="ctr"/>
+                    <a:lstStyle/>
+                    <a:p>
+                      <a:pPr algn="l"/>
+                      <a:r>
+                        <a:rPr sz="900" b="0">
+                          <a:solidFill>
+                            <a:srgbClr val="000000"/>
+                          </a:solidFill>
+                          <a:latin typeface="Calibri"/>
+                        </a:rPr>
+                        <a:t/>
+                      </a:r>
+                    </a:p>
+                  </a:txBody>
+                  <a:tcPr/>
+                </a:tc>
+                <a:tc>
+                  <a:txBody>
+                    <a:bodyPr lIns="54864" rIns="54864" tIns="18288" bIns="18288" wrap="square" anchor="ctr"/>
+                    <a:lstStyle/>
+                    <a:p>
+                      <a:pPr algn="l"/>
+                      <a:r>
+                        <a:rPr sz="900" b="0">
+                          <a:solidFill>
+                            <a:srgbClr val="000000"/>
+                          </a:solidFill>
+                          <a:latin typeface="Calibri"/>
+                        </a:rPr>
+                        <a:t/>
+                      </a:r>
+                    </a:p>
+                  </a:txBody>
+                  <a:tcPr/>
+                </a:tc>
+                <a:tc>
+                  <a:txBody>
+                    <a:bodyPr lIns="54864" rIns="54864" tIns="18288" bIns="18288" wrap="square" anchor="ctr"/>
+                    <a:lstStyle/>
+                    <a:p>
+                      <a:pPr algn="l"/>
+                      <a:r>
+                        <a:rPr sz="900" b="0">
+                          <a:solidFill>
+                            <a:srgbClr val="000000"/>
+                          </a:solidFill>
+                          <a:latin typeface="Calibri"/>
+                        </a:rPr>
+                        <a:t/>
+                      </a:r>
+                    </a:p>
+                  </a:txBody>
+                  <a:tcPr/>
+                </a:tc>
+              </a:tr>
+              <a:tr h="411480">
+                <a:tc>
+                  <a:txBody>
+                    <a:bodyPr lIns="54864" rIns="54864" tIns="18288" bIns="18288" wrap="square" anchor="ctr"/>
+                    <a:lstStyle/>
+                    <a:p>
+                      <a:pPr algn="l"/>
+                      <a:r>
+                        <a:rPr sz="900" b="0">
+                          <a:solidFill>
+                            <a:srgbClr val="000000"/>
+                          </a:solidFill>
+                          <a:latin typeface="Calibri"/>
+                        </a:rPr>
+                        <a:t>S15</a:t>
+                      </a:r>
+                    </a:p>
+                  </a:txBody>
+                  <a:tcPr/>
+                </a:tc>
+                <a:tc>
+                  <a:txBody>
+                    <a:bodyPr lIns="54864" rIns="54864" tIns="18288" bIns="18288" wrap="square" anchor="ctr"/>
+                    <a:lstStyle/>
+                    <a:p>
+                      <a:pPr algn="l"/>
+                      <a:r>
+                        <a:rPr sz="900" b="0">
+                          <a:solidFill>
+                            <a:srgbClr val="000000"/>
+                          </a:solidFill>
+                          <a:latin typeface="Calibri"/>
+                        </a:rPr>
+                        <a:t>100%</a:t>
+                      </a:r>
+                    </a:p>
+                  </a:txBody>
+                  <a:tcPr/>
+                </a:tc>
+                <a:tc>
+                  <a:txBody>
+                    <a:bodyPr lIns="54864" rIns="54864" tIns="18288" bIns="18288" wrap="square" anchor="ctr"/>
+                    <a:lstStyle/>
+                    <a:p>
+                      <a:pPr algn="l"/>
+                      <a:r>
+                        <a:rPr sz="900" b="0">
+                          <a:solidFill>
+                            <a:srgbClr val="000000"/>
+                          </a:solidFill>
+                          <a:latin typeface="Calibri"/>
+                        </a:rPr>
+                        <a:t/>
+                      </a:r>
+                    </a:p>
+                  </a:txBody>
+                  <a:tcPr/>
+                </a:tc>
+                <a:tc>
+                  <a:txBody>
+                    <a:bodyPr lIns="54864" rIns="54864" tIns="18288" bIns="18288" wrap="square" anchor="ctr"/>
+                    <a:lstStyle/>
+                    <a:p>
+                      <a:pPr algn="l"/>
+                      <a:r>
+                        <a:rPr sz="900" b="0">
+                          <a:solidFill>
+                            <a:srgbClr val="000000"/>
+                          </a:solidFill>
+                          <a:latin typeface="Calibri"/>
+                        </a:rPr>
+                        <a:t>stall (no fracture)</a:t>
+                      </a:r>
+                    </a:p>
+                  </a:txBody>
+                  <a:tcPr/>
+                </a:tc>
+              </a:tr>
+              <a:tr h="411480">
+                <a:tc>
+                  <a:txBody>
+                    <a:bodyPr lIns="54864" rIns="54864" tIns="18288" bIns="18288" wrap="square" anchor="ctr"/>
+                    <a:lstStyle/>
+                    <a:p>
+                      <a:pPr algn="l"/>
+                      <a:r>
+                        <a:rPr sz="900" b="0">
+                          <a:solidFill>
+                            <a:srgbClr val="000000"/>
+                          </a:solidFill>
+                          <a:latin typeface="Calibri"/>
+                        </a:rPr>
+                        <a:t>S16</a:t>
+                      </a:r>
+                    </a:p>
+                  </a:txBody>
+                  <a:tcPr/>
+                </a:tc>
+                <a:tc>
+                  <a:txBody>
+                    <a:bodyPr lIns="54864" rIns="54864" tIns="18288" bIns="18288" wrap="square" anchor="ctr"/>
+                    <a:lstStyle/>
+                    <a:p>
+                      <a:pPr algn="l"/>
+                      <a:r>
+                        <a:rPr sz="900" b="0">
+                          <a:solidFill>
+                            <a:srgbClr val="000000"/>
+                          </a:solidFill>
+                          <a:latin typeface="Calibri"/>
+                        </a:rPr>
+                        <a:t>100%</a:t>
+                      </a:r>
+                    </a:p>
+                  </a:txBody>
+                  <a:tcPr/>
+                </a:tc>
+                <a:tc>
+                  <a:txBody>
+                    <a:bodyPr lIns="54864" rIns="54864" tIns="18288" bIns="18288" wrap="square" anchor="ctr"/>
+                    <a:lstStyle/>
+                    <a:p>
+                      <a:pPr algn="l"/>
+                      <a:r>
+                        <a:rPr sz="900" b="0">
+                          <a:solidFill>
+                            <a:srgbClr val="000000"/>
+                          </a:solidFill>
+                          <a:latin typeface="Calibri"/>
+                        </a:rPr>
+                        <a:t/>
+                      </a:r>
+                    </a:p>
+                  </a:txBody>
+                  <a:tcPr/>
+                </a:tc>
+                <a:tc>
+                  <a:txBody>
+                    <a:bodyPr lIns="54864" rIns="54864" tIns="18288" bIns="18288" wrap="square" anchor="ctr"/>
+                    <a:lstStyle/>
+                    <a:p>
+                      <a:pPr algn="l"/>
+                      <a:r>
+                        <a:rPr sz="900" b="0">
+                          <a:solidFill>
+                            <a:srgbClr val="000000"/>
+                          </a:solidFill>
+                          <a:latin typeface="Calibri"/>
+                        </a:rPr>
+                        <a:t>first 100% fracture · 47.4</a:t>
+                      </a:r>
+                    </a:p>
+                  </a:txBody>
+                  <a:tcPr/>
+                </a:tc>
+              </a:tr>
+              <a:tr h="411480">
+                <a:tc>
+                  <a:txBody>
+                    <a:bodyPr lIns="54864" rIns="54864" tIns="18288" bIns="18288" wrap="square" anchor="ctr"/>
+                    <a:lstStyle/>
+                    <a:p>
+                      <a:pPr algn="l"/>
+                      <a:r>
+                        <a:rPr sz="900" b="0">
+                          <a:solidFill>
+                            <a:srgbClr val="000000"/>
+                          </a:solidFill>
+                          <a:latin typeface="Calibri"/>
+                        </a:rPr>
+                        <a:t>S17</a:t>
+                      </a:r>
+                    </a:p>
+                  </a:txBody>
+                  <a:tcPr/>
+                </a:tc>
+                <a:tc>
+                  <a:txBody>
+                    <a:bodyPr lIns="54864" rIns="54864" tIns="18288" bIns="18288" wrap="square" anchor="ctr"/>
+                    <a:lstStyle/>
+                    <a:p>
+                      <a:pPr algn="l"/>
+                      <a:r>
+                        <a:rPr sz="900" b="0">
+                          <a:solidFill>
+                            <a:srgbClr val="000000"/>
+                          </a:solidFill>
+                          <a:latin typeface="Calibri"/>
+                        </a:rPr>
+                        <a:t>100%</a:t>
+                      </a:r>
+                    </a:p>
+                  </a:txBody>
+                  <a:tcPr/>
+                </a:tc>
+                <a:tc>
+                  <a:txBody>
+                    <a:bodyPr lIns="54864" rIns="54864" tIns="18288" bIns="18288" wrap="square" anchor="ctr"/>
+                    <a:lstStyle/>
+                    <a:p>
+                      <a:pPr algn="l"/>
+                      <a:r>
+                        <a:rPr sz="900" b="0">
+                          <a:solidFill>
+                            <a:srgbClr val="000000"/>
+                          </a:solidFill>
+                          <a:latin typeface="Calibri"/>
+                        </a:rPr>
+                        <a:t/>
+                      </a:r>
+                    </a:p>
+                  </a:txBody>
+                  <a:tcPr/>
+                </a:tc>
+                <a:tc>
+                  <a:txBody>
+                    <a:bodyPr lIns="54864" rIns="54864" tIns="18288" bIns="18288" wrap="square" anchor="ctr"/>
+                    <a:lstStyle/>
+                    <a:p>
+                      <a:pPr algn="l"/>
+                      <a:r>
+                        <a:rPr sz="900" b="0">
+                          <a:solidFill>
+                            <a:srgbClr val="000000"/>
+                          </a:solidFill>
+                          <a:latin typeface="Calibri"/>
+                        </a:rPr>
+                        <a:t>halt tests · SR-frac</a:t>
+                      </a:r>
+                    </a:p>
+                  </a:txBody>
+                  <a:tcPr/>
+                </a:tc>
+              </a:tr>
+              <a:tr h="411480">
+                <a:tc>
+                  <a:txBody>
+                    <a:bodyPr lIns="54864" rIns="54864" tIns="18288" bIns="18288" wrap="square" anchor="ctr"/>
+                    <a:lstStyle/>
+                    <a:p>
+                      <a:pPr algn="l"/>
+                      <a:r>
+                        <a:rPr sz="900" b="0">
+                          <a:solidFill>
+                            <a:srgbClr val="000000"/>
+                          </a:solidFill>
+                          <a:latin typeface="Calibri"/>
+                        </a:rPr>
+                        <a:t>S18</a:t>
+                      </a:r>
+                    </a:p>
+                  </a:txBody>
+                  <a:tcPr/>
+                </a:tc>
+                <a:tc>
+                  <a:txBody>
+                    <a:bodyPr lIns="54864" rIns="54864" tIns="18288" bIns="18288" wrap="square" anchor="ctr"/>
+                    <a:lstStyle/>
+                    <a:p>
+                      <a:pPr algn="l"/>
+                      <a:r>
+                        <a:rPr sz="900" b="0">
+                          <a:solidFill>
+                            <a:srgbClr val="000000"/>
+                          </a:solidFill>
+                          <a:latin typeface="Calibri"/>
+                        </a:rPr>
+                        <a:t/>
+                      </a:r>
+                    </a:p>
+                  </a:txBody>
+                  <a:tcPr/>
+                </a:tc>
+                <a:tc>
+                  <a:txBody>
+                    <a:bodyPr lIns="54864" rIns="54864" tIns="18288" bIns="18288" wrap="square" anchor="ctr"/>
+                    <a:lstStyle/>
+                    <a:p>
+                      <a:pPr algn="l"/>
+                      <a:r>
+                        <a:rPr sz="900" b="0">
+                          <a:solidFill>
+                            <a:srgbClr val="000000"/>
+                          </a:solidFill>
+                          <a:latin typeface="Calibri"/>
+                        </a:rPr>
+                        <a:t/>
+                      </a:r>
+                    </a:p>
+                  </a:txBody>
+                  <a:tcPr/>
+                </a:tc>
+                <a:tc>
+                  <a:txBody>
+                    <a:bodyPr lIns="54864" rIns="54864" tIns="18288" bIns="18288" wrap="square" anchor="ctr"/>
+                    <a:lstStyle/>
+                    <a:p>
+                      <a:pPr algn="l"/>
+                      <a:r>
+                        <a:rPr sz="900" b="0">
+                          <a:solidFill>
+                            <a:srgbClr val="000000"/>
+                          </a:solidFill>
+                          <a:latin typeface="Calibri"/>
+                        </a:rPr>
+                        <a:t/>
+                      </a:r>
+                    </a:p>
+                  </a:txBody>
+                  <a:tcPr/>
+                </a:tc>
+              </a:tr>
+              <a:tr h="411480">
+                <a:tc>
+                  <a:txBody>
+                    <a:bodyPr lIns="54864" rIns="54864" tIns="18288" bIns="18288" wrap="square" anchor="ctr"/>
+                    <a:lstStyle/>
+                    <a:p>
+                      <a:pPr algn="l"/>
+                      <a:r>
+                        <a:rPr sz="900" b="0">
+                          <a:solidFill>
+                            <a:srgbClr val="000000"/>
+                          </a:solidFill>
+                          <a:latin typeface="Calibri"/>
+                        </a:rPr>
+                        <a:t>S19</a:t>
+                      </a:r>
+                    </a:p>
+                  </a:txBody>
+                  <a:tcPr/>
+                </a:tc>
+                <a:tc>
+                  <a:txBody>
+                    <a:bodyPr lIns="54864" rIns="54864" tIns="18288" bIns="18288" wrap="square" anchor="ctr"/>
+                    <a:lstStyle/>
+                    <a:p>
+                      <a:pPr algn="l"/>
+                      <a:r>
+                        <a:rPr sz="900" b="0">
+                          <a:solidFill>
+                            <a:srgbClr val="000000"/>
+                          </a:solidFill>
+                          <a:latin typeface="Calibri"/>
+                        </a:rPr>
+                        <a:t>50%</a:t>
+                      </a:r>
+                    </a:p>
+                  </a:txBody>
+                  <a:tcPr/>
+                </a:tc>
+                <a:tc>
+                  <a:txBody>
+                    <a:bodyPr lIns="54864" rIns="54864" tIns="18288" bIns="18288" wrap="square" anchor="ctr"/>
+                    <a:lstStyle/>
+                    <a:p>
+                      <a:pPr algn="l"/>
+                      <a:r>
+                        <a:rPr sz="900" b="0">
+                          <a:solidFill>
+                            <a:srgbClr val="000000"/>
+                          </a:solidFill>
+                          <a:latin typeface="Calibri"/>
+                        </a:rPr>
+                        <a:t/>
+                      </a:r>
+                    </a:p>
+                  </a:txBody>
+                  <a:tcPr/>
+                </a:tc>
+                <a:tc>
+                  <a:txBody>
+                    <a:bodyPr lIns="54864" rIns="54864" tIns="18288" bIns="18288" wrap="square" anchor="ctr"/>
+                    <a:lstStyle/>
+                    <a:p>
+                      <a:pPr algn="l"/>
+                      <a:r>
+                        <a:rPr sz="900" b="0">
+                          <a:solidFill>
+                            <a:srgbClr val="000000"/>
+                          </a:solidFill>
+                          <a:latin typeface="Calibri"/>
+                        </a:rPr>
+                        <a:t>V1 batch</a:t>
+                      </a:r>
+                    </a:p>
+                  </a:txBody>
+                  <a:tcPr/>
+                </a:tc>
+              </a:tr>
+            </a:tbl>
+          </a:graphicData>
+        </a:graphic>
+      </p:graphicFrame>
+      <p:sp>
+        <p:nvSpPr>
+          <p:cNvPr id="7" name="TextBox 6"/>
+          <p:cNvSpPr txBox="1"/>
+          <p:nvPr/>
+        </p:nvSpPr>
+        <p:spPr>
+          <a:xfrm>
+            <a:off x="548640" y="6400800"/>
+            <a:ext cx="11064240" cy="365760"/>
+          </a:xfrm>
+          <a:prstGeom prst="rect">
+            <a:avLst/>
+          </a:prstGeom>
+          <a:noFill/>
+        </p:spPr>
+        <p:txBody>
+          <a:bodyPr wrap="square" lIns="45720" rIns="45720" tIns="18288" bIns="18288" anchor="t">
+            <a:spAutoFit/>
+          </a:bodyPr>
+          <a:lstStyle/>
+          <a:p>
+            <a:pPr algn="l"/>
+            <a:r>
+              <a:rPr sz="1200" b="0" i="1">
+                <a:solidFill>
+                  <a:srgbClr val="707070"/>
+                </a:solidFill>
+                <a:latin typeface="Calibri"/>
+              </a:rPr>
+              <a:t>All spray markers (black dots on PLA). V1_Spray batch = 50% · V2_Spray = 100%. Colour (white/black) + blank cells to be filled by operator.</a:t>
+            </a:r>
+          </a:p>
+        </p:txBody>
+      </p:sp>
+      <p:sp>
+        <p:nvSpPr>
+          <p:cNvPr id="8" name="TextBox 7"/>
+          <p:cNvSpPr txBox="1"/>
+          <p:nvPr/>
+        </p:nvSpPr>
+        <p:spPr>
+          <a:xfrm>
+            <a:off x="457200" y="6446520"/>
+            <a:ext cx="640080" cy="274320"/>
+          </a:xfrm>
+          <a:prstGeom prst="rect">
+            <a:avLst/>
+          </a:prstGeom>
+          <a:noFill/>
+        </p:spPr>
+        <p:txBody>
+          <a:bodyPr wrap="square" lIns="45720" rIns="45720" tIns="18288" bIns="18288" anchor="t">
+            <a:spAutoFit/>
+          </a:bodyPr>
+          <a:lstStyle/>
+          <a:p>
+            <a:pPr algn="l"/>
+            <a:r>
+              <a:rPr sz="1000" b="0" i="0">
+                <a:solidFill>
+                  <a:srgbClr val="707070"/>
+                </a:solidFill>
+                <a:latin typeface="Calibri"/>
+              </a:rPr>
+              <a:t>175</a:t>
             </a:r>
           </a:p>
         </p:txBody>

--- a/documentation/V6a_8_6_20_slides.pptx
+++ b/documentation/V6a_8_6_20_slides.pptx
@@ -40,6 +40,10 @@
     <p:sldId id="288" r:id="rId39"/>
     <p:sldId id="289" r:id="rId40"/>
     <p:sldId id="290" r:id="rId41"/>
+    <p:sldId id="291" r:id="rId42"/>
+    <p:sldId id="292" r:id="rId43"/>
+    <p:sldId id="293" r:id="rId44"/>
+    <p:sldId id="294" r:id="rId45"/>
   </p:sldIdLst>
   <p:sldSz cx="12191695" cy="6858000" type="screen4x3"/>
   <p:notesSz cx="6858000" cy="9144000"/>
@@ -21571,7 +21575,7 @@
                 </a:solidFill>
                 <a:latin typeface="Calibri"/>
               </a:rPr>
-              <a:t>How it works</a:t>
+              <a:t>ACTIVATION CONDITION</a:t>
             </a:r>
           </a:p>
         </p:txBody>
@@ -21584,188 +21588,8 @@
         </p:nvSpPr>
         <p:spPr>
           <a:xfrm>
-            <a:off x="7315200" y="1600200"/>
-            <a:ext cx="4526280" cy="548640"/>
-          </a:xfrm>
-          <a:prstGeom prst="roundRect">
-            <a:avLst/>
-          </a:prstGeom>
-          <a:solidFill>
-            <a:srgbClr val="FFFFFF"/>
-          </a:solidFill>
-          <a:ln w="15240">
-            <a:solidFill>
-              <a:srgbClr val="1F77B4"/>
-            </a:solidFill>
-          </a:ln>
-        </p:spPr>
-        <p:style>
-          <a:lnRef idx="1">
-            <a:schemeClr val="accent1"/>
-          </a:lnRef>
-          <a:fillRef idx="3">
-            <a:schemeClr val="accent1"/>
-          </a:fillRef>
-          <a:effectRef idx="2">
-            <a:schemeClr val="accent1"/>
-          </a:effectRef>
-          <a:fontRef idx="minor">
-            <a:schemeClr val="lt1"/>
-          </a:fontRef>
-        </p:style>
-        <p:txBody>
-          <a:bodyPr rtlCol="0" anchor="ctr" lIns="54864" rIns="54864" tIns="27432" bIns="27432" wrap="square"/>
-          <a:lstStyle/>
-          <a:p>
-            <a:pPr algn="ctr"/>
-            <a:r>
-              <a:rPr sz="1100" b="0">
-                <a:solidFill>
-                  <a:srgbClr val="000000"/>
-                </a:solidFill>
-                <a:latin typeface="Calibri"/>
-              </a:rPr>
-              <a:t>Track the peak load</a:t>
-            </a:r>
-          </a:p>
-        </p:txBody>
-      </p:sp>
-      <p:cxnSp>
-        <p:nvCxnSpPr>
-          <p:cNvPr id="8" name="Connector 7"/>
-          <p:cNvCxnSpPr/>
-          <p:nvPr/>
-        </p:nvCxnSpPr>
-        <p:spPr>
-          <a:xfrm>
-            <a:off x="9573768" y="2148840"/>
-            <a:ext cx="0" cy="164592"/>
-          </a:xfrm>
-          <a:prstGeom prst="line">
-            <a:avLst/>
-          </a:prstGeom>
-          <a:ln w="25400">
-            <a:solidFill>
-              <a:srgbClr val="555555"/>
-            </a:solidFill>
-            <a:tailEnd type="triangle" w="med" len="med"/>
-          </a:ln>
-        </p:spPr>
-        <p:style>
-          <a:lnRef idx="2">
-            <a:schemeClr val="accent1"/>
-          </a:lnRef>
-          <a:fillRef idx="0">
-            <a:schemeClr val="accent1"/>
-          </a:fillRef>
-          <a:effectRef idx="1">
-            <a:schemeClr val="accent1"/>
-          </a:effectRef>
-          <a:fontRef idx="minor">
-            <a:schemeClr val="tx1"/>
-          </a:fontRef>
-        </p:style>
-      </p:cxnSp>
-      <p:sp>
-        <p:nvSpPr>
-          <p:cNvPr id="9" name="Rounded Rectangle 8"/>
-          <p:cNvSpPr/>
-          <p:nvPr/>
-        </p:nvSpPr>
-        <p:spPr>
-          <a:xfrm>
-            <a:off x="7315200" y="2313432"/>
-            <a:ext cx="4526280" cy="548640"/>
-          </a:xfrm>
-          <a:prstGeom prst="roundRect">
-            <a:avLst/>
-          </a:prstGeom>
-          <a:solidFill>
-            <a:srgbClr val="FFFFFF"/>
-          </a:solidFill>
-          <a:ln w="15240">
-            <a:solidFill>
-              <a:srgbClr val="1F77B4"/>
-            </a:solidFill>
-          </a:ln>
-        </p:spPr>
-        <p:style>
-          <a:lnRef idx="1">
-            <a:schemeClr val="accent1"/>
-          </a:lnRef>
-          <a:fillRef idx="3">
-            <a:schemeClr val="accent1"/>
-          </a:fillRef>
-          <a:effectRef idx="2">
-            <a:schemeClr val="accent1"/>
-          </a:effectRef>
-          <a:fontRef idx="minor">
-            <a:schemeClr val="lt1"/>
-          </a:fontRef>
-        </p:style>
-        <p:txBody>
-          <a:bodyPr rtlCol="0" anchor="ctr" lIns="54864" rIns="54864" tIns="27432" bIns="27432" wrap="square"/>
-          <a:lstStyle/>
-          <a:p>
-            <a:pPr algn="ctr"/>
-            <a:r>
-              <a:rPr sz="1100" b="0">
-                <a:solidFill>
-                  <a:srgbClr val="000000"/>
-                </a:solidFill>
-                <a:latin typeface="Calibri"/>
-              </a:rPr>
-              <a:t>Arm at 30% of peak</a:t>
-            </a:r>
-          </a:p>
-        </p:txBody>
-      </p:sp>
-      <p:cxnSp>
-        <p:nvCxnSpPr>
-          <p:cNvPr id="10" name="Connector 9"/>
-          <p:cNvCxnSpPr/>
-          <p:nvPr/>
-        </p:nvCxnSpPr>
-        <p:spPr>
-          <a:xfrm>
-            <a:off x="9573768" y="2862072"/>
-            <a:ext cx="0" cy="164592"/>
-          </a:xfrm>
-          <a:prstGeom prst="line">
-            <a:avLst/>
-          </a:prstGeom>
-          <a:ln w="25400">
-            <a:solidFill>
-              <a:srgbClr val="555555"/>
-            </a:solidFill>
-            <a:tailEnd type="triangle" w="med" len="med"/>
-          </a:ln>
-        </p:spPr>
-        <p:style>
-          <a:lnRef idx="2">
-            <a:schemeClr val="accent1"/>
-          </a:lnRef>
-          <a:fillRef idx="0">
-            <a:schemeClr val="accent1"/>
-          </a:fillRef>
-          <a:effectRef idx="1">
-            <a:schemeClr val="accent1"/>
-          </a:effectRef>
-          <a:fontRef idx="minor">
-            <a:schemeClr val="tx1"/>
-          </a:fontRef>
-        </p:style>
-      </p:cxnSp>
-      <p:sp>
-        <p:nvSpPr>
-          <p:cNvPr id="11" name="Rounded Rectangle 10"/>
-          <p:cNvSpPr/>
-          <p:nvPr/>
-        </p:nvSpPr>
-        <p:spPr>
-          <a:xfrm>
-            <a:off x="7315200" y="3026664"/>
-            <a:ext cx="4526280" cy="548640"/>
+            <a:off x="7315200" y="1572768"/>
+            <a:ext cx="4526280" cy="1417320"/>
           </a:xfrm>
           <a:prstGeom prst="roundRect">
             <a:avLst/>
@@ -21799,117 +21623,29 @@
           <a:p>
             <a:pPr algn="ctr"/>
             <a:r>
-              <a:rPr sz="1100" b="0">
+              <a:rPr sz="1250" b="1">
                 <a:solidFill>
                   <a:srgbClr val="000000"/>
                 </a:solidFill>
                 <a:latin typeface="Calibri"/>
               </a:rPr>
-              <a:t>Fire when load &lt; 50% (collapse)</a:t>
-            </a:r>
-          </a:p>
-        </p:txBody>
-      </p:sp>
-      <p:cxnSp>
-        <p:nvCxnSpPr>
-          <p:cNvPr id="12" name="Connector 11"/>
-          <p:cNvCxnSpPr/>
-          <p:nvPr/>
-        </p:nvCxnSpPr>
-        <p:spPr>
-          <a:xfrm>
-            <a:off x="9573768" y="3575304"/>
-            <a:ext cx="0" cy="164592"/>
-          </a:xfrm>
-          <a:prstGeom prst="line">
-            <a:avLst/>
-          </a:prstGeom>
-          <a:ln w="25400">
-            <a:solidFill>
-              <a:srgbClr val="555555"/>
-            </a:solidFill>
-            <a:tailEnd type="triangle" w="med" len="med"/>
-          </a:ln>
-        </p:spPr>
-        <p:style>
-          <a:lnRef idx="2">
-            <a:schemeClr val="accent1"/>
-          </a:lnRef>
-          <a:fillRef idx="0">
-            <a:schemeClr val="accent1"/>
-          </a:fillRef>
-          <a:effectRef idx="1">
-            <a:schemeClr val="accent1"/>
-          </a:effectRef>
-          <a:fontRef idx="minor">
-            <a:schemeClr val="tx1"/>
-          </a:fontRef>
-        </p:style>
-      </p:cxnSp>
-      <p:sp>
-        <p:nvSpPr>
-          <p:cNvPr id="13" name="Rounded Rectangle 12"/>
+              <a:t>ARM  when load ≥ 30% of peak
+FIRE  when load &lt; 50% of peak
+(collapse)  →  Stop + E-Stop</a:t>
+            </a:r>
+          </a:p>
+        </p:txBody>
+      </p:sp>
+      <p:sp>
+        <p:nvSpPr>
+          <p:cNvPr id="8" name="Rounded Rectangle 7"/>
           <p:cNvSpPr/>
           <p:nvPr/>
         </p:nvSpPr>
         <p:spPr>
           <a:xfrm>
-            <a:off x="7315200" y="3739896"/>
-            <a:ext cx="4526280" cy="548640"/>
-          </a:xfrm>
-          <a:prstGeom prst="roundRect">
-            <a:avLst/>
-          </a:prstGeom>
-          <a:solidFill>
-            <a:srgbClr val="C8E6C9"/>
-          </a:solidFill>
-          <a:ln w="15240">
-            <a:solidFill>
-              <a:srgbClr val="1F3F2F"/>
-            </a:solidFill>
-          </a:ln>
-        </p:spPr>
-        <p:style>
-          <a:lnRef idx="1">
-            <a:schemeClr val="accent1"/>
-          </a:lnRef>
-          <a:fillRef idx="3">
-            <a:schemeClr val="accent1"/>
-          </a:fillRef>
-          <a:effectRef idx="2">
-            <a:schemeClr val="accent1"/>
-          </a:effectRef>
-          <a:fontRef idx="minor">
-            <a:schemeClr val="lt1"/>
-          </a:fontRef>
-        </p:style>
-        <p:txBody>
-          <a:bodyPr rtlCol="0" anchor="ctr" lIns="54864" rIns="54864" tIns="27432" bIns="27432" wrap="square"/>
-          <a:lstStyle/>
-          <a:p>
-            <a:pPr algn="ctr"/>
-            <a:r>
-              <a:rPr sz="1150" b="1">
-                <a:solidFill>
-                  <a:srgbClr val="1F3F2F"/>
-                </a:solidFill>
-                <a:latin typeface="Calibri"/>
-              </a:rPr>
-              <a:t>Stop + E-Stop</a:t>
-            </a:r>
-          </a:p>
-        </p:txBody>
-      </p:sp>
-      <p:sp>
-        <p:nvSpPr>
-          <p:cNvPr id="14" name="Rounded Rectangle 13"/>
-          <p:cNvSpPr/>
-          <p:nvPr/>
-        </p:nvSpPr>
-        <p:spPr>
-          <a:xfrm>
-            <a:off x="7315200" y="4572000"/>
-            <a:ext cx="2194560" cy="868680"/>
+            <a:off x="7315200" y="3200400"/>
+            <a:ext cx="2194560" cy="822960"/>
           </a:xfrm>
           <a:prstGeom prst="roundRect">
             <a:avLst/>
@@ -21966,14 +21702,14 @@
       </p:sp>
       <p:sp>
         <p:nvSpPr>
-          <p:cNvPr id="15" name="Rounded Rectangle 14"/>
+          <p:cNvPr id="9" name="Rounded Rectangle 8"/>
           <p:cNvSpPr/>
           <p:nvPr/>
         </p:nvSpPr>
         <p:spPr>
           <a:xfrm>
-            <a:off x="9646920" y="4572000"/>
-            <a:ext cx="2194560" cy="868680"/>
+            <a:off x="9646920" y="3200400"/>
+            <a:ext cx="2194560" cy="822960"/>
           </a:xfrm>
           <a:prstGeom prst="roundRect">
             <a:avLst/>
@@ -22030,7 +21766,42 @@
       </p:sp>
       <p:sp>
         <p:nvSpPr>
-          <p:cNvPr id="16" name="Rectangle 15"/>
+          <p:cNvPr id="10" name="TextBox 9"/>
+          <p:cNvSpPr txBox="1"/>
+          <p:nvPr/>
+        </p:nvSpPr>
+        <p:spPr>
+          <a:xfrm>
+            <a:off x="7315200" y="4224528"/>
+            <a:ext cx="4526280" cy="914400"/>
+          </a:xfrm>
+          <a:prstGeom prst="rect">
+            <a:avLst/>
+          </a:prstGeom>
+          <a:noFill/>
+        </p:spPr>
+        <p:txBody>
+          <a:bodyPr wrap="square" lIns="45720" rIns="45720" tIns="18288" bIns="18288" anchor="t">
+            <a:spAutoFit/>
+          </a:bodyPr>
+          <a:lstStyle/>
+          <a:p>
+            <a:pPr algn="l"/>
+            <a:r>
+              <a:rPr sz="1150" b="0" i="1">
+                <a:solidFill>
+                  <a:srgbClr val="707070"/>
+                </a:solidFill>
+                <a:latin typeface="Calibri"/>
+              </a:rPr>
+              <a:t>Fires in ONE sample after the load collapses — no hand on the button.</a:t>
+            </a:r>
+          </a:p>
+        </p:txBody>
+      </p:sp>
+      <p:sp>
+        <p:nvSpPr>
+          <p:cNvPr id="11" name="Rectangle 10"/>
           <p:cNvSpPr/>
           <p:nvPr/>
         </p:nvSpPr>
@@ -22075,14 +21846,14 @@
                 </a:solidFill>
                 <a:latin typeface="Calibri"/>
               </a:rPr>
-              <a:t>No hand on the button — the rig detects its own fracture and halts in one sample.</a:t>
-            </a:r>
-          </a:p>
-        </p:txBody>
-      </p:sp>
-      <p:sp>
-        <p:nvSpPr>
-          <p:cNvPr id="17" name="TextBox 16"/>
+              <a:t>The rig detects its OWN fracture and halts — arm at 30% of peak, fire at 50% collapse.</a:t>
+            </a:r>
+          </a:p>
+        </p:txBody>
+      </p:sp>
+      <p:sp>
+        <p:nvSpPr>
+          <p:cNvPr id="12" name="TextBox 11"/>
           <p:cNvSpPr txBox="1"/>
           <p:nvPr/>
         </p:nvSpPr>
@@ -22924,404 +22695,35 @@
                 </a:solidFill>
                 <a:latin typeface="Calibri Light"/>
               </a:rPr>
-              <a:t>TWO WAYS TO FRACTURE — WHEN TO USE WHICH</a:t>
-            </a:r>
-          </a:p>
-        </p:txBody>
-      </p:sp>
-      <p:graphicFrame>
-        <p:nvGraphicFramePr>
-          <p:cNvPr id="5" name="Table 4"/>
-          <p:cNvGraphicFramePr>
-            <a:graphicFrameLocks noGrp="1"/>
-          </p:cNvGraphicFramePr>
-          <p:nvPr/>
-        </p:nvGraphicFramePr>
-        <p:xfrm>
-          <a:off x="365760" y="1280160"/>
-          <a:ext cx="11475720" cy="2971800"/>
-        </p:xfrm>
-        <a:graphic>
-          <a:graphicData uri="http://schemas.openxmlformats.org/drawingml/2006/table">
-            <a:tbl>
-              <a:tblPr firstRow="1" bandRow="1">
-                <a:tableStyleId>{5C22544A-7EE6-4342-B048-85BDC9FD1C3A}</a:tableStyleId>
-              </a:tblPr>
-              <a:tblGrid>
-                <a:gridCol w="1920240"/>
-                <a:gridCol w="4754880"/>
-                <a:gridCol w="4800600"/>
-              </a:tblGrid>
-              <a:tr h="495300">
-                <a:tc>
-                  <a:txBody>
-                    <a:bodyPr lIns="54864" rIns="54864" tIns="18288" bIns="18288" wrap="square" anchor="ctr"/>
-                    <a:lstStyle/>
-                    <a:p>
-                      <a:pPr algn="l"/>
-                      <a:r>
-                        <a:rPr sz="1100" b="1">
-                          <a:solidFill>
-                            <a:srgbClr val="FFFFFF"/>
-                          </a:solidFill>
-                          <a:latin typeface="Calibri"/>
-                        </a:rPr>
-                        <a:t/>
-                      </a:r>
-                    </a:p>
-                  </a:txBody>
-                  <a:tcPr>
-                    <a:solidFill>
-                      <a:srgbClr val="143D2F"/>
-                    </a:solidFill>
-                  </a:tcPr>
-                </a:tc>
-                <a:tc>
-                  <a:txBody>
-                    <a:bodyPr lIns="54864" rIns="54864" tIns="18288" bIns="18288" wrap="square" anchor="ctr"/>
-                    <a:lstStyle/>
-                    <a:p>
-                      <a:pPr algn="l"/>
-                      <a:r>
-                        <a:rPr sz="1100" b="1">
-                          <a:solidFill>
-                            <a:srgbClr val="FFFFFF"/>
-                          </a:solidFill>
-                          <a:latin typeface="Calibri"/>
-                        </a:rPr>
-                        <a:t>Direct motor speed</a:t>
-                      </a:r>
-                    </a:p>
-                  </a:txBody>
-                  <a:tcPr>
-                    <a:solidFill>
-                      <a:srgbClr val="143D2F"/>
-                    </a:solidFill>
-                  </a:tcPr>
-                </a:tc>
-                <a:tc>
-                  <a:txBody>
-                    <a:bodyPr lIns="54864" rIns="54864" tIns="18288" bIns="18288" wrap="square" anchor="ctr"/>
-                    <a:lstStyle/>
-                    <a:p>
-                      <a:pPr algn="l"/>
-                      <a:r>
-                        <a:rPr sz="1100" b="1">
-                          <a:solidFill>
-                            <a:srgbClr val="FFFFFF"/>
-                          </a:solidFill>
-                          <a:latin typeface="Calibri"/>
-                        </a:rPr>
-                        <a:t>Strain-rate fracture</a:t>
-                      </a:r>
-                    </a:p>
-                  </a:txBody>
-                  <a:tcPr>
-                    <a:solidFill>
-                      <a:srgbClr val="143D2F"/>
-                    </a:solidFill>
-                  </a:tcPr>
-                </a:tc>
-              </a:tr>
-              <a:tr h="495300">
-                <a:tc>
-                  <a:txBody>
-                    <a:bodyPr lIns="54864" rIns="54864" tIns="18288" bIns="18288" wrap="square" anchor="ctr"/>
-                    <a:lstStyle/>
-                    <a:p>
-                      <a:pPr algn="l"/>
-                      <a:r>
-                        <a:rPr sz="1050" b="0">
-                          <a:solidFill>
-                            <a:srgbClr val="000000"/>
-                          </a:solidFill>
-                          <a:latin typeface="Calibri"/>
-                        </a:rPr>
-                        <a:t>How</a:t>
-                      </a:r>
-                    </a:p>
-                  </a:txBody>
-                  <a:tcPr/>
-                </a:tc>
-                <a:tc>
-                  <a:txBody>
-                    <a:bodyPr lIns="54864" rIns="54864" tIns="18288" bIns="18288" wrap="square" anchor="ctr"/>
-                    <a:lstStyle/>
-                    <a:p>
-                      <a:pPr algn="l"/>
-                      <a:r>
-                        <a:rPr sz="1050" b="0">
-                          <a:solidFill>
-                            <a:srgbClr val="000000"/>
-                          </a:solidFill>
-                          <a:latin typeface="Calibri"/>
-                        </a:rPr>
-                        <a:t>constant crosshead mm/s</a:t>
-                      </a:r>
-                    </a:p>
-                  </a:txBody>
-                  <a:tcPr/>
-                </a:tc>
-                <a:tc>
-                  <a:txBody>
-                    <a:bodyPr lIns="54864" rIns="54864" tIns="18288" bIns="18288" wrap="square" anchor="ctr"/>
-                    <a:lstStyle/>
-                    <a:p>
-                      <a:pPr algn="l"/>
-                      <a:r>
-                        <a:rPr sz="1050" b="0">
-                          <a:solidFill>
-                            <a:srgbClr val="000000"/>
-                          </a:solidFill>
-                          <a:latin typeface="Calibri"/>
-                        </a:rPr>
-                        <a:t>closed-loop on DIC dε/dt</a:t>
-                      </a:r>
-                    </a:p>
-                  </a:txBody>
-                  <a:tcPr/>
-                </a:tc>
-              </a:tr>
-              <a:tr h="495300">
-                <a:tc>
-                  <a:txBody>
-                    <a:bodyPr lIns="54864" rIns="54864" tIns="18288" bIns="18288" wrap="square" anchor="ctr"/>
-                    <a:lstStyle/>
-                    <a:p>
-                      <a:pPr algn="l"/>
-                      <a:r>
-                        <a:rPr sz="1050" b="0">
-                          <a:solidFill>
-                            <a:srgbClr val="000000"/>
-                          </a:solidFill>
-                          <a:latin typeface="Calibri"/>
-                        </a:rPr>
-                        <a:t>Rate</a:t>
-                      </a:r>
-                    </a:p>
-                  </a:txBody>
-                  <a:tcPr/>
-                </a:tc>
-                <a:tc>
-                  <a:txBody>
-                    <a:bodyPr lIns="54864" rIns="54864" tIns="18288" bIns="18288" wrap="square" anchor="ctr"/>
-                    <a:lstStyle/>
-                    <a:p>
-                      <a:pPr algn="l"/>
-                      <a:r>
-                        <a:rPr sz="1050" b="0">
-                          <a:solidFill>
-                            <a:srgbClr val="000000"/>
-                          </a:solidFill>
-                          <a:latin typeface="Calibri"/>
-                        </a:rPr>
-                        <a:t>varies (fast neck, slow elastic)</a:t>
-                      </a:r>
-                    </a:p>
-                  </a:txBody>
-                  <a:tcPr/>
-                </a:tc>
-                <a:tc>
-                  <a:txBody>
-                    <a:bodyPr lIns="54864" rIns="54864" tIns="18288" bIns="18288" wrap="square" anchor="ctr"/>
-                    <a:lstStyle/>
-                    <a:p>
-                      <a:pPr algn="l"/>
-                      <a:r>
-                        <a:rPr sz="1050" b="0">
-                          <a:solidFill>
-                            <a:srgbClr val="000000"/>
-                          </a:solidFill>
-                          <a:latin typeface="Calibri"/>
-                        </a:rPr>
-                        <a:t>CONSTANT gauge rate</a:t>
-                      </a:r>
-                    </a:p>
-                  </a:txBody>
-                  <a:tcPr/>
-                </a:tc>
-              </a:tr>
-              <a:tr h="495300">
-                <a:tc>
-                  <a:txBody>
-                    <a:bodyPr lIns="54864" rIns="54864" tIns="18288" bIns="18288" wrap="square" anchor="ctr"/>
-                    <a:lstStyle/>
-                    <a:p>
-                      <a:pPr algn="l"/>
-                      <a:r>
-                        <a:rPr sz="1050" b="0">
-                          <a:solidFill>
-                            <a:srgbClr val="000000"/>
-                          </a:solidFill>
-                          <a:latin typeface="Calibri"/>
-                        </a:rPr>
-                        <a:t>Needs DIC?</a:t>
-                      </a:r>
-                    </a:p>
-                  </a:txBody>
-                  <a:tcPr/>
-                </a:tc>
-                <a:tc>
-                  <a:txBody>
-                    <a:bodyPr lIns="54864" rIns="54864" tIns="18288" bIns="18288" wrap="square" anchor="ctr"/>
-                    <a:lstStyle/>
-                    <a:p>
-                      <a:pPr algn="l"/>
-                      <a:r>
-                        <a:rPr sz="1050" b="0">
-                          <a:solidFill>
-                            <a:srgbClr val="000000"/>
-                          </a:solidFill>
-                          <a:latin typeface="Calibri"/>
-                        </a:rPr>
-                        <a:t>no</a:t>
-                      </a:r>
-                    </a:p>
-                  </a:txBody>
-                  <a:tcPr/>
-                </a:tc>
-                <a:tc>
-                  <a:txBody>
-                    <a:bodyPr lIns="54864" rIns="54864" tIns="18288" bIns="18288" wrap="square" anchor="ctr"/>
-                    <a:lstStyle/>
-                    <a:p>
-                      <a:pPr algn="l"/>
-                      <a:r>
-                        <a:rPr sz="1050" b="0">
-                          <a:solidFill>
-                            <a:srgbClr val="000000"/>
-                          </a:solidFill>
-                          <a:latin typeface="Calibri"/>
-                        </a:rPr>
-                        <a:t>YES (green 2/2)</a:t>
-                      </a:r>
-                    </a:p>
-                  </a:txBody>
-                  <a:tcPr/>
-                </a:tc>
-              </a:tr>
-              <a:tr h="495300">
-                <a:tc>
-                  <a:txBody>
-                    <a:bodyPr lIns="54864" rIns="54864" tIns="18288" bIns="18288" wrap="square" anchor="ctr"/>
-                    <a:lstStyle/>
-                    <a:p>
-                      <a:pPr algn="l"/>
-                      <a:r>
-                        <a:rPr sz="1050" b="0">
-                          <a:solidFill>
-                            <a:srgbClr val="000000"/>
-                          </a:solidFill>
-                          <a:latin typeface="Calibri"/>
-                        </a:rPr>
-                        <a:t>Motor force</a:t>
-                      </a:r>
-                    </a:p>
-                  </a:txBody>
-                  <a:tcPr/>
-                </a:tc>
-                <a:tc>
-                  <a:txBody>
-                    <a:bodyPr lIns="54864" rIns="54864" tIns="18288" bIns="18288" wrap="square" anchor="ctr"/>
-                    <a:lstStyle/>
-                    <a:p>
-                      <a:pPr algn="l"/>
-                      <a:r>
-                        <a:rPr sz="1050" b="0">
-                          <a:solidFill>
-                            <a:srgbClr val="000000"/>
-                          </a:solidFill>
-                          <a:latin typeface="Calibri"/>
-                        </a:rPr>
-                        <a:t>full — higher speed OK</a:t>
-                      </a:r>
-                    </a:p>
-                  </a:txBody>
-                  <a:tcPr/>
-                </a:tc>
-                <a:tc>
-                  <a:txBody>
-                    <a:bodyPr lIns="54864" rIns="54864" tIns="18288" bIns="18288" wrap="square" anchor="ctr"/>
-                    <a:lstStyle/>
-                    <a:p>
-                      <a:pPr algn="l"/>
-                      <a:r>
-                        <a:rPr sz="1050" b="0">
-                          <a:solidFill>
-                            <a:srgbClr val="000000"/>
-                          </a:solidFill>
-                          <a:latin typeface="Calibri"/>
-                        </a:rPr>
-                        <a:t>capped speed → less force</a:t>
-                      </a:r>
-                    </a:p>
-                  </a:txBody>
-                  <a:tcPr/>
-                </a:tc>
-              </a:tr>
-              <a:tr h="495300">
-                <a:tc>
-                  <a:txBody>
-                    <a:bodyPr lIns="54864" rIns="54864" tIns="18288" bIns="18288" wrap="square" anchor="ctr"/>
-                    <a:lstStyle/>
-                    <a:p>
-                      <a:pPr algn="l"/>
-                      <a:r>
-                        <a:rPr sz="1050" b="0">
-                          <a:solidFill>
-                            <a:srgbClr val="000000"/>
-                          </a:solidFill>
-                          <a:latin typeface="Calibri"/>
-                        </a:rPr>
-                        <a:t>Best for</a:t>
-                      </a:r>
-                    </a:p>
-                  </a:txBody>
-                  <a:tcPr/>
-                </a:tc>
-                <a:tc>
-                  <a:txBody>
-                    <a:bodyPr lIns="54864" rIns="54864" tIns="18288" bIns="18288" wrap="square" anchor="ctr"/>
-                    <a:lstStyle/>
-                    <a:p>
-                      <a:pPr algn="l"/>
-                      <a:r>
-                        <a:rPr sz="1050" b="0">
-                          <a:solidFill>
-                            <a:srgbClr val="000000"/>
-                          </a:solidFill>
-                          <a:latin typeface="Calibri"/>
-                        </a:rPr>
-                        <a:t>quick UTS · strong specimens</a:t>
-                      </a:r>
-                    </a:p>
-                  </a:txBody>
-                  <a:tcPr/>
-                </a:tc>
-                <a:tc>
-                  <a:txBody>
-                    <a:bodyPr lIns="54864" rIns="54864" tIns="18288" bIns="18288" wrap="square" anchor="ctr"/>
-                    <a:lstStyle/>
-                    <a:p>
-                      <a:pPr algn="l"/>
-                      <a:r>
-                        <a:rPr sz="1050" b="0">
-                          <a:solidFill>
-                            <a:srgbClr val="000000"/>
-                          </a:solidFill>
-                          <a:latin typeface="Calibri"/>
-                        </a:rPr>
-                        <a:t>standards-grade · rate-sensitive</a:t>
-                      </a:r>
-                    </a:p>
-                  </a:txBody>
-                  <a:tcPr/>
-                </a:tc>
-              </a:tr>
-            </a:tbl>
-          </a:graphicData>
-        </a:graphic>
-      </p:graphicFrame>
+              <a:t>STRAIN-RATE FRACTURE — REPORT PLOTS  (S19, 50% infill)</a:t>
+            </a:r>
+          </a:p>
+        </p:txBody>
+      </p:sp>
+      <p:pic>
+        <p:nvPicPr>
+          <p:cNvPr id="5" name="Picture 4" descr="feat_sr_plots.png"/>
+          <p:cNvPicPr>
+            <a:picLocks noChangeAspect="1"/>
+          </p:cNvPicPr>
+          <p:nvPr/>
+        </p:nvPicPr>
+        <p:blipFill>
+          <a:blip r:embed="rId2"/>
+          <a:stretch>
+            <a:fillRect/>
+          </a:stretch>
+        </p:blipFill>
+        <p:spPr>
+          <a:xfrm>
+            <a:off x="457200" y="1371600"/>
+            <a:ext cx="11247120" cy="3226633"/>
+          </a:xfrm>
+          <a:prstGeom prst="rect">
+            <a:avLst/>
+          </a:prstGeom>
+        </p:spPr>
+      </p:pic>
       <p:sp>
         <p:nvSpPr>
           <p:cNvPr id="6" name="TextBox 5"/>
@@ -23330,7 +22732,7 @@
         </p:nvSpPr>
         <p:spPr>
           <a:xfrm>
-            <a:off x="365760" y="4480560"/>
+            <a:off x="365760" y="4590288"/>
             <a:ext cx="11475720" cy="365760"/>
           </a:xfrm>
           <a:prstGeom prst="rect">
@@ -23352,7 +22754,7 @@
                 </a:solidFill>
                 <a:latin typeface="Calibri"/>
               </a:rPr>
-              <a:t>Suggestion</a:t>
+              <a:t>Closed-loop speed limits</a:t>
             </a:r>
           </a:p>
         </p:txBody>
@@ -23365,8 +22767,8 @@
         </p:nvSpPr>
         <p:spPr>
           <a:xfrm>
-            <a:off x="365760" y="4910328"/>
-            <a:ext cx="5669280" cy="914400"/>
+            <a:off x="365760" y="4992624"/>
+            <a:ext cx="3566160" cy="896112"/>
           </a:xfrm>
           <a:prstGeom prst="roundRect">
             <a:avLst/>
@@ -23374,10 +22776,8 @@
           <a:solidFill>
             <a:srgbClr val="E7F1F8"/>
           </a:solidFill>
-          <a:ln w="15240">
-            <a:solidFill>
-              <a:srgbClr val="1F77B4"/>
-            </a:solidFill>
+          <a:ln>
+            <a:noFill/>
           </a:ln>
         </p:spPr>
         <p:style>
@@ -23395,19 +22795,30 @@
           </a:fontRef>
         </p:style>
         <p:txBody>
-          <a:bodyPr rtlCol="0" anchor="ctr" lIns="54864" rIns="54864" tIns="27432" bIns="27432" wrap="square"/>
+          <a:bodyPr rtlCol="0" anchor="ctr" lIns="54864" rIns="54864" bIns="27432" wrap="square"/>
           <a:lstStyle/>
           <a:p>
             <a:pPr algn="ctr"/>
             <a:r>
-              <a:rPr sz="1250" b="1">
+              <a:rPr sz="1800" b="1">
+                <a:solidFill>
+                  <a:srgbClr val="1F3F2F"/>
+                </a:solidFill>
+                <a:latin typeface="Calibri"/>
+              </a:rPr>
+              <a:t>0.0005 /s</a:t>
+            </a:r>
+          </a:p>
+          <a:p>
+            <a:pPr algn="ctr"/>
+            <a:r>
+              <a:rPr sz="950">
                 <a:solidFill>
                   <a:srgbClr val="000000"/>
                 </a:solidFill>
                 <a:latin typeface="Calibri"/>
               </a:rPr>
-              <a:t>MAX pulling force or a quick UTS?
-→  DIRECT motor speed</a:t>
+              <a:t>TARGET RATE</a:t>
             </a:r>
           </a:p>
         </p:txBody>
@@ -23420,19 +22831,17 @@
         </p:nvSpPr>
         <p:spPr>
           <a:xfrm>
-            <a:off x="6172200" y="4910328"/>
-            <a:ext cx="5669280" cy="914400"/>
+            <a:off x="4160520" y="4992624"/>
+            <a:ext cx="3566160" cy="896112"/>
           </a:xfrm>
           <a:prstGeom prst="roundRect">
             <a:avLst/>
           </a:prstGeom>
           <a:solidFill>
-            <a:srgbClr val="C8E6C9"/>
+            <a:srgbClr val="E7F1F8"/>
           </a:solidFill>
-          <a:ln w="15240">
-            <a:solidFill>
-              <a:srgbClr val="1F3F2F"/>
-            </a:solidFill>
+          <a:ln>
+            <a:noFill/>
           </a:ln>
         </p:spPr>
         <p:style>
@@ -23450,26 +22859,101 @@
           </a:fontRef>
         </p:style>
         <p:txBody>
-          <a:bodyPr rtlCol="0" anchor="ctr" lIns="54864" rIns="54864" tIns="27432" bIns="27432" wrap="square"/>
+          <a:bodyPr rtlCol="0" anchor="ctr" lIns="54864" rIns="54864" bIns="27432" wrap="square"/>
           <a:lstStyle/>
           <a:p>
             <a:pPr algn="ctr"/>
             <a:r>
-              <a:rPr sz="1250" b="1">
+              <a:rPr sz="1800" b="1">
                 <a:solidFill>
                   <a:srgbClr val="1F3F2F"/>
                 </a:solidFill>
                 <a:latin typeface="Calibri"/>
               </a:rPr>
-              <a:t>Controlled material strain rate (comparable)?
-→  STRAIN-RATE fracture</a:t>
-            </a:r>
-          </a:p>
-        </p:txBody>
-      </p:sp>
-      <p:sp>
-        <p:nvSpPr>
-          <p:cNvPr id="9" name="TextBox 8"/>
+              <a:t>0.005 mm/s</a:t>
+            </a:r>
+          </a:p>
+          <a:p>
+            <a:pPr algn="ctr"/>
+            <a:r>
+              <a:rPr sz="950">
+                <a:solidFill>
+                  <a:srgbClr val="000000"/>
+                </a:solidFill>
+                <a:latin typeface="Calibri"/>
+              </a:rPr>
+              <a:t>MIN SPEED</a:t>
+            </a:r>
+          </a:p>
+        </p:txBody>
+      </p:sp>
+      <p:sp>
+        <p:nvSpPr>
+          <p:cNvPr id="9" name="Rounded Rectangle 8"/>
+          <p:cNvSpPr/>
+          <p:nvPr/>
+        </p:nvSpPr>
+        <p:spPr>
+          <a:xfrm>
+            <a:off x="7955279" y="4992624"/>
+            <a:ext cx="3886200" cy="896112"/>
+          </a:xfrm>
+          <a:prstGeom prst="roundRect">
+            <a:avLst/>
+          </a:prstGeom>
+          <a:solidFill>
+            <a:srgbClr val="E7F1F8"/>
+          </a:solidFill>
+          <a:ln>
+            <a:noFill/>
+          </a:ln>
+        </p:spPr>
+        <p:style>
+          <a:lnRef idx="1">
+            <a:schemeClr val="accent1"/>
+          </a:lnRef>
+          <a:fillRef idx="3">
+            <a:schemeClr val="accent1"/>
+          </a:fillRef>
+          <a:effectRef idx="2">
+            <a:schemeClr val="accent1"/>
+          </a:effectRef>
+          <a:fontRef idx="minor">
+            <a:schemeClr val="lt1"/>
+          </a:fontRef>
+        </p:style>
+        <p:txBody>
+          <a:bodyPr rtlCol="0" anchor="ctr" lIns="54864" rIns="54864" bIns="27432" wrap="square"/>
+          <a:lstStyle/>
+          <a:p>
+            <a:pPr algn="ctr"/>
+            <a:r>
+              <a:rPr sz="1800" b="1">
+                <a:solidFill>
+                  <a:srgbClr val="1F3F2F"/>
+                </a:solidFill>
+                <a:latin typeface="Calibri"/>
+              </a:rPr>
+              <a:t>0.20 mm/s</a:t>
+            </a:r>
+          </a:p>
+          <a:p>
+            <a:pPr algn="ctr"/>
+            <a:r>
+              <a:rPr sz="950">
+                <a:solidFill>
+                  <a:srgbClr val="000000"/>
+                </a:solidFill>
+                <a:latin typeface="Calibri"/>
+              </a:rPr>
+              <a:t>MAX SPEED (cap)</a:t>
+            </a:r>
+          </a:p>
+        </p:txBody>
+      </p:sp>
+      <p:sp>
+        <p:nvSpPr>
+          <p:cNvPr id="10" name="TextBox 9"/>
           <p:cNvSpPr txBox="1"/>
           <p:nvPr/>
         </p:nvSpPr>
@@ -23497,14 +22981,14 @@
                 </a:solidFill>
                 <a:latin typeface="Calibri"/>
               </a:rPr>
-              <a:t>Both auto-stop on fracture (same detector) + stall guard. On THIS rig (torque ~2.6 kN today) use 50% / smaller specimens for strain-rate to reach break.</a:t>
-            </a:r>
-          </a:p>
-        </p:txBody>
-      </p:sp>
-      <p:sp>
-        <p:nvSpPr>
-          <p:cNvPr id="10" name="TextBox 9"/>
+              <a:t>S19 (50%) fractures ~1.4 kN — under the motor ceiling. The loop varied crosshead speed 0.005–0.20 mm/s to hold 0.0005 /s to fracture.</a:t>
+            </a:r>
+          </a:p>
+        </p:txBody>
+      </p:sp>
+      <p:sp>
+        <p:nvSpPr>
+          <p:cNvPr id="11" name="TextBox 10"/>
           <p:cNvSpPr txBox="1"/>
           <p:nvPr/>
         </p:nvSpPr>
@@ -23663,76 +23147,21 @@
                 </a:solidFill>
                 <a:latin typeface="Calibri Light"/>
               </a:rPr>
-              <a:t>INNOVATION ROADMAP — AT A GLANCE</a:t>
-            </a:r>
-          </a:p>
-        </p:txBody>
-      </p:sp>
-      <p:sp>
-        <p:nvSpPr>
-          <p:cNvPr id="5" name="Rounded Rectangle 4"/>
-          <p:cNvSpPr/>
-          <p:nvPr/>
-        </p:nvSpPr>
-        <p:spPr>
-          <a:xfrm>
-            <a:off x="365760" y="1920240"/>
-            <a:ext cx="2148840" cy="1371600"/>
-          </a:xfrm>
-          <a:prstGeom prst="roundRect">
-            <a:avLst/>
-          </a:prstGeom>
-          <a:solidFill>
-            <a:srgbClr val="C8E6C9"/>
-          </a:solidFill>
-          <a:ln w="15240">
-            <a:solidFill>
-              <a:srgbClr val="1F3F2F"/>
-            </a:solidFill>
-          </a:ln>
-        </p:spPr>
-        <p:style>
-          <a:lnRef idx="1">
-            <a:schemeClr val="accent1"/>
-          </a:lnRef>
-          <a:fillRef idx="3">
-            <a:schemeClr val="accent1"/>
-          </a:fillRef>
-          <a:effectRef idx="2">
-            <a:schemeClr val="accent1"/>
-          </a:effectRef>
-          <a:fontRef idx="minor">
-            <a:schemeClr val="lt1"/>
-          </a:fontRef>
-        </p:style>
-        <p:txBody>
-          <a:bodyPr rtlCol="0" anchor="ctr" lIns="54864" rIns="54864" tIns="27432" bIns="27432" wrap="square"/>
-          <a:lstStyle/>
-          <a:p>
-            <a:pPr algn="ctr"/>
-            <a:r>
-              <a:rPr sz="1050" b="1">
-                <a:solidFill>
-                  <a:srgbClr val="1F3F2F"/>
-                </a:solidFill>
-                <a:latin typeface="Calibri"/>
-              </a:rPr>
-              <a:t>0 · Foundations
-analysis · engine · recipes</a:t>
-            </a:r>
-          </a:p>
-        </p:txBody>
-      </p:sp>
-      <p:sp>
-        <p:nvSpPr>
-          <p:cNvPr id="6" name="TextBox 5"/>
+              <a:t>SAFETY GUARDS &amp; LIMITS — WHAT STOPS THE TEST</a:t>
+            </a:r>
+          </a:p>
+        </p:txBody>
+      </p:sp>
+      <p:sp>
+        <p:nvSpPr>
+          <p:cNvPr id="5" name="TextBox 4"/>
           <p:cNvSpPr txBox="1"/>
           <p:nvPr/>
         </p:nvSpPr>
         <p:spPr>
           <a:xfrm>
-            <a:off x="365760" y="3346704"/>
-            <a:ext cx="2148840" cy="365760"/>
+            <a:off x="365760" y="1170432"/>
+            <a:ext cx="11475720" cy="365760"/>
           </a:xfrm>
           <a:prstGeom prst="rect">
             <a:avLst/>
@@ -23747,803 +23176,479 @@
           <a:p>
             <a:pPr algn="l"/>
             <a:r>
-              <a:rPr sz="1100" b="1" i="0">
-                <a:solidFill>
-                  <a:srgbClr val="1F3F2F"/>
+              <a:rPr sz="1600" b="0" i="0">
+                <a:solidFill>
+                  <a:srgbClr val="707070"/>
                 </a:solidFill>
                 <a:latin typeface="Calibri"/>
               </a:rPr>
-              <a:t>DONE</a:t>
-            </a:r>
-          </a:p>
-        </p:txBody>
-      </p:sp>
-      <p:cxnSp>
-        <p:nvCxnSpPr>
-          <p:cNvPr id="7" name="Connector 6"/>
-          <p:cNvCxnSpPr/>
-          <p:nvPr/>
-        </p:nvCxnSpPr>
-        <p:spPr>
-          <a:xfrm>
-            <a:off x="2514600" y="2606040"/>
-            <a:ext cx="210312" cy="0"/>
-          </a:xfrm>
-          <a:prstGeom prst="line">
-            <a:avLst/>
-          </a:prstGeom>
-          <a:ln w="25400">
-            <a:solidFill>
-              <a:srgbClr val="555555"/>
-            </a:solidFill>
-            <a:tailEnd type="triangle" w="med" len="med"/>
-          </a:ln>
-        </p:spPr>
-        <p:style>
-          <a:lnRef idx="2">
-            <a:schemeClr val="accent1"/>
-          </a:lnRef>
-          <a:fillRef idx="0">
-            <a:schemeClr val="accent1"/>
-          </a:fillRef>
-          <a:effectRef idx="1">
-            <a:schemeClr val="accent1"/>
-          </a:effectRef>
-          <a:fontRef idx="minor">
-            <a:schemeClr val="tx1"/>
-          </a:fontRef>
-        </p:style>
-      </p:cxnSp>
-      <p:sp>
-        <p:nvSpPr>
-          <p:cNvPr id="8" name="Rounded Rectangle 7"/>
+              <a:t>Guards that halt a driven test</a:t>
+            </a:r>
+          </a:p>
+        </p:txBody>
+      </p:sp>
+      <p:graphicFrame>
+        <p:nvGraphicFramePr>
+          <p:cNvPr id="6" name="Table 5"/>
+          <p:cNvGraphicFramePr>
+            <a:graphicFrameLocks noGrp="1"/>
+          </p:cNvGraphicFramePr>
+          <p:nvPr/>
+        </p:nvGraphicFramePr>
+        <p:xfrm>
+          <a:off x="365760" y="1572768"/>
+          <a:ext cx="11475720" cy="3246120"/>
+        </p:xfrm>
+        <a:graphic>
+          <a:graphicData uri="http://schemas.openxmlformats.org/drawingml/2006/table">
+            <a:tbl>
+              <a:tblPr firstRow="1" bandRow="1">
+                <a:tableStyleId>{5C22544A-7EE6-4342-B048-85BDC9FD1C3A}</a:tableStyleId>
+              </a:tblPr>
+              <a:tblGrid>
+                <a:gridCol w="2651760"/>
+                <a:gridCol w="6035040"/>
+                <a:gridCol w="2788920"/>
+              </a:tblGrid>
+              <a:tr h="463731">
+                <a:tc>
+                  <a:txBody>
+                    <a:bodyPr lIns="54864" rIns="54864" tIns="18288" bIns="18288" wrap="square" anchor="ctr"/>
+                    <a:lstStyle/>
+                    <a:p>
+                      <a:pPr algn="l"/>
+                      <a:r>
+                        <a:rPr sz="1100" b="1">
+                          <a:solidFill>
+                            <a:srgbClr val="FFFFFF"/>
+                          </a:solidFill>
+                          <a:latin typeface="Calibri"/>
+                        </a:rPr>
+                        <a:t>Guard</a:t>
+                      </a:r>
+                    </a:p>
+                  </a:txBody>
+                  <a:tcPr>
+                    <a:solidFill>
+                      <a:srgbClr val="143D2F"/>
+                    </a:solidFill>
+                  </a:tcPr>
+                </a:tc>
+                <a:tc>
+                  <a:txBody>
+                    <a:bodyPr lIns="54864" rIns="54864" tIns="18288" bIns="18288" wrap="square" anchor="ctr"/>
+                    <a:lstStyle/>
+                    <a:p>
+                      <a:pPr algn="l"/>
+                      <a:r>
+                        <a:rPr sz="1100" b="1">
+                          <a:solidFill>
+                            <a:srgbClr val="FFFFFF"/>
+                          </a:solidFill>
+                          <a:latin typeface="Calibri"/>
+                        </a:rPr>
+                        <a:t>Trips when</a:t>
+                      </a:r>
+                    </a:p>
+                  </a:txBody>
+                  <a:tcPr>
+                    <a:solidFill>
+                      <a:srgbClr val="143D2F"/>
+                    </a:solidFill>
+                  </a:tcPr>
+                </a:tc>
+                <a:tc>
+                  <a:txBody>
+                    <a:bodyPr lIns="54864" rIns="54864" tIns="18288" bIns="18288" wrap="square" anchor="ctr"/>
+                    <a:lstStyle/>
+                    <a:p>
+                      <a:pPr algn="l"/>
+                      <a:r>
+                        <a:rPr sz="1100" b="1">
+                          <a:solidFill>
+                            <a:srgbClr val="FFFFFF"/>
+                          </a:solidFill>
+                          <a:latin typeface="Calibri"/>
+                        </a:rPr>
+                        <a:t>Action</a:t>
+                      </a:r>
+                    </a:p>
+                  </a:txBody>
+                  <a:tcPr>
+                    <a:solidFill>
+                      <a:srgbClr val="143D2F"/>
+                    </a:solidFill>
+                  </a:tcPr>
+                </a:tc>
+              </a:tr>
+              <a:tr h="463731">
+                <a:tc>
+                  <a:txBody>
+                    <a:bodyPr lIns="54864" rIns="54864" tIns="18288" bIns="18288" wrap="square" anchor="ctr"/>
+                    <a:lstStyle/>
+                    <a:p>
+                      <a:pPr algn="l"/>
+                      <a:r>
+                        <a:rPr sz="1000" b="0">
+                          <a:solidFill>
+                            <a:srgbClr val="000000"/>
+                          </a:solidFill>
+                          <a:latin typeface="Calibri"/>
+                        </a:rPr>
+                        <a:t>Fracture auto-stop</a:t>
+                      </a:r>
+                    </a:p>
+                  </a:txBody>
+                  <a:tcPr/>
+                </a:tc>
+                <a:tc>
+                  <a:txBody>
+                    <a:bodyPr lIns="54864" rIns="54864" tIns="18288" bIns="18288" wrap="square" anchor="ctr"/>
+                    <a:lstStyle/>
+                    <a:p>
+                      <a:pPr algn="l"/>
+                      <a:r>
+                        <a:rPr sz="1000" b="0">
+                          <a:solidFill>
+                            <a:srgbClr val="000000"/>
+                          </a:solidFill>
+                          <a:latin typeface="Calibri"/>
+                        </a:rPr>
+                        <a:t>load &lt; 50% of peak (armed at 30%)</a:t>
+                      </a:r>
+                    </a:p>
+                  </a:txBody>
+                  <a:tcPr/>
+                </a:tc>
+                <a:tc>
+                  <a:txBody>
+                    <a:bodyPr lIns="54864" rIns="54864" tIns="18288" bIns="18288" wrap="square" anchor="ctr"/>
+                    <a:lstStyle/>
+                    <a:p>
+                      <a:pPr algn="l"/>
+                      <a:r>
+                        <a:rPr sz="1000" b="0">
+                          <a:solidFill>
+                            <a:srgbClr val="000000"/>
+                          </a:solidFill>
+                          <a:latin typeface="Calibri"/>
+                        </a:rPr>
+                        <a:t>Stop</a:t>
+                      </a:r>
+                    </a:p>
+                  </a:txBody>
+                  <a:tcPr/>
+                </a:tc>
+              </a:tr>
+              <a:tr h="463731">
+                <a:tc>
+                  <a:txBody>
+                    <a:bodyPr lIns="54864" rIns="54864" tIns="18288" bIns="18288" wrap="square" anchor="ctr"/>
+                    <a:lstStyle/>
+                    <a:p>
+                      <a:pPr algn="l"/>
+                      <a:r>
+                        <a:rPr sz="1000" b="0">
+                          <a:solidFill>
+                            <a:srgbClr val="000000"/>
+                          </a:solidFill>
+                          <a:latin typeface="Calibri"/>
+                        </a:rPr>
+                        <a:t>Stall guard</a:t>
+                      </a:r>
+                    </a:p>
+                  </a:txBody>
+                  <a:tcPr/>
+                </a:tc>
+                <a:tc>
+                  <a:txBody>
+                    <a:bodyPr lIns="54864" rIns="54864" tIns="18288" bIns="18288" wrap="square" anchor="ctr"/>
+                    <a:lstStyle/>
+                    <a:p>
+                      <a:pPr algn="l"/>
+                      <a:r>
+                        <a:rPr sz="1000" b="0">
+                          <a:solidFill>
+                            <a:srgbClr val="000000"/>
+                          </a:solidFill>
+                          <a:latin typeface="Calibri"/>
+                        </a:rPr>
+                        <a:t>crosshead &lt; 0.05 mm in 6 s under load &gt; 200 N</a:t>
+                      </a:r>
+                    </a:p>
+                  </a:txBody>
+                  <a:tcPr/>
+                </a:tc>
+                <a:tc>
+                  <a:txBody>
+                    <a:bodyPr lIns="54864" rIns="54864" tIns="18288" bIns="18288" wrap="square" anchor="ctr"/>
+                    <a:lstStyle/>
+                    <a:p>
+                      <a:pPr algn="l"/>
+                      <a:r>
+                        <a:rPr sz="1000" b="0">
+                          <a:solidFill>
+                            <a:srgbClr val="000000"/>
+                          </a:solidFill>
+                          <a:latin typeface="Calibri"/>
+                        </a:rPr>
+                        <a:t>Stop + E-Stop</a:t>
+                      </a:r>
+                    </a:p>
+                  </a:txBody>
+                  <a:tcPr/>
+                </a:tc>
+              </a:tr>
+              <a:tr h="463731">
+                <a:tc>
+                  <a:txBody>
+                    <a:bodyPr lIns="54864" rIns="54864" tIns="18288" bIns="18288" wrap="square" anchor="ctr"/>
+                    <a:lstStyle/>
+                    <a:p>
+                      <a:pPr algn="l"/>
+                      <a:r>
+                        <a:rPr sz="1000" b="0">
+                          <a:solidFill>
+                            <a:srgbClr val="000000"/>
+                          </a:solidFill>
+                          <a:latin typeface="Calibri"/>
+                        </a:rPr>
+                        <a:t>Dead-DIC guard</a:t>
+                      </a:r>
+                    </a:p>
+                  </a:txBody>
+                  <a:tcPr/>
+                </a:tc>
+                <a:tc>
+                  <a:txBody>
+                    <a:bodyPr lIns="54864" rIns="54864" tIns="18288" bIns="18288" wrap="square" anchor="ctr"/>
+                    <a:lstStyle/>
+                    <a:p>
+                      <a:pPr algn="l"/>
+                      <a:r>
+                        <a:rPr sz="1000" b="0">
+                          <a:solidFill>
+                            <a:srgbClr val="000000"/>
+                          </a:solidFill>
+                          <a:latin typeface="Calibri"/>
+                        </a:rPr>
+                        <a:t>DIC strain frozen (markers lost)</a:t>
+                      </a:r>
+                    </a:p>
+                  </a:txBody>
+                  <a:tcPr/>
+                </a:tc>
+                <a:tc>
+                  <a:txBody>
+                    <a:bodyPr lIns="54864" rIns="54864" tIns="18288" bIns="18288" wrap="square" anchor="ctr"/>
+                    <a:lstStyle/>
+                    <a:p>
+                      <a:pPr algn="l"/>
+                      <a:r>
+                        <a:rPr sz="1000" b="0">
+                          <a:solidFill>
+                            <a:srgbClr val="000000"/>
+                          </a:solidFill>
+                          <a:latin typeface="Calibri"/>
+                        </a:rPr>
+                        <a:t>freeze speed 0.2 s → HALT 1.0 s</a:t>
+                      </a:r>
+                    </a:p>
+                  </a:txBody>
+                  <a:tcPr/>
+                </a:tc>
+              </a:tr>
+              <a:tr h="463731">
+                <a:tc>
+                  <a:txBody>
+                    <a:bodyPr lIns="54864" rIns="54864" tIns="18288" bIns="18288" wrap="square" anchor="ctr"/>
+                    <a:lstStyle/>
+                    <a:p>
+                      <a:pPr algn="l"/>
+                      <a:r>
+                        <a:rPr sz="1000" b="0">
+                          <a:solidFill>
+                            <a:srgbClr val="000000"/>
+                          </a:solidFill>
+                          <a:latin typeface="Calibri"/>
+                        </a:rPr>
+                        <a:t>Force backstop</a:t>
+                      </a:r>
+                    </a:p>
+                  </a:txBody>
+                  <a:tcPr/>
+                </a:tc>
+                <a:tc>
+                  <a:txBody>
+                    <a:bodyPr lIns="54864" rIns="54864" tIns="18288" bIns="18288" wrap="square" anchor="ctr"/>
+                    <a:lstStyle/>
+                    <a:p>
+                      <a:pPr algn="l"/>
+                      <a:r>
+                        <a:rPr sz="1000" b="0">
+                          <a:solidFill>
+                            <a:srgbClr val="000000"/>
+                          </a:solidFill>
+                          <a:latin typeface="Calibri"/>
+                        </a:rPr>
+                        <a:t>load ≥ 10 kN</a:t>
+                      </a:r>
+                    </a:p>
+                  </a:txBody>
+                  <a:tcPr/>
+                </a:tc>
+                <a:tc>
+                  <a:txBody>
+                    <a:bodyPr lIns="54864" rIns="54864" tIns="18288" bIns="18288" wrap="square" anchor="ctr"/>
+                    <a:lstStyle/>
+                    <a:p>
+                      <a:pPr algn="l"/>
+                      <a:r>
+                        <a:rPr sz="1000" b="0">
+                          <a:solidFill>
+                            <a:srgbClr val="000000"/>
+                          </a:solidFill>
+                          <a:latin typeface="Calibri"/>
+                        </a:rPr>
+                        <a:t>Stop + E-Stop</a:t>
+                      </a:r>
+                    </a:p>
+                  </a:txBody>
+                  <a:tcPr/>
+                </a:tc>
+              </a:tr>
+              <a:tr h="463731">
+                <a:tc>
+                  <a:txBody>
+                    <a:bodyPr lIns="54864" rIns="54864" tIns="18288" bIns="18288" wrap="square" anchor="ctr"/>
+                    <a:lstStyle/>
+                    <a:p>
+                      <a:pPr algn="l"/>
+                      <a:r>
+                        <a:rPr sz="1000" b="0">
+                          <a:solidFill>
+                            <a:srgbClr val="000000"/>
+                          </a:solidFill>
+                          <a:latin typeface="Calibri"/>
+                        </a:rPr>
+                        <a:t>Travel backstop</a:t>
+                      </a:r>
+                    </a:p>
+                  </a:txBody>
+                  <a:tcPr/>
+                </a:tc>
+                <a:tc>
+                  <a:txBody>
+                    <a:bodyPr lIns="54864" rIns="54864" tIns="18288" bIns="18288" wrap="square" anchor="ctr"/>
+                    <a:lstStyle/>
+                    <a:p>
+                      <a:pPr algn="l"/>
+                      <a:r>
+                        <a:rPr sz="1000" b="0">
+                          <a:solidFill>
+                            <a:srgbClr val="000000"/>
+                          </a:solidFill>
+                          <a:latin typeface="Calibri"/>
+                        </a:rPr>
+                        <a:t>crosshead travel ≥ 30 mm</a:t>
+                      </a:r>
+                    </a:p>
+                  </a:txBody>
+                  <a:tcPr/>
+                </a:tc>
+                <a:tc>
+                  <a:txBody>
+                    <a:bodyPr lIns="54864" rIns="54864" tIns="18288" bIns="18288" wrap="square" anchor="ctr"/>
+                    <a:lstStyle/>
+                    <a:p>
+                      <a:pPr algn="l"/>
+                      <a:r>
+                        <a:rPr sz="1000" b="0">
+                          <a:solidFill>
+                            <a:srgbClr val="000000"/>
+                          </a:solidFill>
+                          <a:latin typeface="Calibri"/>
+                        </a:rPr>
+                        <a:t>Stop + E-Stop</a:t>
+                      </a:r>
+                    </a:p>
+                  </a:txBody>
+                  <a:tcPr/>
+                </a:tc>
+              </a:tr>
+              <a:tr h="463734">
+                <a:tc>
+                  <a:txBody>
+                    <a:bodyPr lIns="54864" rIns="54864" tIns="18288" bIns="18288" wrap="square" anchor="ctr"/>
+                    <a:lstStyle/>
+                    <a:p>
+                      <a:pPr algn="l"/>
+                      <a:r>
+                        <a:rPr sz="1000" b="0">
+                          <a:solidFill>
+                            <a:srgbClr val="000000"/>
+                          </a:solidFill>
+                          <a:latin typeface="Calibri"/>
+                        </a:rPr>
+                        <a:t>Timeout</a:t>
+                      </a:r>
+                    </a:p>
+                  </a:txBody>
+                  <a:tcPr/>
+                </a:tc>
+                <a:tc>
+                  <a:txBody>
+                    <a:bodyPr lIns="54864" rIns="54864" tIns="18288" bIns="18288" wrap="square" anchor="ctr"/>
+                    <a:lstStyle/>
+                    <a:p>
+                      <a:pPr algn="l"/>
+                      <a:r>
+                        <a:rPr sz="1000" b="0">
+                          <a:solidFill>
+                            <a:srgbClr val="000000"/>
+                          </a:solidFill>
+                          <a:latin typeface="Calibri"/>
+                        </a:rPr>
+                        <a:t>runtime ≥ 900 s</a:t>
+                      </a:r>
+                    </a:p>
+                  </a:txBody>
+                  <a:tcPr/>
+                </a:tc>
+                <a:tc>
+                  <a:txBody>
+                    <a:bodyPr lIns="54864" rIns="54864" tIns="18288" bIns="18288" wrap="square" anchor="ctr"/>
+                    <a:lstStyle/>
+                    <a:p>
+                      <a:pPr algn="l"/>
+                      <a:r>
+                        <a:rPr sz="1000" b="0">
+                          <a:solidFill>
+                            <a:srgbClr val="000000"/>
+                          </a:solidFill>
+                          <a:latin typeface="Calibri"/>
+                        </a:rPr>
+                        <a:t>Stop</a:t>
+                      </a:r>
+                    </a:p>
+                  </a:txBody>
+                  <a:tcPr/>
+                </a:tc>
+              </a:tr>
+            </a:tbl>
+          </a:graphicData>
+        </a:graphic>
+      </p:graphicFrame>
+      <p:sp>
+        <p:nvSpPr>
+          <p:cNvPr id="7" name="Rectangle 6"/>
           <p:cNvSpPr/>
           <p:nvPr/>
         </p:nvSpPr>
         <p:spPr>
           <a:xfrm>
-            <a:off x="2724912" y="1920240"/>
-            <a:ext cx="2148840" cy="1371600"/>
-          </a:xfrm>
-          <a:prstGeom prst="roundRect">
-            <a:avLst/>
-          </a:prstGeom>
-          <a:solidFill>
-            <a:srgbClr val="C8E6C9"/>
-          </a:solidFill>
-          <a:ln w="15240">
-            <a:solidFill>
-              <a:srgbClr val="1F3F2F"/>
-            </a:solidFill>
-          </a:ln>
-        </p:spPr>
-        <p:style>
-          <a:lnRef idx="1">
-            <a:schemeClr val="accent1"/>
-          </a:lnRef>
-          <a:fillRef idx="3">
-            <a:schemeClr val="accent1"/>
-          </a:fillRef>
-          <a:effectRef idx="2">
-            <a:schemeClr val="accent1"/>
-          </a:effectRef>
-          <a:fontRef idx="minor">
-            <a:schemeClr val="lt1"/>
-          </a:fontRef>
-        </p:style>
-        <p:txBody>
-          <a:bodyPr rtlCol="0" anchor="ctr" lIns="54864" rIns="54864" tIns="27432" bIns="27432" wrap="square"/>
-          <a:lstStyle/>
-          <a:p>
-            <a:pPr algn="ctr"/>
-            <a:r>
-              <a:rPr sz="1050" b="1">
-                <a:solidFill>
-                  <a:srgbClr val="1F3F2F"/>
-                </a:solidFill>
-                <a:latin typeface="Calibri"/>
-              </a:rPr>
-              <a:t>A · One-click
-report · prepare · auto-stop</a:t>
-            </a:r>
-          </a:p>
-        </p:txBody>
-      </p:sp>
-      <p:sp>
-        <p:nvSpPr>
-          <p:cNvPr id="9" name="TextBox 8"/>
-          <p:cNvSpPr txBox="1"/>
-          <p:nvPr/>
-        </p:nvSpPr>
-        <p:spPr>
-          <a:xfrm>
-            <a:off x="2724912" y="3346704"/>
-            <a:ext cx="2148840" cy="365760"/>
-          </a:xfrm>
-          <a:prstGeom prst="rect">
-            <a:avLst/>
-          </a:prstGeom>
-          <a:noFill/>
-        </p:spPr>
-        <p:txBody>
-          <a:bodyPr wrap="square" lIns="45720" rIns="45720" tIns="18288" bIns="18288" anchor="t">
-            <a:spAutoFit/>
-          </a:bodyPr>
-          <a:lstStyle/>
-          <a:p>
-            <a:pPr algn="l"/>
-            <a:r>
-              <a:rPr sz="1100" b="1" i="0">
-                <a:solidFill>
-                  <a:srgbClr val="1F3F2F"/>
-                </a:solidFill>
-                <a:latin typeface="Calibri"/>
-              </a:rPr>
-              <a:t>DONE</a:t>
-            </a:r>
-          </a:p>
-        </p:txBody>
-      </p:sp>
-      <p:cxnSp>
-        <p:nvCxnSpPr>
-          <p:cNvPr id="10" name="Connector 9"/>
-          <p:cNvCxnSpPr/>
-          <p:nvPr/>
-        </p:nvCxnSpPr>
-        <p:spPr>
-          <a:xfrm>
-            <a:off x="4873752" y="2606040"/>
-            <a:ext cx="210312" cy="0"/>
-          </a:xfrm>
-          <a:prstGeom prst="line">
-            <a:avLst/>
-          </a:prstGeom>
-          <a:ln w="25400">
-            <a:solidFill>
-              <a:srgbClr val="555555"/>
-            </a:solidFill>
-            <a:tailEnd type="triangle" w="med" len="med"/>
-          </a:ln>
-        </p:spPr>
-        <p:style>
-          <a:lnRef idx="2">
-            <a:schemeClr val="accent1"/>
-          </a:lnRef>
-          <a:fillRef idx="0">
-            <a:schemeClr val="accent1"/>
-          </a:fillRef>
-          <a:effectRef idx="1">
-            <a:schemeClr val="accent1"/>
-          </a:effectRef>
-          <a:fontRef idx="minor">
-            <a:schemeClr val="tx1"/>
-          </a:fontRef>
-        </p:style>
-      </p:cxnSp>
-      <p:sp>
-        <p:nvSpPr>
-          <p:cNvPr id="11" name="Rounded Rectangle 10"/>
-          <p:cNvSpPr/>
-          <p:nvPr/>
-        </p:nvSpPr>
-        <p:spPr>
-          <a:xfrm>
-            <a:off x="5084064" y="1920240"/>
-            <a:ext cx="2148840" cy="1371600"/>
-          </a:xfrm>
-          <a:prstGeom prst="roundRect">
-            <a:avLst/>
-          </a:prstGeom>
-          <a:solidFill>
-            <a:srgbClr val="FFF3CD"/>
-          </a:solidFill>
-          <a:ln w="15240">
-            <a:solidFill>
-              <a:srgbClr val="555555"/>
-            </a:solidFill>
-          </a:ln>
-        </p:spPr>
-        <p:style>
-          <a:lnRef idx="1">
-            <a:schemeClr val="accent1"/>
-          </a:lnRef>
-          <a:fillRef idx="3">
-            <a:schemeClr val="accent1"/>
-          </a:fillRef>
-          <a:effectRef idx="2">
-            <a:schemeClr val="accent1"/>
-          </a:effectRef>
-          <a:fontRef idx="minor">
-            <a:schemeClr val="lt1"/>
-          </a:fontRef>
-        </p:style>
-        <p:txBody>
-          <a:bodyPr rtlCol="0" anchor="ctr" lIns="54864" rIns="54864" tIns="27432" bIns="27432" wrap="square"/>
-          <a:lstStyle/>
-          <a:p>
-            <a:pPr algn="ctr"/>
-            <a:r>
-              <a:rPr sz="1050" b="1">
-                <a:solidFill>
-                  <a:srgbClr val="555555"/>
-                </a:solidFill>
-                <a:latin typeface="Calibri"/>
-              </a:rPr>
-              <a:t>B · Test modes
-strain-rate ✓ · 4 more</a:t>
-            </a:r>
-          </a:p>
-        </p:txBody>
-      </p:sp>
-      <p:sp>
-        <p:nvSpPr>
-          <p:cNvPr id="12" name="TextBox 11"/>
-          <p:cNvSpPr txBox="1"/>
-          <p:nvPr/>
-        </p:nvSpPr>
-        <p:spPr>
-          <a:xfrm>
-            <a:off x="5084064" y="3346704"/>
-            <a:ext cx="2148840" cy="365760"/>
-          </a:xfrm>
-          <a:prstGeom prst="rect">
-            <a:avLst/>
-          </a:prstGeom>
-          <a:noFill/>
-        </p:spPr>
-        <p:txBody>
-          <a:bodyPr wrap="square" lIns="45720" rIns="45720" tIns="18288" bIns="18288" anchor="t">
-            <a:spAutoFit/>
-          </a:bodyPr>
-          <a:lstStyle/>
-          <a:p>
-            <a:pPr algn="l"/>
-            <a:r>
-              <a:rPr sz="1100" b="1" i="0">
-                <a:solidFill>
-                  <a:srgbClr val="555555"/>
-                </a:solidFill>
-                <a:latin typeface="Calibri"/>
-              </a:rPr>
-              <a:t>1 / 5</a:t>
-            </a:r>
-          </a:p>
-        </p:txBody>
-      </p:sp>
-      <p:cxnSp>
-        <p:nvCxnSpPr>
-          <p:cNvPr id="13" name="Connector 12"/>
-          <p:cNvCxnSpPr/>
-          <p:nvPr/>
-        </p:nvCxnSpPr>
-        <p:spPr>
-          <a:xfrm>
-            <a:off x="7232904" y="2606040"/>
-            <a:ext cx="210312" cy="0"/>
-          </a:xfrm>
-          <a:prstGeom prst="line">
-            <a:avLst/>
-          </a:prstGeom>
-          <a:ln w="25400">
-            <a:solidFill>
-              <a:srgbClr val="555555"/>
-            </a:solidFill>
-            <a:tailEnd type="triangle" w="med" len="med"/>
-          </a:ln>
-        </p:spPr>
-        <p:style>
-          <a:lnRef idx="2">
-            <a:schemeClr val="accent1"/>
-          </a:lnRef>
-          <a:fillRef idx="0">
-            <a:schemeClr val="accent1"/>
-          </a:fillRef>
-          <a:effectRef idx="1">
-            <a:schemeClr val="accent1"/>
-          </a:effectRef>
-          <a:fontRef idx="minor">
-            <a:schemeClr val="tx1"/>
-          </a:fontRef>
-        </p:style>
-      </p:cxnSp>
-      <p:sp>
-        <p:nvSpPr>
-          <p:cNvPr id="14" name="Rounded Rectangle 13"/>
-          <p:cNvSpPr/>
-          <p:nvPr/>
-        </p:nvSpPr>
-        <p:spPr>
-          <a:xfrm>
-            <a:off x="7443216" y="1920240"/>
-            <a:ext cx="2148840" cy="1371600"/>
-          </a:xfrm>
-          <a:prstGeom prst="roundRect">
-            <a:avLst/>
-          </a:prstGeom>
-          <a:solidFill>
-            <a:srgbClr val="FFF3CD"/>
-          </a:solidFill>
-          <a:ln w="15240">
-            <a:solidFill>
-              <a:srgbClr val="555555"/>
-            </a:solidFill>
-          </a:ln>
-        </p:spPr>
-        <p:style>
-          <a:lnRef idx="1">
-            <a:schemeClr val="accent1"/>
-          </a:lnRef>
-          <a:fillRef idx="3">
-            <a:schemeClr val="accent1"/>
-          </a:fillRef>
-          <a:effectRef idx="2">
-            <a:schemeClr val="accent1"/>
-          </a:effectRef>
-          <a:fontRef idx="minor">
-            <a:schemeClr val="lt1"/>
-          </a:fontRef>
-        </p:style>
-        <p:txBody>
-          <a:bodyPr rtlCol="0" anchor="ctr" lIns="54864" rIns="54864" tIns="27432" bIns="27432" wrap="square"/>
-          <a:lstStyle/>
-          <a:p>
-            <a:pPr algn="ctr"/>
-            <a:r>
-              <a:rPr sz="1050" b="1">
-                <a:solidFill>
-                  <a:srgbClr val="555555"/>
-                </a:solidFill>
-                <a:latin typeface="Calibri"/>
-              </a:rPr>
-              <a:t>C · Smart DIC
-health HUD ✓ · Poisson</a:t>
-            </a:r>
-          </a:p>
-        </p:txBody>
-      </p:sp>
-      <p:sp>
-        <p:nvSpPr>
-          <p:cNvPr id="15" name="TextBox 14"/>
-          <p:cNvSpPr txBox="1"/>
-          <p:nvPr/>
-        </p:nvSpPr>
-        <p:spPr>
-          <a:xfrm>
-            <a:off x="7443216" y="3346704"/>
-            <a:ext cx="2148840" cy="365760"/>
-          </a:xfrm>
-          <a:prstGeom prst="rect">
-            <a:avLst/>
-          </a:prstGeom>
-          <a:noFill/>
-        </p:spPr>
-        <p:txBody>
-          <a:bodyPr wrap="square" lIns="45720" rIns="45720" tIns="18288" bIns="18288" anchor="t">
-            <a:spAutoFit/>
-          </a:bodyPr>
-          <a:lstStyle/>
-          <a:p>
-            <a:pPr algn="l"/>
-            <a:r>
-              <a:rPr sz="1100" b="1" i="0">
-                <a:solidFill>
-                  <a:srgbClr val="555555"/>
-                </a:solidFill>
-                <a:latin typeface="Calibri"/>
-              </a:rPr>
-              <a:t>partial</a:t>
-            </a:r>
-          </a:p>
-        </p:txBody>
-      </p:sp>
-      <p:cxnSp>
-        <p:nvCxnSpPr>
-          <p:cNvPr id="16" name="Connector 15"/>
-          <p:cNvCxnSpPr/>
-          <p:nvPr/>
-        </p:nvCxnSpPr>
-        <p:spPr>
-          <a:xfrm>
-            <a:off x="9592056" y="2606040"/>
-            <a:ext cx="210312" cy="0"/>
-          </a:xfrm>
-          <a:prstGeom prst="line">
-            <a:avLst/>
-          </a:prstGeom>
-          <a:ln w="25400">
-            <a:solidFill>
-              <a:srgbClr val="555555"/>
-            </a:solidFill>
-            <a:tailEnd type="triangle" w="med" len="med"/>
-          </a:ln>
-        </p:spPr>
-        <p:style>
-          <a:lnRef idx="2">
-            <a:schemeClr val="accent1"/>
-          </a:lnRef>
-          <a:fillRef idx="0">
-            <a:schemeClr val="accent1"/>
-          </a:fillRef>
-          <a:effectRef idx="1">
-            <a:schemeClr val="accent1"/>
-          </a:effectRef>
-          <a:fontRef idx="minor">
-            <a:schemeClr val="tx1"/>
-          </a:fontRef>
-        </p:style>
-      </p:cxnSp>
-      <p:sp>
-        <p:nvSpPr>
-          <p:cNvPr id="17" name="Rounded Rectangle 16"/>
-          <p:cNvSpPr/>
-          <p:nvPr/>
-        </p:nvSpPr>
-        <p:spPr>
-          <a:xfrm>
-            <a:off x="9802368" y="1920240"/>
-            <a:ext cx="2148840" cy="1371600"/>
-          </a:xfrm>
-          <a:prstGeom prst="roundRect">
-            <a:avLst/>
-          </a:prstGeom>
-          <a:solidFill>
-            <a:srgbClr val="E8E8E8"/>
-          </a:solidFill>
-          <a:ln w="15240">
-            <a:solidFill>
-              <a:srgbClr val="555555"/>
-            </a:solidFill>
-          </a:ln>
-        </p:spPr>
-        <p:style>
-          <a:lnRef idx="1">
-            <a:schemeClr val="accent1"/>
-          </a:lnRef>
-          <a:fillRef idx="3">
-            <a:schemeClr val="accent1"/>
-          </a:fillRef>
-          <a:effectRef idx="2">
-            <a:schemeClr val="accent1"/>
-          </a:effectRef>
-          <a:fontRef idx="minor">
-            <a:schemeClr val="lt1"/>
-          </a:fontRef>
-        </p:style>
-        <p:txBody>
-          <a:bodyPr rtlCol="0" anchor="ctr" lIns="54864" rIns="54864" tIns="27432" bIns="27432" wrap="square"/>
-          <a:lstStyle/>
-          <a:p>
-            <a:pPr algn="ctr"/>
-            <a:r>
-              <a:rPr sz="1050" b="1">
-                <a:solidFill>
-                  <a:srgbClr val="555555"/>
-                </a:solidFill>
-                <a:latin typeface="Calibri"/>
-              </a:rPr>
-              <a:t>D · UX layer
-wizard · overlay · dash</a:t>
-            </a:r>
-          </a:p>
-        </p:txBody>
-      </p:sp>
-      <p:sp>
-        <p:nvSpPr>
-          <p:cNvPr id="18" name="TextBox 17"/>
-          <p:cNvSpPr txBox="1"/>
-          <p:nvPr/>
-        </p:nvSpPr>
-        <p:spPr>
-          <a:xfrm>
-            <a:off x="9802368" y="3346704"/>
-            <a:ext cx="2148840" cy="365760"/>
-          </a:xfrm>
-          <a:prstGeom prst="rect">
-            <a:avLst/>
-          </a:prstGeom>
-          <a:noFill/>
-        </p:spPr>
-        <p:txBody>
-          <a:bodyPr wrap="square" lIns="45720" rIns="45720" tIns="18288" bIns="18288" anchor="t">
-            <a:spAutoFit/>
-          </a:bodyPr>
-          <a:lstStyle/>
-          <a:p>
-            <a:pPr algn="l"/>
-            <a:r>
-              <a:rPr sz="1100" b="1" i="0">
-                <a:solidFill>
-                  <a:srgbClr val="555555"/>
-                </a:solidFill>
-                <a:latin typeface="Calibri"/>
-              </a:rPr>
-              <a:t>next</a:t>
-            </a:r>
-          </a:p>
-        </p:txBody>
-      </p:sp>
-      <p:sp>
-        <p:nvSpPr>
-          <p:cNvPr id="19" name="TextBox 18"/>
-          <p:cNvSpPr txBox="1"/>
-          <p:nvPr/>
-        </p:nvSpPr>
-        <p:spPr>
-          <a:xfrm>
-            <a:off x="365760" y="4114800"/>
-            <a:ext cx="11475720" cy="365760"/>
-          </a:xfrm>
-          <a:prstGeom prst="rect">
-            <a:avLst/>
-          </a:prstGeom>
-          <a:noFill/>
-        </p:spPr>
-        <p:txBody>
-          <a:bodyPr wrap="square" lIns="45720" rIns="45720" tIns="18288" bIns="18288" anchor="t">
-            <a:spAutoFit/>
-          </a:bodyPr>
-          <a:lstStyle/>
-          <a:p>
-            <a:pPr algn="l"/>
-            <a:r>
-              <a:rPr sz="1600" b="0" i="0">
-                <a:solidFill>
-                  <a:srgbClr val="707070"/>
-                </a:solidFill>
-                <a:latin typeface="Calibri"/>
-              </a:rPr>
-              <a:t>Next up (in order)</a:t>
-            </a:r>
-          </a:p>
-        </p:txBody>
-      </p:sp>
-      <p:sp>
-        <p:nvSpPr>
-          <p:cNvPr id="20" name="Rounded Rectangle 19"/>
-          <p:cNvSpPr/>
-          <p:nvPr/>
-        </p:nvSpPr>
-        <p:spPr>
-          <a:xfrm>
-            <a:off x="365760" y="4553712"/>
-            <a:ext cx="3703320" cy="868680"/>
-          </a:xfrm>
-          <a:prstGeom prst="roundRect">
-            <a:avLst/>
-          </a:prstGeom>
-          <a:solidFill>
-            <a:srgbClr val="FFFFFF"/>
-          </a:solidFill>
-          <a:ln w="15240">
-            <a:solidFill>
-              <a:srgbClr val="1F77B4"/>
-            </a:solidFill>
-          </a:ln>
-        </p:spPr>
-        <p:style>
-          <a:lnRef idx="1">
-            <a:schemeClr val="accent1"/>
-          </a:lnRef>
-          <a:fillRef idx="3">
-            <a:schemeClr val="accent1"/>
-          </a:fillRef>
-          <a:effectRef idx="2">
-            <a:schemeClr val="accent1"/>
-          </a:effectRef>
-          <a:fontRef idx="minor">
-            <a:schemeClr val="lt1"/>
-          </a:fontRef>
-        </p:style>
-        <p:txBody>
-          <a:bodyPr rtlCol="0" anchor="ctr" lIns="54864" rIns="54864" tIns="27432" bIns="27432" wrap="square"/>
-          <a:lstStyle/>
-          <a:p>
-            <a:pPr algn="ctr"/>
-            <a:r>
-              <a:rPr sz="1150" b="1">
-                <a:solidFill>
-                  <a:srgbClr val="000000"/>
-                </a:solidFill>
-                <a:latin typeface="Calibri"/>
-              </a:rPr>
-              <a:t>1 · Wire the 4 remaining
-modes (engine ready)</a:t>
-            </a:r>
-          </a:p>
-        </p:txBody>
-      </p:sp>
-      <p:cxnSp>
-        <p:nvCxnSpPr>
-          <p:cNvPr id="21" name="Connector 20"/>
-          <p:cNvCxnSpPr/>
-          <p:nvPr/>
-        </p:nvCxnSpPr>
-        <p:spPr>
-          <a:xfrm>
-            <a:off x="4087368" y="4983480"/>
-            <a:ext cx="192024" cy="0"/>
-          </a:xfrm>
-          <a:prstGeom prst="line">
-            <a:avLst/>
-          </a:prstGeom>
-          <a:ln w="25400">
-            <a:solidFill>
-              <a:srgbClr val="555555"/>
-            </a:solidFill>
-            <a:tailEnd type="triangle" w="med" len="med"/>
-          </a:ln>
-        </p:spPr>
-        <p:style>
-          <a:lnRef idx="2">
-            <a:schemeClr val="accent1"/>
-          </a:lnRef>
-          <a:fillRef idx="0">
-            <a:schemeClr val="accent1"/>
-          </a:fillRef>
-          <a:effectRef idx="1">
-            <a:schemeClr val="accent1"/>
-          </a:effectRef>
-          <a:fontRef idx="minor">
-            <a:schemeClr val="tx1"/>
-          </a:fontRef>
-        </p:style>
-      </p:cxnSp>
-      <p:sp>
-        <p:nvSpPr>
-          <p:cNvPr id="22" name="Rounded Rectangle 21"/>
-          <p:cNvSpPr/>
-          <p:nvPr/>
-        </p:nvSpPr>
-        <p:spPr>
-          <a:xfrm>
-            <a:off x="4297680" y="4553712"/>
-            <a:ext cx="3703320" cy="868680"/>
-          </a:xfrm>
-          <a:prstGeom prst="roundRect">
-            <a:avLst/>
-          </a:prstGeom>
-          <a:solidFill>
-            <a:srgbClr val="FFFFFF"/>
-          </a:solidFill>
-          <a:ln w="15240">
-            <a:solidFill>
-              <a:srgbClr val="1F77B4"/>
-            </a:solidFill>
-          </a:ln>
-        </p:spPr>
-        <p:style>
-          <a:lnRef idx="1">
-            <a:schemeClr val="accent1"/>
-          </a:lnRef>
-          <a:fillRef idx="3">
-            <a:schemeClr val="accent1"/>
-          </a:fillRef>
-          <a:effectRef idx="2">
-            <a:schemeClr val="accent1"/>
-          </a:effectRef>
-          <a:fontRef idx="minor">
-            <a:schemeClr val="lt1"/>
-          </a:fontRef>
-        </p:style>
-        <p:txBody>
-          <a:bodyPr rtlCol="0" anchor="ctr" lIns="54864" rIns="54864" tIns="27432" bIns="27432" wrap="square"/>
-          <a:lstStyle/>
-          <a:p>
-            <a:pPr algn="ctr"/>
-            <a:r>
-              <a:rPr sz="1150" b="1">
-                <a:solidFill>
-                  <a:srgbClr val="000000"/>
-                </a:solidFill>
-                <a:latin typeface="Calibri"/>
-              </a:rPr>
-              <a:t>2 · Measured Poisson
-(4-marker + backdrop)</a:t>
-            </a:r>
-          </a:p>
-        </p:txBody>
-      </p:sp>
-      <p:cxnSp>
-        <p:nvCxnSpPr>
-          <p:cNvPr id="23" name="Connector 22"/>
-          <p:cNvCxnSpPr/>
-          <p:nvPr/>
-        </p:nvCxnSpPr>
-        <p:spPr>
-          <a:xfrm>
-            <a:off x="8019288" y="4983480"/>
-            <a:ext cx="192024" cy="0"/>
-          </a:xfrm>
-          <a:prstGeom prst="line">
-            <a:avLst/>
-          </a:prstGeom>
-          <a:ln w="25400">
-            <a:solidFill>
-              <a:srgbClr val="555555"/>
-            </a:solidFill>
-            <a:tailEnd type="triangle" w="med" len="med"/>
-          </a:ln>
-        </p:spPr>
-        <p:style>
-          <a:lnRef idx="2">
-            <a:schemeClr val="accent1"/>
-          </a:lnRef>
-          <a:fillRef idx="0">
-            <a:schemeClr val="accent1"/>
-          </a:fillRef>
-          <a:effectRef idx="1">
-            <a:schemeClr val="accent1"/>
-          </a:effectRef>
-          <a:fontRef idx="minor">
-            <a:schemeClr val="tx1"/>
-          </a:fontRef>
-        </p:style>
-      </p:cxnSp>
-      <p:sp>
-        <p:nvSpPr>
-          <p:cNvPr id="24" name="Rounded Rectangle 23"/>
-          <p:cNvSpPr/>
-          <p:nvPr/>
-        </p:nvSpPr>
-        <p:spPr>
-          <a:xfrm>
-            <a:off x="8229600" y="4553712"/>
-            <a:ext cx="3611880" cy="868680"/>
-          </a:xfrm>
-          <a:prstGeom prst="roundRect">
-            <a:avLst/>
-          </a:prstGeom>
-          <a:solidFill>
-            <a:srgbClr val="FFFFFF"/>
-          </a:solidFill>
-          <a:ln w="15240">
-            <a:solidFill>
-              <a:srgbClr val="1F77B4"/>
-            </a:solidFill>
-          </a:ln>
-        </p:spPr>
-        <p:style>
-          <a:lnRef idx="1">
-            <a:schemeClr val="accent1"/>
-          </a:lnRef>
-          <a:fillRef idx="3">
-            <a:schemeClr val="accent1"/>
-          </a:fillRef>
-          <a:effectRef idx="2">
-            <a:schemeClr val="accent1"/>
-          </a:effectRef>
-          <a:fontRef idx="minor">
-            <a:schemeClr val="lt1"/>
-          </a:fontRef>
-        </p:style>
-        <p:txBody>
-          <a:bodyPr rtlCol="0" anchor="ctr" lIns="54864" rIns="54864" tIns="27432" bIns="27432" wrap="square"/>
-          <a:lstStyle/>
-          <a:p>
-            <a:pPr algn="ctr"/>
-            <a:r>
-              <a:rPr sz="1150" b="1">
-                <a:solidFill>
-                  <a:srgbClr val="000000"/>
-                </a:solidFill>
-                <a:latin typeface="Calibri"/>
-              </a:rPr>
-              <a:t>3 · UX wizard +
-live overlay</a:t>
-            </a:r>
-          </a:p>
-        </p:txBody>
-      </p:sp>
-      <p:sp>
-        <p:nvSpPr>
-          <p:cNvPr id="25" name="Rectangle 24"/>
-          <p:cNvSpPr/>
-          <p:nvPr/>
-        </p:nvSpPr>
-        <p:spPr>
-          <a:xfrm>
-            <a:off x="365760" y="5669280"/>
-            <a:ext cx="11475720" cy="658368"/>
+            <a:off x="365760" y="5029200"/>
+            <a:ext cx="11475720" cy="914400"/>
           </a:xfrm>
           <a:prstGeom prst="rect">
             <a:avLst/>
@@ -24575,20 +23680,55 @@
           <a:p>
             <a:pPr algn="ctr"/>
             <a:r>
-              <a:rPr sz="1100" b="1">
+              <a:rPr sz="1200" b="1">
                 <a:solidFill>
                   <a:srgbClr val="000000"/>
                 </a:solidFill>
                 <a:latin typeface="Calibri"/>
               </a:rPr>
-              <a:t>Hardware gate — motor torque ~2.6 kN today; fix driver Vref / cooling to fracture 100% infill.</a:t>
-            </a:r>
-          </a:p>
-        </p:txBody>
-      </p:sp>
-      <p:sp>
-        <p:nvSpPr>
-          <p:cNvPr id="26" name="TextBox 25"/>
+              <a:t>HARD LIMITS —  force 10 kN  ·  travel 30 mm  ·  stall 0.05 mm in 6 s (&gt;200 N)  ·  dead-DIC halt 1.0 s  ·  timeout 900 s.   Any breach → Stop + E-Stop.</a:t>
+            </a:r>
+          </a:p>
+        </p:txBody>
+      </p:sp>
+      <p:sp>
+        <p:nvSpPr>
+          <p:cNvPr id="8" name="TextBox 7"/>
+          <p:cNvSpPr txBox="1"/>
+          <p:nvPr/>
+        </p:nvSpPr>
+        <p:spPr>
+          <a:xfrm>
+            <a:off x="548640" y="6400800"/>
+            <a:ext cx="11064240" cy="365760"/>
+          </a:xfrm>
+          <a:prstGeom prst="rect">
+            <a:avLst/>
+          </a:prstGeom>
+          <a:noFill/>
+        </p:spPr>
+        <p:txBody>
+          <a:bodyPr wrap="square" lIns="45720" rIns="45720" tIns="18288" bIns="18288" anchor="t">
+            <a:spAutoFit/>
+          </a:bodyPr>
+          <a:lstStyle/>
+          <a:p>
+            <a:pPr algn="l"/>
+            <a:r>
+              <a:rPr sz="1200" b="0" i="1">
+                <a:solidFill>
+                  <a:srgbClr val="707070"/>
+                </a:solidFill>
+                <a:latin typeface="Calibri"/>
+              </a:rPr>
+              <a:t>Layered so a driven test (preload · fracture · strain-rate) can't run away — protects the motor, the printed grips and the 3 t load cell.</a:t>
+            </a:r>
+          </a:p>
+        </p:txBody>
+      </p:sp>
+      <p:sp>
+        <p:nvSpPr>
+          <p:cNvPr id="9" name="TextBox 8"/>
           <p:cNvSpPr txBox="1"/>
           <p:nvPr/>
         </p:nvSpPr>
@@ -24747,21 +23887,414 @@
                 </a:solidFill>
                 <a:latin typeface="Calibri Light"/>
               </a:rPr>
-              <a:t>IN THE APP — ONE-CLICK REPORT &amp; SAVED SETTINGS</a:t>
-            </a:r>
-          </a:p>
-        </p:txBody>
-      </p:sp>
-      <p:sp>
-        <p:nvSpPr>
-          <p:cNvPr id="5" name="TextBox 4"/>
+              <a:t>TWO WAYS TO FRACTURE — WHEN TO USE WHICH</a:t>
+            </a:r>
+          </a:p>
+        </p:txBody>
+      </p:sp>
+      <p:graphicFrame>
+        <p:nvGraphicFramePr>
+          <p:cNvPr id="5" name="Table 4"/>
+          <p:cNvGraphicFramePr>
+            <a:graphicFrameLocks noGrp="1"/>
+          </p:cNvGraphicFramePr>
+          <p:nvPr/>
+        </p:nvGraphicFramePr>
+        <p:xfrm>
+          <a:off x="365760" y="1280160"/>
+          <a:ext cx="11475720" cy="2971800"/>
+        </p:xfrm>
+        <a:graphic>
+          <a:graphicData uri="http://schemas.openxmlformats.org/drawingml/2006/table">
+            <a:tbl>
+              <a:tblPr firstRow="1" bandRow="1">
+                <a:tableStyleId>{5C22544A-7EE6-4342-B048-85BDC9FD1C3A}</a:tableStyleId>
+              </a:tblPr>
+              <a:tblGrid>
+                <a:gridCol w="1920240"/>
+                <a:gridCol w="4754880"/>
+                <a:gridCol w="4800600"/>
+              </a:tblGrid>
+              <a:tr h="495300">
+                <a:tc>
+                  <a:txBody>
+                    <a:bodyPr lIns="54864" rIns="54864" tIns="18288" bIns="18288" wrap="square" anchor="ctr"/>
+                    <a:lstStyle/>
+                    <a:p>
+                      <a:pPr algn="l"/>
+                      <a:r>
+                        <a:rPr sz="1100" b="1">
+                          <a:solidFill>
+                            <a:srgbClr val="FFFFFF"/>
+                          </a:solidFill>
+                          <a:latin typeface="Calibri"/>
+                        </a:rPr>
+                        <a:t/>
+                      </a:r>
+                    </a:p>
+                  </a:txBody>
+                  <a:tcPr>
+                    <a:solidFill>
+                      <a:srgbClr val="143D2F"/>
+                    </a:solidFill>
+                  </a:tcPr>
+                </a:tc>
+                <a:tc>
+                  <a:txBody>
+                    <a:bodyPr lIns="54864" rIns="54864" tIns="18288" bIns="18288" wrap="square" anchor="ctr"/>
+                    <a:lstStyle/>
+                    <a:p>
+                      <a:pPr algn="l"/>
+                      <a:r>
+                        <a:rPr sz="1100" b="1">
+                          <a:solidFill>
+                            <a:srgbClr val="FFFFFF"/>
+                          </a:solidFill>
+                          <a:latin typeface="Calibri"/>
+                        </a:rPr>
+                        <a:t>Direct motor speed</a:t>
+                      </a:r>
+                    </a:p>
+                  </a:txBody>
+                  <a:tcPr>
+                    <a:solidFill>
+                      <a:srgbClr val="143D2F"/>
+                    </a:solidFill>
+                  </a:tcPr>
+                </a:tc>
+                <a:tc>
+                  <a:txBody>
+                    <a:bodyPr lIns="54864" rIns="54864" tIns="18288" bIns="18288" wrap="square" anchor="ctr"/>
+                    <a:lstStyle/>
+                    <a:p>
+                      <a:pPr algn="l"/>
+                      <a:r>
+                        <a:rPr sz="1100" b="1">
+                          <a:solidFill>
+                            <a:srgbClr val="FFFFFF"/>
+                          </a:solidFill>
+                          <a:latin typeface="Calibri"/>
+                        </a:rPr>
+                        <a:t>Strain-rate fracture</a:t>
+                      </a:r>
+                    </a:p>
+                  </a:txBody>
+                  <a:tcPr>
+                    <a:solidFill>
+                      <a:srgbClr val="143D2F"/>
+                    </a:solidFill>
+                  </a:tcPr>
+                </a:tc>
+              </a:tr>
+              <a:tr h="495300">
+                <a:tc>
+                  <a:txBody>
+                    <a:bodyPr lIns="54864" rIns="54864" tIns="18288" bIns="18288" wrap="square" anchor="ctr"/>
+                    <a:lstStyle/>
+                    <a:p>
+                      <a:pPr algn="l"/>
+                      <a:r>
+                        <a:rPr sz="1050" b="0">
+                          <a:solidFill>
+                            <a:srgbClr val="000000"/>
+                          </a:solidFill>
+                          <a:latin typeface="Calibri"/>
+                        </a:rPr>
+                        <a:t>How</a:t>
+                      </a:r>
+                    </a:p>
+                  </a:txBody>
+                  <a:tcPr/>
+                </a:tc>
+                <a:tc>
+                  <a:txBody>
+                    <a:bodyPr lIns="54864" rIns="54864" tIns="18288" bIns="18288" wrap="square" anchor="ctr"/>
+                    <a:lstStyle/>
+                    <a:p>
+                      <a:pPr algn="l"/>
+                      <a:r>
+                        <a:rPr sz="1050" b="0">
+                          <a:solidFill>
+                            <a:srgbClr val="000000"/>
+                          </a:solidFill>
+                          <a:latin typeface="Calibri"/>
+                        </a:rPr>
+                        <a:t>constant crosshead mm/s</a:t>
+                      </a:r>
+                    </a:p>
+                  </a:txBody>
+                  <a:tcPr/>
+                </a:tc>
+                <a:tc>
+                  <a:txBody>
+                    <a:bodyPr lIns="54864" rIns="54864" tIns="18288" bIns="18288" wrap="square" anchor="ctr"/>
+                    <a:lstStyle/>
+                    <a:p>
+                      <a:pPr algn="l"/>
+                      <a:r>
+                        <a:rPr sz="1050" b="0">
+                          <a:solidFill>
+                            <a:srgbClr val="000000"/>
+                          </a:solidFill>
+                          <a:latin typeface="Calibri"/>
+                        </a:rPr>
+                        <a:t>closed-loop on DIC dε/dt</a:t>
+                      </a:r>
+                    </a:p>
+                  </a:txBody>
+                  <a:tcPr/>
+                </a:tc>
+              </a:tr>
+              <a:tr h="495300">
+                <a:tc>
+                  <a:txBody>
+                    <a:bodyPr lIns="54864" rIns="54864" tIns="18288" bIns="18288" wrap="square" anchor="ctr"/>
+                    <a:lstStyle/>
+                    <a:p>
+                      <a:pPr algn="l"/>
+                      <a:r>
+                        <a:rPr sz="1050" b="0">
+                          <a:solidFill>
+                            <a:srgbClr val="000000"/>
+                          </a:solidFill>
+                          <a:latin typeface="Calibri"/>
+                        </a:rPr>
+                        <a:t>Rate</a:t>
+                      </a:r>
+                    </a:p>
+                  </a:txBody>
+                  <a:tcPr/>
+                </a:tc>
+                <a:tc>
+                  <a:txBody>
+                    <a:bodyPr lIns="54864" rIns="54864" tIns="18288" bIns="18288" wrap="square" anchor="ctr"/>
+                    <a:lstStyle/>
+                    <a:p>
+                      <a:pPr algn="l"/>
+                      <a:r>
+                        <a:rPr sz="1050" b="0">
+                          <a:solidFill>
+                            <a:srgbClr val="000000"/>
+                          </a:solidFill>
+                          <a:latin typeface="Calibri"/>
+                        </a:rPr>
+                        <a:t>varies (fast neck, slow elastic)</a:t>
+                      </a:r>
+                    </a:p>
+                  </a:txBody>
+                  <a:tcPr/>
+                </a:tc>
+                <a:tc>
+                  <a:txBody>
+                    <a:bodyPr lIns="54864" rIns="54864" tIns="18288" bIns="18288" wrap="square" anchor="ctr"/>
+                    <a:lstStyle/>
+                    <a:p>
+                      <a:pPr algn="l"/>
+                      <a:r>
+                        <a:rPr sz="1050" b="0">
+                          <a:solidFill>
+                            <a:srgbClr val="000000"/>
+                          </a:solidFill>
+                          <a:latin typeface="Calibri"/>
+                        </a:rPr>
+                        <a:t>CONSTANT gauge rate</a:t>
+                      </a:r>
+                    </a:p>
+                  </a:txBody>
+                  <a:tcPr/>
+                </a:tc>
+              </a:tr>
+              <a:tr h="495300">
+                <a:tc>
+                  <a:txBody>
+                    <a:bodyPr lIns="54864" rIns="54864" tIns="18288" bIns="18288" wrap="square" anchor="ctr"/>
+                    <a:lstStyle/>
+                    <a:p>
+                      <a:pPr algn="l"/>
+                      <a:r>
+                        <a:rPr sz="1050" b="0">
+                          <a:solidFill>
+                            <a:srgbClr val="000000"/>
+                          </a:solidFill>
+                          <a:latin typeface="Calibri"/>
+                        </a:rPr>
+                        <a:t>Needs DIC?</a:t>
+                      </a:r>
+                    </a:p>
+                  </a:txBody>
+                  <a:tcPr/>
+                </a:tc>
+                <a:tc>
+                  <a:txBody>
+                    <a:bodyPr lIns="54864" rIns="54864" tIns="18288" bIns="18288" wrap="square" anchor="ctr"/>
+                    <a:lstStyle/>
+                    <a:p>
+                      <a:pPr algn="l"/>
+                      <a:r>
+                        <a:rPr sz="1050" b="0">
+                          <a:solidFill>
+                            <a:srgbClr val="000000"/>
+                          </a:solidFill>
+                          <a:latin typeface="Calibri"/>
+                        </a:rPr>
+                        <a:t>no</a:t>
+                      </a:r>
+                    </a:p>
+                  </a:txBody>
+                  <a:tcPr/>
+                </a:tc>
+                <a:tc>
+                  <a:txBody>
+                    <a:bodyPr lIns="54864" rIns="54864" tIns="18288" bIns="18288" wrap="square" anchor="ctr"/>
+                    <a:lstStyle/>
+                    <a:p>
+                      <a:pPr algn="l"/>
+                      <a:r>
+                        <a:rPr sz="1050" b="0">
+                          <a:solidFill>
+                            <a:srgbClr val="000000"/>
+                          </a:solidFill>
+                          <a:latin typeface="Calibri"/>
+                        </a:rPr>
+                        <a:t>YES (green 2/2)</a:t>
+                      </a:r>
+                    </a:p>
+                  </a:txBody>
+                  <a:tcPr/>
+                </a:tc>
+              </a:tr>
+              <a:tr h="495300">
+                <a:tc>
+                  <a:txBody>
+                    <a:bodyPr lIns="54864" rIns="54864" tIns="18288" bIns="18288" wrap="square" anchor="ctr"/>
+                    <a:lstStyle/>
+                    <a:p>
+                      <a:pPr algn="l"/>
+                      <a:r>
+                        <a:rPr sz="1050" b="0">
+                          <a:solidFill>
+                            <a:srgbClr val="000000"/>
+                          </a:solidFill>
+                          <a:latin typeface="Calibri"/>
+                        </a:rPr>
+                        <a:t>Motor force</a:t>
+                      </a:r>
+                    </a:p>
+                  </a:txBody>
+                  <a:tcPr/>
+                </a:tc>
+                <a:tc>
+                  <a:txBody>
+                    <a:bodyPr lIns="54864" rIns="54864" tIns="18288" bIns="18288" wrap="square" anchor="ctr"/>
+                    <a:lstStyle/>
+                    <a:p>
+                      <a:pPr algn="l"/>
+                      <a:r>
+                        <a:rPr sz="1050" b="0">
+                          <a:solidFill>
+                            <a:srgbClr val="000000"/>
+                          </a:solidFill>
+                          <a:latin typeface="Calibri"/>
+                        </a:rPr>
+                        <a:t>full — higher speed OK</a:t>
+                      </a:r>
+                    </a:p>
+                  </a:txBody>
+                  <a:tcPr/>
+                </a:tc>
+                <a:tc>
+                  <a:txBody>
+                    <a:bodyPr lIns="54864" rIns="54864" tIns="18288" bIns="18288" wrap="square" anchor="ctr"/>
+                    <a:lstStyle/>
+                    <a:p>
+                      <a:pPr algn="l"/>
+                      <a:r>
+                        <a:rPr sz="1050" b="0">
+                          <a:solidFill>
+                            <a:srgbClr val="000000"/>
+                          </a:solidFill>
+                          <a:latin typeface="Calibri"/>
+                        </a:rPr>
+                        <a:t>capped speed → less force</a:t>
+                      </a:r>
+                    </a:p>
+                  </a:txBody>
+                  <a:tcPr/>
+                </a:tc>
+              </a:tr>
+              <a:tr h="495300">
+                <a:tc>
+                  <a:txBody>
+                    <a:bodyPr lIns="54864" rIns="54864" tIns="18288" bIns="18288" wrap="square" anchor="ctr"/>
+                    <a:lstStyle/>
+                    <a:p>
+                      <a:pPr algn="l"/>
+                      <a:r>
+                        <a:rPr sz="1050" b="0">
+                          <a:solidFill>
+                            <a:srgbClr val="000000"/>
+                          </a:solidFill>
+                          <a:latin typeface="Calibri"/>
+                        </a:rPr>
+                        <a:t>Best for</a:t>
+                      </a:r>
+                    </a:p>
+                  </a:txBody>
+                  <a:tcPr/>
+                </a:tc>
+                <a:tc>
+                  <a:txBody>
+                    <a:bodyPr lIns="54864" rIns="54864" tIns="18288" bIns="18288" wrap="square" anchor="ctr"/>
+                    <a:lstStyle/>
+                    <a:p>
+                      <a:pPr algn="l"/>
+                      <a:r>
+                        <a:rPr sz="1050" b="0">
+                          <a:solidFill>
+                            <a:srgbClr val="000000"/>
+                          </a:solidFill>
+                          <a:latin typeface="Calibri"/>
+                        </a:rPr>
+                        <a:t>quick UTS · strong specimens</a:t>
+                      </a:r>
+                    </a:p>
+                  </a:txBody>
+                  <a:tcPr/>
+                </a:tc>
+                <a:tc>
+                  <a:txBody>
+                    <a:bodyPr lIns="54864" rIns="54864" tIns="18288" bIns="18288" wrap="square" anchor="ctr"/>
+                    <a:lstStyle/>
+                    <a:p>
+                      <a:pPr algn="l"/>
+                      <a:r>
+                        <a:rPr sz="1050" b="0">
+                          <a:solidFill>
+                            <a:srgbClr val="000000"/>
+                          </a:solidFill>
+                          <a:latin typeface="Calibri"/>
+                        </a:rPr>
+                        <a:t>standards-grade · rate-sensitive</a:t>
+                      </a:r>
+                    </a:p>
+                  </a:txBody>
+                  <a:tcPr/>
+                </a:tc>
+              </a:tr>
+            </a:tbl>
+          </a:graphicData>
+        </a:graphic>
+      </p:graphicFrame>
+      <p:sp>
+        <p:nvSpPr>
+          <p:cNvPr id="6" name="TextBox 5"/>
           <p:cNvSpPr txBox="1"/>
           <p:nvPr/>
         </p:nvSpPr>
         <p:spPr>
           <a:xfrm>
-            <a:off x="365760" y="1170432"/>
-            <a:ext cx="5669280" cy="365760"/>
+            <a:off x="365760" y="4480560"/>
+            <a:ext cx="11475720" cy="365760"/>
           </a:xfrm>
           <a:prstGeom prst="rect">
             <a:avLst/>
@@ -24782,90 +24315,31 @@
                 </a:solidFill>
                 <a:latin typeface="Calibri"/>
               </a:rPr>
-              <a:t>Generate report  →  one-page PDF + PNGs</a:t>
-            </a:r>
-          </a:p>
-        </p:txBody>
-      </p:sp>
-      <p:pic>
-        <p:nvPicPr>
-          <p:cNvPr id="6" name="Picture 5" descr="feat_report_s16.png"/>
-          <p:cNvPicPr>
-            <a:picLocks noChangeAspect="1"/>
-          </p:cNvPicPr>
-          <p:nvPr/>
-        </p:nvPicPr>
-        <p:blipFill>
-          <a:blip r:embed="rId2"/>
-          <a:stretch>
-            <a:fillRect/>
-          </a:stretch>
-        </p:blipFill>
-        <p:spPr>
-          <a:xfrm>
-            <a:off x="365760" y="1627632"/>
-            <a:ext cx="5623560" cy="3163252"/>
-          </a:xfrm>
-          <a:prstGeom prst="rect">
-            <a:avLst/>
-          </a:prstGeom>
-        </p:spPr>
-      </p:pic>
-      <p:sp>
-        <p:nvSpPr>
-          <p:cNvPr id="7" name="TextBox 6"/>
-          <p:cNvSpPr txBox="1"/>
-          <p:nvPr/>
-        </p:nvSpPr>
-        <p:spPr>
-          <a:xfrm>
-            <a:off x="6355080" y="1170432"/>
-            <a:ext cx="5486400" cy="365760"/>
-          </a:xfrm>
-          <a:prstGeom prst="rect">
-            <a:avLst/>
-          </a:prstGeom>
-          <a:noFill/>
-        </p:spPr>
-        <p:txBody>
-          <a:bodyPr wrap="square" lIns="45720" rIns="45720" tIns="18288" bIns="18288" anchor="t">
-            <a:spAutoFit/>
-          </a:bodyPr>
-          <a:lstStyle/>
-          <a:p>
-            <a:pPr algn="l"/>
-            <a:r>
-              <a:rPr sz="1600" b="0" i="0">
-                <a:solidFill>
-                  <a:srgbClr val="707070"/>
-                </a:solidFill>
-                <a:latin typeface="Calibri"/>
-              </a:rPr>
-              <a:t>Settings  —  save a setup, reload in 1 click</a:t>
-            </a:r>
-          </a:p>
-        </p:txBody>
-      </p:sp>
-      <p:sp>
-        <p:nvSpPr>
-          <p:cNvPr id="8" name="Rounded Rectangle 7"/>
+              <a:t>Suggestion</a:t>
+            </a:r>
+          </a:p>
+        </p:txBody>
+      </p:sp>
+      <p:sp>
+        <p:nvSpPr>
+          <p:cNvPr id="7" name="Rounded Rectangle 6"/>
           <p:cNvSpPr/>
           <p:nvPr/>
         </p:nvSpPr>
         <p:spPr>
           <a:xfrm>
-            <a:off x="6355080" y="1627632"/>
-            <a:ext cx="5486400" cy="502920"/>
+            <a:off x="365760" y="4910328"/>
+            <a:ext cx="5669280" cy="914400"/>
           </a:xfrm>
           <a:prstGeom prst="roundRect">
             <a:avLst/>
           </a:prstGeom>
           <a:solidFill>
-            <a:srgbClr val="F2F2F2"/>
+            <a:srgbClr val="E7F1F8"/>
           </a:solidFill>
           <a:ln w="15240">
             <a:solidFill>
-              <a:srgbClr val="555555"/>
+              <a:srgbClr val="1F77B4"/>
             </a:solidFill>
           </a:ln>
         </p:spPr>
@@ -24889,13 +24363,69 @@
           <a:p>
             <a:pPr algn="ctr"/>
             <a:r>
-              <a:rPr sz="1100" b="1">
+              <a:rPr sz="1250" b="1">
                 <a:solidFill>
                   <a:srgbClr val="000000"/>
                 </a:solidFill>
                 <a:latin typeface="Calibri"/>
               </a:rPr>
-              <a:t>Settings:  [ Default v ]   [ Load ]   [ Save... ]   Infill %: [ 100 ]</a:t>
+              <a:t>MAX pulling force or a quick UTS?
+→  DIRECT motor speed</a:t>
+            </a:r>
+          </a:p>
+        </p:txBody>
+      </p:sp>
+      <p:sp>
+        <p:nvSpPr>
+          <p:cNvPr id="8" name="Rounded Rectangle 7"/>
+          <p:cNvSpPr/>
+          <p:nvPr/>
+        </p:nvSpPr>
+        <p:spPr>
+          <a:xfrm>
+            <a:off x="6172200" y="4910328"/>
+            <a:ext cx="5669280" cy="914400"/>
+          </a:xfrm>
+          <a:prstGeom prst="roundRect">
+            <a:avLst/>
+          </a:prstGeom>
+          <a:solidFill>
+            <a:srgbClr val="C8E6C9"/>
+          </a:solidFill>
+          <a:ln w="15240">
+            <a:solidFill>
+              <a:srgbClr val="1F3F2F"/>
+            </a:solidFill>
+          </a:ln>
+        </p:spPr>
+        <p:style>
+          <a:lnRef idx="1">
+            <a:schemeClr val="accent1"/>
+          </a:lnRef>
+          <a:fillRef idx="3">
+            <a:schemeClr val="accent1"/>
+          </a:fillRef>
+          <a:effectRef idx="2">
+            <a:schemeClr val="accent1"/>
+          </a:effectRef>
+          <a:fontRef idx="minor">
+            <a:schemeClr val="lt1"/>
+          </a:fontRef>
+        </p:style>
+        <p:txBody>
+          <a:bodyPr rtlCol="0" anchor="ctr" lIns="54864" rIns="54864" tIns="27432" bIns="27432" wrap="square"/>
+          <a:lstStyle/>
+          <a:p>
+            <a:pPr algn="ctr"/>
+            <a:r>
+              <a:rPr sz="1250" b="1">
+                <a:solidFill>
+                  <a:srgbClr val="1F3F2F"/>
+                </a:solidFill>
+                <a:latin typeface="Calibri"/>
+              </a:rPr>
+              <a:t>Controlled material strain rate (comparable)?
+→  STRAIN-RATE fracture</a:t>
             </a:r>
           </a:p>
         </p:txBody>
@@ -24908,8 +24438,8 @@
         </p:nvSpPr>
         <p:spPr>
           <a:xfrm>
-            <a:off x="6355080" y="2331720"/>
-            <a:ext cx="5486400" cy="2926080"/>
+            <a:off x="548640" y="6400800"/>
+            <a:ext cx="11064240" cy="365760"/>
           </a:xfrm>
           <a:prstGeom prst="rect">
             <a:avLst/>
@@ -24924,17 +24454,13 @@
           <a:p>
             <a:pPr algn="l"/>
             <a:r>
-              <a:rPr sz="1150" b="0" i="0">
-                <a:solidFill>
-                  <a:srgbClr val="000000"/>
+              <a:rPr sz="1200" b="0" i="1">
+                <a:solidFill>
+                  <a:srgbClr val="707070"/>
                 </a:solidFill>
                 <a:latin typeface="Calibri"/>
               </a:rPr>
-              <a:t>•  Saves area · gauge · preload · speed · mode + params
-•  'Default' always present (auto-stop ON)
-•  Reload a full test setup with ONE click
-•  Infill % = recorded label only (does NOT change data)
-•  Report reads the CSV header → KPIs + 4 plots + validation</a:t>
+              <a:t>Both auto-stop on fracture (same detector) + stall guard. On THIS rig (torque ~2.6 kN today) use 50% / smaller specimens for strain-rate to reach break.</a:t>
             </a:r>
           </a:p>
         </p:txBody>
@@ -24942,41 +24468,6 @@
       <p:sp>
         <p:nvSpPr>
           <p:cNvPr id="10" name="TextBox 9"/>
-          <p:cNvSpPr txBox="1"/>
-          <p:nvPr/>
-        </p:nvSpPr>
-        <p:spPr>
-          <a:xfrm>
-            <a:off x="548640" y="6400800"/>
-            <a:ext cx="11064240" cy="365760"/>
-          </a:xfrm>
-          <a:prstGeom prst="rect">
-            <a:avLst/>
-          </a:prstGeom>
-          <a:noFill/>
-        </p:spPr>
-        <p:txBody>
-          <a:bodyPr wrap="square" lIns="45720" rIns="45720" tIns="18288" bIns="18288" anchor="t">
-            <a:spAutoFit/>
-          </a:bodyPr>
-          <a:lstStyle/>
-          <a:p>
-            <a:pPr algn="l"/>
-            <a:r>
-              <a:rPr sz="1200" b="0" i="1">
-                <a:solidFill>
-                  <a:srgbClr val="707070"/>
-                </a:solidFill>
-                <a:latin typeface="Calibri"/>
-              </a:rPr>
-              <a:t>Report shown is the REAL S16 one-pager (auto-generated: reports/…200615_report.png). Settings row is a schematic of the Motor-Control controls.</a:t>
-            </a:r>
-          </a:p>
-        </p:txBody>
-      </p:sp>
-      <p:sp>
-        <p:nvSpPr>
-          <p:cNvPr id="11" name="TextBox 10"/>
           <p:cNvSpPr txBox="1"/>
           <p:nvPr/>
         </p:nvSpPr>
@@ -25135,6 +24626,2675 @@
                 </a:solidFill>
                 <a:latin typeface="Calibri Light"/>
               </a:rPr>
+              <a:t>INNOVATION ROADMAP — AT A GLANCE</a:t>
+            </a:r>
+          </a:p>
+        </p:txBody>
+      </p:sp>
+      <p:sp>
+        <p:nvSpPr>
+          <p:cNvPr id="5" name="Rounded Rectangle 4"/>
+          <p:cNvSpPr/>
+          <p:nvPr/>
+        </p:nvSpPr>
+        <p:spPr>
+          <a:xfrm>
+            <a:off x="365760" y="1920240"/>
+            <a:ext cx="2148840" cy="1371600"/>
+          </a:xfrm>
+          <a:prstGeom prst="roundRect">
+            <a:avLst/>
+          </a:prstGeom>
+          <a:solidFill>
+            <a:srgbClr val="C8E6C9"/>
+          </a:solidFill>
+          <a:ln w="15240">
+            <a:solidFill>
+              <a:srgbClr val="1F3F2F"/>
+            </a:solidFill>
+          </a:ln>
+        </p:spPr>
+        <p:style>
+          <a:lnRef idx="1">
+            <a:schemeClr val="accent1"/>
+          </a:lnRef>
+          <a:fillRef idx="3">
+            <a:schemeClr val="accent1"/>
+          </a:fillRef>
+          <a:effectRef idx="2">
+            <a:schemeClr val="accent1"/>
+          </a:effectRef>
+          <a:fontRef idx="minor">
+            <a:schemeClr val="lt1"/>
+          </a:fontRef>
+        </p:style>
+        <p:txBody>
+          <a:bodyPr rtlCol="0" anchor="ctr" lIns="54864" rIns="54864" tIns="27432" bIns="27432" wrap="square"/>
+          <a:lstStyle/>
+          <a:p>
+            <a:pPr algn="ctr"/>
+            <a:r>
+              <a:rPr sz="1050" b="1">
+                <a:solidFill>
+                  <a:srgbClr val="1F3F2F"/>
+                </a:solidFill>
+                <a:latin typeface="Calibri"/>
+              </a:rPr>
+              <a:t>0 · Foundations
+analysis · engine · recipes</a:t>
+            </a:r>
+          </a:p>
+        </p:txBody>
+      </p:sp>
+      <p:sp>
+        <p:nvSpPr>
+          <p:cNvPr id="6" name="TextBox 5"/>
+          <p:cNvSpPr txBox="1"/>
+          <p:nvPr/>
+        </p:nvSpPr>
+        <p:spPr>
+          <a:xfrm>
+            <a:off x="365760" y="3346704"/>
+            <a:ext cx="2148840" cy="365760"/>
+          </a:xfrm>
+          <a:prstGeom prst="rect">
+            <a:avLst/>
+          </a:prstGeom>
+          <a:noFill/>
+        </p:spPr>
+        <p:txBody>
+          <a:bodyPr wrap="square" lIns="45720" rIns="45720" tIns="18288" bIns="18288" anchor="t">
+            <a:spAutoFit/>
+          </a:bodyPr>
+          <a:lstStyle/>
+          <a:p>
+            <a:pPr algn="l"/>
+            <a:r>
+              <a:rPr sz="1100" b="1" i="0">
+                <a:solidFill>
+                  <a:srgbClr val="1F3F2F"/>
+                </a:solidFill>
+                <a:latin typeface="Calibri"/>
+              </a:rPr>
+              <a:t>DONE</a:t>
+            </a:r>
+          </a:p>
+        </p:txBody>
+      </p:sp>
+      <p:cxnSp>
+        <p:nvCxnSpPr>
+          <p:cNvPr id="7" name="Connector 6"/>
+          <p:cNvCxnSpPr/>
+          <p:nvPr/>
+        </p:nvCxnSpPr>
+        <p:spPr>
+          <a:xfrm>
+            <a:off x="2514600" y="2606040"/>
+            <a:ext cx="210312" cy="0"/>
+          </a:xfrm>
+          <a:prstGeom prst="line">
+            <a:avLst/>
+          </a:prstGeom>
+          <a:ln w="25400">
+            <a:solidFill>
+              <a:srgbClr val="555555"/>
+            </a:solidFill>
+            <a:tailEnd type="triangle" w="med" len="med"/>
+          </a:ln>
+        </p:spPr>
+        <p:style>
+          <a:lnRef idx="2">
+            <a:schemeClr val="accent1"/>
+          </a:lnRef>
+          <a:fillRef idx="0">
+            <a:schemeClr val="accent1"/>
+          </a:fillRef>
+          <a:effectRef idx="1">
+            <a:schemeClr val="accent1"/>
+          </a:effectRef>
+          <a:fontRef idx="minor">
+            <a:schemeClr val="tx1"/>
+          </a:fontRef>
+        </p:style>
+      </p:cxnSp>
+      <p:sp>
+        <p:nvSpPr>
+          <p:cNvPr id="8" name="Rounded Rectangle 7"/>
+          <p:cNvSpPr/>
+          <p:nvPr/>
+        </p:nvSpPr>
+        <p:spPr>
+          <a:xfrm>
+            <a:off x="2724912" y="1920240"/>
+            <a:ext cx="2148840" cy="1371600"/>
+          </a:xfrm>
+          <a:prstGeom prst="roundRect">
+            <a:avLst/>
+          </a:prstGeom>
+          <a:solidFill>
+            <a:srgbClr val="C8E6C9"/>
+          </a:solidFill>
+          <a:ln w="15240">
+            <a:solidFill>
+              <a:srgbClr val="1F3F2F"/>
+            </a:solidFill>
+          </a:ln>
+        </p:spPr>
+        <p:style>
+          <a:lnRef idx="1">
+            <a:schemeClr val="accent1"/>
+          </a:lnRef>
+          <a:fillRef idx="3">
+            <a:schemeClr val="accent1"/>
+          </a:fillRef>
+          <a:effectRef idx="2">
+            <a:schemeClr val="accent1"/>
+          </a:effectRef>
+          <a:fontRef idx="minor">
+            <a:schemeClr val="lt1"/>
+          </a:fontRef>
+        </p:style>
+        <p:txBody>
+          <a:bodyPr rtlCol="0" anchor="ctr" lIns="54864" rIns="54864" tIns="27432" bIns="27432" wrap="square"/>
+          <a:lstStyle/>
+          <a:p>
+            <a:pPr algn="ctr"/>
+            <a:r>
+              <a:rPr sz="1050" b="1">
+                <a:solidFill>
+                  <a:srgbClr val="1F3F2F"/>
+                </a:solidFill>
+                <a:latin typeface="Calibri"/>
+              </a:rPr>
+              <a:t>A · One-click
+report · prepare · auto-stop</a:t>
+            </a:r>
+          </a:p>
+        </p:txBody>
+      </p:sp>
+      <p:sp>
+        <p:nvSpPr>
+          <p:cNvPr id="9" name="TextBox 8"/>
+          <p:cNvSpPr txBox="1"/>
+          <p:nvPr/>
+        </p:nvSpPr>
+        <p:spPr>
+          <a:xfrm>
+            <a:off x="2724912" y="3346704"/>
+            <a:ext cx="2148840" cy="365760"/>
+          </a:xfrm>
+          <a:prstGeom prst="rect">
+            <a:avLst/>
+          </a:prstGeom>
+          <a:noFill/>
+        </p:spPr>
+        <p:txBody>
+          <a:bodyPr wrap="square" lIns="45720" rIns="45720" tIns="18288" bIns="18288" anchor="t">
+            <a:spAutoFit/>
+          </a:bodyPr>
+          <a:lstStyle/>
+          <a:p>
+            <a:pPr algn="l"/>
+            <a:r>
+              <a:rPr sz="1100" b="1" i="0">
+                <a:solidFill>
+                  <a:srgbClr val="1F3F2F"/>
+                </a:solidFill>
+                <a:latin typeface="Calibri"/>
+              </a:rPr>
+              <a:t>DONE</a:t>
+            </a:r>
+          </a:p>
+        </p:txBody>
+      </p:sp>
+      <p:cxnSp>
+        <p:nvCxnSpPr>
+          <p:cNvPr id="10" name="Connector 9"/>
+          <p:cNvCxnSpPr/>
+          <p:nvPr/>
+        </p:nvCxnSpPr>
+        <p:spPr>
+          <a:xfrm>
+            <a:off x="4873752" y="2606040"/>
+            <a:ext cx="210312" cy="0"/>
+          </a:xfrm>
+          <a:prstGeom prst="line">
+            <a:avLst/>
+          </a:prstGeom>
+          <a:ln w="25400">
+            <a:solidFill>
+              <a:srgbClr val="555555"/>
+            </a:solidFill>
+            <a:tailEnd type="triangle" w="med" len="med"/>
+          </a:ln>
+        </p:spPr>
+        <p:style>
+          <a:lnRef idx="2">
+            <a:schemeClr val="accent1"/>
+          </a:lnRef>
+          <a:fillRef idx="0">
+            <a:schemeClr val="accent1"/>
+          </a:fillRef>
+          <a:effectRef idx="1">
+            <a:schemeClr val="accent1"/>
+          </a:effectRef>
+          <a:fontRef idx="minor">
+            <a:schemeClr val="tx1"/>
+          </a:fontRef>
+        </p:style>
+      </p:cxnSp>
+      <p:sp>
+        <p:nvSpPr>
+          <p:cNvPr id="11" name="Rounded Rectangle 10"/>
+          <p:cNvSpPr/>
+          <p:nvPr/>
+        </p:nvSpPr>
+        <p:spPr>
+          <a:xfrm>
+            <a:off x="5084064" y="1920240"/>
+            <a:ext cx="2148840" cy="1371600"/>
+          </a:xfrm>
+          <a:prstGeom prst="roundRect">
+            <a:avLst/>
+          </a:prstGeom>
+          <a:solidFill>
+            <a:srgbClr val="FFF3CD"/>
+          </a:solidFill>
+          <a:ln w="15240">
+            <a:solidFill>
+              <a:srgbClr val="555555"/>
+            </a:solidFill>
+          </a:ln>
+        </p:spPr>
+        <p:style>
+          <a:lnRef idx="1">
+            <a:schemeClr val="accent1"/>
+          </a:lnRef>
+          <a:fillRef idx="3">
+            <a:schemeClr val="accent1"/>
+          </a:fillRef>
+          <a:effectRef idx="2">
+            <a:schemeClr val="accent1"/>
+          </a:effectRef>
+          <a:fontRef idx="minor">
+            <a:schemeClr val="lt1"/>
+          </a:fontRef>
+        </p:style>
+        <p:txBody>
+          <a:bodyPr rtlCol="0" anchor="ctr" lIns="54864" rIns="54864" tIns="27432" bIns="27432" wrap="square"/>
+          <a:lstStyle/>
+          <a:p>
+            <a:pPr algn="ctr"/>
+            <a:r>
+              <a:rPr sz="1050" b="1">
+                <a:solidFill>
+                  <a:srgbClr val="555555"/>
+                </a:solidFill>
+                <a:latin typeface="Calibri"/>
+              </a:rPr>
+              <a:t>B · Test modes
+strain-rate ✓ · 4 more</a:t>
+            </a:r>
+          </a:p>
+        </p:txBody>
+      </p:sp>
+      <p:sp>
+        <p:nvSpPr>
+          <p:cNvPr id="12" name="TextBox 11"/>
+          <p:cNvSpPr txBox="1"/>
+          <p:nvPr/>
+        </p:nvSpPr>
+        <p:spPr>
+          <a:xfrm>
+            <a:off x="5084064" y="3346704"/>
+            <a:ext cx="2148840" cy="365760"/>
+          </a:xfrm>
+          <a:prstGeom prst="rect">
+            <a:avLst/>
+          </a:prstGeom>
+          <a:noFill/>
+        </p:spPr>
+        <p:txBody>
+          <a:bodyPr wrap="square" lIns="45720" rIns="45720" tIns="18288" bIns="18288" anchor="t">
+            <a:spAutoFit/>
+          </a:bodyPr>
+          <a:lstStyle/>
+          <a:p>
+            <a:pPr algn="l"/>
+            <a:r>
+              <a:rPr sz="1100" b="1" i="0">
+                <a:solidFill>
+                  <a:srgbClr val="555555"/>
+                </a:solidFill>
+                <a:latin typeface="Calibri"/>
+              </a:rPr>
+              <a:t>1 / 5</a:t>
+            </a:r>
+          </a:p>
+        </p:txBody>
+      </p:sp>
+      <p:cxnSp>
+        <p:nvCxnSpPr>
+          <p:cNvPr id="13" name="Connector 12"/>
+          <p:cNvCxnSpPr/>
+          <p:nvPr/>
+        </p:nvCxnSpPr>
+        <p:spPr>
+          <a:xfrm>
+            <a:off x="7232904" y="2606040"/>
+            <a:ext cx="210312" cy="0"/>
+          </a:xfrm>
+          <a:prstGeom prst="line">
+            <a:avLst/>
+          </a:prstGeom>
+          <a:ln w="25400">
+            <a:solidFill>
+              <a:srgbClr val="555555"/>
+            </a:solidFill>
+            <a:tailEnd type="triangle" w="med" len="med"/>
+          </a:ln>
+        </p:spPr>
+        <p:style>
+          <a:lnRef idx="2">
+            <a:schemeClr val="accent1"/>
+          </a:lnRef>
+          <a:fillRef idx="0">
+            <a:schemeClr val="accent1"/>
+          </a:fillRef>
+          <a:effectRef idx="1">
+            <a:schemeClr val="accent1"/>
+          </a:effectRef>
+          <a:fontRef idx="minor">
+            <a:schemeClr val="tx1"/>
+          </a:fontRef>
+        </p:style>
+      </p:cxnSp>
+      <p:sp>
+        <p:nvSpPr>
+          <p:cNvPr id="14" name="Rounded Rectangle 13"/>
+          <p:cNvSpPr/>
+          <p:nvPr/>
+        </p:nvSpPr>
+        <p:spPr>
+          <a:xfrm>
+            <a:off x="7443216" y="1920240"/>
+            <a:ext cx="2148840" cy="1371600"/>
+          </a:xfrm>
+          <a:prstGeom prst="roundRect">
+            <a:avLst/>
+          </a:prstGeom>
+          <a:solidFill>
+            <a:srgbClr val="FFF3CD"/>
+          </a:solidFill>
+          <a:ln w="15240">
+            <a:solidFill>
+              <a:srgbClr val="555555"/>
+            </a:solidFill>
+          </a:ln>
+        </p:spPr>
+        <p:style>
+          <a:lnRef idx="1">
+            <a:schemeClr val="accent1"/>
+          </a:lnRef>
+          <a:fillRef idx="3">
+            <a:schemeClr val="accent1"/>
+          </a:fillRef>
+          <a:effectRef idx="2">
+            <a:schemeClr val="accent1"/>
+          </a:effectRef>
+          <a:fontRef idx="minor">
+            <a:schemeClr val="lt1"/>
+          </a:fontRef>
+        </p:style>
+        <p:txBody>
+          <a:bodyPr rtlCol="0" anchor="ctr" lIns="54864" rIns="54864" tIns="27432" bIns="27432" wrap="square"/>
+          <a:lstStyle/>
+          <a:p>
+            <a:pPr algn="ctr"/>
+            <a:r>
+              <a:rPr sz="1050" b="1">
+                <a:solidFill>
+                  <a:srgbClr val="555555"/>
+                </a:solidFill>
+                <a:latin typeface="Calibri"/>
+              </a:rPr>
+              <a:t>C · Smart DIC
+health HUD ✓ · Poisson</a:t>
+            </a:r>
+          </a:p>
+        </p:txBody>
+      </p:sp>
+      <p:sp>
+        <p:nvSpPr>
+          <p:cNvPr id="15" name="TextBox 14"/>
+          <p:cNvSpPr txBox="1"/>
+          <p:nvPr/>
+        </p:nvSpPr>
+        <p:spPr>
+          <a:xfrm>
+            <a:off x="7443216" y="3346704"/>
+            <a:ext cx="2148840" cy="365760"/>
+          </a:xfrm>
+          <a:prstGeom prst="rect">
+            <a:avLst/>
+          </a:prstGeom>
+          <a:noFill/>
+        </p:spPr>
+        <p:txBody>
+          <a:bodyPr wrap="square" lIns="45720" rIns="45720" tIns="18288" bIns="18288" anchor="t">
+            <a:spAutoFit/>
+          </a:bodyPr>
+          <a:lstStyle/>
+          <a:p>
+            <a:pPr algn="l"/>
+            <a:r>
+              <a:rPr sz="1100" b="1" i="0">
+                <a:solidFill>
+                  <a:srgbClr val="555555"/>
+                </a:solidFill>
+                <a:latin typeface="Calibri"/>
+              </a:rPr>
+              <a:t>partial</a:t>
+            </a:r>
+          </a:p>
+        </p:txBody>
+      </p:sp>
+      <p:cxnSp>
+        <p:nvCxnSpPr>
+          <p:cNvPr id="16" name="Connector 15"/>
+          <p:cNvCxnSpPr/>
+          <p:nvPr/>
+        </p:nvCxnSpPr>
+        <p:spPr>
+          <a:xfrm>
+            <a:off x="9592056" y="2606040"/>
+            <a:ext cx="210312" cy="0"/>
+          </a:xfrm>
+          <a:prstGeom prst="line">
+            <a:avLst/>
+          </a:prstGeom>
+          <a:ln w="25400">
+            <a:solidFill>
+              <a:srgbClr val="555555"/>
+            </a:solidFill>
+            <a:tailEnd type="triangle" w="med" len="med"/>
+          </a:ln>
+        </p:spPr>
+        <p:style>
+          <a:lnRef idx="2">
+            <a:schemeClr val="accent1"/>
+          </a:lnRef>
+          <a:fillRef idx="0">
+            <a:schemeClr val="accent1"/>
+          </a:fillRef>
+          <a:effectRef idx="1">
+            <a:schemeClr val="accent1"/>
+          </a:effectRef>
+          <a:fontRef idx="minor">
+            <a:schemeClr val="tx1"/>
+          </a:fontRef>
+        </p:style>
+      </p:cxnSp>
+      <p:sp>
+        <p:nvSpPr>
+          <p:cNvPr id="17" name="Rounded Rectangle 16"/>
+          <p:cNvSpPr/>
+          <p:nvPr/>
+        </p:nvSpPr>
+        <p:spPr>
+          <a:xfrm>
+            <a:off x="9802368" y="1920240"/>
+            <a:ext cx="2148840" cy="1371600"/>
+          </a:xfrm>
+          <a:prstGeom prst="roundRect">
+            <a:avLst/>
+          </a:prstGeom>
+          <a:solidFill>
+            <a:srgbClr val="E8E8E8"/>
+          </a:solidFill>
+          <a:ln w="15240">
+            <a:solidFill>
+              <a:srgbClr val="555555"/>
+            </a:solidFill>
+          </a:ln>
+        </p:spPr>
+        <p:style>
+          <a:lnRef idx="1">
+            <a:schemeClr val="accent1"/>
+          </a:lnRef>
+          <a:fillRef idx="3">
+            <a:schemeClr val="accent1"/>
+          </a:fillRef>
+          <a:effectRef idx="2">
+            <a:schemeClr val="accent1"/>
+          </a:effectRef>
+          <a:fontRef idx="minor">
+            <a:schemeClr val="lt1"/>
+          </a:fontRef>
+        </p:style>
+        <p:txBody>
+          <a:bodyPr rtlCol="0" anchor="ctr" lIns="54864" rIns="54864" tIns="27432" bIns="27432" wrap="square"/>
+          <a:lstStyle/>
+          <a:p>
+            <a:pPr algn="ctr"/>
+            <a:r>
+              <a:rPr sz="1050" b="1">
+                <a:solidFill>
+                  <a:srgbClr val="555555"/>
+                </a:solidFill>
+                <a:latin typeface="Calibri"/>
+              </a:rPr>
+              <a:t>D · UX layer
+wizard · overlay · dash</a:t>
+            </a:r>
+          </a:p>
+        </p:txBody>
+      </p:sp>
+      <p:sp>
+        <p:nvSpPr>
+          <p:cNvPr id="18" name="TextBox 17"/>
+          <p:cNvSpPr txBox="1"/>
+          <p:nvPr/>
+        </p:nvSpPr>
+        <p:spPr>
+          <a:xfrm>
+            <a:off x="9802368" y="3346704"/>
+            <a:ext cx="2148840" cy="365760"/>
+          </a:xfrm>
+          <a:prstGeom prst="rect">
+            <a:avLst/>
+          </a:prstGeom>
+          <a:noFill/>
+        </p:spPr>
+        <p:txBody>
+          <a:bodyPr wrap="square" lIns="45720" rIns="45720" tIns="18288" bIns="18288" anchor="t">
+            <a:spAutoFit/>
+          </a:bodyPr>
+          <a:lstStyle/>
+          <a:p>
+            <a:pPr algn="l"/>
+            <a:r>
+              <a:rPr sz="1100" b="1" i="0">
+                <a:solidFill>
+                  <a:srgbClr val="555555"/>
+                </a:solidFill>
+                <a:latin typeface="Calibri"/>
+              </a:rPr>
+              <a:t>next</a:t>
+            </a:r>
+          </a:p>
+        </p:txBody>
+      </p:sp>
+      <p:sp>
+        <p:nvSpPr>
+          <p:cNvPr id="19" name="TextBox 18"/>
+          <p:cNvSpPr txBox="1"/>
+          <p:nvPr/>
+        </p:nvSpPr>
+        <p:spPr>
+          <a:xfrm>
+            <a:off x="365760" y="4114800"/>
+            <a:ext cx="11475720" cy="365760"/>
+          </a:xfrm>
+          <a:prstGeom prst="rect">
+            <a:avLst/>
+          </a:prstGeom>
+          <a:noFill/>
+        </p:spPr>
+        <p:txBody>
+          <a:bodyPr wrap="square" lIns="45720" rIns="45720" tIns="18288" bIns="18288" anchor="t">
+            <a:spAutoFit/>
+          </a:bodyPr>
+          <a:lstStyle/>
+          <a:p>
+            <a:pPr algn="l"/>
+            <a:r>
+              <a:rPr sz="1600" b="0" i="0">
+                <a:solidFill>
+                  <a:srgbClr val="707070"/>
+                </a:solidFill>
+                <a:latin typeface="Calibri"/>
+              </a:rPr>
+              <a:t>Next up (in order)</a:t>
+            </a:r>
+          </a:p>
+        </p:txBody>
+      </p:sp>
+      <p:sp>
+        <p:nvSpPr>
+          <p:cNvPr id="20" name="Rounded Rectangle 19"/>
+          <p:cNvSpPr/>
+          <p:nvPr/>
+        </p:nvSpPr>
+        <p:spPr>
+          <a:xfrm>
+            <a:off x="365760" y="4553712"/>
+            <a:ext cx="3703320" cy="868680"/>
+          </a:xfrm>
+          <a:prstGeom prst="roundRect">
+            <a:avLst/>
+          </a:prstGeom>
+          <a:solidFill>
+            <a:srgbClr val="FFFFFF"/>
+          </a:solidFill>
+          <a:ln w="15240">
+            <a:solidFill>
+              <a:srgbClr val="1F77B4"/>
+            </a:solidFill>
+          </a:ln>
+        </p:spPr>
+        <p:style>
+          <a:lnRef idx="1">
+            <a:schemeClr val="accent1"/>
+          </a:lnRef>
+          <a:fillRef idx="3">
+            <a:schemeClr val="accent1"/>
+          </a:fillRef>
+          <a:effectRef idx="2">
+            <a:schemeClr val="accent1"/>
+          </a:effectRef>
+          <a:fontRef idx="minor">
+            <a:schemeClr val="lt1"/>
+          </a:fontRef>
+        </p:style>
+        <p:txBody>
+          <a:bodyPr rtlCol="0" anchor="ctr" lIns="54864" rIns="54864" tIns="27432" bIns="27432" wrap="square"/>
+          <a:lstStyle/>
+          <a:p>
+            <a:pPr algn="ctr"/>
+            <a:r>
+              <a:rPr sz="1150" b="1">
+                <a:solidFill>
+                  <a:srgbClr val="000000"/>
+                </a:solidFill>
+                <a:latin typeface="Calibri"/>
+              </a:rPr>
+              <a:t>1 · Wire the 4 remaining
+modes (engine ready)</a:t>
+            </a:r>
+          </a:p>
+        </p:txBody>
+      </p:sp>
+      <p:cxnSp>
+        <p:nvCxnSpPr>
+          <p:cNvPr id="21" name="Connector 20"/>
+          <p:cNvCxnSpPr/>
+          <p:nvPr/>
+        </p:nvCxnSpPr>
+        <p:spPr>
+          <a:xfrm>
+            <a:off x="4087368" y="4983480"/>
+            <a:ext cx="192024" cy="0"/>
+          </a:xfrm>
+          <a:prstGeom prst="line">
+            <a:avLst/>
+          </a:prstGeom>
+          <a:ln w="25400">
+            <a:solidFill>
+              <a:srgbClr val="555555"/>
+            </a:solidFill>
+            <a:tailEnd type="triangle" w="med" len="med"/>
+          </a:ln>
+        </p:spPr>
+        <p:style>
+          <a:lnRef idx="2">
+            <a:schemeClr val="accent1"/>
+          </a:lnRef>
+          <a:fillRef idx="0">
+            <a:schemeClr val="accent1"/>
+          </a:fillRef>
+          <a:effectRef idx="1">
+            <a:schemeClr val="accent1"/>
+          </a:effectRef>
+          <a:fontRef idx="minor">
+            <a:schemeClr val="tx1"/>
+          </a:fontRef>
+        </p:style>
+      </p:cxnSp>
+      <p:sp>
+        <p:nvSpPr>
+          <p:cNvPr id="22" name="Rounded Rectangle 21"/>
+          <p:cNvSpPr/>
+          <p:nvPr/>
+        </p:nvSpPr>
+        <p:spPr>
+          <a:xfrm>
+            <a:off x="4297680" y="4553712"/>
+            <a:ext cx="3703320" cy="868680"/>
+          </a:xfrm>
+          <a:prstGeom prst="roundRect">
+            <a:avLst/>
+          </a:prstGeom>
+          <a:solidFill>
+            <a:srgbClr val="FFFFFF"/>
+          </a:solidFill>
+          <a:ln w="15240">
+            <a:solidFill>
+              <a:srgbClr val="1F77B4"/>
+            </a:solidFill>
+          </a:ln>
+        </p:spPr>
+        <p:style>
+          <a:lnRef idx="1">
+            <a:schemeClr val="accent1"/>
+          </a:lnRef>
+          <a:fillRef idx="3">
+            <a:schemeClr val="accent1"/>
+          </a:fillRef>
+          <a:effectRef idx="2">
+            <a:schemeClr val="accent1"/>
+          </a:effectRef>
+          <a:fontRef idx="minor">
+            <a:schemeClr val="lt1"/>
+          </a:fontRef>
+        </p:style>
+        <p:txBody>
+          <a:bodyPr rtlCol="0" anchor="ctr" lIns="54864" rIns="54864" tIns="27432" bIns="27432" wrap="square"/>
+          <a:lstStyle/>
+          <a:p>
+            <a:pPr algn="ctr"/>
+            <a:r>
+              <a:rPr sz="1150" b="1">
+                <a:solidFill>
+                  <a:srgbClr val="000000"/>
+                </a:solidFill>
+                <a:latin typeface="Calibri"/>
+              </a:rPr>
+              <a:t>2 · Measured Poisson
+(4-marker + backdrop)</a:t>
+            </a:r>
+          </a:p>
+        </p:txBody>
+      </p:sp>
+      <p:cxnSp>
+        <p:nvCxnSpPr>
+          <p:cNvPr id="23" name="Connector 22"/>
+          <p:cNvCxnSpPr/>
+          <p:nvPr/>
+        </p:nvCxnSpPr>
+        <p:spPr>
+          <a:xfrm>
+            <a:off x="8019288" y="4983480"/>
+            <a:ext cx="192024" cy="0"/>
+          </a:xfrm>
+          <a:prstGeom prst="line">
+            <a:avLst/>
+          </a:prstGeom>
+          <a:ln w="25400">
+            <a:solidFill>
+              <a:srgbClr val="555555"/>
+            </a:solidFill>
+            <a:tailEnd type="triangle" w="med" len="med"/>
+          </a:ln>
+        </p:spPr>
+        <p:style>
+          <a:lnRef idx="2">
+            <a:schemeClr val="accent1"/>
+          </a:lnRef>
+          <a:fillRef idx="0">
+            <a:schemeClr val="accent1"/>
+          </a:fillRef>
+          <a:effectRef idx="1">
+            <a:schemeClr val="accent1"/>
+          </a:effectRef>
+          <a:fontRef idx="minor">
+            <a:schemeClr val="tx1"/>
+          </a:fontRef>
+        </p:style>
+      </p:cxnSp>
+      <p:sp>
+        <p:nvSpPr>
+          <p:cNvPr id="24" name="Rounded Rectangle 23"/>
+          <p:cNvSpPr/>
+          <p:nvPr/>
+        </p:nvSpPr>
+        <p:spPr>
+          <a:xfrm>
+            <a:off x="8229600" y="4553712"/>
+            <a:ext cx="3611880" cy="868680"/>
+          </a:xfrm>
+          <a:prstGeom prst="roundRect">
+            <a:avLst/>
+          </a:prstGeom>
+          <a:solidFill>
+            <a:srgbClr val="FFFFFF"/>
+          </a:solidFill>
+          <a:ln w="15240">
+            <a:solidFill>
+              <a:srgbClr val="1F77B4"/>
+            </a:solidFill>
+          </a:ln>
+        </p:spPr>
+        <p:style>
+          <a:lnRef idx="1">
+            <a:schemeClr val="accent1"/>
+          </a:lnRef>
+          <a:fillRef idx="3">
+            <a:schemeClr val="accent1"/>
+          </a:fillRef>
+          <a:effectRef idx="2">
+            <a:schemeClr val="accent1"/>
+          </a:effectRef>
+          <a:fontRef idx="minor">
+            <a:schemeClr val="lt1"/>
+          </a:fontRef>
+        </p:style>
+        <p:txBody>
+          <a:bodyPr rtlCol="0" anchor="ctr" lIns="54864" rIns="54864" tIns="27432" bIns="27432" wrap="square"/>
+          <a:lstStyle/>
+          <a:p>
+            <a:pPr algn="ctr"/>
+            <a:r>
+              <a:rPr sz="1150" b="1">
+                <a:solidFill>
+                  <a:srgbClr val="000000"/>
+                </a:solidFill>
+                <a:latin typeface="Calibri"/>
+              </a:rPr>
+              <a:t>3 · UX wizard +
+live overlay</a:t>
+            </a:r>
+          </a:p>
+        </p:txBody>
+      </p:sp>
+      <p:sp>
+        <p:nvSpPr>
+          <p:cNvPr id="25" name="Rectangle 24"/>
+          <p:cNvSpPr/>
+          <p:nvPr/>
+        </p:nvSpPr>
+        <p:spPr>
+          <a:xfrm>
+            <a:off x="365760" y="5669280"/>
+            <a:ext cx="11475720" cy="658368"/>
+          </a:xfrm>
+          <a:prstGeom prst="rect">
+            <a:avLst/>
+          </a:prstGeom>
+          <a:solidFill>
+            <a:srgbClr val="FFF3CD"/>
+          </a:solidFill>
+          <a:ln>
+            <a:noFill/>
+          </a:ln>
+        </p:spPr>
+        <p:style>
+          <a:lnRef idx="1">
+            <a:schemeClr val="accent1"/>
+          </a:lnRef>
+          <a:fillRef idx="3">
+            <a:schemeClr val="accent1"/>
+          </a:fillRef>
+          <a:effectRef idx="2">
+            <a:schemeClr val="accent1"/>
+          </a:effectRef>
+          <a:fontRef idx="minor">
+            <a:schemeClr val="lt1"/>
+          </a:fontRef>
+        </p:style>
+        <p:txBody>
+          <a:bodyPr rtlCol="0" anchor="ctr" wrap="square" lIns="109728" rIns="109728"/>
+          <a:lstStyle/>
+          <a:p>
+            <a:pPr algn="ctr"/>
+            <a:r>
+              <a:rPr sz="1100" b="1">
+                <a:solidFill>
+                  <a:srgbClr val="000000"/>
+                </a:solidFill>
+                <a:latin typeface="Calibri"/>
+              </a:rPr>
+              <a:t>Hardware gate — motor torque ~2.6 kN today; fix driver Vref / cooling to fracture 100% infill.</a:t>
+            </a:r>
+          </a:p>
+        </p:txBody>
+      </p:sp>
+      <p:sp>
+        <p:nvSpPr>
+          <p:cNvPr id="26" name="TextBox 25"/>
+          <p:cNvSpPr txBox="1"/>
+          <p:nvPr/>
+        </p:nvSpPr>
+        <p:spPr>
+          <a:xfrm>
+            <a:off x="457200" y="6446520"/>
+            <a:ext cx="640080" cy="274320"/>
+          </a:xfrm>
+          <a:prstGeom prst="rect">
+            <a:avLst/>
+          </a:prstGeom>
+          <a:noFill/>
+        </p:spPr>
+        <p:txBody>
+          <a:bodyPr wrap="square" lIns="45720" rIns="45720" tIns="18288" bIns="18288" anchor="t">
+            <a:spAutoFit/>
+          </a:bodyPr>
+          <a:lstStyle/>
+          <a:p>
+            <a:pPr algn="l"/>
+            <a:r>
+              <a:rPr sz="1000" b="0" i="0">
+                <a:solidFill>
+                  <a:srgbClr val="707070"/>
+                </a:solidFill>
+                <a:latin typeface="Calibri"/>
+              </a:rPr>
+              <a:t>175</a:t>
+            </a:r>
+          </a:p>
+        </p:txBody>
+      </p:sp>
+    </p:spTree>
+  </p:cSld>
+  <p:clrMapOvr>
+    <a:masterClrMapping/>
+  </p:clrMapOvr>
+</p:sld>
+</file>
+
+<file path=ppt/slides/slide36.xml><?xml version="1.0" encoding="utf-8"?>
+<p:sld xmlns:a="http://schemas.openxmlformats.org/drawingml/2006/main" xmlns:p="http://schemas.openxmlformats.org/presentationml/2006/main" xmlns:r="http://schemas.openxmlformats.org/officeDocument/2006/relationships">
+  <p:cSld>
+    <p:spTree>
+      <p:nvGrpSpPr>
+        <p:cNvPr id="1" name=""/>
+        <p:cNvGrpSpPr/>
+        <p:nvPr/>
+      </p:nvGrpSpPr>
+      <p:grpSpPr/>
+      <p:sp>
+        <p:nvSpPr>
+          <p:cNvPr id="2" name="TextBox 1"/>
+          <p:cNvSpPr txBox="1"/>
+          <p:nvPr/>
+        </p:nvSpPr>
+        <p:spPr>
+          <a:xfrm>
+            <a:off x="11155680" y="274320"/>
+            <a:ext cx="914400" cy="274320"/>
+          </a:xfrm>
+          <a:prstGeom prst="rect">
+            <a:avLst/>
+          </a:prstGeom>
+          <a:noFill/>
+        </p:spPr>
+        <p:txBody>
+          <a:bodyPr wrap="square" lIns="45720" rIns="45720" tIns="18288" bIns="18288" anchor="t">
+            <a:spAutoFit/>
+          </a:bodyPr>
+          <a:lstStyle/>
+          <a:p>
+            <a:pPr algn="r"/>
+            <a:r>
+              <a:rPr sz="800" b="1" i="0">
+                <a:solidFill>
+                  <a:srgbClr val="707070"/>
+                </a:solidFill>
+                <a:latin typeface="Calibri"/>
+              </a:rPr>
+              <a:t>JÖNKÖPING UNIVERSITY</a:t>
+            </a:r>
+          </a:p>
+        </p:txBody>
+      </p:sp>
+      <p:sp>
+        <p:nvSpPr>
+          <p:cNvPr id="3" name="Rectangle 2"/>
+          <p:cNvSpPr/>
+          <p:nvPr/>
+        </p:nvSpPr>
+        <p:spPr>
+          <a:xfrm>
+            <a:off x="457200" y="411480"/>
+            <a:ext cx="457200" cy="73152"/>
+          </a:xfrm>
+          <a:prstGeom prst="rect">
+            <a:avLst/>
+          </a:prstGeom>
+          <a:solidFill>
+            <a:srgbClr val="A9D6EF"/>
+          </a:solidFill>
+          <a:ln>
+            <a:noFill/>
+          </a:ln>
+        </p:spPr>
+        <p:style>
+          <a:lnRef idx="1">
+            <a:schemeClr val="accent1"/>
+          </a:lnRef>
+          <a:fillRef idx="3">
+            <a:schemeClr val="accent1"/>
+          </a:fillRef>
+          <a:effectRef idx="2">
+            <a:schemeClr val="accent1"/>
+          </a:effectRef>
+          <a:fontRef idx="minor">
+            <a:schemeClr val="lt1"/>
+          </a:fontRef>
+        </p:style>
+        <p:txBody>
+          <a:bodyPr rtlCol="0" anchor="ctr"/>
+          <a:lstStyle/>
+          <a:p>
+            <a:pPr algn="ctr"/>
+          </a:p>
+        </p:txBody>
+      </p:sp>
+      <p:sp>
+        <p:nvSpPr>
+          <p:cNvPr id="4" name="TextBox 3"/>
+          <p:cNvSpPr txBox="1"/>
+          <p:nvPr/>
+        </p:nvSpPr>
+        <p:spPr>
+          <a:xfrm>
+            <a:off x="457200" y="502920"/>
+            <a:ext cx="11430000" cy="822960"/>
+          </a:xfrm>
+          <a:prstGeom prst="rect">
+            <a:avLst/>
+          </a:prstGeom>
+          <a:noFill/>
+        </p:spPr>
+        <p:txBody>
+          <a:bodyPr wrap="square" lIns="45720" rIns="45720" tIns="18288" bIns="18288" anchor="t">
+            <a:spAutoFit/>
+          </a:bodyPr>
+          <a:lstStyle/>
+          <a:p>
+            <a:pPr algn="l"/>
+            <a:r>
+              <a:rPr sz="3000" b="0" i="0">
+                <a:solidFill>
+                  <a:srgbClr val="000000"/>
+                </a:solidFill>
+                <a:latin typeface="Calibri Light"/>
+              </a:rPr>
+              <a:t>DIC HEALTH HUD — LIVE TRACKING QUALITY</a:t>
+            </a:r>
+          </a:p>
+        </p:txBody>
+      </p:sp>
+      <p:sp>
+        <p:nvSpPr>
+          <p:cNvPr id="5" name="Rounded Rectangle 4"/>
+          <p:cNvSpPr/>
+          <p:nvPr/>
+        </p:nvSpPr>
+        <p:spPr>
+          <a:xfrm>
+            <a:off x="365760" y="1188720"/>
+            <a:ext cx="7498079" cy="731520"/>
+          </a:xfrm>
+          <a:prstGeom prst="roundRect">
+            <a:avLst/>
+          </a:prstGeom>
+          <a:solidFill>
+            <a:srgbClr val="F2F2F2"/>
+          </a:solidFill>
+          <a:ln w="15240">
+            <a:solidFill>
+              <a:srgbClr val="555555"/>
+            </a:solidFill>
+          </a:ln>
+        </p:spPr>
+        <p:style>
+          <a:lnRef idx="1">
+            <a:schemeClr val="accent1"/>
+          </a:lnRef>
+          <a:fillRef idx="3">
+            <a:schemeClr val="accent1"/>
+          </a:fillRef>
+          <a:effectRef idx="2">
+            <a:schemeClr val="accent1"/>
+          </a:effectRef>
+          <a:fontRef idx="minor">
+            <a:schemeClr val="lt1"/>
+          </a:fontRef>
+        </p:style>
+        <p:txBody>
+          <a:bodyPr rtlCol="0" anchor="ctr" lIns="54864" rIns="54864" tIns="27432" bIns="27432" wrap="square"/>
+          <a:lstStyle/>
+          <a:p>
+            <a:pPr algn="ctr"/>
+            <a:r>
+              <a:rPr sz="1100" b="1">
+                <a:solidFill>
+                  <a:srgbClr val="707070"/>
+                </a:solidFill>
+                <a:latin typeface="Calibri"/>
+              </a:rPr>
+              <a:t>[ drop feat_dic_hud.png here — your DIC-HUD screenshot ]</a:t>
+            </a:r>
+          </a:p>
+        </p:txBody>
+      </p:sp>
+      <p:sp>
+        <p:nvSpPr>
+          <p:cNvPr id="6" name="TextBox 5"/>
+          <p:cNvSpPr txBox="1"/>
+          <p:nvPr/>
+        </p:nvSpPr>
+        <p:spPr>
+          <a:xfrm>
+            <a:off x="8046720" y="1170432"/>
+            <a:ext cx="3794760" cy="868680"/>
+          </a:xfrm>
+          <a:prstGeom prst="rect">
+            <a:avLst/>
+          </a:prstGeom>
+          <a:noFill/>
+        </p:spPr>
+        <p:txBody>
+          <a:bodyPr wrap="square" lIns="45720" rIns="45720" tIns="18288" bIns="18288" anchor="t">
+            <a:spAutoFit/>
+          </a:bodyPr>
+          <a:lstStyle/>
+          <a:p>
+            <a:pPr algn="l"/>
+            <a:r>
+              <a:rPr sz="1100" b="0" i="1">
+                <a:solidFill>
+                  <a:srgbClr val="707070"/>
+                </a:solidFill>
+                <a:latin typeface="Calibri"/>
+              </a:rPr>
+              <a:t>A live badge on both test tabs:
+markers found / expected · % frames tracked · pixel jitter.</a:t>
+            </a:r>
+          </a:p>
+        </p:txBody>
+      </p:sp>
+      <p:sp>
+        <p:nvSpPr>
+          <p:cNvPr id="7" name="TextBox 6"/>
+          <p:cNvSpPr txBox="1"/>
+          <p:nvPr/>
+        </p:nvSpPr>
+        <p:spPr>
+          <a:xfrm>
+            <a:off x="365760" y="2148840"/>
+            <a:ext cx="11475720" cy="365760"/>
+          </a:xfrm>
+          <a:prstGeom prst="rect">
+            <a:avLst/>
+          </a:prstGeom>
+          <a:noFill/>
+        </p:spPr>
+        <p:txBody>
+          <a:bodyPr wrap="square" lIns="45720" rIns="45720" tIns="18288" bIns="18288" anchor="t">
+            <a:spAutoFit/>
+          </a:bodyPr>
+          <a:lstStyle/>
+          <a:p>
+            <a:pPr algn="l"/>
+            <a:r>
+              <a:rPr sz="1600" b="0" i="0">
+                <a:solidFill>
+                  <a:srgbClr val="707070"/>
+                </a:solidFill>
+                <a:latin typeface="Calibri"/>
+              </a:rPr>
+              <a:t>What each state means</a:t>
+            </a:r>
+          </a:p>
+        </p:txBody>
+      </p:sp>
+      <p:graphicFrame>
+        <p:nvGraphicFramePr>
+          <p:cNvPr id="8" name="Table 7"/>
+          <p:cNvGraphicFramePr>
+            <a:graphicFrameLocks noGrp="1"/>
+          </p:cNvGraphicFramePr>
+          <p:nvPr/>
+        </p:nvGraphicFramePr>
+        <p:xfrm>
+          <a:off x="365760" y="2560320"/>
+          <a:ext cx="11475719" cy="2423160"/>
+        </p:xfrm>
+        <a:graphic>
+          <a:graphicData uri="http://schemas.openxmlformats.org/drawingml/2006/table">
+            <a:tbl>
+              <a:tblPr firstRow="1" bandRow="1">
+                <a:tableStyleId>{5C22544A-7EE6-4342-B048-85BDC9FD1C3A}</a:tableStyleId>
+              </a:tblPr>
+              <a:tblGrid>
+                <a:gridCol w="1554480"/>
+                <a:gridCol w="1280160"/>
+                <a:gridCol w="5394959"/>
+                <a:gridCol w="3246120"/>
+              </a:tblGrid>
+              <a:tr h="484632">
+                <a:tc>
+                  <a:txBody>
+                    <a:bodyPr lIns="54864" rIns="54864" tIns="18288" bIns="18288" wrap="square" anchor="ctr"/>
+                    <a:lstStyle/>
+                    <a:p>
+                      <a:pPr algn="l"/>
+                      <a:r>
+                        <a:rPr sz="1100" b="1">
+                          <a:solidFill>
+                            <a:srgbClr val="FFFFFF"/>
+                          </a:solidFill>
+                          <a:latin typeface="Calibri"/>
+                        </a:rPr>
+                        <a:t>State</a:t>
+                      </a:r>
+                    </a:p>
+                  </a:txBody>
+                  <a:tcPr>
+                    <a:solidFill>
+                      <a:srgbClr val="143D2F"/>
+                    </a:solidFill>
+                  </a:tcPr>
+                </a:tc>
+                <a:tc>
+                  <a:txBody>
+                    <a:bodyPr lIns="54864" rIns="54864" tIns="18288" bIns="18288" wrap="square" anchor="ctr"/>
+                    <a:lstStyle/>
+                    <a:p>
+                      <a:pPr algn="l"/>
+                      <a:r>
+                        <a:rPr sz="1100" b="1">
+                          <a:solidFill>
+                            <a:srgbClr val="FFFFFF"/>
+                          </a:solidFill>
+                          <a:latin typeface="Calibri"/>
+                        </a:rPr>
+                        <a:t>Colour</a:t>
+                      </a:r>
+                    </a:p>
+                  </a:txBody>
+                  <a:tcPr>
+                    <a:solidFill>
+                      <a:srgbClr val="143D2F"/>
+                    </a:solidFill>
+                  </a:tcPr>
+                </a:tc>
+                <a:tc>
+                  <a:txBody>
+                    <a:bodyPr lIns="54864" rIns="54864" tIns="18288" bIns="18288" wrap="square" anchor="ctr"/>
+                    <a:lstStyle/>
+                    <a:p>
+                      <a:pPr algn="l"/>
+                      <a:r>
+                        <a:rPr sz="1100" b="1">
+                          <a:solidFill>
+                            <a:srgbClr val="FFFFFF"/>
+                          </a:solidFill>
+                          <a:latin typeface="Calibri"/>
+                        </a:rPr>
+                        <a:t>Condition</a:t>
+                      </a:r>
+                    </a:p>
+                  </a:txBody>
+                  <a:tcPr>
+                    <a:solidFill>
+                      <a:srgbClr val="143D2F"/>
+                    </a:solidFill>
+                  </a:tcPr>
+                </a:tc>
+                <a:tc>
+                  <a:txBody>
+                    <a:bodyPr lIns="54864" rIns="54864" tIns="18288" bIns="18288" wrap="square" anchor="ctr"/>
+                    <a:lstStyle/>
+                    <a:p>
+                      <a:pPr algn="l"/>
+                      <a:r>
+                        <a:rPr sz="1100" b="1">
+                          <a:solidFill>
+                            <a:srgbClr val="FFFFFF"/>
+                          </a:solidFill>
+                          <a:latin typeface="Calibri"/>
+                        </a:rPr>
+                        <a:t>Meaning</a:t>
+                      </a:r>
+                    </a:p>
+                  </a:txBody>
+                  <a:tcPr>
+                    <a:solidFill>
+                      <a:srgbClr val="143D2F"/>
+                    </a:solidFill>
+                  </a:tcPr>
+                </a:tc>
+              </a:tr>
+              <a:tr h="484632">
+                <a:tc>
+                  <a:txBody>
+                    <a:bodyPr lIns="54864" rIns="54864" tIns="18288" bIns="18288" wrap="square" anchor="ctr"/>
+                    <a:lstStyle/>
+                    <a:p>
+                      <a:pPr algn="l"/>
+                      <a:r>
+                        <a:rPr sz="1050" b="0">
+                          <a:solidFill>
+                            <a:srgbClr val="000000"/>
+                          </a:solidFill>
+                          <a:latin typeface="Calibri"/>
+                        </a:rPr>
+                        <a:t>OK</a:t>
+                      </a:r>
+                    </a:p>
+                  </a:txBody>
+                  <a:tcPr/>
+                </a:tc>
+                <a:tc>
+                  <a:txBody>
+                    <a:bodyPr lIns="54864" rIns="54864" tIns="18288" bIns="18288" wrap="square" anchor="ctr"/>
+                    <a:lstStyle/>
+                    <a:p>
+                      <a:pPr algn="l"/>
+                      <a:r>
+                        <a:rPr sz="1050" b="1">
+                          <a:solidFill>
+                            <a:srgbClr val="000000"/>
+                          </a:solidFill>
+                          <a:latin typeface="Calibri"/>
+                        </a:rPr>
+                        <a:t>green</a:t>
+                      </a:r>
+                    </a:p>
+                  </a:txBody>
+                  <a:tcPr>
+                    <a:solidFill>
+                      <a:srgbClr val="C8E6C9"/>
+                    </a:solidFill>
+                  </a:tcPr>
+                </a:tc>
+                <a:tc>
+                  <a:txBody>
+                    <a:bodyPr lIns="54864" rIns="54864" tIns="18288" bIns="18288" wrap="square" anchor="ctr"/>
+                    <a:lstStyle/>
+                    <a:p>
+                      <a:pPr algn="l"/>
+                      <a:r>
+                        <a:rPr sz="1050" b="0">
+                          <a:solidFill>
+                            <a:srgbClr val="000000"/>
+                          </a:solidFill>
+                          <a:latin typeface="Calibri"/>
+                        </a:rPr>
+                        <a:t>all markers · ≥ 95% tracked · jitter ≤ 1.5 px</a:t>
+                      </a:r>
+                    </a:p>
+                  </a:txBody>
+                  <a:tcPr/>
+                </a:tc>
+                <a:tc>
+                  <a:txBody>
+                    <a:bodyPr lIns="54864" rIns="54864" tIns="18288" bIns="18288" wrap="square" anchor="ctr"/>
+                    <a:lstStyle/>
+                    <a:p>
+                      <a:pPr algn="l"/>
+                      <a:r>
+                        <a:rPr sz="1050" b="0">
+                          <a:solidFill>
+                            <a:srgbClr val="000000"/>
+                          </a:solidFill>
+                          <a:latin typeface="Calibri"/>
+                        </a:rPr>
+                        <a:t>trust the strain</a:t>
+                      </a:r>
+                    </a:p>
+                  </a:txBody>
+                  <a:tcPr/>
+                </a:tc>
+              </a:tr>
+              <a:tr h="484632">
+                <a:tc>
+                  <a:txBody>
+                    <a:bodyPr lIns="54864" rIns="54864" tIns="18288" bIns="18288" wrap="square" anchor="ctr"/>
+                    <a:lstStyle/>
+                    <a:p>
+                      <a:pPr algn="l"/>
+                      <a:r>
+                        <a:rPr sz="1050" b="0">
+                          <a:solidFill>
+                            <a:srgbClr val="000000"/>
+                          </a:solidFill>
+                          <a:latin typeface="Calibri"/>
+                        </a:rPr>
+                        <a:t>WARN</a:t>
+                      </a:r>
+                    </a:p>
+                  </a:txBody>
+                  <a:tcPr/>
+                </a:tc>
+                <a:tc>
+                  <a:txBody>
+                    <a:bodyPr lIns="54864" rIns="54864" tIns="18288" bIns="18288" wrap="square" anchor="ctr"/>
+                    <a:lstStyle/>
+                    <a:p>
+                      <a:pPr algn="l"/>
+                      <a:r>
+                        <a:rPr sz="1050" b="1">
+                          <a:solidFill>
+                            <a:srgbClr val="000000"/>
+                          </a:solidFill>
+                          <a:latin typeface="Calibri"/>
+                        </a:rPr>
+                        <a:t>amber</a:t>
+                      </a:r>
+                    </a:p>
+                  </a:txBody>
+                  <a:tcPr>
+                    <a:solidFill>
+                      <a:srgbClr val="FFF3CD"/>
+                    </a:solidFill>
+                  </a:tcPr>
+                </a:tc>
+                <a:tc>
+                  <a:txBody>
+                    <a:bodyPr lIns="54864" rIns="54864" tIns="18288" bIns="18288" wrap="square" anchor="ctr"/>
+                    <a:lstStyle/>
+                    <a:p>
+                      <a:pPr algn="l"/>
+                      <a:r>
+                        <a:rPr sz="1050" b="0">
+                          <a:solidFill>
+                            <a:srgbClr val="000000"/>
+                          </a:solidFill>
+                          <a:latin typeface="Calibri"/>
+                        </a:rPr>
+                        <a:t>70–95% tracked  OR  jitter &gt; 1.5 px</a:t>
+                      </a:r>
+                    </a:p>
+                  </a:txBody>
+                  <a:tcPr/>
+                </a:tc>
+                <a:tc>
+                  <a:txBody>
+                    <a:bodyPr lIns="54864" rIns="54864" tIns="18288" bIns="18288" wrap="square" anchor="ctr"/>
+                    <a:lstStyle/>
+                    <a:p>
+                      <a:pPr algn="l"/>
+                      <a:r>
+                        <a:rPr sz="1050" b="0">
+                          <a:solidFill>
+                            <a:srgbClr val="000000"/>
+                          </a:solidFill>
+                          <a:latin typeface="Calibri"/>
+                        </a:rPr>
+                        <a:t>degraded — re-light / watch</a:t>
+                      </a:r>
+                    </a:p>
+                  </a:txBody>
+                  <a:tcPr/>
+                </a:tc>
+              </a:tr>
+              <a:tr h="484632">
+                <a:tc>
+                  <a:txBody>
+                    <a:bodyPr lIns="54864" rIns="54864" tIns="18288" bIns="18288" wrap="square" anchor="ctr"/>
+                    <a:lstStyle/>
+                    <a:p>
+                      <a:pPr algn="l"/>
+                      <a:r>
+                        <a:rPr sz="1050" b="0">
+                          <a:solidFill>
+                            <a:srgbClr val="000000"/>
+                          </a:solidFill>
+                          <a:latin typeface="Calibri"/>
+                        </a:rPr>
+                        <a:t>BAD</a:t>
+                      </a:r>
+                    </a:p>
+                  </a:txBody>
+                  <a:tcPr/>
+                </a:tc>
+                <a:tc>
+                  <a:txBody>
+                    <a:bodyPr lIns="54864" rIns="54864" tIns="18288" bIns="18288" wrap="square" anchor="ctr"/>
+                    <a:lstStyle/>
+                    <a:p>
+                      <a:pPr algn="l"/>
+                      <a:r>
+                        <a:rPr sz="1050" b="1">
+                          <a:solidFill>
+                            <a:srgbClr val="000000"/>
+                          </a:solidFill>
+                          <a:latin typeface="Calibri"/>
+                        </a:rPr>
+                        <a:t>red</a:t>
+                      </a:r>
+                    </a:p>
+                  </a:txBody>
+                  <a:tcPr>
+                    <a:solidFill>
+                      <a:srgbClr val="FFCDD2"/>
+                    </a:solidFill>
+                  </a:tcPr>
+                </a:tc>
+                <a:tc>
+                  <a:txBody>
+                    <a:bodyPr lIns="54864" rIns="54864" tIns="18288" bIns="18288" wrap="square" anchor="ctr"/>
+                    <a:lstStyle/>
+                    <a:p>
+                      <a:pPr algn="l"/>
+                      <a:r>
+                        <a:rPr sz="1050" b="0">
+                          <a:solidFill>
+                            <a:srgbClr val="000000"/>
+                          </a:solidFill>
+                          <a:latin typeface="Calibri"/>
+                        </a:rPr>
+                        <a:t>a marker missing  OR  &lt; 70% tracked</a:t>
+                      </a:r>
+                    </a:p>
+                  </a:txBody>
+                  <a:tcPr/>
+                </a:tc>
+                <a:tc>
+                  <a:txBody>
+                    <a:bodyPr lIns="54864" rIns="54864" tIns="18288" bIns="18288" wrap="square" anchor="ctr"/>
+                    <a:lstStyle/>
+                    <a:p>
+                      <a:pPr algn="l"/>
+                      <a:r>
+                        <a:rPr sz="1050" b="0">
+                          <a:solidFill>
+                            <a:srgbClr val="000000"/>
+                          </a:solidFill>
+                          <a:latin typeface="Calibri"/>
+                        </a:rPr>
+                        <a:t>unreliable — fix before pulling</a:t>
+                      </a:r>
+                    </a:p>
+                  </a:txBody>
+                  <a:tcPr/>
+                </a:tc>
+              </a:tr>
+              <a:tr h="484632">
+                <a:tc>
+                  <a:txBody>
+                    <a:bodyPr lIns="54864" rIns="54864" tIns="18288" bIns="18288" wrap="square" anchor="ctr"/>
+                    <a:lstStyle/>
+                    <a:p>
+                      <a:pPr algn="l"/>
+                      <a:r>
+                        <a:rPr sz="1050" b="0">
+                          <a:solidFill>
+                            <a:srgbClr val="000000"/>
+                          </a:solidFill>
+                          <a:latin typeface="Calibri"/>
+                        </a:rPr>
+                        <a:t>NO DATA</a:t>
+                      </a:r>
+                    </a:p>
+                  </a:txBody>
+                  <a:tcPr/>
+                </a:tc>
+                <a:tc>
+                  <a:txBody>
+                    <a:bodyPr lIns="54864" rIns="54864" tIns="18288" bIns="18288" wrap="square" anchor="ctr"/>
+                    <a:lstStyle/>
+                    <a:p>
+                      <a:pPr algn="l"/>
+                      <a:r>
+                        <a:rPr sz="1050" b="1">
+                          <a:solidFill>
+                            <a:srgbClr val="000000"/>
+                          </a:solidFill>
+                          <a:latin typeface="Calibri"/>
+                        </a:rPr>
+                        <a:t>grey</a:t>
+                      </a:r>
+                    </a:p>
+                  </a:txBody>
+                  <a:tcPr>
+                    <a:solidFill>
+                      <a:srgbClr val="E8E8E8"/>
+                    </a:solidFill>
+                  </a:tcPr>
+                </a:tc>
+                <a:tc>
+                  <a:txBody>
+                    <a:bodyPr lIns="54864" rIns="54864" tIns="18288" bIns="18288" wrap="square" anchor="ctr"/>
+                    <a:lstStyle/>
+                    <a:p>
+                      <a:pPr algn="l"/>
+                      <a:r>
+                        <a:rPr sz="1050" b="0">
+                          <a:solidFill>
+                            <a:srgbClr val="000000"/>
+                          </a:solidFill>
+                          <a:latin typeface="Calibri"/>
+                        </a:rPr>
+                        <a:t>camera off / no frames</a:t>
+                      </a:r>
+                    </a:p>
+                  </a:txBody>
+                  <a:tcPr/>
+                </a:tc>
+                <a:tc>
+                  <a:txBody>
+                    <a:bodyPr lIns="54864" rIns="54864" tIns="18288" bIns="18288" wrap="square" anchor="ctr"/>
+                    <a:lstStyle/>
+                    <a:p>
+                      <a:pPr algn="l"/>
+                      <a:r>
+                        <a:rPr sz="1050" b="0">
+                          <a:solidFill>
+                            <a:srgbClr val="000000"/>
+                          </a:solidFill>
+                          <a:latin typeface="Calibri"/>
+                        </a:rPr>
+                        <a:t>—</a:t>
+                      </a:r>
+                    </a:p>
+                  </a:txBody>
+                  <a:tcPr/>
+                </a:tc>
+              </a:tr>
+            </a:tbl>
+          </a:graphicData>
+        </a:graphic>
+      </p:graphicFrame>
+      <p:sp>
+        <p:nvSpPr>
+          <p:cNvPr id="9" name="Rectangle 8"/>
+          <p:cNvSpPr/>
+          <p:nvPr/>
+        </p:nvSpPr>
+        <p:spPr>
+          <a:xfrm>
+            <a:off x="365760" y="5257800"/>
+            <a:ext cx="11475720" cy="822960"/>
+          </a:xfrm>
+          <a:prstGeom prst="rect">
+            <a:avLst/>
+          </a:prstGeom>
+          <a:solidFill>
+            <a:srgbClr val="E7F1F8"/>
+          </a:solidFill>
+          <a:ln>
+            <a:noFill/>
+          </a:ln>
+        </p:spPr>
+        <p:style>
+          <a:lnRef idx="1">
+            <a:schemeClr val="accent1"/>
+          </a:lnRef>
+          <a:fillRef idx="3">
+            <a:schemeClr val="accent1"/>
+          </a:fillRef>
+          <a:effectRef idx="2">
+            <a:schemeClr val="accent1"/>
+          </a:effectRef>
+          <a:fontRef idx="minor">
+            <a:schemeClr val="lt1"/>
+          </a:fontRef>
+        </p:style>
+        <p:txBody>
+          <a:bodyPr rtlCol="0" anchor="ctr" wrap="square" lIns="109728" rIns="109728"/>
+          <a:lstStyle/>
+          <a:p>
+            <a:pPr algn="ctr"/>
+            <a:r>
+              <a:rPr sz="1150" b="1">
+                <a:solidFill>
+                  <a:srgbClr val="000000"/>
+                </a:solidFill>
+                <a:latin typeface="Calibri"/>
+              </a:rPr>
+              <a:t>Recorded per-frame in the CSV (DIC_Blobs column) — so you know DIC was reliable, and can PROVE it after the test.</a:t>
+            </a:r>
+          </a:p>
+        </p:txBody>
+      </p:sp>
+      <p:sp>
+        <p:nvSpPr>
+          <p:cNvPr id="10" name="TextBox 9"/>
+          <p:cNvSpPr txBox="1"/>
+          <p:nvPr/>
+        </p:nvSpPr>
+        <p:spPr>
+          <a:xfrm>
+            <a:off x="457200" y="6446520"/>
+            <a:ext cx="640080" cy="274320"/>
+          </a:xfrm>
+          <a:prstGeom prst="rect">
+            <a:avLst/>
+          </a:prstGeom>
+          <a:noFill/>
+        </p:spPr>
+        <p:txBody>
+          <a:bodyPr wrap="square" lIns="45720" rIns="45720" tIns="18288" bIns="18288" anchor="t">
+            <a:spAutoFit/>
+          </a:bodyPr>
+          <a:lstStyle/>
+          <a:p>
+            <a:pPr algn="l"/>
+            <a:r>
+              <a:rPr sz="1000" b="0" i="0">
+                <a:solidFill>
+                  <a:srgbClr val="707070"/>
+                </a:solidFill>
+                <a:latin typeface="Calibri"/>
+              </a:rPr>
+              <a:t>176</a:t>
+            </a:r>
+          </a:p>
+        </p:txBody>
+      </p:sp>
+    </p:spTree>
+  </p:cSld>
+  <p:clrMapOvr>
+    <a:masterClrMapping/>
+  </p:clrMapOvr>
+</p:sld>
+</file>
+
+<file path=ppt/slides/slide37.xml><?xml version="1.0" encoding="utf-8"?>
+<p:sld xmlns:a="http://schemas.openxmlformats.org/drawingml/2006/main" xmlns:p="http://schemas.openxmlformats.org/presentationml/2006/main" xmlns:r="http://schemas.openxmlformats.org/officeDocument/2006/relationships">
+  <p:cSld>
+    <p:spTree>
+      <p:nvGrpSpPr>
+        <p:cNvPr id="1" name=""/>
+        <p:cNvGrpSpPr/>
+        <p:nvPr/>
+      </p:nvGrpSpPr>
+      <p:grpSpPr/>
+      <p:sp>
+        <p:nvSpPr>
+          <p:cNvPr id="2" name="TextBox 1"/>
+          <p:cNvSpPr txBox="1"/>
+          <p:nvPr/>
+        </p:nvSpPr>
+        <p:spPr>
+          <a:xfrm>
+            <a:off x="11155680" y="274320"/>
+            <a:ext cx="914400" cy="274320"/>
+          </a:xfrm>
+          <a:prstGeom prst="rect">
+            <a:avLst/>
+          </a:prstGeom>
+          <a:noFill/>
+        </p:spPr>
+        <p:txBody>
+          <a:bodyPr wrap="square" lIns="45720" rIns="45720" tIns="18288" bIns="18288" anchor="t">
+            <a:spAutoFit/>
+          </a:bodyPr>
+          <a:lstStyle/>
+          <a:p>
+            <a:pPr algn="r"/>
+            <a:r>
+              <a:rPr sz="800" b="1" i="0">
+                <a:solidFill>
+                  <a:srgbClr val="707070"/>
+                </a:solidFill>
+                <a:latin typeface="Calibri"/>
+              </a:rPr>
+              <a:t>JÖNKÖPING UNIVERSITY</a:t>
+            </a:r>
+          </a:p>
+        </p:txBody>
+      </p:sp>
+      <p:sp>
+        <p:nvSpPr>
+          <p:cNvPr id="3" name="Rectangle 2"/>
+          <p:cNvSpPr/>
+          <p:nvPr/>
+        </p:nvSpPr>
+        <p:spPr>
+          <a:xfrm>
+            <a:off x="457200" y="411480"/>
+            <a:ext cx="457200" cy="73152"/>
+          </a:xfrm>
+          <a:prstGeom prst="rect">
+            <a:avLst/>
+          </a:prstGeom>
+          <a:solidFill>
+            <a:srgbClr val="A9D6EF"/>
+          </a:solidFill>
+          <a:ln>
+            <a:noFill/>
+          </a:ln>
+        </p:spPr>
+        <p:style>
+          <a:lnRef idx="1">
+            <a:schemeClr val="accent1"/>
+          </a:lnRef>
+          <a:fillRef idx="3">
+            <a:schemeClr val="accent1"/>
+          </a:fillRef>
+          <a:effectRef idx="2">
+            <a:schemeClr val="accent1"/>
+          </a:effectRef>
+          <a:fontRef idx="minor">
+            <a:schemeClr val="lt1"/>
+          </a:fontRef>
+        </p:style>
+        <p:txBody>
+          <a:bodyPr rtlCol="0" anchor="ctr"/>
+          <a:lstStyle/>
+          <a:p>
+            <a:pPr algn="ctr"/>
+          </a:p>
+        </p:txBody>
+      </p:sp>
+      <p:sp>
+        <p:nvSpPr>
+          <p:cNvPr id="4" name="TextBox 3"/>
+          <p:cNvSpPr txBox="1"/>
+          <p:nvPr/>
+        </p:nvSpPr>
+        <p:spPr>
+          <a:xfrm>
+            <a:off x="457200" y="502920"/>
+            <a:ext cx="11430000" cy="822960"/>
+          </a:xfrm>
+          <a:prstGeom prst="rect">
+            <a:avLst/>
+          </a:prstGeom>
+          <a:noFill/>
+        </p:spPr>
+        <p:txBody>
+          <a:bodyPr wrap="square" lIns="45720" rIns="45720" tIns="18288" bIns="18288" anchor="t">
+            <a:spAutoFit/>
+          </a:bodyPr>
+          <a:lstStyle/>
+          <a:p>
+            <a:pPr algn="l"/>
+            <a:r>
+              <a:rPr sz="3000" b="0" i="0">
+                <a:solidFill>
+                  <a:srgbClr val="000000"/>
+                </a:solidFill>
+                <a:latin typeface="Calibri Light"/>
+              </a:rPr>
+              <a:t>DIC-DRIVEN SAFETY — HALT IF TRACKING GOES BAD  (proof, S17)</a:t>
+            </a:r>
+          </a:p>
+        </p:txBody>
+      </p:sp>
+      <p:pic>
+        <p:nvPicPr>
+          <p:cNvPr id="5" name="Picture 4" descr="feat_dic_halt.png"/>
+          <p:cNvPicPr>
+            <a:picLocks noChangeAspect="1"/>
+          </p:cNvPicPr>
+          <p:nvPr/>
+        </p:nvPicPr>
+        <p:blipFill>
+          <a:blip r:embed="rId2"/>
+          <a:stretch>
+            <a:fillRect/>
+          </a:stretch>
+        </p:blipFill>
+        <p:spPr>
+          <a:xfrm>
+            <a:off x="320040" y="1417320"/>
+            <a:ext cx="6675120" cy="3657600"/>
+          </a:xfrm>
+          <a:prstGeom prst="rect">
+            <a:avLst/>
+          </a:prstGeom>
+        </p:spPr>
+      </p:pic>
+      <p:sp>
+        <p:nvSpPr>
+          <p:cNvPr id="6" name="TextBox 5"/>
+          <p:cNvSpPr txBox="1"/>
+          <p:nvPr/>
+        </p:nvSpPr>
+        <p:spPr>
+          <a:xfrm>
+            <a:off x="7223760" y="1170432"/>
+            <a:ext cx="4617720" cy="365760"/>
+          </a:xfrm>
+          <a:prstGeom prst="rect">
+            <a:avLst/>
+          </a:prstGeom>
+          <a:noFill/>
+        </p:spPr>
+        <p:txBody>
+          <a:bodyPr wrap="square" lIns="45720" rIns="45720" tIns="18288" bIns="18288" anchor="t">
+            <a:spAutoFit/>
+          </a:bodyPr>
+          <a:lstStyle/>
+          <a:p>
+            <a:pPr algn="l"/>
+            <a:r>
+              <a:rPr sz="1600" b="0" i="0">
+                <a:solidFill>
+                  <a:srgbClr val="707070"/>
+                </a:solidFill>
+                <a:latin typeface="Calibri"/>
+              </a:rPr>
+              <a:t>CONDITION</a:t>
+            </a:r>
+          </a:p>
+        </p:txBody>
+      </p:sp>
+      <p:sp>
+        <p:nvSpPr>
+          <p:cNvPr id="7" name="Rounded Rectangle 6"/>
+          <p:cNvSpPr/>
+          <p:nvPr/>
+        </p:nvSpPr>
+        <p:spPr>
+          <a:xfrm>
+            <a:off x="7223760" y="1572768"/>
+            <a:ext cx="4617720" cy="1463040"/>
+          </a:xfrm>
+          <a:prstGeom prst="roundRect">
+            <a:avLst/>
+          </a:prstGeom>
+          <a:solidFill>
+            <a:srgbClr val="FFF3CD"/>
+          </a:solidFill>
+          <a:ln w="15240">
+            <a:solidFill>
+              <a:srgbClr val="555555"/>
+            </a:solidFill>
+          </a:ln>
+        </p:spPr>
+        <p:style>
+          <a:lnRef idx="1">
+            <a:schemeClr val="accent1"/>
+          </a:lnRef>
+          <a:fillRef idx="3">
+            <a:schemeClr val="accent1"/>
+          </a:fillRef>
+          <a:effectRef idx="2">
+            <a:schemeClr val="accent1"/>
+          </a:effectRef>
+          <a:fontRef idx="minor">
+            <a:schemeClr val="lt1"/>
+          </a:fontRef>
+        </p:style>
+        <p:txBody>
+          <a:bodyPr rtlCol="0" anchor="ctr" lIns="54864" rIns="54864" tIns="27432" bIns="27432" wrap="square"/>
+          <a:lstStyle/>
+          <a:p>
+            <a:pPr algn="ctr"/>
+            <a:r>
+              <a:rPr sz="1200" b="1">
+                <a:solidFill>
+                  <a:srgbClr val="000000"/>
+                </a:solidFill>
+                <a:latin typeface="Calibri"/>
+              </a:rPr>
+              <a:t>During a strain-rate test, if DIC strain FREEZES (markers lost):
+•  FREEZE speed at 0.2 s
+•  HALT at 1.0 s</a:t>
+            </a:r>
+          </a:p>
+        </p:txBody>
+      </p:sp>
+      <p:sp>
+        <p:nvSpPr>
+          <p:cNvPr id="8" name="TextBox 7"/>
+          <p:cNvSpPr txBox="1"/>
+          <p:nvPr/>
+        </p:nvSpPr>
+        <p:spPr>
+          <a:xfrm>
+            <a:off x="7223760" y="3246120"/>
+            <a:ext cx="4617720" cy="365760"/>
+          </a:xfrm>
+          <a:prstGeom prst="rect">
+            <a:avLst/>
+          </a:prstGeom>
+          <a:noFill/>
+        </p:spPr>
+        <p:txBody>
+          <a:bodyPr wrap="square" lIns="45720" rIns="45720" tIns="18288" bIns="18288" anchor="t">
+            <a:spAutoFit/>
+          </a:bodyPr>
+          <a:lstStyle/>
+          <a:p>
+            <a:pPr algn="l"/>
+            <a:r>
+              <a:rPr sz="1600" b="0" i="0">
+                <a:solidFill>
+                  <a:srgbClr val="707070"/>
+                </a:solidFill>
+                <a:latin typeface="Calibri"/>
+              </a:rPr>
+              <a:t>Why</a:t>
+            </a:r>
+          </a:p>
+        </p:txBody>
+      </p:sp>
+      <p:sp>
+        <p:nvSpPr>
+          <p:cNvPr id="9" name="TextBox 8"/>
+          <p:cNvSpPr txBox="1"/>
+          <p:nvPr/>
+        </p:nvSpPr>
+        <p:spPr>
+          <a:xfrm>
+            <a:off x="7223760" y="3639312"/>
+            <a:ext cx="4617720" cy="1737360"/>
+          </a:xfrm>
+          <a:prstGeom prst="rect">
+            <a:avLst/>
+          </a:prstGeom>
+          <a:noFill/>
+        </p:spPr>
+        <p:txBody>
+          <a:bodyPr wrap="square" lIns="45720" rIns="45720" tIns="18288" bIns="18288" anchor="t">
+            <a:spAutoFit/>
+          </a:bodyPr>
+          <a:lstStyle/>
+          <a:p>
+            <a:pPr algn="l"/>
+            <a:r>
+              <a:rPr sz="1150" b="0" i="0">
+                <a:solidFill>
+                  <a:srgbClr val="000000"/>
+                </a:solidFill>
+                <a:latin typeface="Calibri"/>
+              </a:rPr>
+              <a:t>The loop STEERS on DIC strain.
+If tracking dies it is blind — so it stops instead of pulling on stale / frozen data.</a:t>
+            </a:r>
+          </a:p>
+        </p:txBody>
+      </p:sp>
+      <p:sp>
+        <p:nvSpPr>
+          <p:cNvPr id="10" name="Rectangle 9"/>
+          <p:cNvSpPr/>
+          <p:nvPr/>
+        </p:nvSpPr>
+        <p:spPr>
+          <a:xfrm>
+            <a:off x="365760" y="5806440"/>
+            <a:ext cx="11475720" cy="658368"/>
+          </a:xfrm>
+          <a:prstGeom prst="rect">
+            <a:avLst/>
+          </a:prstGeom>
+          <a:solidFill>
+            <a:srgbClr val="C8E6C9"/>
+          </a:solidFill>
+          <a:ln>
+            <a:noFill/>
+          </a:ln>
+        </p:spPr>
+        <p:style>
+          <a:lnRef idx="1">
+            <a:schemeClr val="accent1"/>
+          </a:lnRef>
+          <a:fillRef idx="3">
+            <a:schemeClr val="accent1"/>
+          </a:fillRef>
+          <a:effectRef idx="2">
+            <a:schemeClr val="accent1"/>
+          </a:effectRef>
+          <a:fontRef idx="minor">
+            <a:schemeClr val="lt1"/>
+          </a:fontRef>
+        </p:style>
+        <p:txBody>
+          <a:bodyPr rtlCol="0" anchor="ctr" wrap="square" lIns="109728" rIns="109728"/>
+          <a:lstStyle/>
+          <a:p>
+            <a:pPr algn="ctr"/>
+            <a:r>
+              <a:rPr sz="1200" b="1">
+                <a:solidFill>
+                  <a:srgbClr val="1F3F2F"/>
+                </a:solidFill>
+                <a:latin typeface="Calibri"/>
+              </a:rPr>
+              <a:t>S17 — covered a marker mid-test → DIC went BAD → motor auto-halted. No runaway on blind data.</a:t>
+            </a:r>
+          </a:p>
+        </p:txBody>
+      </p:sp>
+      <p:sp>
+        <p:nvSpPr>
+          <p:cNvPr id="11" name="TextBox 10"/>
+          <p:cNvSpPr txBox="1"/>
+          <p:nvPr/>
+        </p:nvSpPr>
+        <p:spPr>
+          <a:xfrm>
+            <a:off x="457200" y="6446520"/>
+            <a:ext cx="640080" cy="274320"/>
+          </a:xfrm>
+          <a:prstGeom prst="rect">
+            <a:avLst/>
+          </a:prstGeom>
+          <a:noFill/>
+        </p:spPr>
+        <p:txBody>
+          <a:bodyPr wrap="square" lIns="45720" rIns="45720" tIns="18288" bIns="18288" anchor="t">
+            <a:spAutoFit/>
+          </a:bodyPr>
+          <a:lstStyle/>
+          <a:p>
+            <a:pPr algn="l"/>
+            <a:r>
+              <a:rPr sz="1000" b="0" i="0">
+                <a:solidFill>
+                  <a:srgbClr val="707070"/>
+                </a:solidFill>
+                <a:latin typeface="Calibri"/>
+              </a:rPr>
+              <a:t>177</a:t>
+            </a:r>
+          </a:p>
+        </p:txBody>
+      </p:sp>
+    </p:spTree>
+  </p:cSld>
+  <p:clrMapOvr>
+    <a:masterClrMapping/>
+  </p:clrMapOvr>
+</p:sld>
+</file>
+
+<file path=ppt/slides/slide38.xml><?xml version="1.0" encoding="utf-8"?>
+<p:sld xmlns:a="http://schemas.openxmlformats.org/drawingml/2006/main" xmlns:p="http://schemas.openxmlformats.org/presentationml/2006/main" xmlns:r="http://schemas.openxmlformats.org/officeDocument/2006/relationships">
+  <p:cSld>
+    <p:spTree>
+      <p:nvGrpSpPr>
+        <p:cNvPr id="1" name=""/>
+        <p:cNvGrpSpPr/>
+        <p:nvPr/>
+      </p:nvGrpSpPr>
+      <p:grpSpPr/>
+      <p:sp>
+        <p:nvSpPr>
+          <p:cNvPr id="2" name="TextBox 1"/>
+          <p:cNvSpPr txBox="1"/>
+          <p:nvPr/>
+        </p:nvSpPr>
+        <p:spPr>
+          <a:xfrm>
+            <a:off x="11155680" y="274320"/>
+            <a:ext cx="914400" cy="274320"/>
+          </a:xfrm>
+          <a:prstGeom prst="rect">
+            <a:avLst/>
+          </a:prstGeom>
+          <a:noFill/>
+        </p:spPr>
+        <p:txBody>
+          <a:bodyPr wrap="square" lIns="45720" rIns="45720" tIns="18288" bIns="18288" anchor="t">
+            <a:spAutoFit/>
+          </a:bodyPr>
+          <a:lstStyle/>
+          <a:p>
+            <a:pPr algn="r"/>
+            <a:r>
+              <a:rPr sz="800" b="1" i="0">
+                <a:solidFill>
+                  <a:srgbClr val="707070"/>
+                </a:solidFill>
+                <a:latin typeface="Calibri"/>
+              </a:rPr>
+              <a:t>JÖNKÖPING UNIVERSITY</a:t>
+            </a:r>
+          </a:p>
+        </p:txBody>
+      </p:sp>
+      <p:sp>
+        <p:nvSpPr>
+          <p:cNvPr id="3" name="Rectangle 2"/>
+          <p:cNvSpPr/>
+          <p:nvPr/>
+        </p:nvSpPr>
+        <p:spPr>
+          <a:xfrm>
+            <a:off x="457200" y="411480"/>
+            <a:ext cx="457200" cy="73152"/>
+          </a:xfrm>
+          <a:prstGeom prst="rect">
+            <a:avLst/>
+          </a:prstGeom>
+          <a:solidFill>
+            <a:srgbClr val="A9D6EF"/>
+          </a:solidFill>
+          <a:ln>
+            <a:noFill/>
+          </a:ln>
+        </p:spPr>
+        <p:style>
+          <a:lnRef idx="1">
+            <a:schemeClr val="accent1"/>
+          </a:lnRef>
+          <a:fillRef idx="3">
+            <a:schemeClr val="accent1"/>
+          </a:fillRef>
+          <a:effectRef idx="2">
+            <a:schemeClr val="accent1"/>
+          </a:effectRef>
+          <a:fontRef idx="minor">
+            <a:schemeClr val="lt1"/>
+          </a:fontRef>
+        </p:style>
+        <p:txBody>
+          <a:bodyPr rtlCol="0" anchor="ctr"/>
+          <a:lstStyle/>
+          <a:p>
+            <a:pPr algn="ctr"/>
+          </a:p>
+        </p:txBody>
+      </p:sp>
+      <p:sp>
+        <p:nvSpPr>
+          <p:cNvPr id="4" name="TextBox 3"/>
+          <p:cNvSpPr txBox="1"/>
+          <p:nvPr/>
+        </p:nvSpPr>
+        <p:spPr>
+          <a:xfrm>
+            <a:off x="457200" y="502920"/>
+            <a:ext cx="11430000" cy="822960"/>
+          </a:xfrm>
+          <a:prstGeom prst="rect">
+            <a:avLst/>
+          </a:prstGeom>
+          <a:noFill/>
+        </p:spPr>
+        <p:txBody>
+          <a:bodyPr wrap="square" lIns="45720" rIns="45720" tIns="18288" bIns="18288" anchor="t">
+            <a:spAutoFit/>
+          </a:bodyPr>
+          <a:lstStyle/>
+          <a:p>
+            <a:pPr algn="l"/>
+            <a:r>
+              <a:rPr sz="3000" b="0" i="0">
+                <a:solidFill>
+                  <a:srgbClr val="000000"/>
+                </a:solidFill>
+                <a:latin typeface="Calibri Light"/>
+              </a:rPr>
+              <a:t>IN THE APP — ONE-CLICK REPORT &amp; SAVED SETTINGS</a:t>
+            </a:r>
+          </a:p>
+        </p:txBody>
+      </p:sp>
+      <p:sp>
+        <p:nvSpPr>
+          <p:cNvPr id="5" name="TextBox 4"/>
+          <p:cNvSpPr txBox="1"/>
+          <p:nvPr/>
+        </p:nvSpPr>
+        <p:spPr>
+          <a:xfrm>
+            <a:off x="365760" y="1170432"/>
+            <a:ext cx="5669280" cy="365760"/>
+          </a:xfrm>
+          <a:prstGeom prst="rect">
+            <a:avLst/>
+          </a:prstGeom>
+          <a:noFill/>
+        </p:spPr>
+        <p:txBody>
+          <a:bodyPr wrap="square" lIns="45720" rIns="45720" tIns="18288" bIns="18288" anchor="t">
+            <a:spAutoFit/>
+          </a:bodyPr>
+          <a:lstStyle/>
+          <a:p>
+            <a:pPr algn="l"/>
+            <a:r>
+              <a:rPr sz="1600" b="0" i="0">
+                <a:solidFill>
+                  <a:srgbClr val="707070"/>
+                </a:solidFill>
+                <a:latin typeface="Calibri"/>
+              </a:rPr>
+              <a:t>Generate report  →  one-page PDF + PNGs</a:t>
+            </a:r>
+          </a:p>
+        </p:txBody>
+      </p:sp>
+      <p:pic>
+        <p:nvPicPr>
+          <p:cNvPr id="6" name="Picture 5" descr="feat_report_s16.png"/>
+          <p:cNvPicPr>
+            <a:picLocks noChangeAspect="1"/>
+          </p:cNvPicPr>
+          <p:nvPr/>
+        </p:nvPicPr>
+        <p:blipFill>
+          <a:blip r:embed="rId2"/>
+          <a:stretch>
+            <a:fillRect/>
+          </a:stretch>
+        </p:blipFill>
+        <p:spPr>
+          <a:xfrm>
+            <a:off x="365760" y="1627632"/>
+            <a:ext cx="5623560" cy="3163252"/>
+          </a:xfrm>
+          <a:prstGeom prst="rect">
+            <a:avLst/>
+          </a:prstGeom>
+        </p:spPr>
+      </p:pic>
+      <p:sp>
+        <p:nvSpPr>
+          <p:cNvPr id="7" name="TextBox 6"/>
+          <p:cNvSpPr txBox="1"/>
+          <p:nvPr/>
+        </p:nvSpPr>
+        <p:spPr>
+          <a:xfrm>
+            <a:off x="6355080" y="1170432"/>
+            <a:ext cx="5486400" cy="365760"/>
+          </a:xfrm>
+          <a:prstGeom prst="rect">
+            <a:avLst/>
+          </a:prstGeom>
+          <a:noFill/>
+        </p:spPr>
+        <p:txBody>
+          <a:bodyPr wrap="square" lIns="45720" rIns="45720" tIns="18288" bIns="18288" anchor="t">
+            <a:spAutoFit/>
+          </a:bodyPr>
+          <a:lstStyle/>
+          <a:p>
+            <a:pPr algn="l"/>
+            <a:r>
+              <a:rPr sz="1600" b="0" i="0">
+                <a:solidFill>
+                  <a:srgbClr val="707070"/>
+                </a:solidFill>
+                <a:latin typeface="Calibri"/>
+              </a:rPr>
+              <a:t>Settings  —  save a setup, reload in 1 click</a:t>
+            </a:r>
+          </a:p>
+        </p:txBody>
+      </p:sp>
+      <p:sp>
+        <p:nvSpPr>
+          <p:cNvPr id="8" name="Rounded Rectangle 7"/>
+          <p:cNvSpPr/>
+          <p:nvPr/>
+        </p:nvSpPr>
+        <p:spPr>
+          <a:xfrm>
+            <a:off x="6355080" y="1627632"/>
+            <a:ext cx="5486400" cy="548640"/>
+          </a:xfrm>
+          <a:prstGeom prst="roundRect">
+            <a:avLst/>
+          </a:prstGeom>
+          <a:solidFill>
+            <a:srgbClr val="F2F2F2"/>
+          </a:solidFill>
+          <a:ln w="15240">
+            <a:solidFill>
+              <a:srgbClr val="555555"/>
+            </a:solidFill>
+          </a:ln>
+        </p:spPr>
+        <p:style>
+          <a:lnRef idx="1">
+            <a:schemeClr val="accent1"/>
+          </a:lnRef>
+          <a:fillRef idx="3">
+            <a:schemeClr val="accent1"/>
+          </a:fillRef>
+          <a:effectRef idx="2">
+            <a:schemeClr val="accent1"/>
+          </a:effectRef>
+          <a:fontRef idx="minor">
+            <a:schemeClr val="lt1"/>
+          </a:fontRef>
+        </p:style>
+        <p:txBody>
+          <a:bodyPr rtlCol="0" anchor="ctr" lIns="54864" rIns="54864" tIns="27432" bIns="27432" wrap="square"/>
+          <a:lstStyle/>
+          <a:p>
+            <a:pPr algn="ctr"/>
+            <a:r>
+              <a:rPr sz="1100" b="1">
+                <a:solidFill>
+                  <a:srgbClr val="707070"/>
+                </a:solidFill>
+                <a:latin typeface="Calibri"/>
+              </a:rPr>
+              <a:t>[ drop feat_settings_ui.png here — your Settings screenshot ]</a:t>
+            </a:r>
+          </a:p>
+        </p:txBody>
+      </p:sp>
+      <p:sp>
+        <p:nvSpPr>
+          <p:cNvPr id="9" name="TextBox 8"/>
+          <p:cNvSpPr txBox="1"/>
+          <p:nvPr/>
+        </p:nvSpPr>
+        <p:spPr>
+          <a:xfrm>
+            <a:off x="6355080" y="2423160"/>
+            <a:ext cx="5486400" cy="2834640"/>
+          </a:xfrm>
+          <a:prstGeom prst="rect">
+            <a:avLst/>
+          </a:prstGeom>
+          <a:noFill/>
+        </p:spPr>
+        <p:txBody>
+          <a:bodyPr wrap="square" lIns="45720" rIns="45720" tIns="18288" bIns="18288" anchor="t">
+            <a:spAutoFit/>
+          </a:bodyPr>
+          <a:lstStyle/>
+          <a:p>
+            <a:pPr algn="l"/>
+            <a:r>
+              <a:rPr sz="1150" b="0" i="0">
+                <a:solidFill>
+                  <a:srgbClr val="000000"/>
+                </a:solidFill>
+                <a:latin typeface="Calibri"/>
+              </a:rPr>
+              <a:t>•  Saves area · gauge · preload · speed · mode + params
+•  'Default' always present (auto-stop ON)
+•  Reload a full test setup with ONE click
+•  Infill % = recorded label only (does NOT change data)
+•  Report reads the CSV header → KPIs + 4 plots + validation</a:t>
+            </a:r>
+          </a:p>
+        </p:txBody>
+      </p:sp>
+      <p:sp>
+        <p:nvSpPr>
+          <p:cNvPr id="10" name="TextBox 9"/>
+          <p:cNvSpPr txBox="1"/>
+          <p:nvPr/>
+        </p:nvSpPr>
+        <p:spPr>
+          <a:xfrm>
+            <a:off x="548640" y="6400800"/>
+            <a:ext cx="11064240" cy="365760"/>
+          </a:xfrm>
+          <a:prstGeom prst="rect">
+            <a:avLst/>
+          </a:prstGeom>
+          <a:noFill/>
+        </p:spPr>
+        <p:txBody>
+          <a:bodyPr wrap="square" lIns="45720" rIns="45720" tIns="18288" bIns="18288" anchor="t">
+            <a:spAutoFit/>
+          </a:bodyPr>
+          <a:lstStyle/>
+          <a:p>
+            <a:pPr algn="l"/>
+            <a:r>
+              <a:rPr sz="1200" b="0" i="1">
+                <a:solidFill>
+                  <a:srgbClr val="707070"/>
+                </a:solidFill>
+                <a:latin typeface="Calibri"/>
+              </a:rPr>
+              <a:t>Report shown is the REAL S16 one-pager (auto-generated). Settings image = the live Motor-Control controls.</a:t>
+            </a:r>
+          </a:p>
+        </p:txBody>
+      </p:sp>
+      <p:sp>
+        <p:nvSpPr>
+          <p:cNvPr id="11" name="TextBox 10"/>
+          <p:cNvSpPr txBox="1"/>
+          <p:nvPr/>
+        </p:nvSpPr>
+        <p:spPr>
+          <a:xfrm>
+            <a:off x="457200" y="6446520"/>
+            <a:ext cx="640080" cy="274320"/>
+          </a:xfrm>
+          <a:prstGeom prst="rect">
+            <a:avLst/>
+          </a:prstGeom>
+          <a:noFill/>
+        </p:spPr>
+        <p:txBody>
+          <a:bodyPr wrap="square" lIns="45720" rIns="45720" tIns="18288" bIns="18288" anchor="t">
+            <a:spAutoFit/>
+          </a:bodyPr>
+          <a:lstStyle/>
+          <a:p>
+            <a:pPr algn="l"/>
+            <a:r>
+              <a:rPr sz="1000" b="0" i="0">
+                <a:solidFill>
+                  <a:srgbClr val="707070"/>
+                </a:solidFill>
+                <a:latin typeface="Calibri"/>
+              </a:rPr>
+              <a:t>178</a:t>
+            </a:r>
+          </a:p>
+        </p:txBody>
+      </p:sp>
+    </p:spTree>
+  </p:cSld>
+  <p:clrMapOvr>
+    <a:masterClrMapping/>
+  </p:clrMapOvr>
+</p:sld>
+</file>
+
+<file path=ppt/slides/slide39.xml><?xml version="1.0" encoding="utf-8"?>
+<p:sld xmlns:a="http://schemas.openxmlformats.org/drawingml/2006/main" xmlns:p="http://schemas.openxmlformats.org/presentationml/2006/main" xmlns:r="http://schemas.openxmlformats.org/officeDocument/2006/relationships">
+  <p:cSld>
+    <p:spTree>
+      <p:nvGrpSpPr>
+        <p:cNvPr id="1" name=""/>
+        <p:cNvGrpSpPr/>
+        <p:nvPr/>
+      </p:nvGrpSpPr>
+      <p:grpSpPr/>
+      <p:sp>
+        <p:nvSpPr>
+          <p:cNvPr id="2" name="TextBox 1"/>
+          <p:cNvSpPr txBox="1"/>
+          <p:nvPr/>
+        </p:nvSpPr>
+        <p:spPr>
+          <a:xfrm>
+            <a:off x="11155680" y="274320"/>
+            <a:ext cx="914400" cy="274320"/>
+          </a:xfrm>
+          <a:prstGeom prst="rect">
+            <a:avLst/>
+          </a:prstGeom>
+          <a:noFill/>
+        </p:spPr>
+        <p:txBody>
+          <a:bodyPr wrap="square" lIns="45720" rIns="45720" tIns="18288" bIns="18288" anchor="t">
+            <a:spAutoFit/>
+          </a:bodyPr>
+          <a:lstStyle/>
+          <a:p>
+            <a:pPr algn="r"/>
+            <a:r>
+              <a:rPr sz="800" b="1" i="0">
+                <a:solidFill>
+                  <a:srgbClr val="707070"/>
+                </a:solidFill>
+                <a:latin typeface="Calibri"/>
+              </a:rPr>
+              <a:t>JÖNKÖPING UNIVERSITY</a:t>
+            </a:r>
+          </a:p>
+        </p:txBody>
+      </p:sp>
+      <p:sp>
+        <p:nvSpPr>
+          <p:cNvPr id="3" name="Rectangle 2"/>
+          <p:cNvSpPr/>
+          <p:nvPr/>
+        </p:nvSpPr>
+        <p:spPr>
+          <a:xfrm>
+            <a:off x="457200" y="411480"/>
+            <a:ext cx="457200" cy="73152"/>
+          </a:xfrm>
+          <a:prstGeom prst="rect">
+            <a:avLst/>
+          </a:prstGeom>
+          <a:solidFill>
+            <a:srgbClr val="A9D6EF"/>
+          </a:solidFill>
+          <a:ln>
+            <a:noFill/>
+          </a:ln>
+        </p:spPr>
+        <p:style>
+          <a:lnRef idx="1">
+            <a:schemeClr val="accent1"/>
+          </a:lnRef>
+          <a:fillRef idx="3">
+            <a:schemeClr val="accent1"/>
+          </a:fillRef>
+          <a:effectRef idx="2">
+            <a:schemeClr val="accent1"/>
+          </a:effectRef>
+          <a:fontRef idx="minor">
+            <a:schemeClr val="lt1"/>
+          </a:fontRef>
+        </p:style>
+        <p:txBody>
+          <a:bodyPr rtlCol="0" anchor="ctr"/>
+          <a:lstStyle/>
+          <a:p>
+            <a:pPr algn="ctr"/>
+          </a:p>
+        </p:txBody>
+      </p:sp>
+      <p:sp>
+        <p:nvSpPr>
+          <p:cNvPr id="4" name="TextBox 3"/>
+          <p:cNvSpPr txBox="1"/>
+          <p:nvPr/>
+        </p:nvSpPr>
+        <p:spPr>
+          <a:xfrm>
+            <a:off x="457200" y="502920"/>
+            <a:ext cx="11430000" cy="822960"/>
+          </a:xfrm>
+          <a:prstGeom prst="rect">
+            <a:avLst/>
+          </a:prstGeom>
+          <a:noFill/>
+        </p:spPr>
+        <p:txBody>
+          <a:bodyPr wrap="square" lIns="45720" rIns="45720" tIns="18288" bIns="18288" anchor="t">
+            <a:spAutoFit/>
+          </a:bodyPr>
+          <a:lstStyle/>
+          <a:p>
+            <a:pPr algn="l"/>
+            <a:r>
+              <a:rPr sz="3000" b="0" i="0">
+                <a:solidFill>
+                  <a:srgbClr val="000000"/>
+                </a:solidFill>
+                <a:latin typeface="Calibri Light"/>
+              </a:rPr>
               <a:t>SPECIMEN REGISTER  (S1 – S19)</a:t>
             </a:r>
           </a:p>
@@ -26699,7 +28859,7 @@
                           </a:solidFill>
                           <a:latin typeface="Calibri"/>
                         </a:rPr>
-                        <a:t>halt tests · SR-frac</a:t>
+                        <a:t>halt tests (DIC / stall)</a:t>
                       </a:r>
                     </a:p>
                   </a:txBody>
@@ -26855,7 +29015,7 @@
                           </a:solidFill>
                           <a:latin typeface="Calibri"/>
                         </a:rPr>
-                        <a:t>V1 batch</a:t>
+                        <a:t>strain-rate frac · 17.3 MPa</a:t>
                       </a:r>
                     </a:p>
                   </a:txBody>
@@ -26931,7 +29091,7 @@
                 </a:solidFill>
                 <a:latin typeface="Calibri"/>
               </a:rPr>
-              <a:t>175</a:t>
+              <a:t>179</a:t>
             </a:r>
           </a:p>
         </p:txBody>

--- a/documentation/V6a_8_6_20_slides.pptx
+++ b/documentation/V6a_8_6_20_slides.pptx
@@ -44,6 +44,7 @@
     <p:sldId id="292" r:id="rId43"/>
     <p:sldId id="293" r:id="rId44"/>
     <p:sldId id="294" r:id="rId45"/>
+    <p:sldId id="295" r:id="rId46"/>
   </p:sldIdLst>
   <p:sldSz cx="12191695" cy="6858000" type="screen4x3"/>
   <p:notesSz cx="6858000" cy="9144000"/>
@@ -25715,60 +25716,30 @@
           </a:p>
         </p:txBody>
       </p:sp>
-      <p:sp>
-        <p:nvSpPr>
-          <p:cNvPr id="5" name="Rounded Rectangle 4"/>
-          <p:cNvSpPr/>
-          <p:nvPr/>
-        </p:nvSpPr>
-        <p:spPr>
-          <a:xfrm>
-            <a:off x="365760" y="1188720"/>
-            <a:ext cx="7498079" cy="731520"/>
-          </a:xfrm>
-          <a:prstGeom prst="roundRect">
-            <a:avLst/>
-          </a:prstGeom>
-          <a:solidFill>
-            <a:srgbClr val="F2F2F2"/>
-          </a:solidFill>
-          <a:ln w="15240">
-            <a:solidFill>
-              <a:srgbClr val="555555"/>
-            </a:solidFill>
-          </a:ln>
-        </p:spPr>
-        <p:style>
-          <a:lnRef idx="1">
-            <a:schemeClr val="accent1"/>
-          </a:lnRef>
-          <a:fillRef idx="3">
-            <a:schemeClr val="accent1"/>
-          </a:fillRef>
-          <a:effectRef idx="2">
-            <a:schemeClr val="accent1"/>
-          </a:effectRef>
-          <a:fontRef idx="minor">
-            <a:schemeClr val="lt1"/>
-          </a:fontRef>
-        </p:style>
-        <p:txBody>
-          <a:bodyPr rtlCol="0" anchor="ctr" lIns="54864" rIns="54864" tIns="27432" bIns="27432" wrap="square"/>
-          <a:lstStyle/>
-          <a:p>
-            <a:pPr algn="ctr"/>
-            <a:r>
-              <a:rPr sz="1100" b="1">
-                <a:solidFill>
-                  <a:srgbClr val="707070"/>
-                </a:solidFill>
-                <a:latin typeface="Calibri"/>
-              </a:rPr>
-              <a:t>[ drop feat_dic_hud.png here — your DIC-HUD screenshot ]</a:t>
-            </a:r>
-          </a:p>
-        </p:txBody>
-      </p:sp>
+      <p:pic>
+        <p:nvPicPr>
+          <p:cNvPr id="5" name="Picture 4" descr="DIC HUD UI Screenshot.png"/>
+          <p:cNvPicPr>
+            <a:picLocks noChangeAspect="1"/>
+          </p:cNvPicPr>
+          <p:nvPr/>
+        </p:nvPicPr>
+        <p:blipFill>
+          <a:blip r:embed="rId2"/>
+          <a:stretch>
+            <a:fillRect/>
+          </a:stretch>
+        </p:blipFill>
+        <p:spPr>
+          <a:xfrm>
+            <a:off x="365760" y="1234440"/>
+            <a:ext cx="7498079" cy="823488"/>
+          </a:xfrm>
+          <a:prstGeom prst="rect">
+            <a:avLst/>
+          </a:prstGeom>
+        </p:spPr>
+      </p:pic>
       <p:sp>
         <p:nvSpPr>
           <p:cNvPr id="6" name="TextBox 5"/>
@@ -27006,60 +26977,30 @@
           </a:p>
         </p:txBody>
       </p:sp>
-      <p:sp>
-        <p:nvSpPr>
-          <p:cNvPr id="8" name="Rounded Rectangle 7"/>
-          <p:cNvSpPr/>
-          <p:nvPr/>
-        </p:nvSpPr>
-        <p:spPr>
-          <a:xfrm>
-            <a:off x="6355080" y="1627632"/>
-            <a:ext cx="5486400" cy="548640"/>
-          </a:xfrm>
-          <a:prstGeom prst="roundRect">
-            <a:avLst/>
-          </a:prstGeom>
-          <a:solidFill>
-            <a:srgbClr val="F2F2F2"/>
-          </a:solidFill>
-          <a:ln w="15240">
-            <a:solidFill>
-              <a:srgbClr val="555555"/>
-            </a:solidFill>
-          </a:ln>
-        </p:spPr>
-        <p:style>
-          <a:lnRef idx="1">
-            <a:schemeClr val="accent1"/>
-          </a:lnRef>
-          <a:fillRef idx="3">
-            <a:schemeClr val="accent1"/>
-          </a:fillRef>
-          <a:effectRef idx="2">
-            <a:schemeClr val="accent1"/>
-          </a:effectRef>
-          <a:fontRef idx="minor">
-            <a:schemeClr val="lt1"/>
-          </a:fontRef>
-        </p:style>
-        <p:txBody>
-          <a:bodyPr rtlCol="0" anchor="ctr" lIns="54864" rIns="54864" tIns="27432" bIns="27432" wrap="square"/>
-          <a:lstStyle/>
-          <a:p>
-            <a:pPr algn="ctr"/>
-            <a:r>
-              <a:rPr sz="1100" b="1">
-                <a:solidFill>
-                  <a:srgbClr val="707070"/>
-                </a:solidFill>
-                <a:latin typeface="Calibri"/>
-              </a:rPr>
-              <a:t>[ drop feat_settings_ui.png here — your Settings screenshot ]</a:t>
-            </a:r>
-          </a:p>
-        </p:txBody>
-      </p:sp>
+      <p:pic>
+        <p:nvPicPr>
+          <p:cNvPr id="8" name="Picture 7" descr="Settings save_UI_Screenshot.png"/>
+          <p:cNvPicPr>
+            <a:picLocks noChangeAspect="1"/>
+          </p:cNvPicPr>
+          <p:nvPr/>
+        </p:nvPicPr>
+        <p:blipFill>
+          <a:blip r:embed="rId3"/>
+          <a:stretch>
+            <a:fillRect/>
+          </a:stretch>
+        </p:blipFill>
+        <p:spPr>
+          <a:xfrm>
+            <a:off x="6355080" y="1691640"/>
+            <a:ext cx="5486400" cy="216487"/>
+          </a:xfrm>
+          <a:prstGeom prst="rect">
+            <a:avLst/>
+          </a:prstGeom>
+        </p:spPr>
+      </p:pic>
       <p:sp>
         <p:nvSpPr>
           <p:cNvPr id="9" name="TextBox 8"/>
@@ -29317,6 +29258,518 @@
                 <a:latin typeface="Calibri"/>
               </a:rPr>
               <a:t>144</a:t>
+            </a:r>
+          </a:p>
+        </p:txBody>
+      </p:sp>
+    </p:spTree>
+  </p:cSld>
+  <p:clrMapOvr>
+    <a:masterClrMapping/>
+  </p:clrMapOvr>
+</p:sld>
+</file>
+
+<file path=ppt/slides/slide40.xml><?xml version="1.0" encoding="utf-8"?>
+<p:sld xmlns:a="http://schemas.openxmlformats.org/drawingml/2006/main" xmlns:p="http://schemas.openxmlformats.org/presentationml/2006/main" xmlns:r="http://schemas.openxmlformats.org/officeDocument/2006/relationships">
+  <p:cSld>
+    <p:spTree>
+      <p:nvGrpSpPr>
+        <p:cNvPr id="1" name=""/>
+        <p:cNvGrpSpPr/>
+        <p:nvPr/>
+      </p:nvGrpSpPr>
+      <p:grpSpPr/>
+      <p:sp>
+        <p:nvSpPr>
+          <p:cNvPr id="2" name="TextBox 1"/>
+          <p:cNvSpPr txBox="1"/>
+          <p:nvPr/>
+        </p:nvSpPr>
+        <p:spPr>
+          <a:xfrm>
+            <a:off x="11155680" y="274320"/>
+            <a:ext cx="914400" cy="274320"/>
+          </a:xfrm>
+          <a:prstGeom prst="rect">
+            <a:avLst/>
+          </a:prstGeom>
+          <a:noFill/>
+        </p:spPr>
+        <p:txBody>
+          <a:bodyPr wrap="square" lIns="45720" rIns="45720" tIns="18288" bIns="18288" anchor="t">
+            <a:spAutoFit/>
+          </a:bodyPr>
+          <a:lstStyle/>
+          <a:p>
+            <a:pPr algn="r"/>
+            <a:r>
+              <a:rPr sz="800" b="1" i="0">
+                <a:solidFill>
+                  <a:srgbClr val="707070"/>
+                </a:solidFill>
+                <a:latin typeface="Calibri"/>
+              </a:rPr>
+              <a:t>JÖNKÖPING UNIVERSITY</a:t>
+            </a:r>
+          </a:p>
+        </p:txBody>
+      </p:sp>
+      <p:sp>
+        <p:nvSpPr>
+          <p:cNvPr id="3" name="Rectangle 2"/>
+          <p:cNvSpPr/>
+          <p:nvPr/>
+        </p:nvSpPr>
+        <p:spPr>
+          <a:xfrm>
+            <a:off x="457200" y="411480"/>
+            <a:ext cx="457200" cy="73152"/>
+          </a:xfrm>
+          <a:prstGeom prst="rect">
+            <a:avLst/>
+          </a:prstGeom>
+          <a:solidFill>
+            <a:srgbClr val="A9D6EF"/>
+          </a:solidFill>
+          <a:ln>
+            <a:noFill/>
+          </a:ln>
+        </p:spPr>
+        <p:style>
+          <a:lnRef idx="1">
+            <a:schemeClr val="accent1"/>
+          </a:lnRef>
+          <a:fillRef idx="3">
+            <a:schemeClr val="accent1"/>
+          </a:fillRef>
+          <a:effectRef idx="2">
+            <a:schemeClr val="accent1"/>
+          </a:effectRef>
+          <a:fontRef idx="minor">
+            <a:schemeClr val="lt1"/>
+          </a:fontRef>
+        </p:style>
+        <p:txBody>
+          <a:bodyPr rtlCol="0" anchor="ctr"/>
+          <a:lstStyle/>
+          <a:p>
+            <a:pPr algn="ctr"/>
+          </a:p>
+        </p:txBody>
+      </p:sp>
+      <p:sp>
+        <p:nvSpPr>
+          <p:cNvPr id="4" name="TextBox 3"/>
+          <p:cNvSpPr txBox="1"/>
+          <p:nvPr/>
+        </p:nvSpPr>
+        <p:spPr>
+          <a:xfrm>
+            <a:off x="457200" y="502920"/>
+            <a:ext cx="11430000" cy="822960"/>
+          </a:xfrm>
+          <a:prstGeom prst="rect">
+            <a:avLst/>
+          </a:prstGeom>
+          <a:noFill/>
+        </p:spPr>
+        <p:txBody>
+          <a:bodyPr wrap="square" lIns="45720" rIns="45720" tIns="18288" bIns="18288" anchor="t">
+            <a:spAutoFit/>
+          </a:bodyPr>
+          <a:lstStyle/>
+          <a:p>
+            <a:pPr algn="l"/>
+            <a:r>
+              <a:rPr sz="3000" b="0" i="0">
+                <a:solidFill>
+                  <a:srgbClr val="000000"/>
+                </a:solidFill>
+                <a:latin typeface="Calibri Light"/>
+              </a:rPr>
+              <a:t>BUCK-CONVERTER ENCLOSURE — CAD (PLA)</a:t>
+            </a:r>
+          </a:p>
+        </p:txBody>
+      </p:sp>
+      <p:pic>
+        <p:nvPicPr>
+          <p:cNvPr id="5" name="Picture 4" descr="Buckconverter_Enclosure_CAD.png"/>
+          <p:cNvPicPr>
+            <a:picLocks noChangeAspect="1"/>
+          </p:cNvPicPr>
+          <p:nvPr/>
+        </p:nvPicPr>
+        <p:blipFill>
+          <a:blip r:embed="rId2"/>
+          <a:stretch>
+            <a:fillRect/>
+          </a:stretch>
+        </p:blipFill>
+        <p:spPr>
+          <a:xfrm>
+            <a:off x="457200" y="1280160"/>
+            <a:ext cx="5760720" cy="4966587"/>
+          </a:xfrm>
+          <a:prstGeom prst="rect">
+            <a:avLst/>
+          </a:prstGeom>
+        </p:spPr>
+      </p:pic>
+      <p:sp>
+        <p:nvSpPr>
+          <p:cNvPr id="6" name="TextBox 5"/>
+          <p:cNvSpPr txBox="1"/>
+          <p:nvPr/>
+        </p:nvSpPr>
+        <p:spPr>
+          <a:xfrm>
+            <a:off x="6720840" y="1170432"/>
+            <a:ext cx="5074920" cy="365760"/>
+          </a:xfrm>
+          <a:prstGeom prst="rect">
+            <a:avLst/>
+          </a:prstGeom>
+          <a:noFill/>
+        </p:spPr>
+        <p:txBody>
+          <a:bodyPr wrap="square" lIns="45720" rIns="45720" tIns="18288" bIns="18288" anchor="t">
+            <a:spAutoFit/>
+          </a:bodyPr>
+          <a:lstStyle/>
+          <a:p>
+            <a:pPr algn="l"/>
+            <a:r>
+              <a:rPr sz="1600" b="0" i="0">
+                <a:solidFill>
+                  <a:srgbClr val="707070"/>
+                </a:solidFill>
+                <a:latin typeface="Calibri"/>
+              </a:rPr>
+              <a:t>Purpose</a:t>
+            </a:r>
+          </a:p>
+        </p:txBody>
+      </p:sp>
+      <p:sp>
+        <p:nvSpPr>
+          <p:cNvPr id="7" name="TextBox 6"/>
+          <p:cNvSpPr txBox="1"/>
+          <p:nvPr/>
+        </p:nvSpPr>
+        <p:spPr>
+          <a:xfrm>
+            <a:off x="6720840" y="1554480"/>
+            <a:ext cx="5074920" cy="868680"/>
+          </a:xfrm>
+          <a:prstGeom prst="rect">
+            <a:avLst/>
+          </a:prstGeom>
+          <a:noFill/>
+        </p:spPr>
+        <p:txBody>
+          <a:bodyPr wrap="square" lIns="45720" rIns="45720" tIns="18288" bIns="18288" anchor="t">
+            <a:spAutoFit/>
+          </a:bodyPr>
+          <a:lstStyle/>
+          <a:p>
+            <a:pPr algn="l"/>
+            <a:r>
+              <a:rPr sz="1200" b="0" i="0">
+                <a:solidFill>
+                  <a:srgbClr val="000000"/>
+                </a:solidFill>
+                <a:latin typeface="Calibri"/>
+              </a:rPr>
+              <a:t>PLA-printed enclosure that houses the buck converter powering the LED ring lights.</a:t>
+            </a:r>
+          </a:p>
+        </p:txBody>
+      </p:sp>
+      <p:sp>
+        <p:nvSpPr>
+          <p:cNvPr id="8" name="Rounded Rectangle 7"/>
+          <p:cNvSpPr/>
+          <p:nvPr/>
+        </p:nvSpPr>
+        <p:spPr>
+          <a:xfrm>
+            <a:off x="6720840" y="2542032"/>
+            <a:ext cx="3246120" cy="566928"/>
+          </a:xfrm>
+          <a:prstGeom prst="roundRect">
+            <a:avLst/>
+          </a:prstGeom>
+          <a:solidFill>
+            <a:srgbClr val="E7F1F8"/>
+          </a:solidFill>
+          <a:ln w="15240">
+            <a:solidFill>
+              <a:srgbClr val="D62728"/>
+            </a:solidFill>
+          </a:ln>
+        </p:spPr>
+        <p:style>
+          <a:lnRef idx="1">
+            <a:schemeClr val="accent1"/>
+          </a:lnRef>
+          <a:fillRef idx="3">
+            <a:schemeClr val="accent1"/>
+          </a:fillRef>
+          <a:effectRef idx="2">
+            <a:schemeClr val="accent1"/>
+          </a:effectRef>
+          <a:fontRef idx="minor">
+            <a:schemeClr val="lt1"/>
+          </a:fontRef>
+        </p:style>
+        <p:txBody>
+          <a:bodyPr rtlCol="0" anchor="ctr" lIns="54864" rIns="54864" tIns="27432" bIns="27432" wrap="square"/>
+          <a:lstStyle/>
+          <a:p>
+            <a:pPr algn="ctr"/>
+            <a:r>
+              <a:rPr sz="1200" b="1">
+                <a:solidFill>
+                  <a:srgbClr val="000000"/>
+                </a:solidFill>
+                <a:latin typeface="Calibri"/>
+              </a:rPr>
+              <a:t>1 · PCB locating pins</a:t>
+            </a:r>
+          </a:p>
+        </p:txBody>
+      </p:sp>
+      <p:cxnSp>
+        <p:nvCxnSpPr>
+          <p:cNvPr id="9" name="Connector 8"/>
+          <p:cNvCxnSpPr/>
+          <p:nvPr/>
+        </p:nvCxnSpPr>
+        <p:spPr>
+          <a:xfrm flipH="1">
+            <a:off x="3840480" y="2825496"/>
+            <a:ext cx="2880360" cy="100584"/>
+          </a:xfrm>
+          <a:prstGeom prst="line">
+            <a:avLst/>
+          </a:prstGeom>
+          <a:ln w="28575">
+            <a:solidFill>
+              <a:srgbClr val="D62728"/>
+            </a:solidFill>
+            <a:tailEnd type="triangle" w="med" len="med"/>
+          </a:ln>
+        </p:spPr>
+        <p:style>
+          <a:lnRef idx="2">
+            <a:schemeClr val="accent1"/>
+          </a:lnRef>
+          <a:fillRef idx="0">
+            <a:schemeClr val="accent1"/>
+          </a:fillRef>
+          <a:effectRef idx="1">
+            <a:schemeClr val="accent1"/>
+          </a:effectRef>
+          <a:fontRef idx="minor">
+            <a:schemeClr val="tx1"/>
+          </a:fontRef>
+        </p:style>
+      </p:cxnSp>
+      <p:sp>
+        <p:nvSpPr>
+          <p:cNvPr id="10" name="Rounded Rectangle 9"/>
+          <p:cNvSpPr/>
+          <p:nvPr/>
+        </p:nvSpPr>
+        <p:spPr>
+          <a:xfrm>
+            <a:off x="6720840" y="3977639"/>
+            <a:ext cx="3611880" cy="566928"/>
+          </a:xfrm>
+          <a:prstGeom prst="roundRect">
+            <a:avLst/>
+          </a:prstGeom>
+          <a:solidFill>
+            <a:srgbClr val="E7F1F8"/>
+          </a:solidFill>
+          <a:ln w="15240">
+            <a:solidFill>
+              <a:srgbClr val="D62728"/>
+            </a:solidFill>
+          </a:ln>
+        </p:spPr>
+        <p:style>
+          <a:lnRef idx="1">
+            <a:schemeClr val="accent1"/>
+          </a:lnRef>
+          <a:fillRef idx="3">
+            <a:schemeClr val="accent1"/>
+          </a:fillRef>
+          <a:effectRef idx="2">
+            <a:schemeClr val="accent1"/>
+          </a:effectRef>
+          <a:fontRef idx="minor">
+            <a:schemeClr val="lt1"/>
+          </a:fontRef>
+        </p:style>
+        <p:txBody>
+          <a:bodyPr rtlCol="0" anchor="ctr" lIns="54864" rIns="54864" tIns="27432" bIns="27432" wrap="square"/>
+          <a:lstStyle/>
+          <a:p>
+            <a:pPr algn="ctr"/>
+            <a:r>
+              <a:rPr sz="1200" b="1">
+                <a:solidFill>
+                  <a:srgbClr val="000000"/>
+                </a:solidFill>
+                <a:latin typeface="Calibri"/>
+              </a:rPr>
+              <a:t>2 · LED-switch extrusion</a:t>
+            </a:r>
+          </a:p>
+        </p:txBody>
+      </p:sp>
+      <p:cxnSp>
+        <p:nvCxnSpPr>
+          <p:cNvPr id="11" name="Connector 10"/>
+          <p:cNvCxnSpPr/>
+          <p:nvPr/>
+        </p:nvCxnSpPr>
+        <p:spPr>
+          <a:xfrm flipH="1">
+            <a:off x="1828800" y="4261104"/>
+            <a:ext cx="4892040" cy="356616"/>
+          </a:xfrm>
+          <a:prstGeom prst="line">
+            <a:avLst/>
+          </a:prstGeom>
+          <a:ln w="28575">
+            <a:solidFill>
+              <a:srgbClr val="D62728"/>
+            </a:solidFill>
+            <a:tailEnd type="triangle" w="med" len="med"/>
+          </a:ln>
+        </p:spPr>
+        <p:style>
+          <a:lnRef idx="2">
+            <a:schemeClr val="accent1"/>
+          </a:lnRef>
+          <a:fillRef idx="0">
+            <a:schemeClr val="accent1"/>
+          </a:fillRef>
+          <a:effectRef idx="1">
+            <a:schemeClr val="accent1"/>
+          </a:effectRef>
+          <a:fontRef idx="minor">
+            <a:schemeClr val="tx1"/>
+          </a:fontRef>
+        </p:style>
+      </p:cxnSp>
+      <p:sp>
+        <p:nvSpPr>
+          <p:cNvPr id="12" name="TextBox 11"/>
+          <p:cNvSpPr txBox="1"/>
+          <p:nvPr/>
+        </p:nvSpPr>
+        <p:spPr>
+          <a:xfrm>
+            <a:off x="6720840" y="4828032"/>
+            <a:ext cx="5074920" cy="1280160"/>
+          </a:xfrm>
+          <a:prstGeom prst="rect">
+            <a:avLst/>
+          </a:prstGeom>
+          <a:noFill/>
+        </p:spPr>
+        <p:txBody>
+          <a:bodyPr wrap="square" lIns="45720" rIns="45720" tIns="18288" bIns="18288" anchor="t">
+            <a:spAutoFit/>
+          </a:bodyPr>
+          <a:lstStyle/>
+          <a:p>
+            <a:pPr algn="l"/>
+            <a:r>
+              <a:rPr sz="1150" b="0" i="0">
+                <a:solidFill>
+                  <a:srgbClr val="000000"/>
+                </a:solidFill>
+                <a:latin typeface="Calibri"/>
+              </a:rPr>
+              <a:t>•  Pins align + hold the buck-converter PCB
+•  Side extrusion = housing for the LED on/off switch
+•  Open top + side slots for wiring / mounting</a:t>
+            </a:r>
+          </a:p>
+        </p:txBody>
+      </p:sp>
+      <p:sp>
+        <p:nvSpPr>
+          <p:cNvPr id="13" name="TextBox 12"/>
+          <p:cNvSpPr txBox="1"/>
+          <p:nvPr/>
+        </p:nvSpPr>
+        <p:spPr>
+          <a:xfrm>
+            <a:off x="548640" y="6400800"/>
+            <a:ext cx="11064240" cy="365760"/>
+          </a:xfrm>
+          <a:prstGeom prst="rect">
+            <a:avLst/>
+          </a:prstGeom>
+          <a:noFill/>
+        </p:spPr>
+        <p:txBody>
+          <a:bodyPr wrap="square" lIns="45720" rIns="45720" tIns="18288" bIns="18288" anchor="t">
+            <a:spAutoFit/>
+          </a:bodyPr>
+          <a:lstStyle/>
+          <a:p>
+            <a:pPr algn="l"/>
+            <a:r>
+              <a:rPr sz="1200" b="0" i="1">
+                <a:solidFill>
+                  <a:srgbClr val="707070"/>
+                </a:solidFill>
+                <a:latin typeface="Calibri"/>
+              </a:rPr>
+              <a:t>CAD for a PLA-printed part. Callout arrows mark the PCB locating pins (floor posts) and the LED-switch extrusion (side tube).</a:t>
+            </a:r>
+          </a:p>
+        </p:txBody>
+      </p:sp>
+      <p:sp>
+        <p:nvSpPr>
+          <p:cNvPr id="14" name="TextBox 13"/>
+          <p:cNvSpPr txBox="1"/>
+          <p:nvPr/>
+        </p:nvSpPr>
+        <p:spPr>
+          <a:xfrm>
+            <a:off x="457200" y="6446520"/>
+            <a:ext cx="640080" cy="274320"/>
+          </a:xfrm>
+          <a:prstGeom prst="rect">
+            <a:avLst/>
+          </a:prstGeom>
+          <a:noFill/>
+        </p:spPr>
+        <p:txBody>
+          <a:bodyPr wrap="square" lIns="45720" rIns="45720" tIns="18288" bIns="18288" anchor="t">
+            <a:spAutoFit/>
+          </a:bodyPr>
+          <a:lstStyle/>
+          <a:p>
+            <a:pPr algn="l"/>
+            <a:r>
+              <a:rPr sz="1000" b="0" i="0">
+                <a:solidFill>
+                  <a:srgbClr val="707070"/>
+                </a:solidFill>
+                <a:latin typeface="Calibri"/>
+              </a:rPr>
+              <a:t>180</a:t>
             </a:r>
           </a:p>
         </p:txBody>

--- a/documentation/V6a_8_6_20_slides.pptx
+++ b/documentation/V6a_8_6_20_slides.pptx
@@ -16648,7 +16648,7 @@
                 </a:solidFill>
                 <a:latin typeface="Calibri"/>
               </a:rPr>
-              <a:t>RECOMMENDED — add a TRANSVERSE marker pair (green row): measure width contraction ε_w with the existing DIC (bonus: Poisson's ratio). Then A(t) = A₀(1+ε_w)²,  σ_cauchy = F / A(t),  plotted vs true strain ln(1+ε). Keep ENGINEERING stress as the reported / validated value (datasheet &amp; journal basis); report Cauchy as the physically-accurate supplement. Add an edge camera for through-thickness if FDM orthotropy matters.</a:t>
+              <a:t>RECOMMENDED — a TRANSVERSE marker pair is the IDEAL route: measure width contraction ε_w with the existing DIC (bonus: Poisson's ratio), then A(t) = A₀(1+ε_w)²,  σ_cauchy = F / A(t). BUT the current specimen gauge is VERY NARROW so transverse dots barely fit → EDGE-WIDTH detection (slide 164) is the SECOND-PREFERRED, practical route. Keep ENGINEERING stress as the reported / validated value; report Cauchy as the physically-accurate supplement.</a:t>
             </a:r>
           </a:p>
         </p:txBody>

--- a/documentation/V6a_8_6_20_slides.pptx
+++ b/documentation/V6a_8_6_20_slides.pptx
@@ -16141,21 +16141,45 @@
                 </a:solidFill>
                 <a:latin typeface="Calibri"/>
               </a:rPr>
-              <a:t>Why the report &amp; plots use ENGINEERING stress</a:t>
-            </a:r>
-          </a:p>
-        </p:txBody>
-      </p:sp>
-      <p:sp>
-        <p:nvSpPr>
-          <p:cNvPr id="6" name="TextBox 5"/>
+              <a:t>Why we REPORT engineering stress</a:t>
+            </a:r>
+          </a:p>
+        </p:txBody>
+      </p:sp>
+      <p:pic>
+        <p:nvPicPr>
+          <p:cNvPr id="6" name="Picture 5" descr="feat_eng_vs_true.png"/>
+          <p:cNvPicPr>
+            <a:picLocks noChangeAspect="1"/>
+          </p:cNvPicPr>
+          <p:nvPr/>
+        </p:nvPicPr>
+        <p:blipFill>
+          <a:blip r:embed="rId2"/>
+          <a:stretch>
+            <a:fillRect/>
+          </a:stretch>
+        </p:blipFill>
+        <p:spPr>
+          <a:xfrm>
+            <a:off x="365760" y="1517904"/>
+            <a:ext cx="5623560" cy="2309892"/>
+          </a:xfrm>
+          <a:prstGeom prst="rect">
+            <a:avLst/>
+          </a:prstGeom>
+        </p:spPr>
+      </p:pic>
+      <p:sp>
+        <p:nvSpPr>
+          <p:cNvPr id="7" name="TextBox 6"/>
           <p:cNvSpPr txBox="1"/>
           <p:nvPr/>
         </p:nvSpPr>
         <p:spPr>
           <a:xfrm>
-            <a:off x="365760" y="1554480"/>
-            <a:ext cx="5623560" cy="3383280"/>
+            <a:off x="365760" y="3950208"/>
+            <a:ext cx="5623560" cy="1051560"/>
           </a:xfrm>
           <a:prstGeom prst="rect">
             <a:avLst/>
@@ -16170,24 +16194,21 @@
           <a:p>
             <a:pPr algn="l"/>
             <a:r>
-              <a:rPr sz="1150" b="0" i="0">
+              <a:rPr sz="1100" b="0" i="0">
                 <a:solidFill>
                   <a:srgbClr val="000000"/>
                 </a:solidFill>
                 <a:latin typeface="Calibri"/>
               </a:rPr>
-              <a:t>σ_eng = F / A₀   (A₀ = 80 mm², fixed) — what we compute &amp; report.
-σ_true (Cauchy) = F / A_current — the real stress on the shrinking cross-section; NOT measured here (the deforming area is never tracked).
-Link (uniform, pre-neck):   σ_true = σ_eng·(1+ε),    ε_true = ln(1+ε).
-WHY engineering: ISO 527, Chacón (2017) and the add:north datasheet all report ENGINEERING stress — so it is the apples-to-apples basis for our k-factors / PASS–FAIL. True stress reads higher and would break that comparison.
-Gap for our PLA (small strains): ~2–3 % higher at UTS (46.2 → ~47 MPa), ~5 % near fracture; E and σ_y essentially unchanged.</a:t>
-            </a:r>
-          </a:p>
-        </p:txBody>
-      </p:sp>
-      <p:sp>
-        <p:nvSpPr>
-          <p:cNvPr id="7" name="TextBox 6"/>
+              <a:t>σ_eng = F / A₀  (REPORTED)      σ_true = F / A  (not tracked, ~2–5% higher)
+Basis: ISO 527 · Chacón · datasheet all use ENGINEERING → apples-to-apples for our k-factors.  E &amp; σ_y ~unchanged.</a:t>
+            </a:r>
+          </a:p>
+        </p:txBody>
+      </p:sp>
+      <p:sp>
+        <p:nvSpPr>
+          <p:cNvPr id="8" name="TextBox 7"/>
           <p:cNvSpPr txBox="1"/>
           <p:nvPr/>
         </p:nvSpPr>
@@ -16222,7 +16243,7 @@
       </p:sp>
       <p:graphicFrame>
         <p:nvGraphicFramePr>
-          <p:cNvPr id="8" name="Table 7"/>
+          <p:cNvPr id="9" name="Table 8"/>
           <p:cNvGraphicFramePr>
             <a:graphicFrameLocks noGrp="1"/>
           </p:cNvGraphicFramePr>
@@ -16568,7 +16589,7 @@
       </p:graphicFrame>
       <p:sp>
         <p:nvSpPr>
-          <p:cNvPr id="9" name="TextBox 8"/>
+          <p:cNvPr id="10" name="TextBox 9"/>
           <p:cNvSpPr txBox="1"/>
           <p:nvPr/>
         </p:nvSpPr>
@@ -16603,7 +16624,7 @@
       </p:sp>
       <p:sp>
         <p:nvSpPr>
-          <p:cNvPr id="10" name="Rectangle 9"/>
+          <p:cNvPr id="11" name="Rectangle 10"/>
           <p:cNvSpPr/>
           <p:nvPr/>
         </p:nvSpPr>
@@ -16655,7 +16676,7 @@
       </p:sp>
       <p:sp>
         <p:nvSpPr>
-          <p:cNvPr id="11" name="TextBox 10"/>
+          <p:cNvPr id="12" name="TextBox 11"/>
           <p:cNvSpPr txBox="1"/>
           <p:nvPr/>
         </p:nvSpPr>
@@ -16690,7 +16711,7 @@
       </p:sp>
       <p:sp>
         <p:nvSpPr>
-          <p:cNvPr id="12" name="TextBox 11"/>
+          <p:cNvPr id="13" name="TextBox 12"/>
           <p:cNvSpPr txBox="1"/>
           <p:nvPr/>
         </p:nvSpPr>

--- a/documentation/V6a_8_6_20_slides.pptx
+++ b/documentation/V6a_8_6_20_slides.pptx
@@ -48,6 +48,8 @@
     <p:sldId id="296" r:id="rId47"/>
     <p:sldId id="297" r:id="rId48"/>
     <p:sldId id="298" r:id="rId49"/>
+    <p:sldId id="299" r:id="rId50"/>
+    <p:sldId id="300" r:id="rId51"/>
   </p:sldIdLst>
   <p:sldSz cx="12191695" cy="6858000" type="screen4x3"/>
   <p:notesSz cx="6858000" cy="9144000"/>
@@ -29949,7 +29951,7 @@
                 </a:solidFill>
                 <a:latin typeface="Calibri Light"/>
               </a:rPr>
-              <a:t>MEASURING CAUCHY (TRUE) STRESS</a:t>
+              <a:t>MOTOR TORQUE CEILING — THE 100% FRACTURE LIMIT</a:t>
             </a:r>
           </a:p>
         </p:txBody>
@@ -29962,8 +29964,8 @@
         </p:nvSpPr>
         <p:spPr>
           <a:xfrm>
-            <a:off x="365760" y="2651760"/>
-            <a:ext cx="11475720" cy="1554480"/>
+            <a:off x="365760" y="1170432"/>
+            <a:ext cx="11475720" cy="365760"/>
           </a:xfrm>
           <a:prstGeom prst="rect">
             <a:avLst/>
@@ -29978,20 +29980,406 @@
           <a:p>
             <a:pPr algn="l"/>
             <a:r>
-              <a:rPr sz="1600" b="1" i="0">
+              <a:rPr sz="1600" b="0" i="0">
+                <a:solidFill>
+                  <a:srgbClr val="707070"/>
+                </a:solidFill>
+                <a:latin typeface="Calibri"/>
+              </a:rPr>
+              <a:t>Same crosshead speed (0.10 mm/s), different MAX force</a:t>
+            </a:r>
+          </a:p>
+        </p:txBody>
+      </p:sp>
+      <p:sp>
+        <p:nvSpPr>
+          <p:cNvPr id="6" name="Rounded Rectangle 5"/>
+          <p:cNvSpPr/>
+          <p:nvPr/>
+        </p:nvSpPr>
+        <p:spPr>
+          <a:xfrm>
+            <a:off x="365760" y="1600200"/>
+            <a:ext cx="3657600" cy="896112"/>
+          </a:xfrm>
+          <a:prstGeom prst="roundRect">
+            <a:avLst/>
+          </a:prstGeom>
+          <a:solidFill>
+            <a:srgbClr val="E7F1F8"/>
+          </a:solidFill>
+          <a:ln>
+            <a:noFill/>
+          </a:ln>
+        </p:spPr>
+        <p:style>
+          <a:lnRef idx="1">
+            <a:schemeClr val="accent1"/>
+          </a:lnRef>
+          <a:fillRef idx="3">
+            <a:schemeClr val="accent1"/>
+          </a:fillRef>
+          <a:effectRef idx="2">
+            <a:schemeClr val="accent1"/>
+          </a:effectRef>
+          <a:fontRef idx="minor">
+            <a:schemeClr val="lt1"/>
+          </a:fontRef>
+        </p:style>
+        <p:txBody>
+          <a:bodyPr rtlCol="0" anchor="ctr" lIns="54864" rIns="54864" bIns="27432" wrap="square"/>
+          <a:lstStyle/>
+          <a:p>
+            <a:pPr algn="ctr"/>
+            <a:r>
+              <a:rPr sz="1800" b="1">
                 <a:solidFill>
                   <a:srgbClr val="1F3F2F"/>
                 </a:solidFill>
                 <a:latin typeface="Calibri"/>
               </a:rPr>
-              <a:t>Getting the DEFORMING cross-section for TRUE / Cauchy stress + Poisson ratio - a separate future work-stream: edge-width tracking on a matte-black backdrop.</a:t>
-            </a:r>
-          </a:p>
-        </p:txBody>
-      </p:sp>
-      <p:sp>
-        <p:nvSpPr>
-          <p:cNvPr id="6" name="TextBox 5"/>
+              <a:t>~2.6 kN</a:t>
+            </a:r>
+          </a:p>
+          <a:p>
+            <a:pPr algn="ctr"/>
+            <a:r>
+              <a:rPr sz="950">
+                <a:solidFill>
+                  <a:srgbClr val="000000"/>
+                </a:solidFill>
+                <a:latin typeface="Calibri"/>
+              </a:rPr>
+              <a:t>WEAK DAY (S15 · today)</a:t>
+            </a:r>
+          </a:p>
+        </p:txBody>
+      </p:sp>
+      <p:sp>
+        <p:nvSpPr>
+          <p:cNvPr id="7" name="Rounded Rectangle 6"/>
+          <p:cNvSpPr/>
+          <p:nvPr/>
+        </p:nvSpPr>
+        <p:spPr>
+          <a:xfrm>
+            <a:off x="4206240" y="1600200"/>
+            <a:ext cx="3657600" cy="896112"/>
+          </a:xfrm>
+          <a:prstGeom prst="roundRect">
+            <a:avLst/>
+          </a:prstGeom>
+          <a:solidFill>
+            <a:srgbClr val="E7F1F8"/>
+          </a:solidFill>
+          <a:ln>
+            <a:noFill/>
+          </a:ln>
+        </p:spPr>
+        <p:style>
+          <a:lnRef idx="1">
+            <a:schemeClr val="accent1"/>
+          </a:lnRef>
+          <a:fillRef idx="3">
+            <a:schemeClr val="accent1"/>
+          </a:fillRef>
+          <a:effectRef idx="2">
+            <a:schemeClr val="accent1"/>
+          </a:effectRef>
+          <a:fontRef idx="minor">
+            <a:schemeClr val="lt1"/>
+          </a:fontRef>
+        </p:style>
+        <p:txBody>
+          <a:bodyPr rtlCol="0" anchor="ctr" lIns="54864" rIns="54864" bIns="27432" wrap="square"/>
+          <a:lstStyle/>
+          <a:p>
+            <a:pPr algn="ctr"/>
+            <a:r>
+              <a:rPr sz="1800" b="1">
+                <a:solidFill>
+                  <a:srgbClr val="1F3F2F"/>
+                </a:solidFill>
+                <a:latin typeface="Calibri"/>
+              </a:rPr>
+              <a:t>3.2–3.8 kN</a:t>
+            </a:r>
+          </a:p>
+          <a:p>
+            <a:pPr algn="ctr"/>
+            <a:r>
+              <a:rPr sz="950">
+                <a:solidFill>
+                  <a:srgbClr val="000000"/>
+                </a:solidFill>
+                <a:latin typeface="Calibri"/>
+              </a:rPr>
+              <a:t>STRONG DAY (V6 · S16)</a:t>
+            </a:r>
+          </a:p>
+        </p:txBody>
+      </p:sp>
+      <p:sp>
+        <p:nvSpPr>
+          <p:cNvPr id="8" name="Rounded Rectangle 7"/>
+          <p:cNvSpPr/>
+          <p:nvPr/>
+        </p:nvSpPr>
+        <p:spPr>
+          <a:xfrm>
+            <a:off x="8046720" y="1600200"/>
+            <a:ext cx="3794760" cy="896112"/>
+          </a:xfrm>
+          <a:prstGeom prst="roundRect">
+            <a:avLst/>
+          </a:prstGeom>
+          <a:solidFill>
+            <a:srgbClr val="E7F1F8"/>
+          </a:solidFill>
+          <a:ln>
+            <a:noFill/>
+          </a:ln>
+        </p:spPr>
+        <p:style>
+          <a:lnRef idx="1">
+            <a:schemeClr val="accent1"/>
+          </a:lnRef>
+          <a:fillRef idx="3">
+            <a:schemeClr val="accent1"/>
+          </a:fillRef>
+          <a:effectRef idx="2">
+            <a:schemeClr val="accent1"/>
+          </a:effectRef>
+          <a:fontRef idx="minor">
+            <a:schemeClr val="lt1"/>
+          </a:fontRef>
+        </p:style>
+        <p:txBody>
+          <a:bodyPr rtlCol="0" anchor="ctr" lIns="54864" rIns="54864" bIns="27432" wrap="square"/>
+          <a:lstStyle/>
+          <a:p>
+            <a:pPr algn="ctr"/>
+            <a:r>
+              <a:rPr sz="1800" b="1">
+                <a:solidFill>
+                  <a:srgbClr val="1F3F2F"/>
+                </a:solidFill>
+                <a:latin typeface="Calibri"/>
+              </a:rPr>
+              <a:t>~3.7 kN</a:t>
+            </a:r>
+          </a:p>
+          <a:p>
+            <a:pPr algn="ctr"/>
+            <a:r>
+              <a:rPr sz="950">
+                <a:solidFill>
+                  <a:srgbClr val="000000"/>
+                </a:solidFill>
+                <a:latin typeface="Calibri"/>
+              </a:rPr>
+              <a:t>100% FULL-AREA NEEDS</a:t>
+            </a:r>
+          </a:p>
+        </p:txBody>
+      </p:sp>
+      <p:sp>
+        <p:nvSpPr>
+          <p:cNvPr id="9" name="TextBox 8"/>
+          <p:cNvSpPr txBox="1"/>
+          <p:nvPr/>
+        </p:nvSpPr>
+        <p:spPr>
+          <a:xfrm>
+            <a:off x="365760" y="2788920"/>
+            <a:ext cx="11475720" cy="365760"/>
+          </a:xfrm>
+          <a:prstGeom prst="rect">
+            <a:avLst/>
+          </a:prstGeom>
+          <a:noFill/>
+        </p:spPr>
+        <p:txBody>
+          <a:bodyPr wrap="square" lIns="45720" rIns="45720" tIns="18288" bIns="18288" anchor="t">
+            <a:spAutoFit/>
+          </a:bodyPr>
+          <a:lstStyle/>
+          <a:p>
+            <a:pPr algn="l"/>
+            <a:r>
+              <a:rPr sz="1600" b="0" i="0">
+                <a:solidFill>
+                  <a:srgbClr val="707070"/>
+                </a:solidFill>
+                <a:latin typeface="Calibri"/>
+              </a:rPr>
+              <a:t>Why — torque capacity, NOT speed or software</a:t>
+            </a:r>
+          </a:p>
+        </p:txBody>
+      </p:sp>
+      <p:sp>
+        <p:nvSpPr>
+          <p:cNvPr id="10" name="TextBox 9"/>
+          <p:cNvSpPr txBox="1"/>
+          <p:nvPr/>
+        </p:nvSpPr>
+        <p:spPr>
+          <a:xfrm>
+            <a:off x="365760" y="3200400"/>
+            <a:ext cx="5669280" cy="1371600"/>
+          </a:xfrm>
+          <a:prstGeom prst="rect">
+            <a:avLst/>
+          </a:prstGeom>
+          <a:noFill/>
+        </p:spPr>
+        <p:txBody>
+          <a:bodyPr wrap="square" lIns="45720" rIns="45720" tIns="18288" bIns="18288" anchor="t">
+            <a:spAutoFit/>
+          </a:bodyPr>
+          <a:lstStyle/>
+          <a:p>
+            <a:pPr algn="l"/>
+            <a:r>
+              <a:rPr sz="1200" b="0" i="0">
+                <a:solidFill>
+                  <a:srgbClr val="000000"/>
+                </a:solidFill>
+                <a:latin typeface="Calibri"/>
+              </a:rPr>
+              <a:t>•  Driver current (Vref) set low
+•  PSU voltage sag under load</a:t>
+            </a:r>
+          </a:p>
+        </p:txBody>
+      </p:sp>
+      <p:sp>
+        <p:nvSpPr>
+          <p:cNvPr id="11" name="TextBox 10"/>
+          <p:cNvSpPr txBox="1"/>
+          <p:nvPr/>
+        </p:nvSpPr>
+        <p:spPr>
+          <a:xfrm>
+            <a:off x="6172200" y="3200400"/>
+            <a:ext cx="5669280" cy="1371600"/>
+          </a:xfrm>
+          <a:prstGeom prst="rect">
+            <a:avLst/>
+          </a:prstGeom>
+          <a:noFill/>
+        </p:spPr>
+        <p:txBody>
+          <a:bodyPr wrap="square" lIns="45720" rIns="45720" tIns="18288" bIns="18288" anchor="t">
+            <a:spAutoFit/>
+          </a:bodyPr>
+          <a:lstStyle/>
+          <a:p>
+            <a:pPr algn="l"/>
+            <a:r>
+              <a:rPr sz="1200" b="0" i="0">
+                <a:solidFill>
+                  <a:srgbClr val="000000"/>
+                </a:solidFill>
+                <a:latin typeface="Calibri"/>
+              </a:rPr>
+              <a:t>•  Driver THERMAL derating (the chip, not motor)
+•  Mechanical binding (screw / rails)</a:t>
+            </a:r>
+          </a:p>
+        </p:txBody>
+      </p:sp>
+      <p:sp>
+        <p:nvSpPr>
+          <p:cNvPr id="12" name="Rectangle 11"/>
+          <p:cNvSpPr/>
+          <p:nvPr/>
+        </p:nvSpPr>
+        <p:spPr>
+          <a:xfrm>
+            <a:off x="365760" y="4800600"/>
+            <a:ext cx="11475720" cy="914400"/>
+          </a:xfrm>
+          <a:prstGeom prst="rect">
+            <a:avLst/>
+          </a:prstGeom>
+          <a:solidFill>
+            <a:srgbClr val="FFF3CD"/>
+          </a:solidFill>
+          <a:ln>
+            <a:noFill/>
+          </a:ln>
+        </p:spPr>
+        <p:style>
+          <a:lnRef idx="1">
+            <a:schemeClr val="accent1"/>
+          </a:lnRef>
+          <a:fillRef idx="3">
+            <a:schemeClr val="accent1"/>
+          </a:fillRef>
+          <a:effectRef idx="2">
+            <a:schemeClr val="accent1"/>
+          </a:effectRef>
+          <a:fontRef idx="minor">
+            <a:schemeClr val="lt1"/>
+          </a:fontRef>
+        </p:style>
+        <p:txBody>
+          <a:bodyPr rtlCol="0" anchor="ctr" wrap="square" lIns="109728" rIns="109728"/>
+          <a:lstStyle/>
+          <a:p>
+            <a:pPr algn="ctr"/>
+            <a:r>
+              <a:rPr sz="1250" b="1">
+                <a:solidFill>
+                  <a:srgbClr val="000000"/>
+                </a:solidFill>
+                <a:latin typeface="Calibri"/>
+              </a:rPr>
+              <a:t>WORKAROUND — use 50% / smaller-cross-section specimens (fracture &lt; 2.6 kN) until the torque is restored (check Vref · cooling · PSU).</a:t>
+            </a:r>
+          </a:p>
+        </p:txBody>
+      </p:sp>
+      <p:sp>
+        <p:nvSpPr>
+          <p:cNvPr id="13" name="TextBox 12"/>
+          <p:cNvSpPr txBox="1"/>
+          <p:nvPr/>
+        </p:nvSpPr>
+        <p:spPr>
+          <a:xfrm>
+            <a:off x="548640" y="6400800"/>
+            <a:ext cx="11064240" cy="365760"/>
+          </a:xfrm>
+          <a:prstGeom prst="rect">
+            <a:avLst/>
+          </a:prstGeom>
+          <a:noFill/>
+        </p:spPr>
+        <p:txBody>
+          <a:bodyPr wrap="square" lIns="45720" rIns="45720" tIns="18288" bIns="18288" anchor="t">
+            <a:spAutoFit/>
+          </a:bodyPr>
+          <a:lstStyle/>
+          <a:p>
+            <a:pPr algn="l"/>
+            <a:r>
+              <a:rPr sz="1200" b="0" i="1">
+                <a:solidFill>
+                  <a:srgbClr val="707070"/>
+                </a:solidFill>
+                <a:latin typeface="Calibri"/>
+              </a:rPr>
+              <a:t>At the SAME 0.10 mm/s: S15 stalled 2.6 kN but S16 fractured 3.8 kN — the ceiling varies day-to-day. See TEST_FAILURES.md (S15).</a:t>
+            </a:r>
+          </a:p>
+        </p:txBody>
+      </p:sp>
+      <p:sp>
+        <p:nvSpPr>
+          <p:cNvPr id="14" name="TextBox 13"/>
           <p:cNvSpPr txBox="1"/>
           <p:nvPr/>
         </p:nvSpPr>
@@ -30150,49 +30538,14 @@
                 </a:solidFill>
                 <a:latin typeface="Calibri Light"/>
               </a:rPr>
-              <a:t>ENGINEERING vs TRUE (CAUCHY) STRESS — &amp; MEASURING THE AREA</a:t>
-            </a:r>
-          </a:p>
-        </p:txBody>
-      </p:sp>
-      <p:sp>
-        <p:nvSpPr>
-          <p:cNvPr id="5" name="TextBox 4"/>
-          <p:cNvSpPr txBox="1"/>
-          <p:nvPr/>
-        </p:nvSpPr>
-        <p:spPr>
-          <a:xfrm>
-            <a:off x="365760" y="1170432"/>
-            <a:ext cx="5577840" cy="365760"/>
-          </a:xfrm>
-          <a:prstGeom prst="rect">
-            <a:avLst/>
-          </a:prstGeom>
-          <a:noFill/>
-        </p:spPr>
-        <p:txBody>
-          <a:bodyPr wrap="square" lIns="45720" rIns="45720" tIns="18288" bIns="18288" anchor="t">
-            <a:spAutoFit/>
-          </a:bodyPr>
-          <a:lstStyle/>
-          <a:p>
-            <a:pPr algn="l"/>
-            <a:r>
-              <a:rPr sz="1600" b="0" i="0">
-                <a:solidFill>
-                  <a:srgbClr val="707070"/>
-                </a:solidFill>
-                <a:latin typeface="Calibri"/>
-              </a:rPr>
-              <a:t>Why we REPORT engineering stress</a:t>
+              <a:t>MOTOR JITTER = STALL WARNING  (a failed test)</a:t>
             </a:r>
           </a:p>
         </p:txBody>
       </p:sp>
       <p:pic>
         <p:nvPicPr>
-          <p:cNvPr id="6" name="Picture 5" descr="feat_eng_vs_true.png"/>
+          <p:cNvPr id="5" name="Picture 4" descr="feat_motor_jitter.png"/>
           <p:cNvPicPr>
             <a:picLocks noChangeAspect="1"/>
           </p:cNvPicPr>
@@ -30206,8 +30559,8 @@
         </p:blipFill>
         <p:spPr>
           <a:xfrm>
-            <a:off x="365760" y="1517904"/>
-            <a:ext cx="5623560" cy="2309892"/>
+            <a:off x="320040" y="1417320"/>
+            <a:ext cx="6766560" cy="3200400"/>
           </a:xfrm>
           <a:prstGeom prst="rect">
             <a:avLst/>
@@ -30216,14 +30569,14 @@
       </p:pic>
       <p:sp>
         <p:nvSpPr>
-          <p:cNvPr id="7" name="TextBox 6"/>
+          <p:cNvPr id="6" name="TextBox 5"/>
           <p:cNvSpPr txBox="1"/>
           <p:nvPr/>
         </p:nvSpPr>
         <p:spPr>
           <a:xfrm>
-            <a:off x="365760" y="3950208"/>
-            <a:ext cx="5623560" cy="1051560"/>
+            <a:off x="7315200" y="1170432"/>
+            <a:ext cx="4526280" cy="365760"/>
           </a:xfrm>
           <a:prstGeom prst="rect">
             <a:avLst/>
@@ -30238,28 +30591,27 @@
           <a:p>
             <a:pPr algn="l"/>
             <a:r>
-              <a:rPr sz="1100" b="0" i="0">
-                <a:solidFill>
-                  <a:srgbClr val="000000"/>
-                </a:solidFill>
-                <a:latin typeface="Calibri"/>
-              </a:rPr>
-              <a:t>σ_eng = F / A₀  (REPORTED)      σ_true = F / A  (not tracked, ~2–5% higher)
-Basis: ISO 527 · Chacón · datasheet all use ENGINEERING → apples-to-apples for our k-factors.  E &amp; σ_y ~unchanged.</a:t>
-            </a:r>
-          </a:p>
-        </p:txBody>
-      </p:sp>
-      <p:sp>
-        <p:nvSpPr>
-          <p:cNvPr id="8" name="TextBox 7"/>
+              <a:rPr sz="1600" b="0" i="0">
+                <a:solidFill>
+                  <a:srgbClr val="707070"/>
+                </a:solidFill>
+                <a:latin typeface="Calibri"/>
+              </a:rPr>
+              <a:t>What happened</a:t>
+            </a:r>
+          </a:p>
+        </p:txBody>
+      </p:sp>
+      <p:sp>
+        <p:nvSpPr>
+          <p:cNvPr id="7" name="TextBox 6"/>
           <p:cNvSpPr txBox="1"/>
           <p:nvPr/>
         </p:nvSpPr>
         <p:spPr>
           <a:xfrm>
-            <a:off x="6172200" y="1170432"/>
-            <a:ext cx="5669280" cy="365760"/>
+            <a:off x="7315200" y="1572768"/>
+            <a:ext cx="4526280" cy="1463040"/>
           </a:xfrm>
           <a:prstGeom prst="rect">
             <a:avLst/>
@@ -30274,373 +30626,28 @@
           <a:p>
             <a:pPr algn="l"/>
             <a:r>
-              <a:rPr sz="1600" b="0" i="0">
-                <a:solidFill>
-                  <a:srgbClr val="707070"/>
-                </a:solidFill>
-                <a:latin typeface="Calibri"/>
-              </a:rPr>
-              <a:t>Measuring the CURRENT area → true stress (future)</a:t>
-            </a:r>
-          </a:p>
-        </p:txBody>
-      </p:sp>
-      <p:graphicFrame>
-        <p:nvGraphicFramePr>
-          <p:cNvPr id="9" name="Table 8"/>
-          <p:cNvGraphicFramePr>
-            <a:graphicFrameLocks noGrp="1"/>
-          </p:cNvGraphicFramePr>
-          <p:nvPr/>
-        </p:nvGraphicFramePr>
-        <p:xfrm>
-          <a:off x="6172200" y="1554480"/>
-          <a:ext cx="5714998" cy="2286000"/>
-        </p:xfrm>
-        <a:graphic>
-          <a:graphicData uri="http://schemas.openxmlformats.org/drawingml/2006/table">
-            <a:tbl>
-              <a:tblPr firstRow="1" bandRow="1">
-                <a:tableStyleId>{5C22544A-7EE6-4342-B048-85BDC9FD1C3A}</a:tableStyleId>
-              </a:tblPr>
-              <a:tblGrid>
-                <a:gridCol w="1365530"/>
-                <a:gridCol w="2731061"/>
-                <a:gridCol w="1618407"/>
-              </a:tblGrid>
-              <a:tr h="457200">
-                <a:tc>
-                  <a:txBody>
-                    <a:bodyPr lIns="54864" rIns="54864" tIns="18288" bIns="18288" wrap="square" anchor="ctr"/>
-                    <a:lstStyle/>
-                    <a:p>
-                      <a:pPr algn="l"/>
-                      <a:r>
-                        <a:rPr sz="1000" b="1">
-                          <a:solidFill>
-                            <a:srgbClr val="FFFFFF"/>
-                          </a:solidFill>
-                          <a:latin typeface="Calibri"/>
-                        </a:rPr>
-                        <a:t>Method</a:t>
-                      </a:r>
-                    </a:p>
-                  </a:txBody>
-                  <a:tcPr>
-                    <a:solidFill>
-                      <a:srgbClr val="143D2F"/>
-                    </a:solidFill>
-                  </a:tcPr>
-                </a:tc>
-                <a:tc>
-                  <a:txBody>
-                    <a:bodyPr lIns="54864" rIns="54864" tIns="18288" bIns="18288" wrap="square" anchor="ctr"/>
-                    <a:lstStyle/>
-                    <a:p>
-                      <a:pPr algn="l"/>
-                      <a:r>
-                        <a:rPr sz="1000" b="1">
-                          <a:solidFill>
-                            <a:srgbClr val="FFFFFF"/>
-                          </a:solidFill>
-                          <a:latin typeface="Calibri"/>
-                        </a:rPr>
-                        <a:t>How</a:t>
-                      </a:r>
-                    </a:p>
-                  </a:txBody>
-                  <a:tcPr>
-                    <a:solidFill>
-                      <a:srgbClr val="143D2F"/>
-                    </a:solidFill>
-                  </a:tcPr>
-                </a:tc>
-                <a:tc>
-                  <a:txBody>
-                    <a:bodyPr lIns="54864" rIns="54864" tIns="18288" bIns="18288" wrap="square" anchor="ctr"/>
-                    <a:lstStyle/>
-                    <a:p>
-                      <a:pPr algn="l"/>
-                      <a:r>
-                        <a:rPr sz="1000" b="1">
-                          <a:solidFill>
-                            <a:srgbClr val="FFFFFF"/>
-                          </a:solidFill>
-                          <a:latin typeface="Calibri"/>
-                        </a:rPr>
-                        <a:t>Note</a:t>
-                      </a:r>
-                    </a:p>
-                  </a:txBody>
-                  <a:tcPr>
-                    <a:solidFill>
-                      <a:srgbClr val="143D2F"/>
-                    </a:solidFill>
-                  </a:tcPr>
-                </a:tc>
-              </a:tr>
-              <a:tr h="457200">
-                <a:tc>
-                  <a:txBody>
-                    <a:bodyPr lIns="54864" rIns="54864" tIns="18288" bIns="18288" wrap="square" anchor="ctr"/>
-                    <a:lstStyle/>
-                    <a:p>
-                      <a:pPr algn="l"/>
-                      <a:r>
-                        <a:rPr sz="950" b="0">
-                          <a:solidFill>
-                            <a:srgbClr val="000000"/>
-                          </a:solidFill>
-                          <a:latin typeface="Calibri"/>
-                        </a:rPr>
-                        <a:t>Poisson estimate</a:t>
-                      </a:r>
-                    </a:p>
-                  </a:txBody>
-                  <a:tcPr/>
-                </a:tc>
-                <a:tc>
-                  <a:txBody>
-                    <a:bodyPr lIns="54864" rIns="54864" tIns="18288" bIns="18288" wrap="square" anchor="ctr"/>
-                    <a:lstStyle/>
-                    <a:p>
-                      <a:pPr algn="l"/>
-                      <a:r>
-                        <a:rPr sz="950" b="0">
-                          <a:solidFill>
-                            <a:srgbClr val="000000"/>
-                          </a:solidFill>
-                          <a:latin typeface="Calibri"/>
-                        </a:rPr>
-                        <a:t>A = A₀(1−ν·ε)²,  ν ≈ 0.35  (no hardware)</a:t>
-                      </a:r>
-                    </a:p>
-                  </a:txBody>
-                  <a:tcPr/>
-                </a:tc>
-                <a:tc>
-                  <a:txBody>
-                    <a:bodyPr lIns="54864" rIns="54864" tIns="18288" bIns="18288" wrap="square" anchor="ctr"/>
-                    <a:lstStyle/>
-                    <a:p>
-                      <a:pPr algn="l"/>
-                      <a:r>
-                        <a:rPr sz="950" b="0">
-                          <a:solidFill>
-                            <a:srgbClr val="000000"/>
-                          </a:solidFill>
-                          <a:latin typeface="Calibri"/>
-                        </a:rPr>
-                        <a:t>cheap; ν drifts in yield</a:t>
-                      </a:r>
-                    </a:p>
-                  </a:txBody>
-                  <a:tcPr/>
-                </a:tc>
-              </a:tr>
-              <a:tr h="457200">
-                <a:tc>
-                  <a:txBody>
-                    <a:bodyPr lIns="54864" rIns="54864" tIns="18288" bIns="18288" wrap="square" anchor="ctr"/>
-                    <a:lstStyle/>
-                    <a:p>
-                      <a:pPr algn="l"/>
-                      <a:r>
-                        <a:rPr sz="950" b="1">
-                          <a:solidFill>
-                            <a:srgbClr val="000000"/>
-                          </a:solidFill>
-                          <a:latin typeface="Calibri"/>
-                        </a:rPr>
-                        <a:t>Transverse markers</a:t>
-                      </a:r>
-                    </a:p>
-                  </a:txBody>
-                  <a:tcPr>
-                    <a:solidFill>
-                      <a:srgbClr val="C8E6C9"/>
-                    </a:solidFill>
-                  </a:tcPr>
-                </a:tc>
-                <a:tc>
-                  <a:txBody>
-                    <a:bodyPr lIns="54864" rIns="54864" tIns="18288" bIns="18288" wrap="square" anchor="ctr"/>
-                    <a:lstStyle/>
-                    <a:p>
-                      <a:pPr algn="l"/>
-                      <a:r>
-                        <a:rPr sz="950" b="0">
-                          <a:solidFill>
-                            <a:srgbClr val="000000"/>
-                          </a:solidFill>
-                          <a:latin typeface="Calibri"/>
-                        </a:rPr>
-                        <a:t>+2 dots across width → ε_w;  A ≈ A₀(1+ε_w)²</a:t>
-                      </a:r>
-                    </a:p>
-                  </a:txBody>
-                  <a:tcPr>
-                    <a:solidFill>
-                      <a:srgbClr val="C8E6C9"/>
-                    </a:solidFill>
-                  </a:tcPr>
-                </a:tc>
-                <a:tc>
-                  <a:txBody>
-                    <a:bodyPr lIns="54864" rIns="54864" tIns="18288" bIns="18288" wrap="square" anchor="ctr"/>
-                    <a:lstStyle/>
-                    <a:p>
-                      <a:pPr algn="l"/>
-                      <a:r>
-                        <a:rPr sz="950" b="0">
-                          <a:solidFill>
-                            <a:srgbClr val="000000"/>
-                          </a:solidFill>
-                          <a:latin typeface="Calibri"/>
-                        </a:rPr>
-                        <a:t>reuses blob-DIC; gives Poisson</a:t>
-                      </a:r>
-                    </a:p>
-                  </a:txBody>
-                  <a:tcPr>
-                    <a:solidFill>
-                      <a:srgbClr val="C8E6C9"/>
-                    </a:solidFill>
-                  </a:tcPr>
-                </a:tc>
-              </a:tr>
-              <a:tr h="457200">
-                <a:tc>
-                  <a:txBody>
-                    <a:bodyPr lIns="54864" rIns="54864" tIns="18288" bIns="18288" wrap="square" anchor="ctr"/>
-                    <a:lstStyle/>
-                    <a:p>
-                      <a:pPr algn="l"/>
-                      <a:r>
-                        <a:rPr sz="950" b="0">
-                          <a:solidFill>
-                            <a:srgbClr val="000000"/>
-                          </a:solidFill>
-                          <a:latin typeface="Calibri"/>
-                        </a:rPr>
-                        <a:t>+ edge camera</a:t>
-                      </a:r>
-                    </a:p>
-                  </a:txBody>
-                  <a:tcPr/>
-                </a:tc>
-                <a:tc>
-                  <a:txBody>
-                    <a:bodyPr lIns="54864" rIns="54864" tIns="18288" bIns="18288" wrap="square" anchor="ctr"/>
-                    <a:lstStyle/>
-                    <a:p>
-                      <a:pPr algn="l"/>
-                      <a:r>
-                        <a:rPr sz="950" b="0">
-                          <a:solidFill>
-                            <a:srgbClr val="000000"/>
-                          </a:solidFill>
-                          <a:latin typeface="Calibri"/>
-                        </a:rPr>
-                        <a:t>2nd view → thickness strain;  A = w·t</a:t>
-                      </a:r>
-                    </a:p>
-                  </a:txBody>
-                  <a:tcPr/>
-                </a:tc>
-                <a:tc>
-                  <a:txBody>
-                    <a:bodyPr lIns="54864" rIns="54864" tIns="18288" bIns="18288" wrap="square" anchor="ctr"/>
-                    <a:lstStyle/>
-                    <a:p>
-                      <a:pPr algn="l"/>
-                      <a:r>
-                        <a:rPr sz="950" b="0">
-                          <a:solidFill>
-                            <a:srgbClr val="000000"/>
-                          </a:solidFill>
-                          <a:latin typeface="Calibri"/>
-                        </a:rPr>
-                        <a:t>rigorous; FDM is orthotropic</a:t>
-                      </a:r>
-                    </a:p>
-                  </a:txBody>
-                  <a:tcPr/>
-                </a:tc>
-              </a:tr>
-              <a:tr h="457200">
-                <a:tc>
-                  <a:txBody>
-                    <a:bodyPr lIns="54864" rIns="54864" tIns="18288" bIns="18288" wrap="square" anchor="ctr"/>
-                    <a:lstStyle/>
-                    <a:p>
-                      <a:pPr algn="l"/>
-                      <a:r>
-                        <a:rPr sz="950" b="0">
-                          <a:solidFill>
-                            <a:srgbClr val="000000"/>
-                          </a:solidFill>
-                          <a:latin typeface="Calibri"/>
-                        </a:rPr>
-                        <a:t>Full-field speckle</a:t>
-                      </a:r>
-                    </a:p>
-                  </a:txBody>
-                  <a:tcPr/>
-                </a:tc>
-                <a:tc>
-                  <a:txBody>
-                    <a:bodyPr lIns="54864" rIns="54864" tIns="18288" bIns="18288" wrap="square" anchor="ctr"/>
-                    <a:lstStyle/>
-                    <a:p>
-                      <a:pPr algn="l"/>
-                      <a:r>
-                        <a:rPr sz="950" b="0">
-                          <a:solidFill>
-                            <a:srgbClr val="000000"/>
-                          </a:solidFill>
-                          <a:latin typeface="Calibri"/>
-                        </a:rPr>
-                        <a:t>fine random speckle + subset DIC</a:t>
-                      </a:r>
-                    </a:p>
-                  </a:txBody>
-                  <a:tcPr/>
-                </a:tc>
-                <a:tc>
-                  <a:txBody>
-                    <a:bodyPr lIns="54864" rIns="54864" tIns="18288" bIns="18288" wrap="square" anchor="ctr"/>
-                    <a:lstStyle/>
-                    <a:p>
-                      <a:pPr algn="l"/>
-                      <a:r>
-                        <a:rPr sz="950" b="0">
-                          <a:solidFill>
-                            <a:srgbClr val="000000"/>
-                          </a:solidFill>
-                          <a:latin typeface="Calibri"/>
-                        </a:rPr>
-                        <a:t>strain field + necking; new pipeline</a:t>
-                      </a:r>
-                    </a:p>
-                  </a:txBody>
-                  <a:tcPr/>
-                </a:tc>
-              </a:tr>
-            </a:tbl>
-          </a:graphicData>
-        </a:graphic>
-      </p:graphicFrame>
-      <p:sp>
-        <p:nvSpPr>
-          <p:cNvPr id="10" name="TextBox 9"/>
+              <a:rPr sz="1150" b="0" i="0">
+                <a:solidFill>
+                  <a:srgbClr val="000000"/>
+                </a:solidFill>
+                <a:latin typeface="Calibri"/>
+              </a:rPr>
+              <a:t>At the force ceiling the crosshead FROZE and the whole machine SHOOK — a stalled stepper skipping steps.
+S15: had to Stop by hand.</a:t>
+            </a:r>
+          </a:p>
+        </p:txBody>
+      </p:sp>
+      <p:sp>
+        <p:nvSpPr>
+          <p:cNvPr id="8" name="TextBox 7"/>
           <p:cNvSpPr txBox="1"/>
           <p:nvPr/>
         </p:nvSpPr>
         <p:spPr>
           <a:xfrm>
-            <a:off x="6172200" y="3950208"/>
-            <a:ext cx="5715000" cy="960120"/>
+            <a:off x="7315200" y="3200400"/>
+            <a:ext cx="4526280" cy="365760"/>
           </a:xfrm>
           <a:prstGeom prst="rect">
             <a:avLst/>
@@ -30655,33 +30662,69 @@
           <a:p>
             <a:pPr algn="l"/>
             <a:r>
-              <a:rPr sz="1050" b="0" i="1">
+              <a:rPr sz="1600" b="0" i="0">
                 <a:solidFill>
                   <a:srgbClr val="707070"/>
                 </a:solidFill>
                 <a:latin typeface="Calibri"/>
               </a:rPr>
-              <a:t>Same speckle style (spray dots): just add a transverse dot pair — the current 2-marker tracker extends naturally (2 axial + 2 transverse). A finer random speckle enables full-field DIC (transverse field + necking) but needs a new analysis pipeline.</a:t>
-            </a:r>
-          </a:p>
-        </p:txBody>
-      </p:sp>
-      <p:sp>
-        <p:nvSpPr>
-          <p:cNvPr id="11" name="Rectangle 10"/>
+              <a:t>Why</a:t>
+            </a:r>
+          </a:p>
+        </p:txBody>
+      </p:sp>
+      <p:sp>
+        <p:nvSpPr>
+          <p:cNvPr id="9" name="TextBox 8"/>
+          <p:cNvSpPr txBox="1"/>
+          <p:nvPr/>
+        </p:nvSpPr>
+        <p:spPr>
+          <a:xfrm>
+            <a:off x="7315200" y="3602736"/>
+            <a:ext cx="4526280" cy="1645920"/>
+          </a:xfrm>
+          <a:prstGeom prst="rect">
+            <a:avLst/>
+          </a:prstGeom>
+          <a:noFill/>
+        </p:spPr>
+        <p:txBody>
+          <a:bodyPr wrap="square" lIns="45720" rIns="45720" tIns="18288" bIns="18288" anchor="t">
+            <a:spAutoFit/>
+          </a:bodyPr>
+          <a:lstStyle/>
+          <a:p>
+            <a:pPr algn="l"/>
+            <a:r>
+              <a:rPr sz="1150" b="0" i="0">
+                <a:solidFill>
+                  <a:srgbClr val="000000"/>
+                </a:solidFill>
+                <a:latin typeface="Calibri"/>
+              </a:rPr>
+              <a:t>•  Motor at / beyond its torque limit
+•  Strain-rate loop then oscillated, chasing a motor that can't move</a:t>
+            </a:r>
+          </a:p>
+        </p:txBody>
+      </p:sp>
+      <p:sp>
+        <p:nvSpPr>
+          <p:cNvPr id="10" name="Rectangle 9"/>
           <p:cNvSpPr/>
           <p:nvPr/>
         </p:nvSpPr>
         <p:spPr>
           <a:xfrm>
-            <a:off x="365760" y="5166360"/>
-            <a:ext cx="11521440" cy="658368"/>
+            <a:off x="365760" y="5760720"/>
+            <a:ext cx="11475720" cy="713232"/>
           </a:xfrm>
           <a:prstGeom prst="rect">
             <a:avLst/>
           </a:prstGeom>
           <a:solidFill>
-            <a:srgbClr val="E7F1F8"/>
+            <a:srgbClr val="FFCDD2"/>
           </a:solidFill>
           <a:ln>
             <a:noFill/>
@@ -30707,55 +30750,20 @@
           <a:p>
             <a:pPr algn="ctr"/>
             <a:r>
-              <a:rPr sz="1200" b="1">
+              <a:rPr sz="1250" b="1">
                 <a:solidFill>
                   <a:srgbClr val="000000"/>
                 </a:solidFill>
                 <a:latin typeface="Calibri"/>
               </a:rPr>
-              <a:t>TRANSVERSE markers = ideal, but the gauge is too NARROW → EDGE-WIDTH detection (next slide) is the practical route. Keep ENGINEERING stress as the validated basis.</a:t>
-            </a:r>
-          </a:p>
-        </p:txBody>
-      </p:sp>
-      <p:sp>
-        <p:nvSpPr>
-          <p:cNvPr id="12" name="TextBox 11"/>
-          <p:cNvSpPr txBox="1"/>
-          <p:nvPr/>
-        </p:nvSpPr>
-        <p:spPr>
-          <a:xfrm>
-            <a:off x="548640" y="6400800"/>
-            <a:ext cx="11064240" cy="365760"/>
-          </a:xfrm>
-          <a:prstGeom prst="rect">
-            <a:avLst/>
-          </a:prstGeom>
-          <a:noFill/>
-        </p:spPr>
-        <p:txBody>
-          <a:bodyPr wrap="square" lIns="45720" rIns="45720" tIns="18288" bIns="18288" anchor="t">
-            <a:spAutoFit/>
-          </a:bodyPr>
-          <a:lstStyle/>
-          <a:p>
-            <a:pPr algn="l"/>
-            <a:r>
-              <a:rPr sz="1200" b="0" i="1">
-                <a:solidFill>
-                  <a:srgbClr val="707070"/>
-                </a:solidFill>
-                <a:latin typeface="Calibri"/>
-              </a:rPr>
-              <a:t>Current V6 report &amp; plots = engineering stress (nominal 80 mm²). True/Cauchy needs the deforming area; post-necking needs full-field DIC or markers at the neck.</a:t>
-            </a:r>
-          </a:p>
-        </p:txBody>
-      </p:sp>
-      <p:sp>
-        <p:nvSpPr>
-          <p:cNvPr id="13" name="TextBox 12"/>
+              <a:t>WARNING — jitter = STALL. STOP, don't force 100% full-area. The stall guard now auto-halts (&lt; 0.05 mm in 6 s under load).</a:t>
+            </a:r>
+          </a:p>
+        </p:txBody>
+      </p:sp>
+      <p:sp>
+        <p:nvSpPr>
+          <p:cNvPr id="11" name="TextBox 10"/>
           <p:cNvSpPr txBox="1"/>
           <p:nvPr/>
         </p:nvSpPr>
@@ -30914,6 +30922,971 @@
                 </a:solidFill>
                 <a:latin typeface="Calibri Light"/>
               </a:rPr>
+              <a:t>MEASURING CAUCHY (TRUE) STRESS</a:t>
+            </a:r>
+          </a:p>
+        </p:txBody>
+      </p:sp>
+      <p:sp>
+        <p:nvSpPr>
+          <p:cNvPr id="5" name="TextBox 4"/>
+          <p:cNvSpPr txBox="1"/>
+          <p:nvPr/>
+        </p:nvSpPr>
+        <p:spPr>
+          <a:xfrm>
+            <a:off x="365760" y="2651760"/>
+            <a:ext cx="11475720" cy="1554480"/>
+          </a:xfrm>
+          <a:prstGeom prst="rect">
+            <a:avLst/>
+          </a:prstGeom>
+          <a:noFill/>
+        </p:spPr>
+        <p:txBody>
+          <a:bodyPr wrap="square" lIns="45720" rIns="45720" tIns="18288" bIns="18288" anchor="t">
+            <a:spAutoFit/>
+          </a:bodyPr>
+          <a:lstStyle/>
+          <a:p>
+            <a:pPr algn="l"/>
+            <a:r>
+              <a:rPr sz="1600" b="1" i="0">
+                <a:solidFill>
+                  <a:srgbClr val="1F3F2F"/>
+                </a:solidFill>
+                <a:latin typeface="Calibri"/>
+              </a:rPr>
+              <a:t>Getting the DEFORMING cross-section for TRUE / Cauchy stress + Poisson ratio - a separate future work-stream: edge-width tracking on a matte-black backdrop.</a:t>
+            </a:r>
+          </a:p>
+        </p:txBody>
+      </p:sp>
+      <p:sp>
+        <p:nvSpPr>
+          <p:cNvPr id="6" name="TextBox 5"/>
+          <p:cNvSpPr txBox="1"/>
+          <p:nvPr/>
+        </p:nvSpPr>
+        <p:spPr>
+          <a:xfrm>
+            <a:off x="457200" y="6446520"/>
+            <a:ext cx="640080" cy="274320"/>
+          </a:xfrm>
+          <a:prstGeom prst="rect">
+            <a:avLst/>
+          </a:prstGeom>
+          <a:noFill/>
+        </p:spPr>
+        <p:txBody>
+          <a:bodyPr wrap="square" lIns="45720" rIns="45720" tIns="18288" bIns="18288" anchor="t">
+            <a:spAutoFit/>
+          </a:bodyPr>
+          <a:lstStyle/>
+          <a:p>
+            <a:pPr algn="l"/>
+            <a:r>
+              <a:rPr sz="1000" b="0" i="0">
+                <a:solidFill>
+                  <a:srgbClr val="707070"/>
+                </a:solidFill>
+                <a:latin typeface="Calibri"/>
+              </a:rPr>
+              <a:t>183</a:t>
+            </a:r>
+          </a:p>
+        </p:txBody>
+      </p:sp>
+    </p:spTree>
+  </p:cSld>
+  <p:clrMapOvr>
+    <a:masterClrMapping/>
+  </p:clrMapOvr>
+</p:sld>
+</file>
+
+<file path=ppt/slides/slide44.xml><?xml version="1.0" encoding="utf-8"?>
+<p:sld xmlns:a="http://schemas.openxmlformats.org/drawingml/2006/main" xmlns:p="http://schemas.openxmlformats.org/presentationml/2006/main" xmlns:r="http://schemas.openxmlformats.org/officeDocument/2006/relationships">
+  <p:cSld>
+    <p:spTree>
+      <p:nvGrpSpPr>
+        <p:cNvPr id="1" name=""/>
+        <p:cNvGrpSpPr/>
+        <p:nvPr/>
+      </p:nvGrpSpPr>
+      <p:grpSpPr/>
+      <p:sp>
+        <p:nvSpPr>
+          <p:cNvPr id="2" name="TextBox 1"/>
+          <p:cNvSpPr txBox="1"/>
+          <p:nvPr/>
+        </p:nvSpPr>
+        <p:spPr>
+          <a:xfrm>
+            <a:off x="11155680" y="274320"/>
+            <a:ext cx="914400" cy="274320"/>
+          </a:xfrm>
+          <a:prstGeom prst="rect">
+            <a:avLst/>
+          </a:prstGeom>
+          <a:noFill/>
+        </p:spPr>
+        <p:txBody>
+          <a:bodyPr wrap="square" lIns="45720" rIns="45720" tIns="18288" bIns="18288" anchor="t">
+            <a:spAutoFit/>
+          </a:bodyPr>
+          <a:lstStyle/>
+          <a:p>
+            <a:pPr algn="r"/>
+            <a:r>
+              <a:rPr sz="800" b="1" i="0">
+                <a:solidFill>
+                  <a:srgbClr val="707070"/>
+                </a:solidFill>
+                <a:latin typeface="Calibri"/>
+              </a:rPr>
+              <a:t>JÖNKÖPING UNIVERSITY</a:t>
+            </a:r>
+          </a:p>
+        </p:txBody>
+      </p:sp>
+      <p:sp>
+        <p:nvSpPr>
+          <p:cNvPr id="3" name="Rectangle 2"/>
+          <p:cNvSpPr/>
+          <p:nvPr/>
+        </p:nvSpPr>
+        <p:spPr>
+          <a:xfrm>
+            <a:off x="457200" y="411480"/>
+            <a:ext cx="457200" cy="73152"/>
+          </a:xfrm>
+          <a:prstGeom prst="rect">
+            <a:avLst/>
+          </a:prstGeom>
+          <a:solidFill>
+            <a:srgbClr val="A9D6EF"/>
+          </a:solidFill>
+          <a:ln>
+            <a:noFill/>
+          </a:ln>
+        </p:spPr>
+        <p:style>
+          <a:lnRef idx="1">
+            <a:schemeClr val="accent1"/>
+          </a:lnRef>
+          <a:fillRef idx="3">
+            <a:schemeClr val="accent1"/>
+          </a:fillRef>
+          <a:effectRef idx="2">
+            <a:schemeClr val="accent1"/>
+          </a:effectRef>
+          <a:fontRef idx="minor">
+            <a:schemeClr val="lt1"/>
+          </a:fontRef>
+        </p:style>
+        <p:txBody>
+          <a:bodyPr rtlCol="0" anchor="ctr"/>
+          <a:lstStyle/>
+          <a:p>
+            <a:pPr algn="ctr"/>
+          </a:p>
+        </p:txBody>
+      </p:sp>
+      <p:sp>
+        <p:nvSpPr>
+          <p:cNvPr id="4" name="TextBox 3"/>
+          <p:cNvSpPr txBox="1"/>
+          <p:nvPr/>
+        </p:nvSpPr>
+        <p:spPr>
+          <a:xfrm>
+            <a:off x="457200" y="502920"/>
+            <a:ext cx="11430000" cy="822960"/>
+          </a:xfrm>
+          <a:prstGeom prst="rect">
+            <a:avLst/>
+          </a:prstGeom>
+          <a:noFill/>
+        </p:spPr>
+        <p:txBody>
+          <a:bodyPr wrap="square" lIns="45720" rIns="45720" tIns="18288" bIns="18288" anchor="t">
+            <a:spAutoFit/>
+          </a:bodyPr>
+          <a:lstStyle/>
+          <a:p>
+            <a:pPr algn="l"/>
+            <a:r>
+              <a:rPr sz="3000" b="0" i="0">
+                <a:solidFill>
+                  <a:srgbClr val="000000"/>
+                </a:solidFill>
+                <a:latin typeface="Calibri Light"/>
+              </a:rPr>
+              <a:t>ENGINEERING vs TRUE (CAUCHY) STRESS — &amp; MEASURING THE AREA</a:t>
+            </a:r>
+          </a:p>
+        </p:txBody>
+      </p:sp>
+      <p:sp>
+        <p:nvSpPr>
+          <p:cNvPr id="5" name="TextBox 4"/>
+          <p:cNvSpPr txBox="1"/>
+          <p:nvPr/>
+        </p:nvSpPr>
+        <p:spPr>
+          <a:xfrm>
+            <a:off x="365760" y="1170432"/>
+            <a:ext cx="5577840" cy="365760"/>
+          </a:xfrm>
+          <a:prstGeom prst="rect">
+            <a:avLst/>
+          </a:prstGeom>
+          <a:noFill/>
+        </p:spPr>
+        <p:txBody>
+          <a:bodyPr wrap="square" lIns="45720" rIns="45720" tIns="18288" bIns="18288" anchor="t">
+            <a:spAutoFit/>
+          </a:bodyPr>
+          <a:lstStyle/>
+          <a:p>
+            <a:pPr algn="l"/>
+            <a:r>
+              <a:rPr sz="1600" b="0" i="0">
+                <a:solidFill>
+                  <a:srgbClr val="707070"/>
+                </a:solidFill>
+                <a:latin typeface="Calibri"/>
+              </a:rPr>
+              <a:t>Why we REPORT engineering stress</a:t>
+            </a:r>
+          </a:p>
+        </p:txBody>
+      </p:sp>
+      <p:pic>
+        <p:nvPicPr>
+          <p:cNvPr id="6" name="Picture 5" descr="feat_eng_vs_true.png"/>
+          <p:cNvPicPr>
+            <a:picLocks noChangeAspect="1"/>
+          </p:cNvPicPr>
+          <p:nvPr/>
+        </p:nvPicPr>
+        <p:blipFill>
+          <a:blip r:embed="rId2"/>
+          <a:stretch>
+            <a:fillRect/>
+          </a:stretch>
+        </p:blipFill>
+        <p:spPr>
+          <a:xfrm>
+            <a:off x="365760" y="1517904"/>
+            <a:ext cx="5623560" cy="2309892"/>
+          </a:xfrm>
+          <a:prstGeom prst="rect">
+            <a:avLst/>
+          </a:prstGeom>
+        </p:spPr>
+      </p:pic>
+      <p:sp>
+        <p:nvSpPr>
+          <p:cNvPr id="7" name="TextBox 6"/>
+          <p:cNvSpPr txBox="1"/>
+          <p:nvPr/>
+        </p:nvSpPr>
+        <p:spPr>
+          <a:xfrm>
+            <a:off x="365760" y="3950208"/>
+            <a:ext cx="5623560" cy="1051560"/>
+          </a:xfrm>
+          <a:prstGeom prst="rect">
+            <a:avLst/>
+          </a:prstGeom>
+          <a:noFill/>
+        </p:spPr>
+        <p:txBody>
+          <a:bodyPr wrap="square" lIns="45720" rIns="45720" tIns="18288" bIns="18288" anchor="t">
+            <a:spAutoFit/>
+          </a:bodyPr>
+          <a:lstStyle/>
+          <a:p>
+            <a:pPr algn="l"/>
+            <a:r>
+              <a:rPr sz="1100" b="0" i="0">
+                <a:solidFill>
+                  <a:srgbClr val="000000"/>
+                </a:solidFill>
+                <a:latin typeface="Calibri"/>
+              </a:rPr>
+              <a:t>σ_eng = F / A₀  (REPORTED)      σ_true = F / A  (not tracked, ~2–5% higher)
+Basis: ISO 527 · Chacón · datasheet all use ENGINEERING → apples-to-apples for our k-factors.  E &amp; σ_y ~unchanged.</a:t>
+            </a:r>
+          </a:p>
+        </p:txBody>
+      </p:sp>
+      <p:sp>
+        <p:nvSpPr>
+          <p:cNvPr id="8" name="TextBox 7"/>
+          <p:cNvSpPr txBox="1"/>
+          <p:nvPr/>
+        </p:nvSpPr>
+        <p:spPr>
+          <a:xfrm>
+            <a:off x="6172200" y="1170432"/>
+            <a:ext cx="5669280" cy="365760"/>
+          </a:xfrm>
+          <a:prstGeom prst="rect">
+            <a:avLst/>
+          </a:prstGeom>
+          <a:noFill/>
+        </p:spPr>
+        <p:txBody>
+          <a:bodyPr wrap="square" lIns="45720" rIns="45720" tIns="18288" bIns="18288" anchor="t">
+            <a:spAutoFit/>
+          </a:bodyPr>
+          <a:lstStyle/>
+          <a:p>
+            <a:pPr algn="l"/>
+            <a:r>
+              <a:rPr sz="1600" b="0" i="0">
+                <a:solidFill>
+                  <a:srgbClr val="707070"/>
+                </a:solidFill>
+                <a:latin typeface="Calibri"/>
+              </a:rPr>
+              <a:t>Measuring the CURRENT area → true stress (future)</a:t>
+            </a:r>
+          </a:p>
+        </p:txBody>
+      </p:sp>
+      <p:graphicFrame>
+        <p:nvGraphicFramePr>
+          <p:cNvPr id="9" name="Table 8"/>
+          <p:cNvGraphicFramePr>
+            <a:graphicFrameLocks noGrp="1"/>
+          </p:cNvGraphicFramePr>
+          <p:nvPr/>
+        </p:nvGraphicFramePr>
+        <p:xfrm>
+          <a:off x="6172200" y="1554480"/>
+          <a:ext cx="5714998" cy="2286000"/>
+        </p:xfrm>
+        <a:graphic>
+          <a:graphicData uri="http://schemas.openxmlformats.org/drawingml/2006/table">
+            <a:tbl>
+              <a:tblPr firstRow="1" bandRow="1">
+                <a:tableStyleId>{5C22544A-7EE6-4342-B048-85BDC9FD1C3A}</a:tableStyleId>
+              </a:tblPr>
+              <a:tblGrid>
+                <a:gridCol w="1365530"/>
+                <a:gridCol w="2731061"/>
+                <a:gridCol w="1618407"/>
+              </a:tblGrid>
+              <a:tr h="457200">
+                <a:tc>
+                  <a:txBody>
+                    <a:bodyPr lIns="54864" rIns="54864" tIns="18288" bIns="18288" wrap="square" anchor="ctr"/>
+                    <a:lstStyle/>
+                    <a:p>
+                      <a:pPr algn="l"/>
+                      <a:r>
+                        <a:rPr sz="1000" b="1">
+                          <a:solidFill>
+                            <a:srgbClr val="FFFFFF"/>
+                          </a:solidFill>
+                          <a:latin typeface="Calibri"/>
+                        </a:rPr>
+                        <a:t>Method</a:t>
+                      </a:r>
+                    </a:p>
+                  </a:txBody>
+                  <a:tcPr>
+                    <a:solidFill>
+                      <a:srgbClr val="143D2F"/>
+                    </a:solidFill>
+                  </a:tcPr>
+                </a:tc>
+                <a:tc>
+                  <a:txBody>
+                    <a:bodyPr lIns="54864" rIns="54864" tIns="18288" bIns="18288" wrap="square" anchor="ctr"/>
+                    <a:lstStyle/>
+                    <a:p>
+                      <a:pPr algn="l"/>
+                      <a:r>
+                        <a:rPr sz="1000" b="1">
+                          <a:solidFill>
+                            <a:srgbClr val="FFFFFF"/>
+                          </a:solidFill>
+                          <a:latin typeface="Calibri"/>
+                        </a:rPr>
+                        <a:t>How</a:t>
+                      </a:r>
+                    </a:p>
+                  </a:txBody>
+                  <a:tcPr>
+                    <a:solidFill>
+                      <a:srgbClr val="143D2F"/>
+                    </a:solidFill>
+                  </a:tcPr>
+                </a:tc>
+                <a:tc>
+                  <a:txBody>
+                    <a:bodyPr lIns="54864" rIns="54864" tIns="18288" bIns="18288" wrap="square" anchor="ctr"/>
+                    <a:lstStyle/>
+                    <a:p>
+                      <a:pPr algn="l"/>
+                      <a:r>
+                        <a:rPr sz="1000" b="1">
+                          <a:solidFill>
+                            <a:srgbClr val="FFFFFF"/>
+                          </a:solidFill>
+                          <a:latin typeface="Calibri"/>
+                        </a:rPr>
+                        <a:t>Note</a:t>
+                      </a:r>
+                    </a:p>
+                  </a:txBody>
+                  <a:tcPr>
+                    <a:solidFill>
+                      <a:srgbClr val="143D2F"/>
+                    </a:solidFill>
+                  </a:tcPr>
+                </a:tc>
+              </a:tr>
+              <a:tr h="457200">
+                <a:tc>
+                  <a:txBody>
+                    <a:bodyPr lIns="54864" rIns="54864" tIns="18288" bIns="18288" wrap="square" anchor="ctr"/>
+                    <a:lstStyle/>
+                    <a:p>
+                      <a:pPr algn="l"/>
+                      <a:r>
+                        <a:rPr sz="950" b="0">
+                          <a:solidFill>
+                            <a:srgbClr val="000000"/>
+                          </a:solidFill>
+                          <a:latin typeface="Calibri"/>
+                        </a:rPr>
+                        <a:t>Poisson estimate</a:t>
+                      </a:r>
+                    </a:p>
+                  </a:txBody>
+                  <a:tcPr/>
+                </a:tc>
+                <a:tc>
+                  <a:txBody>
+                    <a:bodyPr lIns="54864" rIns="54864" tIns="18288" bIns="18288" wrap="square" anchor="ctr"/>
+                    <a:lstStyle/>
+                    <a:p>
+                      <a:pPr algn="l"/>
+                      <a:r>
+                        <a:rPr sz="950" b="0">
+                          <a:solidFill>
+                            <a:srgbClr val="000000"/>
+                          </a:solidFill>
+                          <a:latin typeface="Calibri"/>
+                        </a:rPr>
+                        <a:t>A = A₀(1−ν·ε)²,  ν ≈ 0.35  (no hardware)</a:t>
+                      </a:r>
+                    </a:p>
+                  </a:txBody>
+                  <a:tcPr/>
+                </a:tc>
+                <a:tc>
+                  <a:txBody>
+                    <a:bodyPr lIns="54864" rIns="54864" tIns="18288" bIns="18288" wrap="square" anchor="ctr"/>
+                    <a:lstStyle/>
+                    <a:p>
+                      <a:pPr algn="l"/>
+                      <a:r>
+                        <a:rPr sz="950" b="0">
+                          <a:solidFill>
+                            <a:srgbClr val="000000"/>
+                          </a:solidFill>
+                          <a:latin typeface="Calibri"/>
+                        </a:rPr>
+                        <a:t>cheap; ν drifts in yield</a:t>
+                      </a:r>
+                    </a:p>
+                  </a:txBody>
+                  <a:tcPr/>
+                </a:tc>
+              </a:tr>
+              <a:tr h="457200">
+                <a:tc>
+                  <a:txBody>
+                    <a:bodyPr lIns="54864" rIns="54864" tIns="18288" bIns="18288" wrap="square" anchor="ctr"/>
+                    <a:lstStyle/>
+                    <a:p>
+                      <a:pPr algn="l"/>
+                      <a:r>
+                        <a:rPr sz="950" b="1">
+                          <a:solidFill>
+                            <a:srgbClr val="000000"/>
+                          </a:solidFill>
+                          <a:latin typeface="Calibri"/>
+                        </a:rPr>
+                        <a:t>Transverse markers</a:t>
+                      </a:r>
+                    </a:p>
+                  </a:txBody>
+                  <a:tcPr>
+                    <a:solidFill>
+                      <a:srgbClr val="C8E6C9"/>
+                    </a:solidFill>
+                  </a:tcPr>
+                </a:tc>
+                <a:tc>
+                  <a:txBody>
+                    <a:bodyPr lIns="54864" rIns="54864" tIns="18288" bIns="18288" wrap="square" anchor="ctr"/>
+                    <a:lstStyle/>
+                    <a:p>
+                      <a:pPr algn="l"/>
+                      <a:r>
+                        <a:rPr sz="950" b="0">
+                          <a:solidFill>
+                            <a:srgbClr val="000000"/>
+                          </a:solidFill>
+                          <a:latin typeface="Calibri"/>
+                        </a:rPr>
+                        <a:t>+2 dots across width → ε_w;  A ≈ A₀(1+ε_w)²</a:t>
+                      </a:r>
+                    </a:p>
+                  </a:txBody>
+                  <a:tcPr>
+                    <a:solidFill>
+                      <a:srgbClr val="C8E6C9"/>
+                    </a:solidFill>
+                  </a:tcPr>
+                </a:tc>
+                <a:tc>
+                  <a:txBody>
+                    <a:bodyPr lIns="54864" rIns="54864" tIns="18288" bIns="18288" wrap="square" anchor="ctr"/>
+                    <a:lstStyle/>
+                    <a:p>
+                      <a:pPr algn="l"/>
+                      <a:r>
+                        <a:rPr sz="950" b="0">
+                          <a:solidFill>
+                            <a:srgbClr val="000000"/>
+                          </a:solidFill>
+                          <a:latin typeface="Calibri"/>
+                        </a:rPr>
+                        <a:t>reuses blob-DIC; gives Poisson</a:t>
+                      </a:r>
+                    </a:p>
+                  </a:txBody>
+                  <a:tcPr>
+                    <a:solidFill>
+                      <a:srgbClr val="C8E6C9"/>
+                    </a:solidFill>
+                  </a:tcPr>
+                </a:tc>
+              </a:tr>
+              <a:tr h="457200">
+                <a:tc>
+                  <a:txBody>
+                    <a:bodyPr lIns="54864" rIns="54864" tIns="18288" bIns="18288" wrap="square" anchor="ctr"/>
+                    <a:lstStyle/>
+                    <a:p>
+                      <a:pPr algn="l"/>
+                      <a:r>
+                        <a:rPr sz="950" b="0">
+                          <a:solidFill>
+                            <a:srgbClr val="000000"/>
+                          </a:solidFill>
+                          <a:latin typeface="Calibri"/>
+                        </a:rPr>
+                        <a:t>+ edge camera</a:t>
+                      </a:r>
+                    </a:p>
+                  </a:txBody>
+                  <a:tcPr/>
+                </a:tc>
+                <a:tc>
+                  <a:txBody>
+                    <a:bodyPr lIns="54864" rIns="54864" tIns="18288" bIns="18288" wrap="square" anchor="ctr"/>
+                    <a:lstStyle/>
+                    <a:p>
+                      <a:pPr algn="l"/>
+                      <a:r>
+                        <a:rPr sz="950" b="0">
+                          <a:solidFill>
+                            <a:srgbClr val="000000"/>
+                          </a:solidFill>
+                          <a:latin typeface="Calibri"/>
+                        </a:rPr>
+                        <a:t>2nd view → thickness strain;  A = w·t</a:t>
+                      </a:r>
+                    </a:p>
+                  </a:txBody>
+                  <a:tcPr/>
+                </a:tc>
+                <a:tc>
+                  <a:txBody>
+                    <a:bodyPr lIns="54864" rIns="54864" tIns="18288" bIns="18288" wrap="square" anchor="ctr"/>
+                    <a:lstStyle/>
+                    <a:p>
+                      <a:pPr algn="l"/>
+                      <a:r>
+                        <a:rPr sz="950" b="0">
+                          <a:solidFill>
+                            <a:srgbClr val="000000"/>
+                          </a:solidFill>
+                          <a:latin typeface="Calibri"/>
+                        </a:rPr>
+                        <a:t>rigorous; FDM is orthotropic</a:t>
+                      </a:r>
+                    </a:p>
+                  </a:txBody>
+                  <a:tcPr/>
+                </a:tc>
+              </a:tr>
+              <a:tr h="457200">
+                <a:tc>
+                  <a:txBody>
+                    <a:bodyPr lIns="54864" rIns="54864" tIns="18288" bIns="18288" wrap="square" anchor="ctr"/>
+                    <a:lstStyle/>
+                    <a:p>
+                      <a:pPr algn="l"/>
+                      <a:r>
+                        <a:rPr sz="950" b="0">
+                          <a:solidFill>
+                            <a:srgbClr val="000000"/>
+                          </a:solidFill>
+                          <a:latin typeface="Calibri"/>
+                        </a:rPr>
+                        <a:t>Full-field speckle</a:t>
+                      </a:r>
+                    </a:p>
+                  </a:txBody>
+                  <a:tcPr/>
+                </a:tc>
+                <a:tc>
+                  <a:txBody>
+                    <a:bodyPr lIns="54864" rIns="54864" tIns="18288" bIns="18288" wrap="square" anchor="ctr"/>
+                    <a:lstStyle/>
+                    <a:p>
+                      <a:pPr algn="l"/>
+                      <a:r>
+                        <a:rPr sz="950" b="0">
+                          <a:solidFill>
+                            <a:srgbClr val="000000"/>
+                          </a:solidFill>
+                          <a:latin typeface="Calibri"/>
+                        </a:rPr>
+                        <a:t>fine random speckle + subset DIC</a:t>
+                      </a:r>
+                    </a:p>
+                  </a:txBody>
+                  <a:tcPr/>
+                </a:tc>
+                <a:tc>
+                  <a:txBody>
+                    <a:bodyPr lIns="54864" rIns="54864" tIns="18288" bIns="18288" wrap="square" anchor="ctr"/>
+                    <a:lstStyle/>
+                    <a:p>
+                      <a:pPr algn="l"/>
+                      <a:r>
+                        <a:rPr sz="950" b="0">
+                          <a:solidFill>
+                            <a:srgbClr val="000000"/>
+                          </a:solidFill>
+                          <a:latin typeface="Calibri"/>
+                        </a:rPr>
+                        <a:t>strain field + necking; new pipeline</a:t>
+                      </a:r>
+                    </a:p>
+                  </a:txBody>
+                  <a:tcPr/>
+                </a:tc>
+              </a:tr>
+            </a:tbl>
+          </a:graphicData>
+        </a:graphic>
+      </p:graphicFrame>
+      <p:sp>
+        <p:nvSpPr>
+          <p:cNvPr id="10" name="TextBox 9"/>
+          <p:cNvSpPr txBox="1"/>
+          <p:nvPr/>
+        </p:nvSpPr>
+        <p:spPr>
+          <a:xfrm>
+            <a:off x="6172200" y="3950208"/>
+            <a:ext cx="5715000" cy="960120"/>
+          </a:xfrm>
+          <a:prstGeom prst="rect">
+            <a:avLst/>
+          </a:prstGeom>
+          <a:noFill/>
+        </p:spPr>
+        <p:txBody>
+          <a:bodyPr wrap="square" lIns="45720" rIns="45720" tIns="18288" bIns="18288" anchor="t">
+            <a:spAutoFit/>
+          </a:bodyPr>
+          <a:lstStyle/>
+          <a:p>
+            <a:pPr algn="l"/>
+            <a:r>
+              <a:rPr sz="1050" b="0" i="1">
+                <a:solidFill>
+                  <a:srgbClr val="707070"/>
+                </a:solidFill>
+                <a:latin typeface="Calibri"/>
+              </a:rPr>
+              <a:t>Same speckle style (spray dots): just add a transverse dot pair — the current 2-marker tracker extends naturally (2 axial + 2 transverse). A finer random speckle enables full-field DIC (transverse field + necking) but needs a new analysis pipeline.</a:t>
+            </a:r>
+          </a:p>
+        </p:txBody>
+      </p:sp>
+      <p:sp>
+        <p:nvSpPr>
+          <p:cNvPr id="11" name="Rectangle 10"/>
+          <p:cNvSpPr/>
+          <p:nvPr/>
+        </p:nvSpPr>
+        <p:spPr>
+          <a:xfrm>
+            <a:off x="365760" y="5166360"/>
+            <a:ext cx="11521440" cy="658368"/>
+          </a:xfrm>
+          <a:prstGeom prst="rect">
+            <a:avLst/>
+          </a:prstGeom>
+          <a:solidFill>
+            <a:srgbClr val="E7F1F8"/>
+          </a:solidFill>
+          <a:ln>
+            <a:noFill/>
+          </a:ln>
+        </p:spPr>
+        <p:style>
+          <a:lnRef idx="1">
+            <a:schemeClr val="accent1"/>
+          </a:lnRef>
+          <a:fillRef idx="3">
+            <a:schemeClr val="accent1"/>
+          </a:fillRef>
+          <a:effectRef idx="2">
+            <a:schemeClr val="accent1"/>
+          </a:effectRef>
+          <a:fontRef idx="minor">
+            <a:schemeClr val="lt1"/>
+          </a:fontRef>
+        </p:style>
+        <p:txBody>
+          <a:bodyPr rtlCol="0" anchor="ctr" wrap="square" lIns="109728" rIns="109728"/>
+          <a:lstStyle/>
+          <a:p>
+            <a:pPr algn="ctr"/>
+            <a:r>
+              <a:rPr sz="1200" b="1">
+                <a:solidFill>
+                  <a:srgbClr val="000000"/>
+                </a:solidFill>
+                <a:latin typeface="Calibri"/>
+              </a:rPr>
+              <a:t>TRANSVERSE markers = ideal, but the gauge is too NARROW → EDGE-WIDTH detection (next slide) is the practical route. Keep ENGINEERING stress as the validated basis.</a:t>
+            </a:r>
+          </a:p>
+        </p:txBody>
+      </p:sp>
+      <p:sp>
+        <p:nvSpPr>
+          <p:cNvPr id="12" name="TextBox 11"/>
+          <p:cNvSpPr txBox="1"/>
+          <p:nvPr/>
+        </p:nvSpPr>
+        <p:spPr>
+          <a:xfrm>
+            <a:off x="548640" y="6400800"/>
+            <a:ext cx="11064240" cy="365760"/>
+          </a:xfrm>
+          <a:prstGeom prst="rect">
+            <a:avLst/>
+          </a:prstGeom>
+          <a:noFill/>
+        </p:spPr>
+        <p:txBody>
+          <a:bodyPr wrap="square" lIns="45720" rIns="45720" tIns="18288" bIns="18288" anchor="t">
+            <a:spAutoFit/>
+          </a:bodyPr>
+          <a:lstStyle/>
+          <a:p>
+            <a:pPr algn="l"/>
+            <a:r>
+              <a:rPr sz="1200" b="0" i="1">
+                <a:solidFill>
+                  <a:srgbClr val="707070"/>
+                </a:solidFill>
+                <a:latin typeface="Calibri"/>
+              </a:rPr>
+              <a:t>Current V6 report &amp; plots = engineering stress (nominal 80 mm²). True/Cauchy needs the deforming area; post-necking needs full-field DIC or markers at the neck.</a:t>
+            </a:r>
+          </a:p>
+        </p:txBody>
+      </p:sp>
+      <p:sp>
+        <p:nvSpPr>
+          <p:cNvPr id="13" name="TextBox 12"/>
+          <p:cNvSpPr txBox="1"/>
+          <p:nvPr/>
+        </p:nvSpPr>
+        <p:spPr>
+          <a:xfrm>
+            <a:off x="457200" y="6446520"/>
+            <a:ext cx="640080" cy="274320"/>
+          </a:xfrm>
+          <a:prstGeom prst="rect">
+            <a:avLst/>
+          </a:prstGeom>
+          <a:noFill/>
+        </p:spPr>
+        <p:txBody>
+          <a:bodyPr wrap="square" lIns="45720" rIns="45720" tIns="18288" bIns="18288" anchor="t">
+            <a:spAutoFit/>
+          </a:bodyPr>
+          <a:lstStyle/>
+          <a:p>
+            <a:pPr algn="l"/>
+            <a:r>
+              <a:rPr sz="1000" b="0" i="0">
+                <a:solidFill>
+                  <a:srgbClr val="707070"/>
+                </a:solidFill>
+                <a:latin typeface="Calibri"/>
+              </a:rPr>
+              <a:t>184</a:t>
+            </a:r>
+          </a:p>
+        </p:txBody>
+      </p:sp>
+    </p:spTree>
+  </p:cSld>
+  <p:clrMapOvr>
+    <a:masterClrMapping/>
+  </p:clrMapOvr>
+</p:sld>
+</file>
+
+<file path=ppt/slides/slide45.xml><?xml version="1.0" encoding="utf-8"?>
+<p:sld xmlns:a="http://schemas.openxmlformats.org/drawingml/2006/main" xmlns:p="http://schemas.openxmlformats.org/presentationml/2006/main" xmlns:r="http://schemas.openxmlformats.org/officeDocument/2006/relationships">
+  <p:cSld>
+    <p:spTree>
+      <p:nvGrpSpPr>
+        <p:cNvPr id="1" name=""/>
+        <p:cNvGrpSpPr/>
+        <p:nvPr/>
+      </p:nvGrpSpPr>
+      <p:grpSpPr/>
+      <p:sp>
+        <p:nvSpPr>
+          <p:cNvPr id="2" name="TextBox 1"/>
+          <p:cNvSpPr txBox="1"/>
+          <p:nvPr/>
+        </p:nvSpPr>
+        <p:spPr>
+          <a:xfrm>
+            <a:off x="11155680" y="274320"/>
+            <a:ext cx="914400" cy="274320"/>
+          </a:xfrm>
+          <a:prstGeom prst="rect">
+            <a:avLst/>
+          </a:prstGeom>
+          <a:noFill/>
+        </p:spPr>
+        <p:txBody>
+          <a:bodyPr wrap="square" lIns="45720" rIns="45720" tIns="18288" bIns="18288" anchor="t">
+            <a:spAutoFit/>
+          </a:bodyPr>
+          <a:lstStyle/>
+          <a:p>
+            <a:pPr algn="r"/>
+            <a:r>
+              <a:rPr sz="800" b="1" i="0">
+                <a:solidFill>
+                  <a:srgbClr val="707070"/>
+                </a:solidFill>
+                <a:latin typeface="Calibri"/>
+              </a:rPr>
+              <a:t>JÖNKÖPING UNIVERSITY</a:t>
+            </a:r>
+          </a:p>
+        </p:txBody>
+      </p:sp>
+      <p:sp>
+        <p:nvSpPr>
+          <p:cNvPr id="3" name="Rectangle 2"/>
+          <p:cNvSpPr/>
+          <p:nvPr/>
+        </p:nvSpPr>
+        <p:spPr>
+          <a:xfrm>
+            <a:off x="457200" y="411480"/>
+            <a:ext cx="457200" cy="73152"/>
+          </a:xfrm>
+          <a:prstGeom prst="rect">
+            <a:avLst/>
+          </a:prstGeom>
+          <a:solidFill>
+            <a:srgbClr val="A9D6EF"/>
+          </a:solidFill>
+          <a:ln>
+            <a:noFill/>
+          </a:ln>
+        </p:spPr>
+        <p:style>
+          <a:lnRef idx="1">
+            <a:schemeClr val="accent1"/>
+          </a:lnRef>
+          <a:fillRef idx="3">
+            <a:schemeClr val="accent1"/>
+          </a:fillRef>
+          <a:effectRef idx="2">
+            <a:schemeClr val="accent1"/>
+          </a:effectRef>
+          <a:fontRef idx="minor">
+            <a:schemeClr val="lt1"/>
+          </a:fontRef>
+        </p:style>
+        <p:txBody>
+          <a:bodyPr rtlCol="0" anchor="ctr"/>
+          <a:lstStyle/>
+          <a:p>
+            <a:pPr algn="ctr"/>
+          </a:p>
+        </p:txBody>
+      </p:sp>
+      <p:sp>
+        <p:nvSpPr>
+          <p:cNvPr id="4" name="TextBox 3"/>
+          <p:cNvSpPr txBox="1"/>
+          <p:nvPr/>
+        </p:nvSpPr>
+        <p:spPr>
+          <a:xfrm>
+            <a:off x="457200" y="502920"/>
+            <a:ext cx="11430000" cy="822960"/>
+          </a:xfrm>
+          <a:prstGeom prst="rect">
+            <a:avLst/>
+          </a:prstGeom>
+          <a:noFill/>
+        </p:spPr>
+        <p:txBody>
+          <a:bodyPr wrap="square" lIns="45720" rIns="45720" tIns="18288" bIns="18288" anchor="t">
+            <a:spAutoFit/>
+          </a:bodyPr>
+          <a:lstStyle/>
+          <a:p>
+            <a:pPr algn="l"/>
+            <a:r>
+              <a:rPr sz="3000" b="0" i="0">
+                <a:solidFill>
+                  <a:srgbClr val="000000"/>
+                </a:solidFill>
+                <a:latin typeface="Calibri Light"/>
+              </a:rPr>
               <a:t>MEASURING POISSON'S RATIO &amp; TRUE STRESS — WITHOUT TRANSVERSE DOTS</a:t>
             </a:r>
           </a:p>
@@ -31493,7 +32466,7 @@
                 </a:solidFill>
                 <a:latin typeface="Calibri"/>
               </a:rPr>
-              <a:t>183</a:t>
+              <a:t>185</a:t>
             </a:r>
           </a:p>
         </p:txBody>

--- a/documentation/V6a_8_6_20_slides.pptx
+++ b/documentation/V6a_8_6_20_slides.pptx
@@ -64,6 +64,7 @@
     <p:sldId id="312" r:id="rId63"/>
     <p:sldId id="313" r:id="rId64"/>
     <p:sldId id="314" r:id="rId65"/>
+    <p:sldId id="315" r:id="rId66"/>
   </p:sldIdLst>
   <p:sldSz cx="12191695" cy="6858000" type="screen4x3"/>
   <p:notesSz cx="6858000" cy="9144000"/>
@@ -32923,7 +32924,7 @@
                 </a:solidFill>
                 <a:latin typeface="Calibri Light"/>
               </a:rPr>
-              <a:t>SF9 · CYCLIC — HOW IT WORKS</a:t>
+              <a:t>SF9 · CYCLIC  [T5 · T6.3] — HOW IT WORKS</a:t>
             </a:r>
           </a:p>
         </p:txBody>
@@ -33637,7 +33638,7 @@
                 </a:solidFill>
                 <a:latin typeface="Calibri Light"/>
               </a:rPr>
-              <a:t>SF9 · CYCLIC — OUR RESULTS</a:t>
+              <a:t>SF9 · CYCLIC  [T5 · T6.3] — OUR RESULTS</a:t>
             </a:r>
           </a:p>
         </p:txBody>
@@ -34634,7 +34635,7 @@
                 </a:solidFill>
                 <a:latin typeface="Calibri Light"/>
               </a:rPr>
-              <a:t>SF9 · STAIRCASE — HOW IT WORKS</a:t>
+              <a:t>SF9 · STAIRCASE  [T3 · T4] — HOW IT WORKS</a:t>
             </a:r>
           </a:p>
         </p:txBody>
@@ -35613,7 +35614,7 @@
                 </a:solidFill>
                 <a:latin typeface="Calibri Light"/>
               </a:rPr>
-              <a:t>SF9 · STAIRCASE — OUR RESULTS</a:t>
+              <a:t>SF9 · STAIRCASE  [T3 · T4] — OUR RESULTS</a:t>
             </a:r>
           </a:p>
         </p:txBody>
@@ -36502,7 +36503,7 @@
                 </a:solidFill>
                 <a:latin typeface="Calibri Light"/>
               </a:rPr>
-              <a:t>SF9 · RELAXATION — HOW IT WORKS</a:t>
+              <a:t>SF9 · RELAXATION  [T2] — HOW IT WORKS</a:t>
             </a:r>
           </a:p>
         </p:txBody>
@@ -37176,7 +37177,7 @@
                 </a:solidFill>
                 <a:latin typeface="Calibri Light"/>
               </a:rPr>
-              <a:t>SF9 · RELAXATION — OUR RESULTS</a:t>
+              <a:t>SF9 · RELAXATION  [T2] — OUR RESULTS</a:t>
             </a:r>
           </a:p>
         </p:txBody>
@@ -37925,7 +37926,7 @@
                 </a:solidFill>
                 <a:latin typeface="Calibri Light"/>
               </a:rPr>
-              <a:t>SF9 · CREEP — HOW IT WORKS</a:t>
+              <a:t>SF9 · CREEP  [T1] — HOW IT WORKS</a:t>
             </a:r>
           </a:p>
         </p:txBody>
@@ -38599,7 +38600,7 @@
                 </a:solidFill>
                 <a:latin typeface="Calibri Light"/>
               </a:rPr>
-              <a:t>SF9 · CREEP — OUR RESULTS</a:t>
+              <a:t>SF9 · CREEP  [T1] — OUR RESULTS</a:t>
             </a:r>
           </a:p>
         </p:txBody>
@@ -39348,7 +39349,7 @@
                 </a:solidFill>
                 <a:latin typeface="Calibri Light"/>
               </a:rPr>
-              <a:t>SF9 · STAIRCASE → FRACTURE — HOW IT WORKS</a:t>
+              <a:t>SF9 · STAIRCASE → FRACTURE  [T7.2] — HOW IT WORKS</a:t>
             </a:r>
           </a:p>
         </p:txBody>
@@ -40097,7 +40098,7 @@
                 </a:solidFill>
                 <a:latin typeface="Calibri Light"/>
               </a:rPr>
-              <a:t>SF9 · STAIRCASE → FRACTURE — OUR RESULTS</a:t>
+              <a:t>SF9 · STAIRCASE → FRACTURE  [T7.2] — OUR RESULTS</a:t>
             </a:r>
           </a:p>
         </p:txBody>
@@ -40905,7 +40906,7 @@
                 </a:solidFill>
                 <a:latin typeface="Calibri Light"/>
               </a:rPr>
-              <a:t>SF9 · PROGRESSIVE CYCLIC → FRACTURE — HOW IT WORKS</a:t>
+              <a:t>SF9 · PROGRESSIVE CYCLIC → FRACTURE  [T8] — HOW IT WORKS</a:t>
             </a:r>
           </a:p>
         </p:txBody>
@@ -41654,7 +41655,7 @@
                 </a:solidFill>
                 <a:latin typeface="Calibri Light"/>
               </a:rPr>
-              <a:t>SF9 · PROGRESSIVE CYCLIC → FRACTURE — OUR RESULTS</a:t>
+              <a:t>SF9 · PROGRESSIVE CYCLIC → FRACTURE  [T8] — OUR RESULTS</a:t>
             </a:r>
           </a:p>
         </p:txBody>
@@ -43157,7 +43158,7 @@
                 </a:solidFill>
                 <a:latin typeface="Calibri Light"/>
               </a:rPr>
-              <a:t>SF9 · THE ONE THAT FAILED — T7, AND WHY</a:t>
+              <a:t>SF9 · THE ONE THAT FAILED  [T7] — AND WHY</a:t>
             </a:r>
           </a:p>
         </p:txBody>
@@ -43978,6 +43979,1831 @@
                 <a:latin typeface="Calibri"/>
               </a:rPr>
               <a:t>146</a:t>
+            </a:r>
+          </a:p>
+        </p:txBody>
+      </p:sp>
+    </p:spTree>
+  </p:cSld>
+  <p:clrMapOvr>
+    <a:masterClrMapping/>
+  </p:clrMapOvr>
+</p:sld>
+</file>
+
+<file path=ppt/slides/slide60.xml><?xml version="1.0" encoding="utf-8"?>
+<p:sld xmlns:a="http://schemas.openxmlformats.org/drawingml/2006/main" xmlns:p="http://schemas.openxmlformats.org/presentationml/2006/main" xmlns:r="http://schemas.openxmlformats.org/officeDocument/2006/relationships">
+  <p:cSld>
+    <p:spTree>
+      <p:nvGrpSpPr>
+        <p:cNvPr id="1" name=""/>
+        <p:cNvGrpSpPr/>
+        <p:nvPr/>
+      </p:nvGrpSpPr>
+      <p:grpSpPr/>
+      <p:sp>
+        <p:nvSpPr>
+          <p:cNvPr id="2" name="TextBox 1"/>
+          <p:cNvSpPr txBox="1"/>
+          <p:nvPr/>
+        </p:nvSpPr>
+        <p:spPr>
+          <a:xfrm>
+            <a:off x="11155680" y="274320"/>
+            <a:ext cx="914400" cy="274320"/>
+          </a:xfrm>
+          <a:prstGeom prst="rect">
+            <a:avLst/>
+          </a:prstGeom>
+          <a:noFill/>
+        </p:spPr>
+        <p:txBody>
+          <a:bodyPr wrap="square" lIns="45720" rIns="45720" tIns="18288" bIns="18288" anchor="t">
+            <a:spAutoFit/>
+          </a:bodyPr>
+          <a:lstStyle/>
+          <a:p>
+            <a:pPr algn="r"/>
+            <a:r>
+              <a:rPr sz="800" b="1" i="0">
+                <a:solidFill>
+                  <a:srgbClr val="707070"/>
+                </a:solidFill>
+                <a:latin typeface="Calibri"/>
+              </a:rPr>
+              <a:t>JÖNKÖPING UNIVERSITY</a:t>
+            </a:r>
+          </a:p>
+        </p:txBody>
+      </p:sp>
+      <p:sp>
+        <p:nvSpPr>
+          <p:cNvPr id="3" name="Rectangle 2"/>
+          <p:cNvSpPr/>
+          <p:nvPr/>
+        </p:nvSpPr>
+        <p:spPr>
+          <a:xfrm>
+            <a:off x="457200" y="411480"/>
+            <a:ext cx="457200" cy="73152"/>
+          </a:xfrm>
+          <a:prstGeom prst="rect">
+            <a:avLst/>
+          </a:prstGeom>
+          <a:solidFill>
+            <a:srgbClr val="A9D6EF"/>
+          </a:solidFill>
+          <a:ln>
+            <a:noFill/>
+          </a:ln>
+        </p:spPr>
+        <p:style>
+          <a:lnRef idx="1">
+            <a:schemeClr val="accent1"/>
+          </a:lnRef>
+          <a:fillRef idx="3">
+            <a:schemeClr val="accent1"/>
+          </a:fillRef>
+          <a:effectRef idx="2">
+            <a:schemeClr val="accent1"/>
+          </a:effectRef>
+          <a:fontRef idx="minor">
+            <a:schemeClr val="lt1"/>
+          </a:fontRef>
+        </p:style>
+        <p:txBody>
+          <a:bodyPr rtlCol="0" anchor="ctr"/>
+          <a:lstStyle/>
+          <a:p>
+            <a:pPr algn="ctr"/>
+          </a:p>
+        </p:txBody>
+      </p:sp>
+      <p:sp>
+        <p:nvSpPr>
+          <p:cNvPr id="4" name="TextBox 3"/>
+          <p:cNvSpPr txBox="1"/>
+          <p:nvPr/>
+        </p:nvSpPr>
+        <p:spPr>
+          <a:xfrm>
+            <a:off x="457200" y="502920"/>
+            <a:ext cx="11430000" cy="822960"/>
+          </a:xfrm>
+          <a:prstGeom prst="rect">
+            <a:avLst/>
+          </a:prstGeom>
+          <a:noFill/>
+        </p:spPr>
+        <p:txBody>
+          <a:bodyPr wrap="square" lIns="45720" rIns="45720" tIns="18288" bIns="18288" anchor="t">
+            <a:spAutoFit/>
+          </a:bodyPr>
+          <a:lstStyle/>
+          <a:p>
+            <a:pPr algn="l"/>
+            <a:r>
+              <a:rPr sz="3000" b="0" i="0">
+                <a:solidFill>
+                  <a:srgbClr val="000000"/>
+                </a:solidFill>
+                <a:latin typeface="Calibri Light"/>
+              </a:rPr>
+              <a:t>SF9 — TEST CAMPAIGN REGISTER  (T1–T8)</a:t>
+            </a:r>
+          </a:p>
+        </p:txBody>
+      </p:sp>
+      <p:sp>
+        <p:nvSpPr>
+          <p:cNvPr id="5" name="TextBox 4"/>
+          <p:cNvSpPr txBox="1"/>
+          <p:nvPr/>
+        </p:nvSpPr>
+        <p:spPr>
+          <a:xfrm>
+            <a:off x="457200" y="1042415"/>
+            <a:ext cx="11338560" cy="310896"/>
+          </a:xfrm>
+          <a:prstGeom prst="rect">
+            <a:avLst/>
+          </a:prstGeom>
+          <a:noFill/>
+        </p:spPr>
+        <p:txBody>
+          <a:bodyPr wrap="square" lIns="45720" rIns="45720" tIns="18288" bIns="18288" anchor="t">
+            <a:spAutoFit/>
+          </a:bodyPr>
+          <a:lstStyle/>
+          <a:p>
+            <a:pPr algn="l"/>
+            <a:r>
+              <a:rPr sz="1100" b="0" i="1">
+                <a:solidFill>
+                  <a:srgbClr val="707070"/>
+                </a:solidFill>
+                <a:latin typeface="Calibri"/>
+              </a:rPr>
+              <a:t>Every advanced-mode run, in order. Use the Test ID to tie a slide back to its CSV, and the Slides column to go the other way. Dates are the CSV's own 'Test Date' header — the filename timestamp is a session id and does NOT match (all three T6 attempts share one).</a:t>
+            </a:r>
+          </a:p>
+        </p:txBody>
+      </p:sp>
+      <p:graphicFrame>
+        <p:nvGraphicFramePr>
+          <p:cNvPr id="6" name="Table 5"/>
+          <p:cNvGraphicFramePr>
+            <a:graphicFrameLocks noGrp="1"/>
+          </p:cNvGraphicFramePr>
+          <p:nvPr/>
+        </p:nvGraphicFramePr>
+        <p:xfrm>
+          <a:off x="411480" y="1408176"/>
+          <a:ext cx="11384276" cy="3566160"/>
+        </p:xfrm>
+        <a:graphic>
+          <a:graphicData uri="http://schemas.openxmlformats.org/drawingml/2006/table">
+            <a:tbl>
+              <a:tblPr firstRow="1" bandRow="1">
+                <a:tableStyleId>{5C22544A-7EE6-4342-B048-85BDC9FD1C3A}</a:tableStyleId>
+              </a:tblPr>
+              <a:tblGrid>
+                <a:gridCol w="602053"/>
+                <a:gridCol w="2353480"/>
+                <a:gridCol w="930445"/>
+                <a:gridCol w="1149374"/>
+                <a:gridCol w="5582675"/>
+                <a:gridCol w="766249"/>
+              </a:tblGrid>
+              <a:tr h="297180">
+                <a:tc>
+                  <a:txBody>
+                    <a:bodyPr lIns="54864" rIns="54864" tIns="18288" bIns="18288" wrap="square" anchor="ctr"/>
+                    <a:lstStyle/>
+                    <a:p>
+                      <a:pPr algn="l"/>
+                      <a:r>
+                        <a:rPr sz="1000" b="1">
+                          <a:solidFill>
+                            <a:srgbClr val="FFFFFF"/>
+                          </a:solidFill>
+                          <a:latin typeface="Calibri"/>
+                        </a:rPr>
+                        <a:t>Test</a:t>
+                      </a:r>
+                    </a:p>
+                  </a:txBody>
+                  <a:tcPr>
+                    <a:solidFill>
+                      <a:srgbClr val="143D2F"/>
+                    </a:solidFill>
+                  </a:tcPr>
+                </a:tc>
+                <a:tc>
+                  <a:txBody>
+                    <a:bodyPr lIns="54864" rIns="54864" tIns="18288" bIns="18288" wrap="square" anchor="ctr"/>
+                    <a:lstStyle/>
+                    <a:p>
+                      <a:pPr algn="l"/>
+                      <a:r>
+                        <a:rPr sz="1000" b="1">
+                          <a:solidFill>
+                            <a:srgbClr val="FFFFFF"/>
+                          </a:solidFill>
+                          <a:latin typeface="Calibri"/>
+                        </a:rPr>
+                        <a:t>Mode / variant</a:t>
+                      </a:r>
+                    </a:p>
+                  </a:txBody>
+                  <a:tcPr>
+                    <a:solidFill>
+                      <a:srgbClr val="143D2F"/>
+                    </a:solidFill>
+                  </a:tcPr>
+                </a:tc>
+                <a:tc>
+                  <a:txBody>
+                    <a:bodyPr lIns="54864" rIns="54864" tIns="18288" bIns="18288" wrap="square" anchor="ctr"/>
+                    <a:lstStyle/>
+                    <a:p>
+                      <a:pPr algn="l"/>
+                      <a:r>
+                        <a:rPr sz="1000" b="1">
+                          <a:solidFill>
+                            <a:srgbClr val="FFFFFF"/>
+                          </a:solidFill>
+                          <a:latin typeface="Calibri"/>
+                        </a:rPr>
+                        <a:t>Spec.</a:t>
+                      </a:r>
+                    </a:p>
+                  </a:txBody>
+                  <a:tcPr>
+                    <a:solidFill>
+                      <a:srgbClr val="143D2F"/>
+                    </a:solidFill>
+                  </a:tcPr>
+                </a:tc>
+                <a:tc>
+                  <a:txBody>
+                    <a:bodyPr lIns="54864" rIns="54864" tIns="18288" bIns="18288" wrap="square" anchor="ctr"/>
+                    <a:lstStyle/>
+                    <a:p>
+                      <a:pPr algn="l"/>
+                      <a:r>
+                        <a:rPr sz="1000" b="1">
+                          <a:solidFill>
+                            <a:srgbClr val="FFFFFF"/>
+                          </a:solidFill>
+                          <a:latin typeface="Calibri"/>
+                        </a:rPr>
+                        <a:t>When (2026)</a:t>
+                      </a:r>
+                    </a:p>
+                  </a:txBody>
+                  <a:tcPr>
+                    <a:solidFill>
+                      <a:srgbClr val="143D2F"/>
+                    </a:solidFill>
+                  </a:tcPr>
+                </a:tc>
+                <a:tc>
+                  <a:txBody>
+                    <a:bodyPr lIns="54864" rIns="54864" tIns="18288" bIns="18288" wrap="square" anchor="ctr"/>
+                    <a:lstStyle/>
+                    <a:p>
+                      <a:pPr algn="l"/>
+                      <a:r>
+                        <a:rPr sz="1000" b="1">
+                          <a:solidFill>
+                            <a:srgbClr val="FFFFFF"/>
+                          </a:solidFill>
+                          <a:latin typeface="Calibri"/>
+                        </a:rPr>
+                        <a:t>Headline result</a:t>
+                      </a:r>
+                    </a:p>
+                  </a:txBody>
+                  <a:tcPr>
+                    <a:solidFill>
+                      <a:srgbClr val="143D2F"/>
+                    </a:solidFill>
+                  </a:tcPr>
+                </a:tc>
+                <a:tc>
+                  <a:txBody>
+                    <a:bodyPr lIns="54864" rIns="54864" tIns="18288" bIns="18288" wrap="square" anchor="ctr"/>
+                    <a:lstStyle/>
+                    <a:p>
+                      <a:pPr algn="l"/>
+                      <a:r>
+                        <a:rPr sz="1000" b="1">
+                          <a:solidFill>
+                            <a:srgbClr val="FFFFFF"/>
+                          </a:solidFill>
+                          <a:latin typeface="Calibri"/>
+                        </a:rPr>
+                        <a:t>Slides</a:t>
+                      </a:r>
+                    </a:p>
+                  </a:txBody>
+                  <a:tcPr>
+                    <a:solidFill>
+                      <a:srgbClr val="143D2F"/>
+                    </a:solidFill>
+                  </a:tcPr>
+                </a:tc>
+              </a:tr>
+              <a:tr h="297180">
+                <a:tc>
+                  <a:txBody>
+                    <a:bodyPr lIns="54864" rIns="54864" tIns="18288" bIns="18288" wrap="square" anchor="ctr"/>
+                    <a:lstStyle/>
+                    <a:p>
+                      <a:pPr algn="l"/>
+                      <a:r>
+                        <a:rPr sz="950" b="1">
+                          <a:solidFill>
+                            <a:srgbClr val="000000"/>
+                          </a:solidFill>
+                          <a:latin typeface="Calibri"/>
+                        </a:rPr>
+                        <a:t>T1</a:t>
+                      </a:r>
+                    </a:p>
+                  </a:txBody>
+                  <a:tcPr>
+                    <a:solidFill>
+                      <a:srgbClr val="C8E6C9"/>
+                    </a:solidFill>
+                  </a:tcPr>
+                </a:tc>
+                <a:tc>
+                  <a:txBody>
+                    <a:bodyPr lIns="54864" rIns="54864" tIns="18288" bIns="18288" wrap="square" anchor="ctr"/>
+                    <a:lstStyle/>
+                    <a:p>
+                      <a:pPr algn="l"/>
+                      <a:r>
+                        <a:rPr sz="950" b="0">
+                          <a:solidFill>
+                            <a:srgbClr val="000000"/>
+                          </a:solidFill>
+                          <a:latin typeface="Calibri"/>
+                        </a:rPr>
+                        <a:t>Creep</a:t>
+                      </a:r>
+                    </a:p>
+                  </a:txBody>
+                  <a:tcPr/>
+                </a:tc>
+                <a:tc>
+                  <a:txBody>
+                    <a:bodyPr lIns="54864" rIns="54864" tIns="18288" bIns="18288" wrap="square" anchor="ctr"/>
+                    <a:lstStyle/>
+                    <a:p>
+                      <a:pPr algn="l"/>
+                      <a:r>
+                        <a:rPr sz="950" b="0">
+                          <a:solidFill>
+                            <a:srgbClr val="000000"/>
+                          </a:solidFill>
+                          <a:latin typeface="Calibri"/>
+                        </a:rPr>
+                        <a:t>S20 100 %</a:t>
+                      </a:r>
+                    </a:p>
+                  </a:txBody>
+                  <a:tcPr/>
+                </a:tc>
+                <a:tc>
+                  <a:txBody>
+                    <a:bodyPr lIns="54864" rIns="54864" tIns="18288" bIns="18288" wrap="square" anchor="ctr"/>
+                    <a:lstStyle/>
+                    <a:p>
+                      <a:pPr algn="l"/>
+                      <a:r>
+                        <a:rPr sz="950" b="0">
+                          <a:solidFill>
+                            <a:srgbClr val="000000"/>
+                          </a:solidFill>
+                          <a:latin typeface="Calibri"/>
+                        </a:rPr>
+                        <a:t>08-08 18:28</a:t>
+                      </a:r>
+                    </a:p>
+                  </a:txBody>
+                  <a:tcPr/>
+                </a:tc>
+                <a:tc>
+                  <a:txBody>
+                    <a:bodyPr lIns="54864" rIns="54864" tIns="18288" bIns="18288" wrap="square" anchor="ctr"/>
+                    <a:lstStyle/>
+                    <a:p>
+                      <a:pPr algn="l"/>
+                      <a:r>
+                        <a:rPr sz="950" b="0">
+                          <a:solidFill>
+                            <a:srgbClr val="000000"/>
+                          </a:solidFill>
+                          <a:latin typeface="Calibri"/>
+                        </a:rPr>
+                        <a:t>held 398 ± 2.2 N for 40 s; strain crept +3257 µε</a:t>
+                      </a:r>
+                    </a:p>
+                  </a:txBody>
+                  <a:tcPr/>
+                </a:tc>
+                <a:tc>
+                  <a:txBody>
+                    <a:bodyPr lIns="54864" rIns="54864" tIns="18288" bIns="18288" wrap="square" anchor="ctr"/>
+                    <a:lstStyle/>
+                    <a:p>
+                      <a:pPr algn="l"/>
+                      <a:r>
+                        <a:rPr sz="950" b="0">
+                          <a:solidFill>
+                            <a:srgbClr val="000000"/>
+                          </a:solidFill>
+                          <a:latin typeface="Calibri"/>
+                        </a:rPr>
+                        <a:t>193-194</a:t>
+                      </a:r>
+                    </a:p>
+                  </a:txBody>
+                  <a:tcPr/>
+                </a:tc>
+              </a:tr>
+              <a:tr h="297180">
+                <a:tc>
+                  <a:txBody>
+                    <a:bodyPr lIns="54864" rIns="54864" tIns="18288" bIns="18288" wrap="square" anchor="ctr"/>
+                    <a:lstStyle/>
+                    <a:p>
+                      <a:pPr algn="l"/>
+                      <a:r>
+                        <a:rPr sz="950" b="1">
+                          <a:solidFill>
+                            <a:srgbClr val="000000"/>
+                          </a:solidFill>
+                          <a:latin typeface="Calibri"/>
+                        </a:rPr>
+                        <a:t>T2</a:t>
+                      </a:r>
+                    </a:p>
+                  </a:txBody>
+                  <a:tcPr>
+                    <a:solidFill>
+                      <a:srgbClr val="C8E6C9"/>
+                    </a:solidFill>
+                  </a:tcPr>
+                </a:tc>
+                <a:tc>
+                  <a:txBody>
+                    <a:bodyPr lIns="54864" rIns="54864" tIns="18288" bIns="18288" wrap="square" anchor="ctr"/>
+                    <a:lstStyle/>
+                    <a:p>
+                      <a:pPr algn="l"/>
+                      <a:r>
+                        <a:rPr sz="950" b="0">
+                          <a:solidFill>
+                            <a:srgbClr val="000000"/>
+                          </a:solidFill>
+                          <a:latin typeface="Calibri"/>
+                        </a:rPr>
+                        <a:t>Relaxation</a:t>
+                      </a:r>
+                    </a:p>
+                  </a:txBody>
+                  <a:tcPr/>
+                </a:tc>
+                <a:tc>
+                  <a:txBody>
+                    <a:bodyPr lIns="54864" rIns="54864" tIns="18288" bIns="18288" wrap="square" anchor="ctr"/>
+                    <a:lstStyle/>
+                    <a:p>
+                      <a:pPr algn="l"/>
+                      <a:r>
+                        <a:rPr sz="950" b="0">
+                          <a:solidFill>
+                            <a:srgbClr val="000000"/>
+                          </a:solidFill>
+                          <a:latin typeface="Calibri"/>
+                        </a:rPr>
+                        <a:t>S20 100 %</a:t>
+                      </a:r>
+                    </a:p>
+                  </a:txBody>
+                  <a:tcPr/>
+                </a:tc>
+                <a:tc>
+                  <a:txBody>
+                    <a:bodyPr lIns="54864" rIns="54864" tIns="18288" bIns="18288" wrap="square" anchor="ctr"/>
+                    <a:lstStyle/>
+                    <a:p>
+                      <a:pPr algn="l"/>
+                      <a:r>
+                        <a:rPr sz="950" b="0">
+                          <a:solidFill>
+                            <a:srgbClr val="000000"/>
+                          </a:solidFill>
+                          <a:latin typeface="Calibri"/>
+                        </a:rPr>
+                        <a:t>08-08 18:34</a:t>
+                      </a:r>
+                    </a:p>
+                  </a:txBody>
+                  <a:tcPr/>
+                </a:tc>
+                <a:tc>
+                  <a:txBody>
+                    <a:bodyPr lIns="54864" rIns="54864" tIns="18288" bIns="18288" wrap="square" anchor="ctr"/>
+                    <a:lstStyle/>
+                    <a:p>
+                      <a:pPr algn="l"/>
+                      <a:r>
+                        <a:rPr sz="950" b="0">
+                          <a:solidFill>
+                            <a:srgbClr val="000000"/>
+                          </a:solidFill>
+                          <a:latin typeface="Calibri"/>
+                        </a:rPr>
+                        <a:t>ε pinned at 0.01011; force decayed 2146 → 2040 N (4.9 %)</a:t>
+                      </a:r>
+                    </a:p>
+                  </a:txBody>
+                  <a:tcPr/>
+                </a:tc>
+                <a:tc>
+                  <a:txBody>
+                    <a:bodyPr lIns="54864" rIns="54864" tIns="18288" bIns="18288" wrap="square" anchor="ctr"/>
+                    <a:lstStyle/>
+                    <a:p>
+                      <a:pPr algn="l"/>
+                      <a:r>
+                        <a:rPr sz="950" b="0">
+                          <a:solidFill>
+                            <a:srgbClr val="000000"/>
+                          </a:solidFill>
+                          <a:latin typeface="Calibri"/>
+                        </a:rPr>
+                        <a:t>191-192</a:t>
+                      </a:r>
+                    </a:p>
+                  </a:txBody>
+                  <a:tcPr/>
+                </a:tc>
+              </a:tr>
+              <a:tr h="297180">
+                <a:tc>
+                  <a:txBody>
+                    <a:bodyPr lIns="54864" rIns="54864" tIns="18288" bIns="18288" wrap="square" anchor="ctr"/>
+                    <a:lstStyle/>
+                    <a:p>
+                      <a:pPr algn="l"/>
+                      <a:r>
+                        <a:rPr sz="950" b="1">
+                          <a:solidFill>
+                            <a:srgbClr val="000000"/>
+                          </a:solidFill>
+                          <a:latin typeface="Calibri"/>
+                        </a:rPr>
+                        <a:t>T3</a:t>
+                      </a:r>
+                    </a:p>
+                  </a:txBody>
+                  <a:tcPr>
+                    <a:solidFill>
+                      <a:srgbClr val="C8E6C9"/>
+                    </a:solidFill>
+                  </a:tcPr>
+                </a:tc>
+                <a:tc>
+                  <a:txBody>
+                    <a:bodyPr lIns="54864" rIns="54864" tIns="18288" bIns="18288" wrap="square" anchor="ctr"/>
+                    <a:lstStyle/>
+                    <a:p>
+                      <a:pPr algn="l"/>
+                      <a:r>
+                        <a:rPr sz="950" b="0">
+                          <a:solidFill>
+                            <a:srgbClr val="000000"/>
+                          </a:solidFill>
+                          <a:latin typeface="Calibri"/>
+                        </a:rPr>
+                        <a:t>Staircase · Linear ramp</a:t>
+                      </a:r>
+                    </a:p>
+                  </a:txBody>
+                  <a:tcPr/>
+                </a:tc>
+                <a:tc>
+                  <a:txBody>
+                    <a:bodyPr lIns="54864" rIns="54864" tIns="18288" bIns="18288" wrap="square" anchor="ctr"/>
+                    <a:lstStyle/>
+                    <a:p>
+                      <a:pPr algn="l"/>
+                      <a:r>
+                        <a:rPr sz="950" b="0">
+                          <a:solidFill>
+                            <a:srgbClr val="000000"/>
+                          </a:solidFill>
+                          <a:latin typeface="Calibri"/>
+                        </a:rPr>
+                        <a:t>S20 100 %</a:t>
+                      </a:r>
+                    </a:p>
+                  </a:txBody>
+                  <a:tcPr/>
+                </a:tc>
+                <a:tc>
+                  <a:txBody>
+                    <a:bodyPr lIns="54864" rIns="54864" tIns="18288" bIns="18288" wrap="square" anchor="ctr"/>
+                    <a:lstStyle/>
+                    <a:p>
+                      <a:pPr algn="l"/>
+                      <a:r>
+                        <a:rPr sz="950" b="0">
+                          <a:solidFill>
+                            <a:srgbClr val="000000"/>
+                          </a:solidFill>
+                          <a:latin typeface="Calibri"/>
+                        </a:rPr>
+                        <a:t>08-08 19:37</a:t>
+                      </a:r>
+                    </a:p>
+                  </a:txBody>
+                  <a:tcPr/>
+                </a:tc>
+                <a:tc>
+                  <a:txBody>
+                    <a:bodyPr lIns="54864" rIns="54864" tIns="18288" bIns="18288" wrap="square" anchor="ctr"/>
+                    <a:lstStyle/>
+                    <a:p>
+                      <a:pPr algn="l"/>
+                      <a:r>
+                        <a:rPr sz="950" b="0">
+                          <a:solidFill>
+                            <a:srgbClr val="000000"/>
+                          </a:solidFill>
+                          <a:latin typeface="Calibri"/>
+                        </a:rPr>
+                        <a:t>3 levels / 20 s dwells — arrival overshoot +45/+47/+53 N</a:t>
+                      </a:r>
+                    </a:p>
+                  </a:txBody>
+                  <a:tcPr/>
+                </a:tc>
+                <a:tc>
+                  <a:txBody>
+                    <a:bodyPr lIns="54864" rIns="54864" tIns="18288" bIns="18288" wrap="square" anchor="ctr"/>
+                    <a:lstStyle/>
+                    <a:p>
+                      <a:pPr algn="l"/>
+                      <a:r>
+                        <a:rPr sz="950" b="0">
+                          <a:solidFill>
+                            <a:srgbClr val="000000"/>
+                          </a:solidFill>
+                          <a:latin typeface="Calibri"/>
+                        </a:rPr>
+                        <a:t>189-190</a:t>
+                      </a:r>
+                    </a:p>
+                  </a:txBody>
+                  <a:tcPr/>
+                </a:tc>
+              </a:tr>
+              <a:tr h="297180">
+                <a:tc>
+                  <a:txBody>
+                    <a:bodyPr lIns="54864" rIns="54864" tIns="18288" bIns="18288" wrap="square" anchor="ctr"/>
+                    <a:lstStyle/>
+                    <a:p>
+                      <a:pPr algn="l"/>
+                      <a:r>
+                        <a:rPr sz="950" b="1">
+                          <a:solidFill>
+                            <a:srgbClr val="000000"/>
+                          </a:solidFill>
+                          <a:latin typeface="Calibri"/>
+                        </a:rPr>
+                        <a:t>T4</a:t>
+                      </a:r>
+                    </a:p>
+                  </a:txBody>
+                  <a:tcPr>
+                    <a:solidFill>
+                      <a:srgbClr val="C8E6C9"/>
+                    </a:solidFill>
+                  </a:tcPr>
+                </a:tc>
+                <a:tc>
+                  <a:txBody>
+                    <a:bodyPr lIns="54864" rIns="54864" tIns="18288" bIns="18288" wrap="square" anchor="ctr"/>
+                    <a:lstStyle/>
+                    <a:p>
+                      <a:pPr algn="l"/>
+                      <a:r>
+                        <a:rPr sz="950" b="0">
+                          <a:solidFill>
+                            <a:srgbClr val="000000"/>
+                          </a:solidFill>
+                          <a:latin typeface="Calibri"/>
+                        </a:rPr>
+                        <a:t>Staircase · Smooth ramp</a:t>
+                      </a:r>
+                    </a:p>
+                  </a:txBody>
+                  <a:tcPr/>
+                </a:tc>
+                <a:tc>
+                  <a:txBody>
+                    <a:bodyPr lIns="54864" rIns="54864" tIns="18288" bIns="18288" wrap="square" anchor="ctr"/>
+                    <a:lstStyle/>
+                    <a:p>
+                      <a:pPr algn="l"/>
+                      <a:r>
+                        <a:rPr sz="950" b="0">
+                          <a:solidFill>
+                            <a:srgbClr val="000000"/>
+                          </a:solidFill>
+                          <a:latin typeface="Calibri"/>
+                        </a:rPr>
+                        <a:t>S20 100 %</a:t>
+                      </a:r>
+                    </a:p>
+                  </a:txBody>
+                  <a:tcPr/>
+                </a:tc>
+                <a:tc>
+                  <a:txBody>
+                    <a:bodyPr lIns="54864" rIns="54864" tIns="18288" bIns="18288" wrap="square" anchor="ctr"/>
+                    <a:lstStyle/>
+                    <a:p>
+                      <a:pPr algn="l"/>
+                      <a:r>
+                        <a:rPr sz="950" b="0">
+                          <a:solidFill>
+                            <a:srgbClr val="000000"/>
+                          </a:solidFill>
+                          <a:latin typeface="Calibri"/>
+                        </a:rPr>
+                        <a:t>08-08 19:42</a:t>
+                      </a:r>
+                    </a:p>
+                  </a:txBody>
+                  <a:tcPr/>
+                </a:tc>
+                <a:tc>
+                  <a:txBody>
+                    <a:bodyPr lIns="54864" rIns="54864" tIns="18288" bIns="18288" wrap="square" anchor="ctr"/>
+                    <a:lstStyle/>
+                    <a:p>
+                      <a:pPr algn="l"/>
+                      <a:r>
+                        <a:rPr sz="950" b="0">
+                          <a:solidFill>
+                            <a:srgbClr val="000000"/>
+                          </a:solidFill>
+                          <a:latin typeface="Calibri"/>
+                        </a:rPr>
+                        <a:t>same levels — overshoot +6/+5/+8 N  ▸ the taper fix</a:t>
+                      </a:r>
+                    </a:p>
+                  </a:txBody>
+                  <a:tcPr/>
+                </a:tc>
+                <a:tc>
+                  <a:txBody>
+                    <a:bodyPr lIns="54864" rIns="54864" tIns="18288" bIns="18288" wrap="square" anchor="ctr"/>
+                    <a:lstStyle/>
+                    <a:p>
+                      <a:pPr algn="l"/>
+                      <a:r>
+                        <a:rPr sz="950" b="0">
+                          <a:solidFill>
+                            <a:srgbClr val="000000"/>
+                          </a:solidFill>
+                          <a:latin typeface="Calibri"/>
+                        </a:rPr>
+                        <a:t>189-190</a:t>
+                      </a:r>
+                    </a:p>
+                  </a:txBody>
+                  <a:tcPr/>
+                </a:tc>
+              </a:tr>
+              <a:tr h="297180">
+                <a:tc>
+                  <a:txBody>
+                    <a:bodyPr lIns="54864" rIns="54864" tIns="18288" bIns="18288" wrap="square" anchor="ctr"/>
+                    <a:lstStyle/>
+                    <a:p>
+                      <a:pPr algn="l"/>
+                      <a:r>
+                        <a:rPr sz="950" b="1">
+                          <a:solidFill>
+                            <a:srgbClr val="000000"/>
+                          </a:solidFill>
+                          <a:latin typeface="Calibri"/>
+                        </a:rPr>
+                        <a:t>T5</a:t>
+                      </a:r>
+                    </a:p>
+                  </a:txBody>
+                  <a:tcPr>
+                    <a:solidFill>
+                      <a:srgbClr val="C8E6C9"/>
+                    </a:solidFill>
+                  </a:tcPr>
+                </a:tc>
+                <a:tc>
+                  <a:txBody>
+                    <a:bodyPr lIns="54864" rIns="54864" tIns="18288" bIns="18288" wrap="square" anchor="ctr"/>
+                    <a:lstStyle/>
+                    <a:p>
+                      <a:pPr algn="l"/>
+                      <a:r>
+                        <a:rPr sz="950" b="0">
+                          <a:solidFill>
+                            <a:srgbClr val="000000"/>
+                          </a:solidFill>
+                          <a:latin typeface="Calibri"/>
+                        </a:rPr>
+                        <a:t>Cyclic · Triangle</a:t>
+                      </a:r>
+                    </a:p>
+                  </a:txBody>
+                  <a:tcPr/>
+                </a:tc>
+                <a:tc>
+                  <a:txBody>
+                    <a:bodyPr lIns="54864" rIns="54864" tIns="18288" bIns="18288" wrap="square" anchor="ctr"/>
+                    <a:lstStyle/>
+                    <a:p>
+                      <a:pPr algn="l"/>
+                      <a:r>
+                        <a:rPr sz="950" b="0">
+                          <a:solidFill>
+                            <a:srgbClr val="000000"/>
+                          </a:solidFill>
+                          <a:latin typeface="Calibri"/>
+                        </a:rPr>
+                        <a:t>S20 100 %</a:t>
+                      </a:r>
+                    </a:p>
+                  </a:txBody>
+                  <a:tcPr/>
+                </a:tc>
+                <a:tc>
+                  <a:txBody>
+                    <a:bodyPr lIns="54864" rIns="54864" tIns="18288" bIns="18288" wrap="square" anchor="ctr"/>
+                    <a:lstStyle/>
+                    <a:p>
+                      <a:pPr algn="l"/>
+                      <a:r>
+                        <a:rPr sz="950" b="0">
+                          <a:solidFill>
+                            <a:srgbClr val="000000"/>
+                          </a:solidFill>
+                          <a:latin typeface="Calibri"/>
+                        </a:rPr>
+                        <a:t>08-09 13:10</a:t>
+                      </a:r>
+                    </a:p>
+                  </a:txBody>
+                  <a:tcPr/>
+                </a:tc>
+                <a:tc>
+                  <a:txBody>
+                    <a:bodyPr lIns="54864" rIns="54864" tIns="18288" bIns="18288" wrap="square" anchor="ctr"/>
+                    <a:lstStyle/>
+                    <a:p>
+                      <a:pPr algn="l"/>
+                      <a:r>
+                        <a:rPr sz="950" b="0">
+                          <a:solidFill>
+                            <a:srgbClr val="000000"/>
+                          </a:solidFill>
+                          <a:latin typeface="Calibri"/>
+                        </a:rPr>
+                        <a:t>5 cycles 100/500 N in 115 s; peak error 71 N (no lead yet)</a:t>
+                      </a:r>
+                    </a:p>
+                  </a:txBody>
+                  <a:tcPr/>
+                </a:tc>
+                <a:tc>
+                  <a:txBody>
+                    <a:bodyPr lIns="54864" rIns="54864" tIns="18288" bIns="18288" wrap="square" anchor="ctr"/>
+                    <a:lstStyle/>
+                    <a:p>
+                      <a:pPr algn="l"/>
+                      <a:r>
+                        <a:rPr sz="950" b="0">
+                          <a:solidFill>
+                            <a:srgbClr val="000000"/>
+                          </a:solidFill>
+                          <a:latin typeface="Calibri"/>
+                        </a:rPr>
+                        <a:t>187-188</a:t>
+                      </a:r>
+                    </a:p>
+                  </a:txBody>
+                  <a:tcPr/>
+                </a:tc>
+              </a:tr>
+              <a:tr h="297180">
+                <a:tc>
+                  <a:txBody>
+                    <a:bodyPr lIns="54864" rIns="54864" tIns="18288" bIns="18288" wrap="square" anchor="ctr"/>
+                    <a:lstStyle/>
+                    <a:p>
+                      <a:pPr algn="l"/>
+                      <a:r>
+                        <a:rPr sz="950" b="1">
+                          <a:solidFill>
+                            <a:srgbClr val="000000"/>
+                          </a:solidFill>
+                          <a:latin typeface="Calibri"/>
+                        </a:rPr>
+                        <a:t>T6</a:t>
+                      </a:r>
+                    </a:p>
+                  </a:txBody>
+                  <a:tcPr>
+                    <a:solidFill>
+                      <a:srgbClr val="FFF3CD"/>
+                    </a:solidFill>
+                  </a:tcPr>
+                </a:tc>
+                <a:tc>
+                  <a:txBody>
+                    <a:bodyPr lIns="54864" rIns="54864" tIns="18288" bIns="18288" wrap="square" anchor="ctr"/>
+                    <a:lstStyle/>
+                    <a:p>
+                      <a:pPr algn="l"/>
+                      <a:r>
+                        <a:rPr sz="950" b="0">
+                          <a:solidFill>
+                            <a:srgbClr val="000000"/>
+                          </a:solidFill>
+                          <a:latin typeface="Calibri"/>
+                        </a:rPr>
+                        <a:t>Cyclic · Sine — 1st try</a:t>
+                      </a:r>
+                    </a:p>
+                  </a:txBody>
+                  <a:tcPr/>
+                </a:tc>
+                <a:tc>
+                  <a:txBody>
+                    <a:bodyPr lIns="54864" rIns="54864" tIns="18288" bIns="18288" wrap="square" anchor="ctr"/>
+                    <a:lstStyle/>
+                    <a:p>
+                      <a:pPr algn="l"/>
+                      <a:r>
+                        <a:rPr sz="950" b="0">
+                          <a:solidFill>
+                            <a:srgbClr val="000000"/>
+                          </a:solidFill>
+                          <a:latin typeface="Calibri"/>
+                        </a:rPr>
+                        <a:t>S20 100 %</a:t>
+                      </a:r>
+                    </a:p>
+                  </a:txBody>
+                  <a:tcPr/>
+                </a:tc>
+                <a:tc>
+                  <a:txBody>
+                    <a:bodyPr lIns="54864" rIns="54864" tIns="18288" bIns="18288" wrap="square" anchor="ctr"/>
+                    <a:lstStyle/>
+                    <a:p>
+                      <a:pPr algn="l"/>
+                      <a:r>
+                        <a:rPr sz="950" b="0">
+                          <a:solidFill>
+                            <a:srgbClr val="000000"/>
+                          </a:solidFill>
+                          <a:latin typeface="Calibri"/>
+                        </a:rPr>
+                        <a:t>08-09 13:16</a:t>
+                      </a:r>
+                    </a:p>
+                  </a:txBody>
+                  <a:tcPr/>
+                </a:tc>
+                <a:tc>
+                  <a:txBody>
+                    <a:bodyPr lIns="54864" rIns="54864" tIns="18288" bIns="18288" wrap="square" anchor="ctr"/>
+                    <a:lstStyle/>
+                    <a:p>
+                      <a:pPr algn="l"/>
+                      <a:r>
+                        <a:rPr sz="950" b="0">
+                          <a:solidFill>
+                            <a:srgbClr val="000000"/>
+                          </a:solidFill>
+                          <a:latin typeface="Calibri"/>
+                        </a:rPr>
+                        <a:t>accurate (8 N) but took 222 s — ~2× too slow, flat bottoms ▸ velocity-law bug found</a:t>
+                      </a:r>
+                    </a:p>
+                  </a:txBody>
+                  <a:tcPr>
+                    <a:solidFill>
+                      <a:srgbClr val="FFF3CD"/>
+                    </a:solidFill>
+                  </a:tcPr>
+                </a:tc>
+                <a:tc>
+                  <a:txBody>
+                    <a:bodyPr lIns="54864" rIns="54864" tIns="18288" bIns="18288" wrap="square" anchor="ctr"/>
+                    <a:lstStyle/>
+                    <a:p>
+                      <a:pPr algn="l"/>
+                      <a:r>
+                        <a:rPr sz="950" b="0">
+                          <a:solidFill>
+                            <a:srgbClr val="000000"/>
+                          </a:solidFill>
+                          <a:latin typeface="Calibri"/>
+                        </a:rPr>
+                        <a:t>—</a:t>
+                      </a:r>
+                    </a:p>
+                  </a:txBody>
+                  <a:tcPr/>
+                </a:tc>
+              </a:tr>
+              <a:tr h="297180">
+                <a:tc>
+                  <a:txBody>
+                    <a:bodyPr lIns="54864" rIns="54864" tIns="18288" bIns="18288" wrap="square" anchor="ctr"/>
+                    <a:lstStyle/>
+                    <a:p>
+                      <a:pPr algn="l"/>
+                      <a:r>
+                        <a:rPr sz="950" b="1">
+                          <a:solidFill>
+                            <a:srgbClr val="000000"/>
+                          </a:solidFill>
+                          <a:latin typeface="Calibri"/>
+                        </a:rPr>
+                        <a:t>T6.2</a:t>
+                      </a:r>
+                    </a:p>
+                  </a:txBody>
+                  <a:tcPr>
+                    <a:solidFill>
+                      <a:srgbClr val="FFF3CD"/>
+                    </a:solidFill>
+                  </a:tcPr>
+                </a:tc>
+                <a:tc>
+                  <a:txBody>
+                    <a:bodyPr lIns="54864" rIns="54864" tIns="18288" bIns="18288" wrap="square" anchor="ctr"/>
+                    <a:lstStyle/>
+                    <a:p>
+                      <a:pPr algn="l"/>
+                      <a:r>
+                        <a:rPr sz="950" b="0">
+                          <a:solidFill>
+                            <a:srgbClr val="000000"/>
+                          </a:solidFill>
+                          <a:latin typeface="Calibri"/>
+                        </a:rPr>
+                        <a:t>Cyclic · Sine — 2nd try</a:t>
+                      </a:r>
+                    </a:p>
+                  </a:txBody>
+                  <a:tcPr/>
+                </a:tc>
+                <a:tc>
+                  <a:txBody>
+                    <a:bodyPr lIns="54864" rIns="54864" tIns="18288" bIns="18288" wrap="square" anchor="ctr"/>
+                    <a:lstStyle/>
+                    <a:p>
+                      <a:pPr algn="l"/>
+                      <a:r>
+                        <a:rPr sz="950" b="0">
+                          <a:solidFill>
+                            <a:srgbClr val="000000"/>
+                          </a:solidFill>
+                          <a:latin typeface="Calibri"/>
+                        </a:rPr>
+                        <a:t>S20 100 %</a:t>
+                      </a:r>
+                    </a:p>
+                  </a:txBody>
+                  <a:tcPr/>
+                </a:tc>
+                <a:tc>
+                  <a:txBody>
+                    <a:bodyPr lIns="54864" rIns="54864" tIns="18288" bIns="18288" wrap="square" anchor="ctr"/>
+                    <a:lstStyle/>
+                    <a:p>
+                      <a:pPr algn="l"/>
+                      <a:r>
+                        <a:rPr sz="950" b="0">
+                          <a:solidFill>
+                            <a:srgbClr val="000000"/>
+                          </a:solidFill>
+                          <a:latin typeface="Calibri"/>
+                        </a:rPr>
+                        <a:t>08-09 14:03</a:t>
+                      </a:r>
+                    </a:p>
+                  </a:txBody>
+                  <a:tcPr/>
+                </a:tc>
+                <a:tc>
+                  <a:txBody>
+                    <a:bodyPr lIns="54864" rIns="54864" tIns="18288" bIns="18288" wrap="square" anchor="ctr"/>
+                    <a:lstStyle/>
+                    <a:p>
+                      <a:pPr algn="l"/>
+                      <a:r>
+                        <a:rPr sz="950" b="0">
+                          <a:solidFill>
+                            <a:srgbClr val="000000"/>
+                          </a:solidFill>
+                          <a:latin typeface="Calibri"/>
+                        </a:rPr>
+                        <a:t>speed fixed (117 s) but peaks flat at +15 N — no convergence ▸ 2 structural fixes</a:t>
+                      </a:r>
+                    </a:p>
+                  </a:txBody>
+                  <a:tcPr>
+                    <a:solidFill>
+                      <a:srgbClr val="FFF3CD"/>
+                    </a:solidFill>
+                  </a:tcPr>
+                </a:tc>
+                <a:tc>
+                  <a:txBody>
+                    <a:bodyPr lIns="54864" rIns="54864" tIns="18288" bIns="18288" wrap="square" anchor="ctr"/>
+                    <a:lstStyle/>
+                    <a:p>
+                      <a:pPr algn="l"/>
+                      <a:r>
+                        <a:rPr sz="950" b="0">
+                          <a:solidFill>
+                            <a:srgbClr val="000000"/>
+                          </a:solidFill>
+                          <a:latin typeface="Calibri"/>
+                        </a:rPr>
+                        <a:t>—</a:t>
+                      </a:r>
+                    </a:p>
+                  </a:txBody>
+                  <a:tcPr/>
+                </a:tc>
+              </a:tr>
+              <a:tr h="297180">
+                <a:tc>
+                  <a:txBody>
+                    <a:bodyPr lIns="54864" rIns="54864" tIns="18288" bIns="18288" wrap="square" anchor="ctr"/>
+                    <a:lstStyle/>
+                    <a:p>
+                      <a:pPr algn="l"/>
+                      <a:r>
+                        <a:rPr sz="950" b="1">
+                          <a:solidFill>
+                            <a:srgbClr val="000000"/>
+                          </a:solidFill>
+                          <a:latin typeface="Calibri"/>
+                        </a:rPr>
+                        <a:t>T6.3</a:t>
+                      </a:r>
+                    </a:p>
+                  </a:txBody>
+                  <a:tcPr>
+                    <a:solidFill>
+                      <a:srgbClr val="C8E6C9"/>
+                    </a:solidFill>
+                  </a:tcPr>
+                </a:tc>
+                <a:tc>
+                  <a:txBody>
+                    <a:bodyPr lIns="54864" rIns="54864" tIns="18288" bIns="18288" wrap="square" anchor="ctr"/>
+                    <a:lstStyle/>
+                    <a:p>
+                      <a:pPr algn="l"/>
+                      <a:r>
+                        <a:rPr sz="950" b="0">
+                          <a:solidFill>
+                            <a:srgbClr val="000000"/>
+                          </a:solidFill>
+                          <a:latin typeface="Calibri"/>
+                        </a:rPr>
+                        <a:t>Cyclic · Sine — final</a:t>
+                      </a:r>
+                    </a:p>
+                  </a:txBody>
+                  <a:tcPr/>
+                </a:tc>
+                <a:tc>
+                  <a:txBody>
+                    <a:bodyPr lIns="54864" rIns="54864" tIns="18288" bIns="18288" wrap="square" anchor="ctr"/>
+                    <a:lstStyle/>
+                    <a:p>
+                      <a:pPr algn="l"/>
+                      <a:r>
+                        <a:rPr sz="950" b="0">
+                          <a:solidFill>
+                            <a:srgbClr val="000000"/>
+                          </a:solidFill>
+                          <a:latin typeface="Calibri"/>
+                        </a:rPr>
+                        <a:t>S20 100 %</a:t>
+                      </a:r>
+                    </a:p>
+                  </a:txBody>
+                  <a:tcPr/>
+                </a:tc>
+                <a:tc>
+                  <a:txBody>
+                    <a:bodyPr lIns="54864" rIns="54864" tIns="18288" bIns="18288" wrap="square" anchor="ctr"/>
+                    <a:lstStyle/>
+                    <a:p>
+                      <a:pPr algn="l"/>
+                      <a:r>
+                        <a:rPr sz="950" b="0">
+                          <a:solidFill>
+                            <a:srgbClr val="000000"/>
+                          </a:solidFill>
+                          <a:latin typeface="Calibri"/>
+                        </a:rPr>
+                        <a:t>08-09 14:25</a:t>
+                      </a:r>
+                    </a:p>
+                  </a:txBody>
+                  <a:tcPr/>
+                </a:tc>
+                <a:tc>
+                  <a:txBody>
+                    <a:bodyPr lIns="54864" rIns="54864" tIns="18288" bIns="18288" wrap="square" anchor="ctr"/>
+                    <a:lstStyle/>
+                    <a:p>
+                      <a:pPr algn="l"/>
+                      <a:r>
+                        <a:rPr sz="950" b="0">
+                          <a:solidFill>
+                            <a:srgbClr val="000000"/>
+                          </a:solidFill>
+                          <a:latin typeface="Calibri"/>
+                        </a:rPr>
+                        <a:t>138 s, peak error 15 N, and peaks CONVERGE 528 → 500 N</a:t>
+                      </a:r>
+                    </a:p>
+                  </a:txBody>
+                  <a:tcPr/>
+                </a:tc>
+                <a:tc>
+                  <a:txBody>
+                    <a:bodyPr lIns="54864" rIns="54864" tIns="18288" bIns="18288" wrap="square" anchor="ctr"/>
+                    <a:lstStyle/>
+                    <a:p>
+                      <a:pPr algn="l"/>
+                      <a:r>
+                        <a:rPr sz="950" b="0">
+                          <a:solidFill>
+                            <a:srgbClr val="000000"/>
+                          </a:solidFill>
+                          <a:latin typeface="Calibri"/>
+                        </a:rPr>
+                        <a:t>187-188</a:t>
+                      </a:r>
+                    </a:p>
+                  </a:txBody>
+                  <a:tcPr/>
+                </a:tc>
+              </a:tr>
+              <a:tr h="297180">
+                <a:tc>
+                  <a:txBody>
+                    <a:bodyPr lIns="54864" rIns="54864" tIns="18288" bIns="18288" wrap="square" anchor="ctr"/>
+                    <a:lstStyle/>
+                    <a:p>
+                      <a:pPr algn="l"/>
+                      <a:r>
+                        <a:rPr sz="950" b="1">
+                          <a:solidFill>
+                            <a:srgbClr val="000000"/>
+                          </a:solidFill>
+                          <a:latin typeface="Calibri"/>
+                        </a:rPr>
+                        <a:t>T7</a:t>
+                      </a:r>
+                    </a:p>
+                  </a:txBody>
+                  <a:tcPr>
+                    <a:solidFill>
+                      <a:srgbClr val="FFCDD2"/>
+                    </a:solidFill>
+                  </a:tcPr>
+                </a:tc>
+                <a:tc>
+                  <a:txBody>
+                    <a:bodyPr lIns="54864" rIns="54864" tIns="18288" bIns="18288" wrap="square" anchor="ctr"/>
+                    <a:lstStyle/>
+                    <a:p>
+                      <a:pPr algn="l"/>
+                      <a:r>
+                        <a:rPr sz="950" b="0">
+                          <a:solidFill>
+                            <a:srgbClr val="000000"/>
+                          </a:solidFill>
+                          <a:latin typeface="Calibri"/>
+                        </a:rPr>
+                        <a:t>Staircase → FRACTURE</a:t>
+                      </a:r>
+                    </a:p>
+                  </a:txBody>
+                  <a:tcPr/>
+                </a:tc>
+                <a:tc>
+                  <a:txBody>
+                    <a:bodyPr lIns="54864" rIns="54864" tIns="18288" bIns="18288" wrap="square" anchor="ctr"/>
+                    <a:lstStyle/>
+                    <a:p>
+                      <a:pPr algn="l"/>
+                      <a:r>
+                        <a:rPr sz="950" b="0">
+                          <a:solidFill>
+                            <a:srgbClr val="000000"/>
+                          </a:solidFill>
+                          <a:latin typeface="Calibri"/>
+                        </a:rPr>
+                        <a:t>S20 100 %</a:t>
+                      </a:r>
+                    </a:p>
+                  </a:txBody>
+                  <a:tcPr/>
+                </a:tc>
+                <a:tc>
+                  <a:txBody>
+                    <a:bodyPr lIns="54864" rIns="54864" tIns="18288" bIns="18288" wrap="square" anchor="ctr"/>
+                    <a:lstStyle/>
+                    <a:p>
+                      <a:pPr algn="l"/>
+                      <a:r>
+                        <a:rPr sz="950" b="0">
+                          <a:solidFill>
+                            <a:srgbClr val="000000"/>
+                          </a:solidFill>
+                          <a:latin typeface="Calibri"/>
+                        </a:rPr>
+                        <a:t>08-09 15:20</a:t>
+                      </a:r>
+                    </a:p>
+                  </a:txBody>
+                  <a:tcPr/>
+                </a:tc>
+                <a:tc>
+                  <a:txBody>
+                    <a:bodyPr lIns="54864" rIns="54864" tIns="18288" bIns="18288" wrap="square" anchor="ctr"/>
+                    <a:lstStyle/>
+                    <a:p>
+                      <a:pPr algn="l"/>
+                      <a:r>
+                        <a:rPr sz="950" b="0">
+                          <a:solidFill>
+                            <a:srgbClr val="000000"/>
+                          </a:solidFill>
+                          <a:latin typeface="Calibri"/>
+                        </a:rPr>
+                        <a:t>STALLED at 2355 N (72 % of what was needed) — no fracture, specimen intact</a:t>
+                      </a:r>
+                    </a:p>
+                  </a:txBody>
+                  <a:tcPr>
+                    <a:solidFill>
+                      <a:srgbClr val="FFCDD2"/>
+                    </a:solidFill>
+                  </a:tcPr>
+                </a:tc>
+                <a:tc>
+                  <a:txBody>
+                    <a:bodyPr lIns="54864" rIns="54864" tIns="18288" bIns="18288" wrap="square" anchor="ctr"/>
+                    <a:lstStyle/>
+                    <a:p>
+                      <a:pPr algn="l"/>
+                      <a:r>
+                        <a:rPr sz="950" b="0">
+                          <a:solidFill>
+                            <a:srgbClr val="000000"/>
+                          </a:solidFill>
+                          <a:latin typeface="Calibri"/>
+                        </a:rPr>
+                        <a:t>199</a:t>
+                      </a:r>
+                    </a:p>
+                  </a:txBody>
+                  <a:tcPr/>
+                </a:tc>
+              </a:tr>
+              <a:tr h="297180">
+                <a:tc>
+                  <a:txBody>
+                    <a:bodyPr lIns="54864" rIns="54864" tIns="18288" bIns="18288" wrap="square" anchor="ctr"/>
+                    <a:lstStyle/>
+                    <a:p>
+                      <a:pPr algn="l"/>
+                      <a:r>
+                        <a:rPr sz="950" b="1">
+                          <a:solidFill>
+                            <a:srgbClr val="000000"/>
+                          </a:solidFill>
+                          <a:latin typeface="Calibri"/>
+                        </a:rPr>
+                        <a:t>T7.2</a:t>
+                      </a:r>
+                    </a:p>
+                  </a:txBody>
+                  <a:tcPr>
+                    <a:solidFill>
+                      <a:srgbClr val="C8E6C9"/>
+                    </a:solidFill>
+                  </a:tcPr>
+                </a:tc>
+                <a:tc>
+                  <a:txBody>
+                    <a:bodyPr lIns="54864" rIns="54864" tIns="18288" bIns="18288" wrap="square" anchor="ctr"/>
+                    <a:lstStyle/>
+                    <a:p>
+                      <a:pPr algn="l"/>
+                      <a:r>
+                        <a:rPr sz="950" b="0">
+                          <a:solidFill>
+                            <a:srgbClr val="000000"/>
+                          </a:solidFill>
+                          <a:latin typeface="Calibri"/>
+                        </a:rPr>
+                        <a:t>Staircase → FRACTURE</a:t>
+                      </a:r>
+                    </a:p>
+                  </a:txBody>
+                  <a:tcPr/>
+                </a:tc>
+                <a:tc>
+                  <a:txBody>
+                    <a:bodyPr lIns="54864" rIns="54864" tIns="18288" bIns="18288" wrap="square" anchor="ctr"/>
+                    <a:lstStyle/>
+                    <a:p>
+                      <a:pPr algn="l"/>
+                      <a:r>
+                        <a:rPr sz="950" b="0">
+                          <a:solidFill>
+                            <a:srgbClr val="000000"/>
+                          </a:solidFill>
+                          <a:latin typeface="Calibri"/>
+                        </a:rPr>
+                        <a:t>S18 50 %</a:t>
+                      </a:r>
+                    </a:p>
+                  </a:txBody>
+                  <a:tcPr/>
+                </a:tc>
+                <a:tc>
+                  <a:txBody>
+                    <a:bodyPr lIns="54864" rIns="54864" tIns="18288" bIns="18288" wrap="square" anchor="ctr"/>
+                    <a:lstStyle/>
+                    <a:p>
+                      <a:pPr algn="l"/>
+                      <a:r>
+                        <a:rPr sz="950" b="0">
+                          <a:solidFill>
+                            <a:srgbClr val="000000"/>
+                          </a:solidFill>
+                          <a:latin typeface="Calibri"/>
+                        </a:rPr>
+                        <a:t>08-09 15:37</a:t>
+                      </a:r>
+                    </a:p>
+                  </a:txBody>
+                  <a:tcPr/>
+                </a:tc>
+                <a:tc>
+                  <a:txBody>
+                    <a:bodyPr lIns="54864" rIns="54864" tIns="18288" bIns="18288" wrap="square" anchor="ctr"/>
+                    <a:lstStyle/>
+                    <a:p>
+                      <a:pPr algn="l"/>
+                      <a:r>
+                        <a:rPr sz="950" b="0">
+                          <a:solidFill>
+                            <a:srgbClr val="000000"/>
+                          </a:solidFill>
+                          <a:latin typeface="Calibri"/>
+                        </a:rPr>
+                        <a:t>yield knee 694 N, TRUE UTS 21.19 MPa, auto-halt 1.36 s</a:t>
+                      </a:r>
+                    </a:p>
+                  </a:txBody>
+                  <a:tcPr/>
+                </a:tc>
+                <a:tc>
+                  <a:txBody>
+                    <a:bodyPr lIns="54864" rIns="54864" tIns="18288" bIns="18288" wrap="square" anchor="ctr"/>
+                    <a:lstStyle/>
+                    <a:p>
+                      <a:pPr algn="l"/>
+                      <a:r>
+                        <a:rPr sz="950" b="0">
+                          <a:solidFill>
+                            <a:srgbClr val="000000"/>
+                          </a:solidFill>
+                          <a:latin typeface="Calibri"/>
+                        </a:rPr>
+                        <a:t>195-196</a:t>
+                      </a:r>
+                    </a:p>
+                  </a:txBody>
+                  <a:tcPr/>
+                </a:tc>
+              </a:tr>
+              <a:tr h="297180">
+                <a:tc>
+                  <a:txBody>
+                    <a:bodyPr lIns="54864" rIns="54864" tIns="18288" bIns="18288" wrap="square" anchor="ctr"/>
+                    <a:lstStyle/>
+                    <a:p>
+                      <a:pPr algn="l"/>
+                      <a:r>
+                        <a:rPr sz="950" b="1">
+                          <a:solidFill>
+                            <a:srgbClr val="000000"/>
+                          </a:solidFill>
+                          <a:latin typeface="Calibri"/>
+                        </a:rPr>
+                        <a:t>T8</a:t>
+                      </a:r>
+                    </a:p>
+                  </a:txBody>
+                  <a:tcPr>
+                    <a:solidFill>
+                      <a:srgbClr val="C8E6C9"/>
+                    </a:solidFill>
+                  </a:tcPr>
+                </a:tc>
+                <a:tc>
+                  <a:txBody>
+                    <a:bodyPr lIns="54864" rIns="54864" tIns="18288" bIns="18288" wrap="square" anchor="ctr"/>
+                    <a:lstStyle/>
+                    <a:p>
+                      <a:pPr algn="l"/>
+                      <a:r>
+                        <a:rPr sz="950" b="0">
+                          <a:solidFill>
+                            <a:srgbClr val="000000"/>
+                          </a:solidFill>
+                          <a:latin typeface="Calibri"/>
+                        </a:rPr>
+                        <a:t>Progressive cyclic → FRACTURE</a:t>
+                      </a:r>
+                    </a:p>
+                  </a:txBody>
+                  <a:tcPr/>
+                </a:tc>
+                <a:tc>
+                  <a:txBody>
+                    <a:bodyPr lIns="54864" rIns="54864" tIns="18288" bIns="18288" wrap="square" anchor="ctr"/>
+                    <a:lstStyle/>
+                    <a:p>
+                      <a:pPr algn="l"/>
+                      <a:r>
+                        <a:rPr sz="950" b="0">
+                          <a:solidFill>
+                            <a:srgbClr val="000000"/>
+                          </a:solidFill>
+                          <a:latin typeface="Calibri"/>
+                        </a:rPr>
+                        <a:t>S21 50 %</a:t>
+                      </a:r>
+                    </a:p>
+                  </a:txBody>
+                  <a:tcPr/>
+                </a:tc>
+                <a:tc>
+                  <a:txBody>
+                    <a:bodyPr lIns="54864" rIns="54864" tIns="18288" bIns="18288" wrap="square" anchor="ctr"/>
+                    <a:lstStyle/>
+                    <a:p>
+                      <a:pPr algn="l"/>
+                      <a:r>
+                        <a:rPr sz="950" b="0">
+                          <a:solidFill>
+                            <a:srgbClr val="000000"/>
+                          </a:solidFill>
+                          <a:latin typeface="Calibri"/>
+                        </a:rPr>
+                        <a:t>08-09 17:34</a:t>
+                      </a:r>
+                    </a:p>
+                  </a:txBody>
+                  <a:tcPr/>
+                </a:tc>
+                <a:tc>
+                  <a:txBody>
+                    <a:bodyPr lIns="54864" rIns="54864" tIns="18288" bIns="18288" wrap="square" anchor="ctr"/>
+                    <a:lstStyle/>
+                    <a:p>
+                      <a:pPr algn="l"/>
+                      <a:r>
+                        <a:rPr sz="950" b="0">
+                          <a:solidFill>
+                            <a:srgbClr val="000000"/>
+                          </a:solidFill>
+                          <a:latin typeface="Calibri"/>
+                        </a:rPr>
+                        <a:t>8 clean cycles, 25 % stiffness lost, TRUE UTS 21.38 MPa</a:t>
+                      </a:r>
+                    </a:p>
+                  </a:txBody>
+                  <a:tcPr/>
+                </a:tc>
+                <a:tc>
+                  <a:txBody>
+                    <a:bodyPr lIns="54864" rIns="54864" tIns="18288" bIns="18288" wrap="square" anchor="ctr"/>
+                    <a:lstStyle/>
+                    <a:p>
+                      <a:pPr algn="l"/>
+                      <a:r>
+                        <a:rPr sz="950" b="0">
+                          <a:solidFill>
+                            <a:srgbClr val="000000"/>
+                          </a:solidFill>
+                          <a:latin typeface="Calibri"/>
+                        </a:rPr>
+                        <a:t>197-198</a:t>
+                      </a:r>
+                    </a:p>
+                  </a:txBody>
+                  <a:tcPr/>
+                </a:tc>
+              </a:tr>
+            </a:tbl>
+          </a:graphicData>
+        </a:graphic>
+      </p:graphicFrame>
+      <p:sp>
+        <p:nvSpPr>
+          <p:cNvPr id="7" name="Rectangle 6"/>
+          <p:cNvSpPr/>
+          <p:nvPr/>
+        </p:nvSpPr>
+        <p:spPr>
+          <a:xfrm>
+            <a:off x="411480" y="5138928"/>
+            <a:ext cx="11384280" cy="566928"/>
+          </a:xfrm>
+          <a:prstGeom prst="rect">
+            <a:avLst/>
+          </a:prstGeom>
+          <a:solidFill>
+            <a:srgbClr val="E7F1F8"/>
+          </a:solidFill>
+          <a:ln>
+            <a:noFill/>
+          </a:ln>
+        </p:spPr>
+        <p:style>
+          <a:lnRef idx="1">
+            <a:schemeClr val="accent1"/>
+          </a:lnRef>
+          <a:fillRef idx="3">
+            <a:schemeClr val="accent1"/>
+          </a:fillRef>
+          <a:effectRef idx="2">
+            <a:schemeClr val="accent1"/>
+          </a:effectRef>
+          <a:fontRef idx="minor">
+            <a:schemeClr val="lt1"/>
+          </a:fontRef>
+        </p:style>
+        <p:txBody>
+          <a:bodyPr rtlCol="0" anchor="ctr" wrap="square" lIns="109728" rIns="109728"/>
+          <a:lstStyle/>
+          <a:p>
+            <a:pPr algn="ctr"/>
+            <a:r>
+              <a:rPr sz="1200" b="1">
+                <a:solidFill>
+                  <a:srgbClr val="000000"/>
+                </a:solidFill>
+                <a:latin typeface="Calibri"/>
+              </a:rPr>
+              <a:t>11 runs, 6 modes, 3 specimens.  T6 → T6.2 → T6.3 are three attempts at ONE test, not three tests — each failure diagnosed a real bug.  T7 is the only outright failure, and it is hardware.</a:t>
+            </a:r>
+          </a:p>
+        </p:txBody>
+      </p:sp>
+      <p:sp>
+        <p:nvSpPr>
+          <p:cNvPr id="8" name="TextBox 7"/>
+          <p:cNvSpPr txBox="1"/>
+          <p:nvPr/>
+        </p:nvSpPr>
+        <p:spPr>
+          <a:xfrm>
+            <a:off x="457200" y="5797296"/>
+            <a:ext cx="11338560" cy="566928"/>
+          </a:xfrm>
+          <a:prstGeom prst="rect">
+            <a:avLst/>
+          </a:prstGeom>
+          <a:noFill/>
+        </p:spPr>
+        <p:txBody>
+          <a:bodyPr wrap="square" lIns="45720" rIns="45720" tIns="18288" bIns="18288" anchor="t">
+            <a:spAutoFit/>
+          </a:bodyPr>
+          <a:lstStyle/>
+          <a:p>
+            <a:pPr algn="l"/>
+            <a:r>
+              <a:rPr sz="1100" b="0" i="0">
+                <a:solidFill>
+                  <a:srgbClr val="707070"/>
+                </a:solidFill>
+                <a:latin typeface="Calibri"/>
+              </a:rPr>
+              <a:t>Specimen economy: S20 (100 %) survived all eight NON-destructive runs (T1–T6.3) AND the failed T7 — a destructive protocol it was never broken by. The two destructive runs that DID succeed each consumed a fresh specimen (S18, S21). T7 came after 2 h 15 min of continuous testing that day, which is the thermal-derating argument on p199.</a:t>
+            </a:r>
+          </a:p>
+        </p:txBody>
+      </p:sp>
+      <p:sp>
+        <p:nvSpPr>
+          <p:cNvPr id="9" name="TextBox 8"/>
+          <p:cNvSpPr txBox="1"/>
+          <p:nvPr/>
+        </p:nvSpPr>
+        <p:spPr>
+          <a:xfrm>
+            <a:off x="548640" y="6400800"/>
+            <a:ext cx="11064240" cy="365760"/>
+          </a:xfrm>
+          <a:prstGeom prst="rect">
+            <a:avLst/>
+          </a:prstGeom>
+          <a:noFill/>
+        </p:spPr>
+        <p:txBody>
+          <a:bodyPr wrap="square" lIns="45720" rIns="45720" tIns="18288" bIns="18288" anchor="t">
+            <a:spAutoFit/>
+          </a:bodyPr>
+          <a:lstStyle/>
+          <a:p>
+            <a:pPr algn="l"/>
+            <a:r>
+              <a:rPr sz="1200" b="0" i="1">
+                <a:solidFill>
+                  <a:srgbClr val="707070"/>
+                </a:solidFill>
+                <a:latin typeface="Calibri"/>
+              </a:rPr>
+              <a:t>Raw CSVs: Software/UTM_PyQt6/8.7/&lt;specimen folder&gt;/. Metrics recomputed by documentation/sf9_data.py — this table is generated, not typed.</a:t>
+            </a:r>
+          </a:p>
+        </p:txBody>
+      </p:sp>
+      <p:sp>
+        <p:nvSpPr>
+          <p:cNvPr id="10" name="TextBox 9"/>
+          <p:cNvSpPr txBox="1"/>
+          <p:nvPr/>
+        </p:nvSpPr>
+        <p:spPr>
+          <a:xfrm>
+            <a:off x="457200" y="6446520"/>
+            <a:ext cx="640080" cy="274320"/>
+          </a:xfrm>
+          <a:prstGeom prst="rect">
+            <a:avLst/>
+          </a:prstGeom>
+          <a:noFill/>
+        </p:spPr>
+        <p:txBody>
+          <a:bodyPr wrap="square" lIns="45720" rIns="45720" tIns="18288" bIns="18288" anchor="t">
+            <a:spAutoFit/>
+          </a:bodyPr>
+          <a:lstStyle/>
+          <a:p>
+            <a:pPr algn="l"/>
+            <a:r>
+              <a:rPr sz="1000" b="0" i="0">
+                <a:solidFill>
+                  <a:srgbClr val="707070"/>
+                </a:solidFill>
+                <a:latin typeface="Calibri"/>
+              </a:rPr>
+              <a:t>200</a:t>
             </a:r>
           </a:p>
         </p:txBody>
